--- a/Materials.pptx
+++ b/Materials.pptx
@@ -11,6 +11,7 @@
     <p:sldId id="259" r:id="rId8"/>
     <p:sldId id="260" r:id="rId9"/>
     <p:sldId id="261" r:id="rId10"/>
+    <p:sldId id="262" r:id="rId11"/>
   </p:sldIdLst>
   <p:sldSz cx="12192000" cy="6858000"/>
   <p:notesSz cx="6858000" cy="9144000"/>
@@ -120,9 +121,246 @@
 <file path=ppt/revisionInfo.xml><?xml version="1.0" encoding="utf-8"?>
 <p1510:revInfo xmlns:a="http://schemas.openxmlformats.org/drawingml/2006/main" xmlns:r="http://schemas.openxmlformats.org/officeDocument/2006/relationships" xmlns:p1510="http://schemas.microsoft.com/office/powerpoint/2015/10/main">
   <p1510:revLst>
-    <p1510:client id="{4D29ADE8-87A0-47F3-AF9B-6AE0BEA23B07}" v="5" dt="2026-04-26T07:06:41.845"/>
+    <p1510:client id="{D7E556E5-4621-4DA7-B0AC-26EEABCF8A3F}" v="25" dt="2026-06-11T12:42:04.323"/>
   </p1510:revLst>
 </p1510:revInfo>
+</file>
+
+<file path=ppt/changesInfos/changesInfo1.xml><?xml version="1.0" encoding="utf-8"?>
+<pc:chgInfo xmlns:a="http://schemas.openxmlformats.org/drawingml/2006/main" xmlns:r="http://schemas.openxmlformats.org/officeDocument/2006/relationships" xmlns:ac="http://schemas.microsoft.com/office/drawing/2013/main/command" xmlns:pc="http://schemas.microsoft.com/office/powerpoint/2013/main/command">
+  <pc:docChgLst>
+    <pc:chgData name="全 香玉" userId="1f3450e5-81b9-4f7a-82d7-841c32c029e0" providerId="ADAL" clId="{670531AC-1667-4F97-B1A6-5D38F8A44A79}"/>
+    <pc:docChg chg="undo custSel addSld modSld">
+      <pc:chgData name="全 香玉" userId="1f3450e5-81b9-4f7a-82d7-841c32c029e0" providerId="ADAL" clId="{670531AC-1667-4F97-B1A6-5D38F8A44A79}" dt="2026-06-11T12:42:08.875" v="128" actId="1076"/>
+      <pc:docMkLst>
+        <pc:docMk/>
+      </pc:docMkLst>
+      <pc:sldChg chg="addSp delSp modSp add mod">
+        <pc:chgData name="全 香玉" userId="1f3450e5-81b9-4f7a-82d7-841c32c029e0" providerId="ADAL" clId="{670531AC-1667-4F97-B1A6-5D38F8A44A79}" dt="2026-06-11T12:42:08.875" v="128" actId="1076"/>
+        <pc:sldMkLst>
+          <pc:docMk/>
+          <pc:sldMk cId="3363106213" sldId="262"/>
+        </pc:sldMkLst>
+        <pc:spChg chg="add del mod ord">
+          <ac:chgData name="全 香玉" userId="1f3450e5-81b9-4f7a-82d7-841c32c029e0" providerId="ADAL" clId="{670531AC-1667-4F97-B1A6-5D38F8A44A79}" dt="2026-06-11T12:37:32.504" v="32" actId="478"/>
+          <ac:spMkLst>
+            <pc:docMk/>
+            <pc:sldMk cId="3363106213" sldId="262"/>
+            <ac:spMk id="13" creationId="{F1B90D87-F2AE-676A-5DCE-4A8F59658478}"/>
+          </ac:spMkLst>
+        </pc:spChg>
+        <pc:spChg chg="add mod">
+          <ac:chgData name="全 香玉" userId="1f3450e5-81b9-4f7a-82d7-841c32c029e0" providerId="ADAL" clId="{670531AC-1667-4F97-B1A6-5D38F8A44A79}" dt="2026-06-11T12:36:43.075" v="16" actId="1076"/>
+          <ac:spMkLst>
+            <pc:docMk/>
+            <pc:sldMk cId="3363106213" sldId="262"/>
+            <ac:spMk id="14" creationId="{AA898FDB-40F3-868E-F9BA-AC4B9F3D2D96}"/>
+          </ac:spMkLst>
+        </pc:spChg>
+        <pc:spChg chg="add mod">
+          <ac:chgData name="全 香玉" userId="1f3450e5-81b9-4f7a-82d7-841c32c029e0" providerId="ADAL" clId="{670531AC-1667-4F97-B1A6-5D38F8A44A79}" dt="2026-06-11T12:37:31.197" v="31" actId="14100"/>
+          <ac:spMkLst>
+            <pc:docMk/>
+            <pc:sldMk cId="3363106213" sldId="262"/>
+            <ac:spMk id="15" creationId="{83FD3DB5-19E4-3FCC-22A3-F9F8A4FE7211}"/>
+          </ac:spMkLst>
+        </pc:spChg>
+        <pc:spChg chg="add del mod">
+          <ac:chgData name="全 香玉" userId="1f3450e5-81b9-4f7a-82d7-841c32c029e0" providerId="ADAL" clId="{670531AC-1667-4F97-B1A6-5D38F8A44A79}" dt="2026-06-11T12:37:33.354" v="33" actId="478"/>
+          <ac:spMkLst>
+            <pc:docMk/>
+            <pc:sldMk cId="3363106213" sldId="262"/>
+            <ac:spMk id="16" creationId="{E065223F-2AAC-A58A-6759-C86C4B796E09}"/>
+          </ac:spMkLst>
+        </pc:spChg>
+        <pc:spChg chg="add del mod">
+          <ac:chgData name="全 香玉" userId="1f3450e5-81b9-4f7a-82d7-841c32c029e0" providerId="ADAL" clId="{670531AC-1667-4F97-B1A6-5D38F8A44A79}" dt="2026-06-11T12:37:33.919" v="34" actId="478"/>
+          <ac:spMkLst>
+            <pc:docMk/>
+            <pc:sldMk cId="3363106213" sldId="262"/>
+            <ac:spMk id="19" creationId="{0DBC9D3F-8367-B8A9-4ADE-9D4F8E53F19C}"/>
+          </ac:spMkLst>
+        </pc:spChg>
+        <pc:spChg chg="add del mod">
+          <ac:chgData name="全 香玉" userId="1f3450e5-81b9-4f7a-82d7-841c32c029e0" providerId="ADAL" clId="{670531AC-1667-4F97-B1A6-5D38F8A44A79}" dt="2026-06-11T12:37:34.535" v="35" actId="478"/>
+          <ac:spMkLst>
+            <pc:docMk/>
+            <pc:sldMk cId="3363106213" sldId="262"/>
+            <ac:spMk id="22" creationId="{D0060E31-5B50-9745-8369-BA851F453DE5}"/>
+          </ac:spMkLst>
+        </pc:spChg>
+        <pc:spChg chg="add mod">
+          <ac:chgData name="全 香玉" userId="1f3450e5-81b9-4f7a-82d7-841c32c029e0" providerId="ADAL" clId="{670531AC-1667-4F97-B1A6-5D38F8A44A79}" dt="2026-06-11T12:38:07.283" v="47" actId="1076"/>
+          <ac:spMkLst>
+            <pc:docMk/>
+            <pc:sldMk cId="3363106213" sldId="262"/>
+            <ac:spMk id="24" creationId="{E168952E-433B-1F90-F5D4-5DA21FCFBE26}"/>
+          </ac:spMkLst>
+        </pc:spChg>
+        <pc:spChg chg="add mod">
+          <ac:chgData name="全 香玉" userId="1f3450e5-81b9-4f7a-82d7-841c32c029e0" providerId="ADAL" clId="{670531AC-1667-4F97-B1A6-5D38F8A44A79}" dt="2026-06-11T12:38:05.873" v="46" actId="1076"/>
+          <ac:spMkLst>
+            <pc:docMk/>
+            <pc:sldMk cId="3363106213" sldId="262"/>
+            <ac:spMk id="25" creationId="{E7AC7E87-E228-D025-A0CE-F1770156BE28}"/>
+          </ac:spMkLst>
+        </pc:spChg>
+        <pc:spChg chg="add mod">
+          <ac:chgData name="全 香玉" userId="1f3450e5-81b9-4f7a-82d7-841c32c029e0" providerId="ADAL" clId="{670531AC-1667-4F97-B1A6-5D38F8A44A79}" dt="2026-06-11T12:38:04.241" v="45" actId="1076"/>
+          <ac:spMkLst>
+            <pc:docMk/>
+            <pc:sldMk cId="3363106213" sldId="262"/>
+            <ac:spMk id="29" creationId="{71D2D838-CEC3-A7E7-01E8-7F43A7074F83}"/>
+          </ac:spMkLst>
+        </pc:spChg>
+        <pc:spChg chg="add mod">
+          <ac:chgData name="全 香玉" userId="1f3450e5-81b9-4f7a-82d7-841c32c029e0" providerId="ADAL" clId="{670531AC-1667-4F97-B1A6-5D38F8A44A79}" dt="2026-06-11T12:38:03.008" v="44" actId="1076"/>
+          <ac:spMkLst>
+            <pc:docMk/>
+            <pc:sldMk cId="3363106213" sldId="262"/>
+            <ac:spMk id="30" creationId="{E70D00BF-2DA4-B210-B70F-331637E1798E}"/>
+          </ac:spMkLst>
+        </pc:spChg>
+        <pc:spChg chg="add mod">
+          <ac:chgData name="全 香玉" userId="1f3450e5-81b9-4f7a-82d7-841c32c029e0" providerId="ADAL" clId="{670531AC-1667-4F97-B1A6-5D38F8A44A79}" dt="2026-06-11T12:39:43.475" v="93" actId="1076"/>
+          <ac:spMkLst>
+            <pc:docMk/>
+            <pc:sldMk cId="3363106213" sldId="262"/>
+            <ac:spMk id="37" creationId="{6388989A-2EB6-A86C-015D-D2A8792D4FCF}"/>
+          </ac:spMkLst>
+        </pc:spChg>
+        <pc:spChg chg="add mod">
+          <ac:chgData name="全 香玉" userId="1f3450e5-81b9-4f7a-82d7-841c32c029e0" providerId="ADAL" clId="{670531AC-1667-4F97-B1A6-5D38F8A44A79}" dt="2026-06-11T12:40:50.395" v="102" actId="1076"/>
+          <ac:spMkLst>
+            <pc:docMk/>
+            <pc:sldMk cId="3363106213" sldId="262"/>
+            <ac:spMk id="38" creationId="{2B0282C4-34AC-42E7-8F53-F6A4BE656C29}"/>
+          </ac:spMkLst>
+        </pc:spChg>
+        <pc:spChg chg="add mod">
+          <ac:chgData name="全 香玉" userId="1f3450e5-81b9-4f7a-82d7-841c32c029e0" providerId="ADAL" clId="{670531AC-1667-4F97-B1A6-5D38F8A44A79}" dt="2026-06-11T12:42:00.577" v="125" actId="14100"/>
+          <ac:spMkLst>
+            <pc:docMk/>
+            <pc:sldMk cId="3363106213" sldId="262"/>
+            <ac:spMk id="39" creationId="{B2C1686C-695C-F70C-BAD6-9341B75390C3}"/>
+          </ac:spMkLst>
+        </pc:spChg>
+        <pc:spChg chg="add del mod">
+          <ac:chgData name="全 香玉" userId="1f3450e5-81b9-4f7a-82d7-841c32c029e0" providerId="ADAL" clId="{670531AC-1667-4F97-B1A6-5D38F8A44A79}" dt="2026-06-11T12:42:02.238" v="126" actId="478"/>
+          <ac:spMkLst>
+            <pc:docMk/>
+            <pc:sldMk cId="3363106213" sldId="262"/>
+            <ac:spMk id="40" creationId="{709F6137-03BC-240E-8B6A-0D01AE516847}"/>
+          </ac:spMkLst>
+        </pc:spChg>
+        <pc:spChg chg="add mod">
+          <ac:chgData name="全 香玉" userId="1f3450e5-81b9-4f7a-82d7-841c32c029e0" providerId="ADAL" clId="{670531AC-1667-4F97-B1A6-5D38F8A44A79}" dt="2026-06-11T12:41:32.195" v="114" actId="1076"/>
+          <ac:spMkLst>
+            <pc:docMk/>
+            <pc:sldMk cId="3363106213" sldId="262"/>
+            <ac:spMk id="41" creationId="{566FF6FB-E984-DC3B-B409-0BA5913CC6E7}"/>
+          </ac:spMkLst>
+        </pc:spChg>
+        <pc:spChg chg="add mod">
+          <ac:chgData name="全 香玉" userId="1f3450e5-81b9-4f7a-82d7-841c32c029e0" providerId="ADAL" clId="{670531AC-1667-4F97-B1A6-5D38F8A44A79}" dt="2026-06-11T12:41:36.340" v="116" actId="1076"/>
+          <ac:spMkLst>
+            <pc:docMk/>
+            <pc:sldMk cId="3363106213" sldId="262"/>
+            <ac:spMk id="42" creationId="{E142564C-0FCF-0D7A-D946-221C2AD988A1}"/>
+          </ac:spMkLst>
+        </pc:spChg>
+        <pc:spChg chg="add mod">
+          <ac:chgData name="全 香玉" userId="1f3450e5-81b9-4f7a-82d7-841c32c029e0" providerId="ADAL" clId="{670531AC-1667-4F97-B1A6-5D38F8A44A79}" dt="2026-06-11T12:41:40.556" v="118" actId="1076"/>
+          <ac:spMkLst>
+            <pc:docMk/>
+            <pc:sldMk cId="3363106213" sldId="262"/>
+            <ac:spMk id="43" creationId="{5464174D-F154-823A-BAC4-982B62E22CF0}"/>
+          </ac:spMkLst>
+        </pc:spChg>
+        <pc:spChg chg="add mod">
+          <ac:chgData name="全 香玉" userId="1f3450e5-81b9-4f7a-82d7-841c32c029e0" providerId="ADAL" clId="{670531AC-1667-4F97-B1A6-5D38F8A44A79}" dt="2026-06-11T12:41:44.188" v="120" actId="1076"/>
+          <ac:spMkLst>
+            <pc:docMk/>
+            <pc:sldMk cId="3363106213" sldId="262"/>
+            <ac:spMk id="44" creationId="{2893BB8A-D5AA-CBBB-7565-CAD84FAD3F87}"/>
+          </ac:spMkLst>
+        </pc:spChg>
+        <pc:spChg chg="add mod">
+          <ac:chgData name="全 香玉" userId="1f3450e5-81b9-4f7a-82d7-841c32c029e0" providerId="ADAL" clId="{670531AC-1667-4F97-B1A6-5D38F8A44A79}" dt="2026-06-11T12:41:50.075" v="122" actId="1076"/>
+          <ac:spMkLst>
+            <pc:docMk/>
+            <pc:sldMk cId="3363106213" sldId="262"/>
+            <ac:spMk id="45" creationId="{4A61DF6C-59C8-6394-3BA1-940CCE4B8314}"/>
+          </ac:spMkLst>
+        </pc:spChg>
+        <pc:spChg chg="add mod">
+          <ac:chgData name="全 香玉" userId="1f3450e5-81b9-4f7a-82d7-841c32c029e0" providerId="ADAL" clId="{670531AC-1667-4F97-B1A6-5D38F8A44A79}" dt="2026-06-11T12:42:08.875" v="128" actId="1076"/>
+          <ac:spMkLst>
+            <pc:docMk/>
+            <pc:sldMk cId="3363106213" sldId="262"/>
+            <ac:spMk id="46" creationId="{29DB7FD7-AD53-9045-387F-947A1994C533}"/>
+          </ac:spMkLst>
+        </pc:spChg>
+        <pc:cxnChg chg="add mod">
+          <ac:chgData name="全 香玉" userId="1f3450e5-81b9-4f7a-82d7-841c32c029e0" providerId="ADAL" clId="{670531AC-1667-4F97-B1A6-5D38F8A44A79}" dt="2026-06-11T12:35:54.388" v="6" actId="14100"/>
+          <ac:cxnSpMkLst>
+            <pc:docMk/>
+            <pc:sldMk cId="3363106213" sldId="262"/>
+            <ac:cxnSpMk id="3" creationId="{DA312E9E-08BD-40B9-3E30-8EA145F9C634}"/>
+          </ac:cxnSpMkLst>
+        </pc:cxnChg>
+        <pc:cxnChg chg="add mod">
+          <ac:chgData name="全 香玉" userId="1f3450e5-81b9-4f7a-82d7-841c32c029e0" providerId="ADAL" clId="{670531AC-1667-4F97-B1A6-5D38F8A44A79}" dt="2026-06-11T12:35:57.043" v="7" actId="14100"/>
+          <ac:cxnSpMkLst>
+            <pc:docMk/>
+            <pc:sldMk cId="3363106213" sldId="262"/>
+            <ac:cxnSpMk id="6" creationId="{932AFEE0-9F31-6713-F97F-59C2210F12E2}"/>
+          </ac:cxnSpMkLst>
+        </pc:cxnChg>
+        <pc:cxnChg chg="mod">
+          <ac:chgData name="全 香玉" userId="1f3450e5-81b9-4f7a-82d7-841c32c029e0" providerId="ADAL" clId="{670531AC-1667-4F97-B1A6-5D38F8A44A79}" dt="2026-06-11T12:36:02.912" v="9" actId="14100"/>
+          <ac:cxnSpMkLst>
+            <pc:docMk/>
+            <pc:sldMk cId="3363106213" sldId="262"/>
+            <ac:cxnSpMk id="7" creationId="{7A6AE2C9-EDEC-4F2C-6B59-CA7EDA86C274}"/>
+          </ac:cxnSpMkLst>
+        </pc:cxnChg>
+        <pc:cxnChg chg="mod">
+          <ac:chgData name="全 香玉" userId="1f3450e5-81b9-4f7a-82d7-841c32c029e0" providerId="ADAL" clId="{670531AC-1667-4F97-B1A6-5D38F8A44A79}" dt="2026-06-11T12:35:59.931" v="8" actId="14100"/>
+          <ac:cxnSpMkLst>
+            <pc:docMk/>
+            <pc:sldMk cId="3363106213" sldId="262"/>
+            <ac:cxnSpMk id="8" creationId="{D8289FD3-1CB9-AAA8-0969-12D0AFECF816}"/>
+          </ac:cxnSpMkLst>
+        </pc:cxnChg>
+        <pc:cxnChg chg="add mod">
+          <ac:chgData name="全 香玉" userId="1f3450e5-81b9-4f7a-82d7-841c32c029e0" providerId="ADAL" clId="{670531AC-1667-4F97-B1A6-5D38F8A44A79}" dt="2026-06-11T12:38:49.195" v="56" actId="1076"/>
+          <ac:cxnSpMkLst>
+            <pc:docMk/>
+            <pc:sldMk cId="3363106213" sldId="262"/>
+            <ac:cxnSpMk id="31" creationId="{4B175DA7-3ED6-430B-F907-180649D80370}"/>
+          </ac:cxnSpMkLst>
+        </pc:cxnChg>
+        <pc:cxnChg chg="add mod">
+          <ac:chgData name="全 香玉" userId="1f3450e5-81b9-4f7a-82d7-841c32c029e0" providerId="ADAL" clId="{670531AC-1667-4F97-B1A6-5D38F8A44A79}" dt="2026-06-11T12:38:46.005" v="55" actId="1036"/>
+          <ac:cxnSpMkLst>
+            <pc:docMk/>
+            <pc:sldMk cId="3363106213" sldId="262"/>
+            <ac:cxnSpMk id="34" creationId="{E661173F-737E-9D38-0A7D-73522C19C8CE}"/>
+          </ac:cxnSpMkLst>
+        </pc:cxnChg>
+        <pc:cxnChg chg="add mod">
+          <ac:chgData name="全 香玉" userId="1f3450e5-81b9-4f7a-82d7-841c32c029e0" providerId="ADAL" clId="{670531AC-1667-4F97-B1A6-5D38F8A44A79}" dt="2026-06-11T12:40:09.983" v="94" actId="208"/>
+          <ac:cxnSpMkLst>
+            <pc:docMk/>
+            <pc:sldMk cId="3363106213" sldId="262"/>
+            <ac:cxnSpMk id="36" creationId="{6C5C2136-BF76-C1E2-E81D-0519B6F0C3C0}"/>
+          </ac:cxnSpMkLst>
+        </pc:cxnChg>
+      </pc:sldChg>
+    </pc:docChg>
+  </pc:docChgLst>
+</pc:chgInfo>
 </file>
 
 <file path=ppt/slideLayouts/slideLayout1.xml><?xml version="1.0" encoding="utf-8"?>
@@ -274,7 +512,7 @@
           <a:p>
             <a:fld id="{9236E18D-A30F-4D3C-BC15-86FA9E93A319}" type="datetimeFigureOut">
               <a:rPr kumimoji="1" lang="ja-JP" altLang="en-US" smtClean="0"/>
-              <a:t>2026/5/2</a:t>
+              <a:t>2026/6/11</a:t>
             </a:fld>
             <a:endParaRPr kumimoji="1" lang="ja-JP" altLang="en-US"/>
           </a:p>
@@ -474,7 +712,7 @@
           <a:p>
             <a:fld id="{9236E18D-A30F-4D3C-BC15-86FA9E93A319}" type="datetimeFigureOut">
               <a:rPr kumimoji="1" lang="ja-JP" altLang="en-US" smtClean="0"/>
-              <a:t>2026/5/2</a:t>
+              <a:t>2026/6/11</a:t>
             </a:fld>
             <a:endParaRPr kumimoji="1" lang="ja-JP" altLang="en-US"/>
           </a:p>
@@ -684,7 +922,7 @@
           <a:p>
             <a:fld id="{9236E18D-A30F-4D3C-BC15-86FA9E93A319}" type="datetimeFigureOut">
               <a:rPr kumimoji="1" lang="ja-JP" altLang="en-US" smtClean="0"/>
-              <a:t>2026/5/2</a:t>
+              <a:t>2026/6/11</a:t>
             </a:fld>
             <a:endParaRPr kumimoji="1" lang="ja-JP" altLang="en-US"/>
           </a:p>
@@ -884,7 +1122,7 @@
           <a:p>
             <a:fld id="{9236E18D-A30F-4D3C-BC15-86FA9E93A319}" type="datetimeFigureOut">
               <a:rPr kumimoji="1" lang="ja-JP" altLang="en-US" smtClean="0"/>
-              <a:t>2026/5/2</a:t>
+              <a:t>2026/6/11</a:t>
             </a:fld>
             <a:endParaRPr kumimoji="1" lang="ja-JP" altLang="en-US"/>
           </a:p>
@@ -1160,7 +1398,7 @@
           <a:p>
             <a:fld id="{9236E18D-A30F-4D3C-BC15-86FA9E93A319}" type="datetimeFigureOut">
               <a:rPr kumimoji="1" lang="ja-JP" altLang="en-US" smtClean="0"/>
-              <a:t>2026/5/2</a:t>
+              <a:t>2026/6/11</a:t>
             </a:fld>
             <a:endParaRPr kumimoji="1" lang="ja-JP" altLang="en-US"/>
           </a:p>
@@ -1428,7 +1666,7 @@
           <a:p>
             <a:fld id="{9236E18D-A30F-4D3C-BC15-86FA9E93A319}" type="datetimeFigureOut">
               <a:rPr kumimoji="1" lang="ja-JP" altLang="en-US" smtClean="0"/>
-              <a:t>2026/5/2</a:t>
+              <a:t>2026/6/11</a:t>
             </a:fld>
             <a:endParaRPr kumimoji="1" lang="ja-JP" altLang="en-US"/>
           </a:p>
@@ -1843,7 +2081,7 @@
           <a:p>
             <a:fld id="{9236E18D-A30F-4D3C-BC15-86FA9E93A319}" type="datetimeFigureOut">
               <a:rPr kumimoji="1" lang="ja-JP" altLang="en-US" smtClean="0"/>
-              <a:t>2026/5/2</a:t>
+              <a:t>2026/6/11</a:t>
             </a:fld>
             <a:endParaRPr kumimoji="1" lang="ja-JP" altLang="en-US"/>
           </a:p>
@@ -1985,7 +2223,7 @@
           <a:p>
             <a:fld id="{9236E18D-A30F-4D3C-BC15-86FA9E93A319}" type="datetimeFigureOut">
               <a:rPr kumimoji="1" lang="ja-JP" altLang="en-US" smtClean="0"/>
-              <a:t>2026/5/2</a:t>
+              <a:t>2026/6/11</a:t>
             </a:fld>
             <a:endParaRPr kumimoji="1" lang="ja-JP" altLang="en-US"/>
           </a:p>
@@ -2098,7 +2336,7 @@
           <a:p>
             <a:fld id="{9236E18D-A30F-4D3C-BC15-86FA9E93A319}" type="datetimeFigureOut">
               <a:rPr kumimoji="1" lang="ja-JP" altLang="en-US" smtClean="0"/>
-              <a:t>2026/5/2</a:t>
+              <a:t>2026/6/11</a:t>
             </a:fld>
             <a:endParaRPr kumimoji="1" lang="ja-JP" altLang="en-US"/>
           </a:p>
@@ -2411,7 +2649,7 @@
           <a:p>
             <a:fld id="{9236E18D-A30F-4D3C-BC15-86FA9E93A319}" type="datetimeFigureOut">
               <a:rPr kumimoji="1" lang="ja-JP" altLang="en-US" smtClean="0"/>
-              <a:t>2026/5/2</a:t>
+              <a:t>2026/6/11</a:t>
             </a:fld>
             <a:endParaRPr kumimoji="1" lang="ja-JP" altLang="en-US"/>
           </a:p>
@@ -2700,7 +2938,7 @@
           <a:p>
             <a:fld id="{9236E18D-A30F-4D3C-BC15-86FA9E93A319}" type="datetimeFigureOut">
               <a:rPr kumimoji="1" lang="ja-JP" altLang="en-US" smtClean="0"/>
-              <a:t>2026/5/2</a:t>
+              <a:t>2026/6/11</a:t>
             </a:fld>
             <a:endParaRPr kumimoji="1" lang="ja-JP" altLang="en-US"/>
           </a:p>
@@ -2943,7 +3181,7 @@
           <a:p>
             <a:fld id="{9236E18D-A30F-4D3C-BC15-86FA9E93A319}" type="datetimeFigureOut">
               <a:rPr kumimoji="1" lang="ja-JP" altLang="en-US" smtClean="0"/>
-              <a:t>2026/5/2</a:t>
+              <a:t>2026/6/11</a:t>
             </a:fld>
             <a:endParaRPr kumimoji="1" lang="ja-JP" altLang="en-US"/>
           </a:p>
@@ -7812,6 +8050,1498 @@
 </p:sld>
 </file>
 
+<file path=ppt/slides/slide7.xml><?xml version="1.0" encoding="utf-8"?>
+<p:sld xmlns:a="http://schemas.openxmlformats.org/drawingml/2006/main" xmlns:r="http://schemas.openxmlformats.org/officeDocument/2006/relationships" xmlns:p="http://schemas.openxmlformats.org/presentationml/2006/main">
+  <p:cSld>
+    <p:spTree>
+      <p:nvGrpSpPr>
+        <p:cNvPr id="1" name="">
+          <a:extLst>
+            <a:ext uri="{FF2B5EF4-FFF2-40B4-BE49-F238E27FC236}">
+              <a16:creationId xmlns:a16="http://schemas.microsoft.com/office/drawing/2014/main" id="{DC91A0CB-9278-FB5E-2CE4-D9AF5285DD91}"/>
+            </a:ext>
+          </a:extLst>
+        </p:cNvPr>
+        <p:cNvGrpSpPr/>
+        <p:nvPr/>
+      </p:nvGrpSpPr>
+      <p:grpSpPr>
+        <a:xfrm>
+          <a:off x="0" y="0"/>
+          <a:ext cx="0" cy="0"/>
+          <a:chOff x="0" y="0"/>
+          <a:chExt cx="0" cy="0"/>
+        </a:xfrm>
+      </p:grpSpPr>
+      <p:sp>
+        <p:nvSpPr>
+          <p:cNvPr id="4" name="Oval 3">
+            <a:extLst>
+              <a:ext uri="{FF2B5EF4-FFF2-40B4-BE49-F238E27FC236}">
+                <a16:creationId xmlns:a16="http://schemas.microsoft.com/office/drawing/2014/main" id="{8D0AF85B-32BB-9CF0-A26B-024C4F8F4DA0}"/>
+              </a:ext>
+            </a:extLst>
+          </p:cNvPr>
+          <p:cNvSpPr/>
+          <p:nvPr/>
+        </p:nvSpPr>
+        <p:spPr>
+          <a:xfrm>
+            <a:off x="2946400" y="1981200"/>
+            <a:ext cx="1479550" cy="2120900"/>
+          </a:xfrm>
+          <a:prstGeom prst="ellipse">
+            <a:avLst/>
+          </a:prstGeom>
+          <a:solidFill>
+            <a:schemeClr val="bg2">
+              <a:lumMod val="90000"/>
+            </a:schemeClr>
+          </a:solidFill>
+        </p:spPr>
+        <p:style>
+          <a:lnRef idx="2">
+            <a:schemeClr val="dk1">
+              <a:shade val="15000"/>
+            </a:schemeClr>
+          </a:lnRef>
+          <a:fillRef idx="1">
+            <a:schemeClr val="dk1"/>
+          </a:fillRef>
+          <a:effectRef idx="0">
+            <a:schemeClr val="dk1"/>
+          </a:effectRef>
+          <a:fontRef idx="minor">
+            <a:schemeClr val="lt1"/>
+          </a:fontRef>
+        </p:style>
+        <p:txBody>
+          <a:bodyPr rtlCol="0" anchor="ctr"/>
+          <a:lstStyle/>
+          <a:p>
+            <a:pPr algn="ctr"/>
+            <a:endParaRPr kumimoji="1" lang="ja-JP" altLang="en-US" dirty="0"/>
+          </a:p>
+        </p:txBody>
+      </p:sp>
+      <p:sp>
+        <p:nvSpPr>
+          <p:cNvPr id="5" name="Oval 4">
+            <a:extLst>
+              <a:ext uri="{FF2B5EF4-FFF2-40B4-BE49-F238E27FC236}">
+                <a16:creationId xmlns:a16="http://schemas.microsoft.com/office/drawing/2014/main" id="{C04036EB-B3B7-2796-197B-3DFA267B8911}"/>
+              </a:ext>
+            </a:extLst>
+          </p:cNvPr>
+          <p:cNvSpPr/>
+          <p:nvPr/>
+        </p:nvSpPr>
+        <p:spPr>
+          <a:xfrm>
+            <a:off x="3282950" y="2495550"/>
+            <a:ext cx="737532" cy="1057234"/>
+          </a:xfrm>
+          <a:prstGeom prst="ellipse">
+            <a:avLst/>
+          </a:prstGeom>
+          <a:solidFill>
+            <a:schemeClr val="bg1"/>
+          </a:solidFill>
+        </p:spPr>
+        <p:style>
+          <a:lnRef idx="2">
+            <a:schemeClr val="dk1">
+              <a:shade val="15000"/>
+            </a:schemeClr>
+          </a:lnRef>
+          <a:fillRef idx="1">
+            <a:schemeClr val="dk1"/>
+          </a:fillRef>
+          <a:effectRef idx="0">
+            <a:schemeClr val="dk1"/>
+          </a:effectRef>
+          <a:fontRef idx="minor">
+            <a:schemeClr val="lt1"/>
+          </a:fontRef>
+        </p:style>
+        <p:txBody>
+          <a:bodyPr rtlCol="0" anchor="ctr"/>
+          <a:lstStyle/>
+          <a:p>
+            <a:pPr algn="ctr"/>
+            <a:endParaRPr kumimoji="1" lang="ja-JP" altLang="en-US"/>
+          </a:p>
+        </p:txBody>
+      </p:sp>
+      <p:cxnSp>
+        <p:nvCxnSpPr>
+          <p:cNvPr id="7" name="Straight Connector 6">
+            <a:extLst>
+              <a:ext uri="{FF2B5EF4-FFF2-40B4-BE49-F238E27FC236}">
+                <a16:creationId xmlns:a16="http://schemas.microsoft.com/office/drawing/2014/main" id="{7A6AE2C9-EDEC-4F2C-6B59-CA7EDA86C274}"/>
+              </a:ext>
+            </a:extLst>
+          </p:cNvPr>
+          <p:cNvCxnSpPr>
+            <a:cxnSpLocks/>
+            <a:stCxn id="4" idx="0"/>
+          </p:cNvCxnSpPr>
+          <p:nvPr/>
+        </p:nvCxnSpPr>
+        <p:spPr>
+          <a:xfrm>
+            <a:off x="3686175" y="1981200"/>
+            <a:ext cx="5815634" cy="0"/>
+          </a:xfrm>
+          <a:prstGeom prst="line">
+            <a:avLst/>
+          </a:prstGeom>
+        </p:spPr>
+        <p:style>
+          <a:lnRef idx="2">
+            <a:schemeClr val="dk1"/>
+          </a:lnRef>
+          <a:fillRef idx="0">
+            <a:schemeClr val="dk1"/>
+          </a:fillRef>
+          <a:effectRef idx="1">
+            <a:schemeClr val="dk1"/>
+          </a:effectRef>
+          <a:fontRef idx="minor">
+            <a:schemeClr val="tx1"/>
+          </a:fontRef>
+        </p:style>
+      </p:cxnSp>
+      <p:cxnSp>
+        <p:nvCxnSpPr>
+          <p:cNvPr id="8" name="Straight Connector 7">
+            <a:extLst>
+              <a:ext uri="{FF2B5EF4-FFF2-40B4-BE49-F238E27FC236}">
+                <a16:creationId xmlns:a16="http://schemas.microsoft.com/office/drawing/2014/main" id="{D8289FD3-1CB9-AAA8-0969-12D0AFECF816}"/>
+              </a:ext>
+            </a:extLst>
+          </p:cNvPr>
+          <p:cNvCxnSpPr>
+            <a:cxnSpLocks/>
+            <a:stCxn id="4" idx="4"/>
+          </p:cNvCxnSpPr>
+          <p:nvPr/>
+        </p:nvCxnSpPr>
+        <p:spPr>
+          <a:xfrm>
+            <a:off x="3686175" y="4102100"/>
+            <a:ext cx="5981286" cy="0"/>
+          </a:xfrm>
+          <a:prstGeom prst="line">
+            <a:avLst/>
+          </a:prstGeom>
+        </p:spPr>
+        <p:style>
+          <a:lnRef idx="2">
+            <a:schemeClr val="dk1"/>
+          </a:lnRef>
+          <a:fillRef idx="0">
+            <a:schemeClr val="dk1"/>
+          </a:fillRef>
+          <a:effectRef idx="1">
+            <a:schemeClr val="dk1"/>
+          </a:effectRef>
+          <a:fontRef idx="minor">
+            <a:schemeClr val="tx1"/>
+          </a:fontRef>
+        </p:style>
+      </p:cxnSp>
+      <p:sp>
+        <p:nvSpPr>
+          <p:cNvPr id="17" name="TextBox 16">
+            <a:extLst>
+              <a:ext uri="{FF2B5EF4-FFF2-40B4-BE49-F238E27FC236}">
+                <a16:creationId xmlns:a16="http://schemas.microsoft.com/office/drawing/2014/main" id="{57D5879B-5B35-067F-01E2-B62B34C164C0}"/>
+              </a:ext>
+            </a:extLst>
+          </p:cNvPr>
+          <p:cNvSpPr txBox="1"/>
+          <p:nvPr/>
+        </p:nvSpPr>
+        <p:spPr>
+          <a:xfrm>
+            <a:off x="3407092" y="2071193"/>
+            <a:ext cx="558166" cy="369332"/>
+          </a:xfrm>
+          <a:prstGeom prst="rect">
+            <a:avLst/>
+          </a:prstGeom>
+          <a:noFill/>
+        </p:spPr>
+        <p:txBody>
+          <a:bodyPr wrap="none" rtlCol="0">
+            <a:spAutoFit/>
+          </a:bodyPr>
+          <a:lstStyle/>
+          <a:p>
+            <a:r>
+              <a:rPr kumimoji="1" lang="en-US" altLang="ja-JP" dirty="0" err="1">
+                <a:latin typeface="times" panose="02020603050405020304" pitchFamily="18" charset="0"/>
+                <a:cs typeface="times" panose="02020603050405020304" pitchFamily="18" charset="0"/>
+              </a:rPr>
+              <a:t>n</a:t>
+            </a:r>
+            <a:r>
+              <a:rPr kumimoji="1" lang="en-US" altLang="ja-JP" baseline="-25000" dirty="0" err="1">
+                <a:latin typeface="times" panose="02020603050405020304" pitchFamily="18" charset="0"/>
+                <a:cs typeface="times" panose="02020603050405020304" pitchFamily="18" charset="0"/>
+              </a:rPr>
+              <a:t>clad</a:t>
+            </a:r>
+            <a:endParaRPr kumimoji="1" lang="ja-JP" altLang="en-US" baseline="-25000" dirty="0">
+              <a:latin typeface="times" panose="02020603050405020304" pitchFamily="18" charset="0"/>
+              <a:cs typeface="times" panose="02020603050405020304" pitchFamily="18" charset="0"/>
+            </a:endParaRPr>
+          </a:p>
+        </p:txBody>
+      </p:sp>
+      <p:sp>
+        <p:nvSpPr>
+          <p:cNvPr id="18" name="TextBox 17">
+            <a:extLst>
+              <a:ext uri="{FF2B5EF4-FFF2-40B4-BE49-F238E27FC236}">
+                <a16:creationId xmlns:a16="http://schemas.microsoft.com/office/drawing/2014/main" id="{8E9BCC03-9C2D-9ACD-66E7-0CF58B8994E9}"/>
+              </a:ext>
+            </a:extLst>
+          </p:cNvPr>
+          <p:cNvSpPr txBox="1"/>
+          <p:nvPr/>
+        </p:nvSpPr>
+        <p:spPr>
+          <a:xfrm>
+            <a:off x="3380549" y="2883993"/>
+            <a:ext cx="566181" cy="369332"/>
+          </a:xfrm>
+          <a:prstGeom prst="rect">
+            <a:avLst/>
+          </a:prstGeom>
+          <a:noFill/>
+        </p:spPr>
+        <p:txBody>
+          <a:bodyPr wrap="none" rtlCol="0">
+            <a:spAutoFit/>
+          </a:bodyPr>
+          <a:lstStyle/>
+          <a:p>
+            <a:r>
+              <a:rPr kumimoji="1" lang="en-US" altLang="ja-JP" dirty="0" err="1">
+                <a:latin typeface="times" panose="02020603050405020304" pitchFamily="18" charset="0"/>
+                <a:cs typeface="times" panose="02020603050405020304" pitchFamily="18" charset="0"/>
+              </a:rPr>
+              <a:t>n</a:t>
+            </a:r>
+            <a:r>
+              <a:rPr kumimoji="1" lang="en-US" altLang="ja-JP" baseline="-25000" dirty="0" err="1">
+                <a:latin typeface="times" panose="02020603050405020304" pitchFamily="18" charset="0"/>
+                <a:cs typeface="times" panose="02020603050405020304" pitchFamily="18" charset="0"/>
+              </a:rPr>
+              <a:t>core</a:t>
+            </a:r>
+            <a:endParaRPr kumimoji="1" lang="ja-JP" altLang="en-US" baseline="-25000" dirty="0">
+              <a:latin typeface="times" panose="02020603050405020304" pitchFamily="18" charset="0"/>
+              <a:cs typeface="times" panose="02020603050405020304" pitchFamily="18" charset="0"/>
+            </a:endParaRPr>
+          </a:p>
+        </p:txBody>
+      </p:sp>
+      <p:cxnSp>
+        <p:nvCxnSpPr>
+          <p:cNvPr id="20" name="Straight Arrow Connector 19">
+            <a:extLst>
+              <a:ext uri="{FF2B5EF4-FFF2-40B4-BE49-F238E27FC236}">
+                <a16:creationId xmlns:a16="http://schemas.microsoft.com/office/drawing/2014/main" id="{749A6541-A0BB-A427-8D2D-6F11B8EE0F12}"/>
+              </a:ext>
+            </a:extLst>
+          </p:cNvPr>
+          <p:cNvCxnSpPr/>
+          <p:nvPr/>
+        </p:nvCxnSpPr>
+        <p:spPr>
+          <a:xfrm>
+            <a:off x="1693193" y="3150632"/>
+            <a:ext cx="996950" cy="0"/>
+          </a:xfrm>
+          <a:prstGeom prst="straightConnector1">
+            <a:avLst/>
+          </a:prstGeom>
+          <a:ln>
+            <a:tailEnd type="triangle"/>
+          </a:ln>
+        </p:spPr>
+        <p:style>
+          <a:lnRef idx="2">
+            <a:schemeClr val="dk1"/>
+          </a:lnRef>
+          <a:fillRef idx="0">
+            <a:schemeClr val="dk1"/>
+          </a:fillRef>
+          <a:effectRef idx="1">
+            <a:schemeClr val="dk1"/>
+          </a:effectRef>
+          <a:fontRef idx="minor">
+            <a:schemeClr val="tx1"/>
+          </a:fontRef>
+        </p:style>
+      </p:cxnSp>
+      <p:cxnSp>
+        <p:nvCxnSpPr>
+          <p:cNvPr id="21" name="Straight Arrow Connector 20">
+            <a:extLst>
+              <a:ext uri="{FF2B5EF4-FFF2-40B4-BE49-F238E27FC236}">
+                <a16:creationId xmlns:a16="http://schemas.microsoft.com/office/drawing/2014/main" id="{74349CCE-19D0-ABC0-9E02-3DDC1F4BF859}"/>
+              </a:ext>
+            </a:extLst>
+          </p:cNvPr>
+          <p:cNvCxnSpPr>
+            <a:cxnSpLocks/>
+          </p:cNvCxnSpPr>
+          <p:nvPr/>
+        </p:nvCxnSpPr>
+        <p:spPr>
+          <a:xfrm flipV="1">
+            <a:off x="1699543" y="2356882"/>
+            <a:ext cx="0" cy="787400"/>
+          </a:xfrm>
+          <a:prstGeom prst="straightConnector1">
+            <a:avLst/>
+          </a:prstGeom>
+          <a:ln>
+            <a:tailEnd type="triangle"/>
+          </a:ln>
+        </p:spPr>
+        <p:style>
+          <a:lnRef idx="2">
+            <a:schemeClr val="dk1"/>
+          </a:lnRef>
+          <a:fillRef idx="0">
+            <a:schemeClr val="dk1"/>
+          </a:fillRef>
+          <a:effectRef idx="1">
+            <a:schemeClr val="dk1"/>
+          </a:effectRef>
+          <a:fontRef idx="minor">
+            <a:schemeClr val="tx1"/>
+          </a:fontRef>
+        </p:style>
+      </p:cxnSp>
+      <p:cxnSp>
+        <p:nvCxnSpPr>
+          <p:cNvPr id="23" name="Straight Arrow Connector 22">
+            <a:extLst>
+              <a:ext uri="{FF2B5EF4-FFF2-40B4-BE49-F238E27FC236}">
+                <a16:creationId xmlns:a16="http://schemas.microsoft.com/office/drawing/2014/main" id="{530AB565-9E4A-29AE-3D3E-AA1FA1293C7B}"/>
+              </a:ext>
+            </a:extLst>
+          </p:cNvPr>
+          <p:cNvCxnSpPr>
+            <a:cxnSpLocks/>
+          </p:cNvCxnSpPr>
+          <p:nvPr/>
+        </p:nvCxnSpPr>
+        <p:spPr>
+          <a:xfrm>
+            <a:off x="1699543" y="3150632"/>
+            <a:ext cx="679450" cy="323850"/>
+          </a:xfrm>
+          <a:prstGeom prst="straightConnector1">
+            <a:avLst/>
+          </a:prstGeom>
+          <a:ln>
+            <a:tailEnd type="triangle"/>
+          </a:ln>
+        </p:spPr>
+        <p:style>
+          <a:lnRef idx="2">
+            <a:schemeClr val="dk1"/>
+          </a:lnRef>
+          <a:fillRef idx="0">
+            <a:schemeClr val="dk1"/>
+          </a:fillRef>
+          <a:effectRef idx="1">
+            <a:schemeClr val="dk1"/>
+          </a:effectRef>
+          <a:fontRef idx="minor">
+            <a:schemeClr val="tx1"/>
+          </a:fontRef>
+        </p:style>
+      </p:cxnSp>
+      <p:sp>
+        <p:nvSpPr>
+          <p:cNvPr id="26" name="TextBox 25">
+            <a:extLst>
+              <a:ext uri="{FF2B5EF4-FFF2-40B4-BE49-F238E27FC236}">
+                <a16:creationId xmlns:a16="http://schemas.microsoft.com/office/drawing/2014/main" id="{DADAD0E8-3CD1-93DC-0B6F-253477E65E11}"/>
+              </a:ext>
+            </a:extLst>
+          </p:cNvPr>
+          <p:cNvSpPr txBox="1"/>
+          <p:nvPr/>
+        </p:nvSpPr>
+        <p:spPr>
+          <a:xfrm>
+            <a:off x="1549502" y="1981200"/>
+            <a:ext cx="300082" cy="369332"/>
+          </a:xfrm>
+          <a:prstGeom prst="rect">
+            <a:avLst/>
+          </a:prstGeom>
+          <a:noFill/>
+        </p:spPr>
+        <p:txBody>
+          <a:bodyPr wrap="none" rtlCol="0">
+            <a:spAutoFit/>
+          </a:bodyPr>
+          <a:lstStyle/>
+          <a:p>
+            <a:r>
+              <a:rPr kumimoji="1" lang="en-US" altLang="ja-JP" dirty="0">
+                <a:latin typeface="times" panose="02020603050405020304" pitchFamily="18" charset="0"/>
+                <a:cs typeface="times" panose="02020603050405020304" pitchFamily="18" charset="0"/>
+              </a:rPr>
+              <a:t>x</a:t>
+            </a:r>
+            <a:endParaRPr kumimoji="1" lang="ja-JP" altLang="en-US" dirty="0">
+              <a:latin typeface="times" panose="02020603050405020304" pitchFamily="18" charset="0"/>
+              <a:cs typeface="times" panose="02020603050405020304" pitchFamily="18" charset="0"/>
+            </a:endParaRPr>
+          </a:p>
+        </p:txBody>
+      </p:sp>
+      <p:sp>
+        <p:nvSpPr>
+          <p:cNvPr id="27" name="TextBox 26">
+            <a:extLst>
+              <a:ext uri="{FF2B5EF4-FFF2-40B4-BE49-F238E27FC236}">
+                <a16:creationId xmlns:a16="http://schemas.microsoft.com/office/drawing/2014/main" id="{AEDCFA8B-A69D-6AD1-893B-2C2D9CF76E33}"/>
+              </a:ext>
+            </a:extLst>
+          </p:cNvPr>
+          <p:cNvSpPr txBox="1"/>
+          <p:nvPr/>
+        </p:nvSpPr>
+        <p:spPr>
+          <a:xfrm>
+            <a:off x="2363845" y="3312557"/>
+            <a:ext cx="300082" cy="369332"/>
+          </a:xfrm>
+          <a:prstGeom prst="rect">
+            <a:avLst/>
+          </a:prstGeom>
+          <a:noFill/>
+        </p:spPr>
+        <p:txBody>
+          <a:bodyPr wrap="none" rtlCol="0">
+            <a:spAutoFit/>
+          </a:bodyPr>
+          <a:lstStyle/>
+          <a:p>
+            <a:r>
+              <a:rPr kumimoji="1" lang="en-US" altLang="ja-JP" dirty="0">
+                <a:latin typeface="times" panose="02020603050405020304" pitchFamily="18" charset="0"/>
+                <a:cs typeface="times" panose="02020603050405020304" pitchFamily="18" charset="0"/>
+              </a:rPr>
+              <a:t>y</a:t>
+            </a:r>
+            <a:endParaRPr kumimoji="1" lang="ja-JP" altLang="en-US" dirty="0">
+              <a:latin typeface="times" panose="02020603050405020304" pitchFamily="18" charset="0"/>
+              <a:cs typeface="times" panose="02020603050405020304" pitchFamily="18" charset="0"/>
+            </a:endParaRPr>
+          </a:p>
+        </p:txBody>
+      </p:sp>
+      <p:sp>
+        <p:nvSpPr>
+          <p:cNvPr id="28" name="TextBox 27">
+            <a:extLst>
+              <a:ext uri="{FF2B5EF4-FFF2-40B4-BE49-F238E27FC236}">
+                <a16:creationId xmlns:a16="http://schemas.microsoft.com/office/drawing/2014/main" id="{6486978B-3C32-CEB5-9771-EF4EB75974B8}"/>
+              </a:ext>
+            </a:extLst>
+          </p:cNvPr>
+          <p:cNvSpPr txBox="1"/>
+          <p:nvPr/>
+        </p:nvSpPr>
+        <p:spPr>
+          <a:xfrm>
+            <a:off x="2385343" y="2813050"/>
+            <a:ext cx="287258" cy="369332"/>
+          </a:xfrm>
+          <a:prstGeom prst="rect">
+            <a:avLst/>
+          </a:prstGeom>
+          <a:noFill/>
+        </p:spPr>
+        <p:txBody>
+          <a:bodyPr wrap="none" rtlCol="0">
+            <a:spAutoFit/>
+          </a:bodyPr>
+          <a:lstStyle/>
+          <a:p>
+            <a:r>
+              <a:rPr kumimoji="1" lang="en-US" altLang="ja-JP" dirty="0">
+                <a:latin typeface="times" panose="02020603050405020304" pitchFamily="18" charset="0"/>
+                <a:cs typeface="times" panose="02020603050405020304" pitchFamily="18" charset="0"/>
+              </a:rPr>
+              <a:t>z</a:t>
+            </a:r>
+            <a:endParaRPr kumimoji="1" lang="ja-JP" altLang="en-US" dirty="0">
+              <a:latin typeface="times" panose="02020603050405020304" pitchFamily="18" charset="0"/>
+              <a:cs typeface="times" panose="02020603050405020304" pitchFamily="18" charset="0"/>
+            </a:endParaRPr>
+          </a:p>
+        </p:txBody>
+      </p:sp>
+      <p:cxnSp>
+        <p:nvCxnSpPr>
+          <p:cNvPr id="3" name="直線コネクタ 2">
+            <a:extLst>
+              <a:ext uri="{FF2B5EF4-FFF2-40B4-BE49-F238E27FC236}">
+                <a16:creationId xmlns:a16="http://schemas.microsoft.com/office/drawing/2014/main" id="{DA312E9E-08BD-40B9-3E30-8EA145F9C634}"/>
+              </a:ext>
+            </a:extLst>
+          </p:cNvPr>
+          <p:cNvCxnSpPr>
+            <a:cxnSpLocks/>
+            <a:stCxn id="5" idx="0"/>
+          </p:cNvCxnSpPr>
+          <p:nvPr/>
+        </p:nvCxnSpPr>
+        <p:spPr>
+          <a:xfrm>
+            <a:off x="3651716" y="2495550"/>
+            <a:ext cx="5803710" cy="0"/>
+          </a:xfrm>
+          <a:prstGeom prst="line">
+            <a:avLst/>
+          </a:prstGeom>
+          <a:ln>
+            <a:prstDash val="dash"/>
+          </a:ln>
+        </p:spPr>
+        <p:style>
+          <a:lnRef idx="2">
+            <a:schemeClr val="dk1"/>
+          </a:lnRef>
+          <a:fillRef idx="0">
+            <a:schemeClr val="dk1"/>
+          </a:fillRef>
+          <a:effectRef idx="1">
+            <a:schemeClr val="dk1"/>
+          </a:effectRef>
+          <a:fontRef idx="minor">
+            <a:schemeClr val="tx1"/>
+          </a:fontRef>
+        </p:style>
+      </p:cxnSp>
+      <p:cxnSp>
+        <p:nvCxnSpPr>
+          <p:cNvPr id="6" name="直線コネクタ 5">
+            <a:extLst>
+              <a:ext uri="{FF2B5EF4-FFF2-40B4-BE49-F238E27FC236}">
+                <a16:creationId xmlns:a16="http://schemas.microsoft.com/office/drawing/2014/main" id="{932AFEE0-9F31-6713-F97F-59C2210F12E2}"/>
+              </a:ext>
+            </a:extLst>
+          </p:cNvPr>
+          <p:cNvCxnSpPr>
+            <a:cxnSpLocks/>
+          </p:cNvCxnSpPr>
+          <p:nvPr/>
+        </p:nvCxnSpPr>
+        <p:spPr>
+          <a:xfrm>
+            <a:off x="3651716" y="3552784"/>
+            <a:ext cx="5969362" cy="0"/>
+          </a:xfrm>
+          <a:prstGeom prst="line">
+            <a:avLst/>
+          </a:prstGeom>
+          <a:ln>
+            <a:prstDash val="dash"/>
+          </a:ln>
+        </p:spPr>
+        <p:style>
+          <a:lnRef idx="2">
+            <a:schemeClr val="dk1"/>
+          </a:lnRef>
+          <a:fillRef idx="0">
+            <a:schemeClr val="dk1"/>
+          </a:fillRef>
+          <a:effectRef idx="1">
+            <a:schemeClr val="dk1"/>
+          </a:effectRef>
+          <a:fontRef idx="minor">
+            <a:schemeClr val="tx1"/>
+          </a:fontRef>
+        </p:style>
+      </p:cxnSp>
+      <p:sp>
+        <p:nvSpPr>
+          <p:cNvPr id="15" name="Oval 4">
+            <a:extLst>
+              <a:ext uri="{FF2B5EF4-FFF2-40B4-BE49-F238E27FC236}">
+                <a16:creationId xmlns:a16="http://schemas.microsoft.com/office/drawing/2014/main" id="{83FD3DB5-19E4-3FCC-22A3-F9F8A4FE7211}"/>
+              </a:ext>
+            </a:extLst>
+          </p:cNvPr>
+          <p:cNvSpPr/>
+          <p:nvPr/>
+        </p:nvSpPr>
+        <p:spPr>
+          <a:xfrm>
+            <a:off x="8382871" y="2495550"/>
+            <a:ext cx="483398" cy="1057234"/>
+          </a:xfrm>
+          <a:prstGeom prst="ellipse">
+            <a:avLst/>
+          </a:prstGeom>
+          <a:solidFill>
+            <a:schemeClr val="bg2">
+              <a:lumMod val="50000"/>
+            </a:schemeClr>
+          </a:solidFill>
+        </p:spPr>
+        <p:style>
+          <a:lnRef idx="2">
+            <a:schemeClr val="dk1">
+              <a:shade val="15000"/>
+            </a:schemeClr>
+          </a:lnRef>
+          <a:fillRef idx="1">
+            <a:schemeClr val="dk1"/>
+          </a:fillRef>
+          <a:effectRef idx="0">
+            <a:schemeClr val="dk1"/>
+          </a:effectRef>
+          <a:fontRef idx="minor">
+            <a:schemeClr val="lt1"/>
+          </a:fontRef>
+        </p:style>
+        <p:txBody>
+          <a:bodyPr rtlCol="0" anchor="ctr"/>
+          <a:lstStyle/>
+          <a:p>
+            <a:pPr algn="ctr"/>
+            <a:endParaRPr kumimoji="1" lang="ja-JP" altLang="en-US"/>
+          </a:p>
+        </p:txBody>
+      </p:sp>
+      <p:sp>
+        <p:nvSpPr>
+          <p:cNvPr id="24" name="Oval 4">
+            <a:extLst>
+              <a:ext uri="{FF2B5EF4-FFF2-40B4-BE49-F238E27FC236}">
+                <a16:creationId xmlns:a16="http://schemas.microsoft.com/office/drawing/2014/main" id="{E168952E-433B-1F90-F5D4-5DA21FCFBE26}"/>
+              </a:ext>
+            </a:extLst>
+          </p:cNvPr>
+          <p:cNvSpPr/>
+          <p:nvPr/>
+        </p:nvSpPr>
+        <p:spPr>
+          <a:xfrm>
+            <a:off x="7701814" y="2492034"/>
+            <a:ext cx="483398" cy="1057234"/>
+          </a:xfrm>
+          <a:prstGeom prst="ellipse">
+            <a:avLst/>
+          </a:prstGeom>
+          <a:solidFill>
+            <a:schemeClr val="bg2">
+              <a:lumMod val="50000"/>
+            </a:schemeClr>
+          </a:solidFill>
+        </p:spPr>
+        <p:style>
+          <a:lnRef idx="2">
+            <a:schemeClr val="dk1">
+              <a:shade val="15000"/>
+            </a:schemeClr>
+          </a:lnRef>
+          <a:fillRef idx="1">
+            <a:schemeClr val="dk1"/>
+          </a:fillRef>
+          <a:effectRef idx="0">
+            <a:schemeClr val="dk1"/>
+          </a:effectRef>
+          <a:fontRef idx="minor">
+            <a:schemeClr val="lt1"/>
+          </a:fontRef>
+        </p:style>
+        <p:txBody>
+          <a:bodyPr rtlCol="0" anchor="ctr"/>
+          <a:lstStyle/>
+          <a:p>
+            <a:pPr algn="ctr"/>
+            <a:endParaRPr kumimoji="1" lang="ja-JP" altLang="en-US"/>
+          </a:p>
+        </p:txBody>
+      </p:sp>
+      <p:sp>
+        <p:nvSpPr>
+          <p:cNvPr id="25" name="Oval 4">
+            <a:extLst>
+              <a:ext uri="{FF2B5EF4-FFF2-40B4-BE49-F238E27FC236}">
+                <a16:creationId xmlns:a16="http://schemas.microsoft.com/office/drawing/2014/main" id="{E7AC7E87-E228-D025-A0CE-F1770156BE28}"/>
+              </a:ext>
+            </a:extLst>
+          </p:cNvPr>
+          <p:cNvSpPr/>
+          <p:nvPr/>
+        </p:nvSpPr>
+        <p:spPr>
+          <a:xfrm>
+            <a:off x="6980895" y="2493222"/>
+            <a:ext cx="483398" cy="1057234"/>
+          </a:xfrm>
+          <a:prstGeom prst="ellipse">
+            <a:avLst/>
+          </a:prstGeom>
+          <a:solidFill>
+            <a:schemeClr val="bg2">
+              <a:lumMod val="50000"/>
+            </a:schemeClr>
+          </a:solidFill>
+        </p:spPr>
+        <p:style>
+          <a:lnRef idx="2">
+            <a:schemeClr val="dk1">
+              <a:shade val="15000"/>
+            </a:schemeClr>
+          </a:lnRef>
+          <a:fillRef idx="1">
+            <a:schemeClr val="dk1"/>
+          </a:fillRef>
+          <a:effectRef idx="0">
+            <a:schemeClr val="dk1"/>
+          </a:effectRef>
+          <a:fontRef idx="minor">
+            <a:schemeClr val="lt1"/>
+          </a:fontRef>
+        </p:style>
+        <p:txBody>
+          <a:bodyPr rtlCol="0" anchor="ctr"/>
+          <a:lstStyle/>
+          <a:p>
+            <a:pPr algn="ctr"/>
+            <a:endParaRPr kumimoji="1" lang="ja-JP" altLang="en-US"/>
+          </a:p>
+        </p:txBody>
+      </p:sp>
+      <p:sp>
+        <p:nvSpPr>
+          <p:cNvPr id="29" name="Oval 4">
+            <a:extLst>
+              <a:ext uri="{FF2B5EF4-FFF2-40B4-BE49-F238E27FC236}">
+                <a16:creationId xmlns:a16="http://schemas.microsoft.com/office/drawing/2014/main" id="{71D2D838-CEC3-A7E7-01E8-7F43A7074F83}"/>
+              </a:ext>
+            </a:extLst>
+          </p:cNvPr>
+          <p:cNvSpPr/>
+          <p:nvPr/>
+        </p:nvSpPr>
+        <p:spPr>
+          <a:xfrm>
+            <a:off x="6226086" y="2499067"/>
+            <a:ext cx="483398" cy="1057234"/>
+          </a:xfrm>
+          <a:prstGeom prst="ellipse">
+            <a:avLst/>
+          </a:prstGeom>
+          <a:solidFill>
+            <a:schemeClr val="bg2">
+              <a:lumMod val="50000"/>
+            </a:schemeClr>
+          </a:solidFill>
+        </p:spPr>
+        <p:style>
+          <a:lnRef idx="2">
+            <a:schemeClr val="dk1">
+              <a:shade val="15000"/>
+            </a:schemeClr>
+          </a:lnRef>
+          <a:fillRef idx="1">
+            <a:schemeClr val="dk1"/>
+          </a:fillRef>
+          <a:effectRef idx="0">
+            <a:schemeClr val="dk1"/>
+          </a:effectRef>
+          <a:fontRef idx="minor">
+            <a:schemeClr val="lt1"/>
+          </a:fontRef>
+        </p:style>
+        <p:txBody>
+          <a:bodyPr rtlCol="0" anchor="ctr"/>
+          <a:lstStyle/>
+          <a:p>
+            <a:pPr algn="ctr"/>
+            <a:endParaRPr kumimoji="1" lang="ja-JP" altLang="en-US"/>
+          </a:p>
+        </p:txBody>
+      </p:sp>
+      <p:sp>
+        <p:nvSpPr>
+          <p:cNvPr id="30" name="Oval 4">
+            <a:extLst>
+              <a:ext uri="{FF2B5EF4-FFF2-40B4-BE49-F238E27FC236}">
+                <a16:creationId xmlns:a16="http://schemas.microsoft.com/office/drawing/2014/main" id="{E70D00BF-2DA4-B210-B70F-331637E1798E}"/>
+              </a:ext>
+            </a:extLst>
+          </p:cNvPr>
+          <p:cNvSpPr/>
+          <p:nvPr/>
+        </p:nvSpPr>
+        <p:spPr>
+          <a:xfrm>
+            <a:off x="5505167" y="2492034"/>
+            <a:ext cx="483398" cy="1057234"/>
+          </a:xfrm>
+          <a:prstGeom prst="ellipse">
+            <a:avLst/>
+          </a:prstGeom>
+          <a:solidFill>
+            <a:schemeClr val="bg2">
+              <a:lumMod val="50000"/>
+            </a:schemeClr>
+          </a:solidFill>
+        </p:spPr>
+        <p:style>
+          <a:lnRef idx="2">
+            <a:schemeClr val="dk1">
+              <a:shade val="15000"/>
+            </a:schemeClr>
+          </a:lnRef>
+          <a:fillRef idx="1">
+            <a:schemeClr val="dk1"/>
+          </a:fillRef>
+          <a:effectRef idx="0">
+            <a:schemeClr val="dk1"/>
+          </a:effectRef>
+          <a:fontRef idx="minor">
+            <a:schemeClr val="lt1"/>
+          </a:fontRef>
+        </p:style>
+        <p:txBody>
+          <a:bodyPr rtlCol="0" anchor="ctr"/>
+          <a:lstStyle/>
+          <a:p>
+            <a:pPr algn="ctr"/>
+            <a:endParaRPr kumimoji="1" lang="ja-JP" altLang="en-US"/>
+          </a:p>
+        </p:txBody>
+      </p:sp>
+      <p:cxnSp>
+        <p:nvCxnSpPr>
+          <p:cNvPr id="31" name="直線コネクタ 30">
+            <a:extLst>
+              <a:ext uri="{FF2B5EF4-FFF2-40B4-BE49-F238E27FC236}">
+                <a16:creationId xmlns:a16="http://schemas.microsoft.com/office/drawing/2014/main" id="{4B175DA7-3ED6-430B-F907-180649D80370}"/>
+              </a:ext>
+            </a:extLst>
+          </p:cNvPr>
+          <p:cNvCxnSpPr>
+            <a:cxnSpLocks/>
+          </p:cNvCxnSpPr>
+          <p:nvPr/>
+        </p:nvCxnSpPr>
+        <p:spPr>
+          <a:xfrm flipV="1">
+            <a:off x="5733731" y="2498660"/>
+            <a:ext cx="19878" cy="2244118"/>
+          </a:xfrm>
+          <a:prstGeom prst="line">
+            <a:avLst/>
+          </a:prstGeom>
+          <a:ln w="6350">
+            <a:prstDash val="dash"/>
+          </a:ln>
+        </p:spPr>
+        <p:style>
+          <a:lnRef idx="2">
+            <a:schemeClr val="dk1"/>
+          </a:lnRef>
+          <a:fillRef idx="0">
+            <a:schemeClr val="dk1"/>
+          </a:fillRef>
+          <a:effectRef idx="1">
+            <a:schemeClr val="dk1"/>
+          </a:effectRef>
+          <a:fontRef idx="minor">
+            <a:schemeClr val="tx1"/>
+          </a:fontRef>
+        </p:style>
+      </p:cxnSp>
+      <p:cxnSp>
+        <p:nvCxnSpPr>
+          <p:cNvPr id="34" name="直線コネクタ 33">
+            <a:extLst>
+              <a:ext uri="{FF2B5EF4-FFF2-40B4-BE49-F238E27FC236}">
+                <a16:creationId xmlns:a16="http://schemas.microsoft.com/office/drawing/2014/main" id="{E661173F-737E-9D38-0A7D-73522C19C8CE}"/>
+              </a:ext>
+            </a:extLst>
+          </p:cNvPr>
+          <p:cNvCxnSpPr>
+            <a:cxnSpLocks/>
+          </p:cNvCxnSpPr>
+          <p:nvPr/>
+        </p:nvCxnSpPr>
+        <p:spPr>
+          <a:xfrm flipV="1">
+            <a:off x="8604692" y="2498660"/>
+            <a:ext cx="19878" cy="2244118"/>
+          </a:xfrm>
+          <a:prstGeom prst="line">
+            <a:avLst/>
+          </a:prstGeom>
+          <a:ln w="6350">
+            <a:prstDash val="dash"/>
+          </a:ln>
+        </p:spPr>
+        <p:style>
+          <a:lnRef idx="2">
+            <a:schemeClr val="dk1"/>
+          </a:lnRef>
+          <a:fillRef idx="0">
+            <a:schemeClr val="dk1"/>
+          </a:fillRef>
+          <a:effectRef idx="1">
+            <a:schemeClr val="dk1"/>
+          </a:effectRef>
+          <a:fontRef idx="minor">
+            <a:schemeClr val="tx1"/>
+          </a:fontRef>
+        </p:style>
+      </p:cxnSp>
+      <p:cxnSp>
+        <p:nvCxnSpPr>
+          <p:cNvPr id="36" name="直線矢印コネクタ 35">
+            <a:extLst>
+              <a:ext uri="{FF2B5EF4-FFF2-40B4-BE49-F238E27FC236}">
+                <a16:creationId xmlns:a16="http://schemas.microsoft.com/office/drawing/2014/main" id="{6C5C2136-BF76-C1E2-E81D-0519B6F0C3C0}"/>
+              </a:ext>
+            </a:extLst>
+          </p:cNvPr>
+          <p:cNvCxnSpPr/>
+          <p:nvPr/>
+        </p:nvCxnSpPr>
+        <p:spPr>
+          <a:xfrm>
+            <a:off x="5733731" y="4518991"/>
+            <a:ext cx="2890839" cy="0"/>
+          </a:xfrm>
+          <a:prstGeom prst="straightConnector1">
+            <a:avLst/>
+          </a:prstGeom>
+          <a:ln>
+            <a:solidFill>
+              <a:schemeClr val="tx1"/>
+            </a:solidFill>
+            <a:headEnd type="arrow" w="med" len="med"/>
+            <a:tailEnd type="arrow" w="med" len="med"/>
+          </a:ln>
+        </p:spPr>
+        <p:style>
+          <a:lnRef idx="2">
+            <a:schemeClr val="accent1"/>
+          </a:lnRef>
+          <a:fillRef idx="0">
+            <a:schemeClr val="accent1"/>
+          </a:fillRef>
+          <a:effectRef idx="1">
+            <a:schemeClr val="accent1"/>
+          </a:effectRef>
+          <a:fontRef idx="minor">
+            <a:schemeClr val="tx1"/>
+          </a:fontRef>
+        </p:style>
+      </p:cxnSp>
+      <p:sp>
+        <p:nvSpPr>
+          <p:cNvPr id="37" name="テキスト ボックス 36">
+            <a:extLst>
+              <a:ext uri="{FF2B5EF4-FFF2-40B4-BE49-F238E27FC236}">
+                <a16:creationId xmlns:a16="http://schemas.microsoft.com/office/drawing/2014/main" id="{6388989A-2EB6-A86C-015D-D2A8792D4FCF}"/>
+              </a:ext>
+            </a:extLst>
+          </p:cNvPr>
+          <p:cNvSpPr txBox="1"/>
+          <p:nvPr/>
+        </p:nvSpPr>
+        <p:spPr>
+          <a:xfrm>
+            <a:off x="6129987" y="4610018"/>
+            <a:ext cx="2185214" cy="369332"/>
+          </a:xfrm>
+          <a:prstGeom prst="rect">
+            <a:avLst/>
+          </a:prstGeom>
+          <a:noFill/>
+        </p:spPr>
+        <p:txBody>
+          <a:bodyPr wrap="none" rtlCol="0">
+            <a:spAutoFit/>
+          </a:bodyPr>
+          <a:lstStyle/>
+          <a:p>
+            <a:r>
+              <a:rPr lang="en-US" dirty="0">
+                <a:latin typeface="times" panose="02020603050405020304" pitchFamily="18" charset="0"/>
+                <a:cs typeface="times" panose="02020603050405020304" pitchFamily="18" charset="0"/>
+              </a:rPr>
+              <a:t>Bragg gratings length</a:t>
+            </a:r>
+          </a:p>
+        </p:txBody>
+      </p:sp>
+      <p:sp>
+        <p:nvSpPr>
+          <p:cNvPr id="38" name="矢印: 右 37">
+            <a:extLst>
+              <a:ext uri="{FF2B5EF4-FFF2-40B4-BE49-F238E27FC236}">
+                <a16:creationId xmlns:a16="http://schemas.microsoft.com/office/drawing/2014/main" id="{2B0282C4-34AC-42E7-8F53-F6A4BE656C29}"/>
+              </a:ext>
+            </a:extLst>
+          </p:cNvPr>
+          <p:cNvSpPr/>
+          <p:nvPr/>
+        </p:nvSpPr>
+        <p:spPr>
+          <a:xfrm>
+            <a:off x="4582767" y="2855860"/>
+            <a:ext cx="5084694" cy="280034"/>
+          </a:xfrm>
+          <a:prstGeom prst="rightArrow">
+            <a:avLst/>
+          </a:prstGeom>
+          <a:solidFill>
+            <a:srgbClr val="FF0000">
+              <a:alpha val="40000"/>
+            </a:srgbClr>
+          </a:solidFill>
+          <a:ln>
+            <a:noFill/>
+          </a:ln>
+        </p:spPr>
+        <p:style>
+          <a:lnRef idx="2">
+            <a:schemeClr val="accent1">
+              <a:shade val="15000"/>
+            </a:schemeClr>
+          </a:lnRef>
+          <a:fillRef idx="1">
+            <a:schemeClr val="accent1"/>
+          </a:fillRef>
+          <a:effectRef idx="0">
+            <a:schemeClr val="accent1"/>
+          </a:effectRef>
+          <a:fontRef idx="minor">
+            <a:schemeClr val="lt1"/>
+          </a:fontRef>
+        </p:style>
+        <p:txBody>
+          <a:bodyPr rtlCol="0" anchor="ctr"/>
+          <a:lstStyle/>
+          <a:p>
+            <a:pPr algn="ctr"/>
+            <a:endParaRPr lang="en-US"/>
+          </a:p>
+        </p:txBody>
+      </p:sp>
+      <p:sp>
+        <p:nvSpPr>
+          <p:cNvPr id="39" name="矢印: 右 38">
+            <a:extLst>
+              <a:ext uri="{FF2B5EF4-FFF2-40B4-BE49-F238E27FC236}">
+                <a16:creationId xmlns:a16="http://schemas.microsoft.com/office/drawing/2014/main" id="{B2C1686C-695C-F70C-BAD6-9341B75390C3}"/>
+              </a:ext>
+            </a:extLst>
+          </p:cNvPr>
+          <p:cNvSpPr/>
+          <p:nvPr/>
+        </p:nvSpPr>
+        <p:spPr>
+          <a:xfrm rot="10800000">
+            <a:off x="4616183" y="2701473"/>
+            <a:ext cx="679244" cy="150871"/>
+          </a:xfrm>
+          <a:prstGeom prst="rightArrow">
+            <a:avLst/>
+          </a:prstGeom>
+          <a:solidFill>
+            <a:srgbClr val="FF0000">
+              <a:alpha val="40000"/>
+            </a:srgbClr>
+          </a:solidFill>
+          <a:ln>
+            <a:noFill/>
+          </a:ln>
+        </p:spPr>
+        <p:style>
+          <a:lnRef idx="2">
+            <a:schemeClr val="accent1">
+              <a:shade val="15000"/>
+            </a:schemeClr>
+          </a:lnRef>
+          <a:fillRef idx="1">
+            <a:schemeClr val="accent1"/>
+          </a:fillRef>
+          <a:effectRef idx="0">
+            <a:schemeClr val="accent1"/>
+          </a:effectRef>
+          <a:fontRef idx="minor">
+            <a:schemeClr val="lt1"/>
+          </a:fontRef>
+        </p:style>
+        <p:txBody>
+          <a:bodyPr rtlCol="0" anchor="ctr"/>
+          <a:lstStyle/>
+          <a:p>
+            <a:pPr algn="ctr"/>
+            <a:endParaRPr lang="en-US"/>
+          </a:p>
+        </p:txBody>
+      </p:sp>
+      <p:sp>
+        <p:nvSpPr>
+          <p:cNvPr id="41" name="矢印: 右 40">
+            <a:extLst>
+              <a:ext uri="{FF2B5EF4-FFF2-40B4-BE49-F238E27FC236}">
+                <a16:creationId xmlns:a16="http://schemas.microsoft.com/office/drawing/2014/main" id="{566FF6FB-E984-DC3B-B409-0BA5913CC6E7}"/>
+              </a:ext>
+            </a:extLst>
+          </p:cNvPr>
+          <p:cNvSpPr/>
+          <p:nvPr/>
+        </p:nvSpPr>
+        <p:spPr>
+          <a:xfrm rot="9551747">
+            <a:off x="5981994" y="2550005"/>
+            <a:ext cx="456783" cy="102185"/>
+          </a:xfrm>
+          <a:prstGeom prst="rightArrow">
+            <a:avLst/>
+          </a:prstGeom>
+          <a:solidFill>
+            <a:srgbClr val="FF0000">
+              <a:alpha val="40000"/>
+            </a:srgbClr>
+          </a:solidFill>
+          <a:ln>
+            <a:noFill/>
+          </a:ln>
+        </p:spPr>
+        <p:style>
+          <a:lnRef idx="2">
+            <a:schemeClr val="accent1">
+              <a:shade val="15000"/>
+            </a:schemeClr>
+          </a:lnRef>
+          <a:fillRef idx="1">
+            <a:schemeClr val="accent1"/>
+          </a:fillRef>
+          <a:effectRef idx="0">
+            <a:schemeClr val="accent1"/>
+          </a:effectRef>
+          <a:fontRef idx="minor">
+            <a:schemeClr val="lt1"/>
+          </a:fontRef>
+        </p:style>
+        <p:txBody>
+          <a:bodyPr rtlCol="0" anchor="ctr"/>
+          <a:lstStyle/>
+          <a:p>
+            <a:pPr algn="ctr"/>
+            <a:endParaRPr lang="en-US"/>
+          </a:p>
+        </p:txBody>
+      </p:sp>
+      <p:sp>
+        <p:nvSpPr>
+          <p:cNvPr id="42" name="矢印: 右 41">
+            <a:extLst>
+              <a:ext uri="{FF2B5EF4-FFF2-40B4-BE49-F238E27FC236}">
+                <a16:creationId xmlns:a16="http://schemas.microsoft.com/office/drawing/2014/main" id="{E142564C-0FCF-0D7A-D946-221C2AD988A1}"/>
+              </a:ext>
+            </a:extLst>
+          </p:cNvPr>
+          <p:cNvSpPr/>
+          <p:nvPr/>
+        </p:nvSpPr>
+        <p:spPr>
+          <a:xfrm rot="9551747">
+            <a:off x="6777175" y="2550004"/>
+            <a:ext cx="456783" cy="102185"/>
+          </a:xfrm>
+          <a:prstGeom prst="rightArrow">
+            <a:avLst/>
+          </a:prstGeom>
+          <a:solidFill>
+            <a:srgbClr val="FF0000">
+              <a:alpha val="40000"/>
+            </a:srgbClr>
+          </a:solidFill>
+          <a:ln>
+            <a:noFill/>
+          </a:ln>
+        </p:spPr>
+        <p:style>
+          <a:lnRef idx="2">
+            <a:schemeClr val="accent1">
+              <a:shade val="15000"/>
+            </a:schemeClr>
+          </a:lnRef>
+          <a:fillRef idx="1">
+            <a:schemeClr val="accent1"/>
+          </a:fillRef>
+          <a:effectRef idx="0">
+            <a:schemeClr val="accent1"/>
+          </a:effectRef>
+          <a:fontRef idx="minor">
+            <a:schemeClr val="lt1"/>
+          </a:fontRef>
+        </p:style>
+        <p:txBody>
+          <a:bodyPr rtlCol="0" anchor="ctr"/>
+          <a:lstStyle/>
+          <a:p>
+            <a:pPr algn="ctr"/>
+            <a:endParaRPr lang="en-US"/>
+          </a:p>
+        </p:txBody>
+      </p:sp>
+      <p:sp>
+        <p:nvSpPr>
+          <p:cNvPr id="43" name="矢印: 右 42">
+            <a:extLst>
+              <a:ext uri="{FF2B5EF4-FFF2-40B4-BE49-F238E27FC236}">
+                <a16:creationId xmlns:a16="http://schemas.microsoft.com/office/drawing/2014/main" id="{5464174D-F154-823A-BAC4-982B62E22CF0}"/>
+              </a:ext>
+            </a:extLst>
+          </p:cNvPr>
+          <p:cNvSpPr/>
+          <p:nvPr/>
+        </p:nvSpPr>
+        <p:spPr>
+          <a:xfrm rot="9551747">
+            <a:off x="7514837" y="2550003"/>
+            <a:ext cx="456783" cy="102185"/>
+          </a:xfrm>
+          <a:prstGeom prst="rightArrow">
+            <a:avLst/>
+          </a:prstGeom>
+          <a:solidFill>
+            <a:srgbClr val="FF0000">
+              <a:alpha val="40000"/>
+            </a:srgbClr>
+          </a:solidFill>
+          <a:ln>
+            <a:noFill/>
+          </a:ln>
+        </p:spPr>
+        <p:style>
+          <a:lnRef idx="2">
+            <a:schemeClr val="accent1">
+              <a:shade val="15000"/>
+            </a:schemeClr>
+          </a:lnRef>
+          <a:fillRef idx="1">
+            <a:schemeClr val="accent1"/>
+          </a:fillRef>
+          <a:effectRef idx="0">
+            <a:schemeClr val="accent1"/>
+          </a:effectRef>
+          <a:fontRef idx="minor">
+            <a:schemeClr val="lt1"/>
+          </a:fontRef>
+        </p:style>
+        <p:txBody>
+          <a:bodyPr rtlCol="0" anchor="ctr"/>
+          <a:lstStyle/>
+          <a:p>
+            <a:pPr algn="ctr"/>
+            <a:endParaRPr lang="en-US"/>
+          </a:p>
+        </p:txBody>
+      </p:sp>
+      <p:sp>
+        <p:nvSpPr>
+          <p:cNvPr id="44" name="矢印: 右 43">
+            <a:extLst>
+              <a:ext uri="{FF2B5EF4-FFF2-40B4-BE49-F238E27FC236}">
+                <a16:creationId xmlns:a16="http://schemas.microsoft.com/office/drawing/2014/main" id="{2893BB8A-D5AA-CBBB-7565-CAD84FAD3F87}"/>
+              </a:ext>
+            </a:extLst>
+          </p:cNvPr>
+          <p:cNvSpPr/>
+          <p:nvPr/>
+        </p:nvSpPr>
+        <p:spPr>
+          <a:xfrm rot="9551747">
+            <a:off x="8194341" y="2555675"/>
+            <a:ext cx="456783" cy="102185"/>
+          </a:xfrm>
+          <a:prstGeom prst="rightArrow">
+            <a:avLst/>
+          </a:prstGeom>
+          <a:solidFill>
+            <a:srgbClr val="FF0000">
+              <a:alpha val="40000"/>
+            </a:srgbClr>
+          </a:solidFill>
+          <a:ln>
+            <a:noFill/>
+          </a:ln>
+        </p:spPr>
+        <p:style>
+          <a:lnRef idx="2">
+            <a:schemeClr val="accent1">
+              <a:shade val="15000"/>
+            </a:schemeClr>
+          </a:lnRef>
+          <a:fillRef idx="1">
+            <a:schemeClr val="accent1"/>
+          </a:fillRef>
+          <a:effectRef idx="0">
+            <a:schemeClr val="accent1"/>
+          </a:effectRef>
+          <a:fontRef idx="minor">
+            <a:schemeClr val="lt1"/>
+          </a:fontRef>
+        </p:style>
+        <p:txBody>
+          <a:bodyPr rtlCol="0" anchor="ctr"/>
+          <a:lstStyle/>
+          <a:p>
+            <a:pPr algn="ctr"/>
+            <a:endParaRPr lang="en-US"/>
+          </a:p>
+        </p:txBody>
+      </p:sp>
+      <p:sp>
+        <p:nvSpPr>
+          <p:cNvPr id="45" name="矢印: 右 44">
+            <a:extLst>
+              <a:ext uri="{FF2B5EF4-FFF2-40B4-BE49-F238E27FC236}">
+                <a16:creationId xmlns:a16="http://schemas.microsoft.com/office/drawing/2014/main" id="{4A61DF6C-59C8-6394-3BA1-940CCE4B8314}"/>
+              </a:ext>
+            </a:extLst>
+          </p:cNvPr>
+          <p:cNvSpPr/>
+          <p:nvPr/>
+        </p:nvSpPr>
+        <p:spPr>
+          <a:xfrm rot="9551747">
+            <a:off x="5258766" y="2543088"/>
+            <a:ext cx="456783" cy="102185"/>
+          </a:xfrm>
+          <a:prstGeom prst="rightArrow">
+            <a:avLst/>
+          </a:prstGeom>
+          <a:solidFill>
+            <a:srgbClr val="FF0000">
+              <a:alpha val="40000"/>
+            </a:srgbClr>
+          </a:solidFill>
+          <a:ln>
+            <a:noFill/>
+          </a:ln>
+        </p:spPr>
+        <p:style>
+          <a:lnRef idx="2">
+            <a:schemeClr val="accent1">
+              <a:shade val="15000"/>
+            </a:schemeClr>
+          </a:lnRef>
+          <a:fillRef idx="1">
+            <a:schemeClr val="accent1"/>
+          </a:fillRef>
+          <a:effectRef idx="0">
+            <a:schemeClr val="accent1"/>
+          </a:effectRef>
+          <a:fontRef idx="minor">
+            <a:schemeClr val="lt1"/>
+          </a:fontRef>
+        </p:style>
+        <p:txBody>
+          <a:bodyPr rtlCol="0" anchor="ctr"/>
+          <a:lstStyle/>
+          <a:p>
+            <a:pPr algn="ctr"/>
+            <a:endParaRPr lang="en-US"/>
+          </a:p>
+        </p:txBody>
+      </p:sp>
+      <p:sp>
+        <p:nvSpPr>
+          <p:cNvPr id="46" name="矢印: 右 45">
+            <a:extLst>
+              <a:ext uri="{FF2B5EF4-FFF2-40B4-BE49-F238E27FC236}">
+                <a16:creationId xmlns:a16="http://schemas.microsoft.com/office/drawing/2014/main" id="{29DB7FD7-AD53-9045-387F-947A1994C533}"/>
+              </a:ext>
+            </a:extLst>
+          </p:cNvPr>
+          <p:cNvSpPr/>
+          <p:nvPr/>
+        </p:nvSpPr>
+        <p:spPr>
+          <a:xfrm rot="10800000">
+            <a:off x="4629182" y="3177889"/>
+            <a:ext cx="679244" cy="150871"/>
+          </a:xfrm>
+          <a:prstGeom prst="rightArrow">
+            <a:avLst/>
+          </a:prstGeom>
+          <a:solidFill>
+            <a:srgbClr val="FF0000">
+              <a:alpha val="40000"/>
+            </a:srgbClr>
+          </a:solidFill>
+          <a:ln>
+            <a:noFill/>
+          </a:ln>
+        </p:spPr>
+        <p:style>
+          <a:lnRef idx="2">
+            <a:schemeClr val="accent1">
+              <a:shade val="15000"/>
+            </a:schemeClr>
+          </a:lnRef>
+          <a:fillRef idx="1">
+            <a:schemeClr val="accent1"/>
+          </a:fillRef>
+          <a:effectRef idx="0">
+            <a:schemeClr val="accent1"/>
+          </a:effectRef>
+          <a:fontRef idx="minor">
+            <a:schemeClr val="lt1"/>
+          </a:fontRef>
+        </p:style>
+        <p:txBody>
+          <a:bodyPr rtlCol="0" anchor="ctr"/>
+          <a:lstStyle/>
+          <a:p>
+            <a:pPr algn="ctr"/>
+            <a:endParaRPr lang="en-US"/>
+          </a:p>
+        </p:txBody>
+      </p:sp>
+    </p:spTree>
+    <p:extLst>
+      <p:ext uri="{BB962C8B-B14F-4D97-AF65-F5344CB8AC3E}">
+        <p14:creationId xmlns:p14="http://schemas.microsoft.com/office/powerpoint/2010/main" val="3363106213"/>
+      </p:ext>
+    </p:extLst>
+  </p:cSld>
+  <p:clrMapOvr>
+    <a:masterClrMapping/>
+  </p:clrMapOvr>
+</p:sld>
+</file>
+
 <file path=ppt/theme/theme1.xml><?xml version="1.0" encoding="utf-8"?>
 <a:theme xmlns:a="http://schemas.openxmlformats.org/drawingml/2006/main" name="Office Theme">
   <a:themeElements>
@@ -8128,23 +9858,6 @@
 </file>
 
 <file path=customXml/item1.xml><?xml version="1.0" encoding="utf-8"?>
-<p:properties xmlns:p="http://schemas.microsoft.com/office/2006/metadata/properties" xmlns:xsi="http://www.w3.org/2001/XMLSchema-instance" xmlns:pc="http://schemas.microsoft.com/office/infopath/2007/PartnerControls">
-  <documentManagement>
-    <_activity xmlns="e5fea337-426f-4878-aaa1-6cc4dbed00d3" xsi:nil="true"/>
-  </documentManagement>
-</p:properties>
-</file>
-
-<file path=customXml/item2.xml><?xml version="1.0" encoding="utf-8"?>
-<?mso-contentType ?>
-<FormTemplates xmlns="http://schemas.microsoft.com/sharepoint/v3/contenttype/forms">
-  <Display>DocumentLibraryForm</Display>
-  <Edit>DocumentLibraryForm</Edit>
-  <New>DocumentLibraryForm</New>
-</FormTemplates>
-</file>
-
-<file path=customXml/item3.xml><?xml version="1.0" encoding="utf-8"?>
 <ct:contentTypeSchema xmlns:ct="http://schemas.microsoft.com/office/2006/metadata/contentType" xmlns:ma="http://schemas.microsoft.com/office/2006/metadata/properties/metaAttributes" ct:_="" ma:_="" ma:contentTypeName="ドキュメント" ma:contentTypeID="0x010100D291828BE931164DA279E7DB37510E8B" ma:contentTypeVersion="12" ma:contentTypeDescription="新しいドキュメントを作成します。" ma:contentTypeScope="" ma:versionID="d40e79753e265535ebdef0a9a1630dbe">
   <xsd:schema xmlns:xsd="http://www.w3.org/2001/XMLSchema" xmlns:xs="http://www.w3.org/2001/XMLSchema" xmlns:p="http://schemas.microsoft.com/office/2006/metadata/properties" xmlns:ns3="e5fea337-426f-4878-aaa1-6cc4dbed00d3" targetNamespace="http://schemas.microsoft.com/office/2006/metadata/properties" ma:root="true" ma:fieldsID="909ec013045a4ae227a46cef79b1603d" ns3:_="">
     <xsd:import namespace="e5fea337-426f-4878-aaa1-6cc4dbed00d3"/>
@@ -8338,31 +10051,24 @@
 </ct:contentTypeSchema>
 </file>
 
-<file path=customXml/itemProps1.xml><?xml version="1.0" encoding="utf-8"?>
-<ds:datastoreItem xmlns:ds="http://schemas.openxmlformats.org/officeDocument/2006/customXml" ds:itemID="{E690C700-0B54-4769-9477-9FE646BEDBDF}">
-  <ds:schemaRefs>
-    <ds:schemaRef ds:uri="e5fea337-426f-4878-aaa1-6cc4dbed00d3"/>
-    <ds:schemaRef ds:uri="http://schemas.microsoft.com/office/infopath/2007/PartnerControls"/>
-    <ds:schemaRef ds:uri="http://www.w3.org/XML/1998/namespace"/>
-    <ds:schemaRef ds:uri="http://schemas.microsoft.com/office/2006/documentManagement/types"/>
-    <ds:schemaRef ds:uri="http://purl.org/dc/dcmitype/"/>
-    <ds:schemaRef ds:uri="http://purl.org/dc/terms/"/>
-    <ds:schemaRef ds:uri="http://purl.org/dc/elements/1.1/"/>
-    <ds:schemaRef ds:uri="http://schemas.openxmlformats.org/package/2006/metadata/core-properties"/>
-    <ds:schemaRef ds:uri="http://schemas.microsoft.com/office/2006/metadata/properties"/>
-  </ds:schemaRefs>
-</ds:datastoreItem>
+<file path=customXml/item2.xml><?xml version="1.0" encoding="utf-8"?>
+<?mso-contentType ?>
+<FormTemplates xmlns="http://schemas.microsoft.com/sharepoint/v3/contenttype/forms">
+  <Display>DocumentLibraryForm</Display>
+  <Edit>DocumentLibraryForm</Edit>
+  <New>DocumentLibraryForm</New>
+</FormTemplates>
 </file>
 
-<file path=customXml/itemProps2.xml><?xml version="1.0" encoding="utf-8"?>
-<ds:datastoreItem xmlns:ds="http://schemas.openxmlformats.org/officeDocument/2006/customXml" ds:itemID="{EBB85C3E-FFAD-4A75-A769-4B97E54A903C}">
-  <ds:schemaRefs>
-    <ds:schemaRef ds:uri="http://schemas.microsoft.com/sharepoint/v3/contenttype/forms"/>
-  </ds:schemaRefs>
-</ds:datastoreItem>
+<file path=customXml/item3.xml><?xml version="1.0" encoding="utf-8"?>
+<p:properties xmlns:p="http://schemas.microsoft.com/office/2006/metadata/properties" xmlns:xsi="http://www.w3.org/2001/XMLSchema-instance" xmlns:pc="http://schemas.microsoft.com/office/infopath/2007/PartnerControls">
+  <documentManagement>
+    <_activity xmlns="e5fea337-426f-4878-aaa1-6cc4dbed00d3" xsi:nil="true"/>
+  </documentManagement>
+</p:properties>
 </file>
 
-<file path=customXml/itemProps3.xml><?xml version="1.0" encoding="utf-8"?>
+<file path=customXml/itemProps1.xml><?xml version="1.0" encoding="utf-8"?>
 <ds:datastoreItem xmlns:ds="http://schemas.openxmlformats.org/officeDocument/2006/customXml" ds:itemID="{6231A16C-3E0A-4893-9CB3-DA6770BA5700}">
   <ds:schemaRefs>
     <ds:schemaRef ds:uri="http://schemas.microsoft.com/office/2006/metadata/contentType"/>
@@ -8378,4 +10084,28 @@
     <ds:schemaRef ds:uri="http://schemas.microsoft.com/internal/obd"/>
   </ds:schemaRefs>
 </ds:datastoreItem>
+</file>
+
+<file path=customXml/itemProps2.xml><?xml version="1.0" encoding="utf-8"?>
+<ds:datastoreItem xmlns:ds="http://schemas.openxmlformats.org/officeDocument/2006/customXml" ds:itemID="{EBB85C3E-FFAD-4A75-A769-4B97E54A903C}">
+  <ds:schemaRefs>
+    <ds:schemaRef ds:uri="http://schemas.microsoft.com/sharepoint/v3/contenttype/forms"/>
+  </ds:schemaRefs>
+</ds:datastoreItem>
+</file>
+
+<file path=customXml/itemProps3.xml><?xml version="1.0" encoding="utf-8"?>
+<ds:datastoreItem xmlns:ds="http://schemas.openxmlformats.org/officeDocument/2006/customXml" ds:itemID="{E690C700-0B54-4769-9477-9FE646BEDBDF}">
+  <ds:schemaRefs>
+    <ds:schemaRef ds:uri="e5fea337-426f-4878-aaa1-6cc4dbed00d3"/>
+    <ds:schemaRef ds:uri="http://schemas.microsoft.com/office/infopath/2007/PartnerControls"/>
+    <ds:schemaRef ds:uri="http://www.w3.org/XML/1998/namespace"/>
+    <ds:schemaRef ds:uri="http://schemas.microsoft.com/office/2006/documentManagement/types"/>
+    <ds:schemaRef ds:uri="http://purl.org/dc/dcmitype/"/>
+    <ds:schemaRef ds:uri="http://purl.org/dc/terms/"/>
+    <ds:schemaRef ds:uri="http://purl.org/dc/elements/1.1/"/>
+    <ds:schemaRef ds:uri="http://schemas.openxmlformats.org/package/2006/metadata/core-properties"/>
+    <ds:schemaRef ds:uri="http://schemas.microsoft.com/office/2006/metadata/properties"/>
+  </ds:schemaRefs>
+</ds:datastoreItem>
 </file>
--- a/Materials.pptx
+++ b/Materials.pptx
@@ -14,6 +14,8 @@
     <p:sldId id="262" r:id="rId11"/>
     <p:sldId id="263" r:id="rId12"/>
     <p:sldId id="264" r:id="rId13"/>
+    <p:sldId id="266" r:id="rId14"/>
+    <p:sldId id="267" r:id="rId15"/>
   </p:sldIdLst>
   <p:sldSz cx="12192000" cy="6858000"/>
   <p:notesSz cx="6858000" cy="9144000"/>
@@ -514,7 +516,7 @@
           <a:p>
             <a:fld id="{9236E18D-A30F-4D3C-BC15-86FA9E93A319}" type="datetimeFigureOut">
               <a:rPr kumimoji="1" lang="ja-JP" altLang="en-US" smtClean="0"/>
-              <a:t>2026/6/12</a:t>
+              <a:t>2026/6/29</a:t>
             </a:fld>
             <a:endParaRPr kumimoji="1" lang="ja-JP" altLang="en-US"/>
           </a:p>
@@ -714,7 +716,7 @@
           <a:p>
             <a:fld id="{9236E18D-A30F-4D3C-BC15-86FA9E93A319}" type="datetimeFigureOut">
               <a:rPr kumimoji="1" lang="ja-JP" altLang="en-US" smtClean="0"/>
-              <a:t>2026/6/12</a:t>
+              <a:t>2026/6/29</a:t>
             </a:fld>
             <a:endParaRPr kumimoji="1" lang="ja-JP" altLang="en-US"/>
           </a:p>
@@ -924,7 +926,7 @@
           <a:p>
             <a:fld id="{9236E18D-A30F-4D3C-BC15-86FA9E93A319}" type="datetimeFigureOut">
               <a:rPr kumimoji="1" lang="ja-JP" altLang="en-US" smtClean="0"/>
-              <a:t>2026/6/12</a:t>
+              <a:t>2026/6/29</a:t>
             </a:fld>
             <a:endParaRPr kumimoji="1" lang="ja-JP" altLang="en-US"/>
           </a:p>
@@ -1124,7 +1126,7 @@
           <a:p>
             <a:fld id="{9236E18D-A30F-4D3C-BC15-86FA9E93A319}" type="datetimeFigureOut">
               <a:rPr kumimoji="1" lang="ja-JP" altLang="en-US" smtClean="0"/>
-              <a:t>2026/6/12</a:t>
+              <a:t>2026/6/29</a:t>
             </a:fld>
             <a:endParaRPr kumimoji="1" lang="ja-JP" altLang="en-US"/>
           </a:p>
@@ -1400,7 +1402,7 @@
           <a:p>
             <a:fld id="{9236E18D-A30F-4D3C-BC15-86FA9E93A319}" type="datetimeFigureOut">
               <a:rPr kumimoji="1" lang="ja-JP" altLang="en-US" smtClean="0"/>
-              <a:t>2026/6/12</a:t>
+              <a:t>2026/6/29</a:t>
             </a:fld>
             <a:endParaRPr kumimoji="1" lang="ja-JP" altLang="en-US"/>
           </a:p>
@@ -1668,7 +1670,7 @@
           <a:p>
             <a:fld id="{9236E18D-A30F-4D3C-BC15-86FA9E93A319}" type="datetimeFigureOut">
               <a:rPr kumimoji="1" lang="ja-JP" altLang="en-US" smtClean="0"/>
-              <a:t>2026/6/12</a:t>
+              <a:t>2026/6/29</a:t>
             </a:fld>
             <a:endParaRPr kumimoji="1" lang="ja-JP" altLang="en-US"/>
           </a:p>
@@ -2083,7 +2085,7 @@
           <a:p>
             <a:fld id="{9236E18D-A30F-4D3C-BC15-86FA9E93A319}" type="datetimeFigureOut">
               <a:rPr kumimoji="1" lang="ja-JP" altLang="en-US" smtClean="0"/>
-              <a:t>2026/6/12</a:t>
+              <a:t>2026/6/29</a:t>
             </a:fld>
             <a:endParaRPr kumimoji="1" lang="ja-JP" altLang="en-US"/>
           </a:p>
@@ -2225,7 +2227,7 @@
           <a:p>
             <a:fld id="{9236E18D-A30F-4D3C-BC15-86FA9E93A319}" type="datetimeFigureOut">
               <a:rPr kumimoji="1" lang="ja-JP" altLang="en-US" smtClean="0"/>
-              <a:t>2026/6/12</a:t>
+              <a:t>2026/6/29</a:t>
             </a:fld>
             <a:endParaRPr kumimoji="1" lang="ja-JP" altLang="en-US"/>
           </a:p>
@@ -2338,7 +2340,7 @@
           <a:p>
             <a:fld id="{9236E18D-A30F-4D3C-BC15-86FA9E93A319}" type="datetimeFigureOut">
               <a:rPr kumimoji="1" lang="ja-JP" altLang="en-US" smtClean="0"/>
-              <a:t>2026/6/12</a:t>
+              <a:t>2026/6/29</a:t>
             </a:fld>
             <a:endParaRPr kumimoji="1" lang="ja-JP" altLang="en-US"/>
           </a:p>
@@ -2651,7 +2653,7 @@
           <a:p>
             <a:fld id="{9236E18D-A30F-4D3C-BC15-86FA9E93A319}" type="datetimeFigureOut">
               <a:rPr kumimoji="1" lang="ja-JP" altLang="en-US" smtClean="0"/>
-              <a:t>2026/6/12</a:t>
+              <a:t>2026/6/29</a:t>
             </a:fld>
             <a:endParaRPr kumimoji="1" lang="ja-JP" altLang="en-US"/>
           </a:p>
@@ -2940,7 +2942,7 @@
           <a:p>
             <a:fld id="{9236E18D-A30F-4D3C-BC15-86FA9E93A319}" type="datetimeFigureOut">
               <a:rPr kumimoji="1" lang="ja-JP" altLang="en-US" smtClean="0"/>
-              <a:t>2026/6/12</a:t>
+              <a:t>2026/6/29</a:t>
             </a:fld>
             <a:endParaRPr kumimoji="1" lang="ja-JP" altLang="en-US"/>
           </a:p>
@@ -3183,7 +3185,7 @@
           <a:p>
             <a:fld id="{9236E18D-A30F-4D3C-BC15-86FA9E93A319}" type="datetimeFigureOut">
               <a:rPr kumimoji="1" lang="ja-JP" altLang="en-US" smtClean="0"/>
-              <a:t>2026/6/12</a:t>
+              <a:t>2026/6/29</a:t>
             </a:fld>
             <a:endParaRPr kumimoji="1" lang="ja-JP" altLang="en-US"/>
           </a:p>
@@ -4435,6 +4437,2531 @@
     <p:extLst>
       <p:ext uri="{BB962C8B-B14F-4D97-AF65-F5344CB8AC3E}">
         <p14:creationId xmlns:p14="http://schemas.microsoft.com/office/powerpoint/2010/main" val="1217858464"/>
+      </p:ext>
+    </p:extLst>
+  </p:cSld>
+  <p:clrMapOvr>
+    <a:masterClrMapping/>
+  </p:clrMapOvr>
+</p:sld>
+</file>
+
+<file path=ppt/slides/slide10.xml><?xml version="1.0" encoding="utf-8"?>
+<p:sld xmlns:a="http://schemas.openxmlformats.org/drawingml/2006/main" xmlns:r="http://schemas.openxmlformats.org/officeDocument/2006/relationships" xmlns:p="http://schemas.openxmlformats.org/presentationml/2006/main">
+  <p:cSld>
+    <p:spTree>
+      <p:nvGrpSpPr>
+        <p:cNvPr id="1" name="">
+          <a:extLst>
+            <a:ext uri="{FF2B5EF4-FFF2-40B4-BE49-F238E27FC236}">
+              <a16:creationId xmlns:a16="http://schemas.microsoft.com/office/drawing/2014/main" id="{94174775-85D3-DEC7-80CF-A1A46A678091}"/>
+            </a:ext>
+          </a:extLst>
+        </p:cNvPr>
+        <p:cNvGrpSpPr/>
+        <p:nvPr/>
+      </p:nvGrpSpPr>
+      <p:grpSpPr>
+        <a:xfrm>
+          <a:off x="0" y="0"/>
+          <a:ext cx="0" cy="0"/>
+          <a:chOff x="0" y="0"/>
+          <a:chExt cx="0" cy="0"/>
+        </a:xfrm>
+      </p:grpSpPr>
+      <p:sp>
+        <p:nvSpPr>
+          <p:cNvPr id="4" name="Oval 3">
+            <a:extLst>
+              <a:ext uri="{FF2B5EF4-FFF2-40B4-BE49-F238E27FC236}">
+                <a16:creationId xmlns:a16="http://schemas.microsoft.com/office/drawing/2014/main" id="{65691FE4-DF2D-5559-87D6-1433A363A2B8}"/>
+              </a:ext>
+            </a:extLst>
+          </p:cNvPr>
+          <p:cNvSpPr/>
+          <p:nvPr/>
+        </p:nvSpPr>
+        <p:spPr>
+          <a:xfrm>
+            <a:off x="2946400" y="1981200"/>
+            <a:ext cx="1479550" cy="2120900"/>
+          </a:xfrm>
+          <a:prstGeom prst="ellipse">
+            <a:avLst/>
+          </a:prstGeom>
+          <a:solidFill>
+            <a:schemeClr val="bg2">
+              <a:lumMod val="90000"/>
+            </a:schemeClr>
+          </a:solidFill>
+        </p:spPr>
+        <p:style>
+          <a:lnRef idx="2">
+            <a:schemeClr val="dk1">
+              <a:shade val="15000"/>
+            </a:schemeClr>
+          </a:lnRef>
+          <a:fillRef idx="1">
+            <a:schemeClr val="dk1"/>
+          </a:fillRef>
+          <a:effectRef idx="0">
+            <a:schemeClr val="dk1"/>
+          </a:effectRef>
+          <a:fontRef idx="minor">
+            <a:schemeClr val="lt1"/>
+          </a:fontRef>
+        </p:style>
+        <p:txBody>
+          <a:bodyPr rtlCol="0" anchor="ctr"/>
+          <a:lstStyle/>
+          <a:p>
+            <a:pPr algn="ctr"/>
+            <a:endParaRPr kumimoji="1" lang="ja-JP" altLang="en-US" dirty="0"/>
+          </a:p>
+        </p:txBody>
+      </p:sp>
+      <p:sp>
+        <p:nvSpPr>
+          <p:cNvPr id="5" name="Oval 4">
+            <a:extLst>
+              <a:ext uri="{FF2B5EF4-FFF2-40B4-BE49-F238E27FC236}">
+                <a16:creationId xmlns:a16="http://schemas.microsoft.com/office/drawing/2014/main" id="{640206C6-DB7F-5EDE-1119-40A0C8D0047C}"/>
+              </a:ext>
+            </a:extLst>
+          </p:cNvPr>
+          <p:cNvSpPr/>
+          <p:nvPr/>
+        </p:nvSpPr>
+        <p:spPr>
+          <a:xfrm>
+            <a:off x="3282950" y="2495550"/>
+            <a:ext cx="737532" cy="1057234"/>
+          </a:xfrm>
+          <a:prstGeom prst="ellipse">
+            <a:avLst/>
+          </a:prstGeom>
+          <a:solidFill>
+            <a:schemeClr val="bg1"/>
+          </a:solidFill>
+        </p:spPr>
+        <p:style>
+          <a:lnRef idx="2">
+            <a:schemeClr val="dk1">
+              <a:shade val="15000"/>
+            </a:schemeClr>
+          </a:lnRef>
+          <a:fillRef idx="1">
+            <a:schemeClr val="dk1"/>
+          </a:fillRef>
+          <a:effectRef idx="0">
+            <a:schemeClr val="dk1"/>
+          </a:effectRef>
+          <a:fontRef idx="minor">
+            <a:schemeClr val="lt1"/>
+          </a:fontRef>
+        </p:style>
+        <p:txBody>
+          <a:bodyPr rtlCol="0" anchor="ctr"/>
+          <a:lstStyle/>
+          <a:p>
+            <a:pPr algn="ctr"/>
+            <a:endParaRPr kumimoji="1" lang="ja-JP" altLang="en-US"/>
+          </a:p>
+        </p:txBody>
+      </p:sp>
+      <p:cxnSp>
+        <p:nvCxnSpPr>
+          <p:cNvPr id="7" name="Straight Connector 6">
+            <a:extLst>
+              <a:ext uri="{FF2B5EF4-FFF2-40B4-BE49-F238E27FC236}">
+                <a16:creationId xmlns:a16="http://schemas.microsoft.com/office/drawing/2014/main" id="{B589C756-FD0C-FBD6-D7E6-896F1E5E52C4}"/>
+              </a:ext>
+            </a:extLst>
+          </p:cNvPr>
+          <p:cNvCxnSpPr>
+            <a:stCxn id="4" idx="0"/>
+          </p:cNvCxnSpPr>
+          <p:nvPr/>
+        </p:nvCxnSpPr>
+        <p:spPr>
+          <a:xfrm>
+            <a:off x="3686175" y="1981200"/>
+            <a:ext cx="3971925" cy="0"/>
+          </a:xfrm>
+          <a:prstGeom prst="line">
+            <a:avLst/>
+          </a:prstGeom>
+        </p:spPr>
+        <p:style>
+          <a:lnRef idx="2">
+            <a:schemeClr val="dk1"/>
+          </a:lnRef>
+          <a:fillRef idx="0">
+            <a:schemeClr val="dk1"/>
+          </a:fillRef>
+          <a:effectRef idx="1">
+            <a:schemeClr val="dk1"/>
+          </a:effectRef>
+          <a:fontRef idx="minor">
+            <a:schemeClr val="tx1"/>
+          </a:fontRef>
+        </p:style>
+      </p:cxnSp>
+      <p:cxnSp>
+        <p:nvCxnSpPr>
+          <p:cNvPr id="8" name="Straight Connector 7">
+            <a:extLst>
+              <a:ext uri="{FF2B5EF4-FFF2-40B4-BE49-F238E27FC236}">
+                <a16:creationId xmlns:a16="http://schemas.microsoft.com/office/drawing/2014/main" id="{94748463-83A2-0A85-13A5-BF2BFC6D271F}"/>
+              </a:ext>
+            </a:extLst>
+          </p:cNvPr>
+          <p:cNvCxnSpPr>
+            <a:cxnSpLocks/>
+            <a:stCxn id="4" idx="4"/>
+          </p:cNvCxnSpPr>
+          <p:nvPr/>
+        </p:nvCxnSpPr>
+        <p:spPr>
+          <a:xfrm>
+            <a:off x="3686175" y="4102100"/>
+            <a:ext cx="4079877" cy="0"/>
+          </a:xfrm>
+          <a:prstGeom prst="line">
+            <a:avLst/>
+          </a:prstGeom>
+        </p:spPr>
+        <p:style>
+          <a:lnRef idx="2">
+            <a:schemeClr val="dk1"/>
+          </a:lnRef>
+          <a:fillRef idx="0">
+            <a:schemeClr val="dk1"/>
+          </a:fillRef>
+          <a:effectRef idx="1">
+            <a:schemeClr val="dk1"/>
+          </a:effectRef>
+          <a:fontRef idx="minor">
+            <a:schemeClr val="tx1"/>
+          </a:fontRef>
+        </p:style>
+      </p:cxnSp>
+      <p:cxnSp>
+        <p:nvCxnSpPr>
+          <p:cNvPr id="20" name="Straight Arrow Connector 19">
+            <a:extLst>
+              <a:ext uri="{FF2B5EF4-FFF2-40B4-BE49-F238E27FC236}">
+                <a16:creationId xmlns:a16="http://schemas.microsoft.com/office/drawing/2014/main" id="{0F3E2025-3C17-B7C3-E36B-E13135599FF8}"/>
+              </a:ext>
+            </a:extLst>
+          </p:cNvPr>
+          <p:cNvCxnSpPr>
+            <a:cxnSpLocks/>
+          </p:cNvCxnSpPr>
+          <p:nvPr/>
+        </p:nvCxnSpPr>
+        <p:spPr>
+          <a:xfrm>
+            <a:off x="4425950" y="3088685"/>
+            <a:ext cx="3536950" cy="0"/>
+          </a:xfrm>
+          <a:prstGeom prst="straightConnector1">
+            <a:avLst/>
+          </a:prstGeom>
+          <a:ln>
+            <a:prstDash val="sysDot"/>
+            <a:tailEnd type="triangle"/>
+          </a:ln>
+        </p:spPr>
+        <p:style>
+          <a:lnRef idx="2">
+            <a:schemeClr val="dk1"/>
+          </a:lnRef>
+          <a:fillRef idx="0">
+            <a:schemeClr val="dk1"/>
+          </a:fillRef>
+          <a:effectRef idx="1">
+            <a:schemeClr val="dk1"/>
+          </a:effectRef>
+          <a:fontRef idx="minor">
+            <a:schemeClr val="tx1"/>
+          </a:fontRef>
+        </p:style>
+      </p:cxnSp>
+      <p:cxnSp>
+        <p:nvCxnSpPr>
+          <p:cNvPr id="21" name="Straight Arrow Connector 20">
+            <a:extLst>
+              <a:ext uri="{FF2B5EF4-FFF2-40B4-BE49-F238E27FC236}">
+                <a16:creationId xmlns:a16="http://schemas.microsoft.com/office/drawing/2014/main" id="{1E6C44CD-9B71-F884-FF76-12A1D008AF79}"/>
+              </a:ext>
+            </a:extLst>
+          </p:cNvPr>
+          <p:cNvCxnSpPr>
+            <a:cxnSpLocks/>
+          </p:cNvCxnSpPr>
+          <p:nvPr/>
+        </p:nvCxnSpPr>
+        <p:spPr>
+          <a:xfrm flipV="1">
+            <a:off x="3683918" y="1498600"/>
+            <a:ext cx="0" cy="3498850"/>
+          </a:xfrm>
+          <a:prstGeom prst="straightConnector1">
+            <a:avLst/>
+          </a:prstGeom>
+          <a:ln>
+            <a:prstDash val="sysDot"/>
+            <a:tailEnd type="triangle"/>
+          </a:ln>
+        </p:spPr>
+        <p:style>
+          <a:lnRef idx="2">
+            <a:schemeClr val="dk1"/>
+          </a:lnRef>
+          <a:fillRef idx="0">
+            <a:schemeClr val="dk1"/>
+          </a:fillRef>
+          <a:effectRef idx="1">
+            <a:schemeClr val="dk1"/>
+          </a:effectRef>
+          <a:fontRef idx="minor">
+            <a:schemeClr val="tx1"/>
+          </a:fontRef>
+        </p:style>
+      </p:cxnSp>
+      <p:sp>
+        <p:nvSpPr>
+          <p:cNvPr id="26" name="TextBox 25">
+            <a:extLst>
+              <a:ext uri="{FF2B5EF4-FFF2-40B4-BE49-F238E27FC236}">
+                <a16:creationId xmlns:a16="http://schemas.microsoft.com/office/drawing/2014/main" id="{D9FEC1D7-440D-5E2A-7EED-EF419BE69125}"/>
+              </a:ext>
+            </a:extLst>
+          </p:cNvPr>
+          <p:cNvSpPr txBox="1"/>
+          <p:nvPr/>
+        </p:nvSpPr>
+        <p:spPr>
+          <a:xfrm>
+            <a:off x="3533877" y="1084558"/>
+            <a:ext cx="300082" cy="369332"/>
+          </a:xfrm>
+          <a:prstGeom prst="rect">
+            <a:avLst/>
+          </a:prstGeom>
+          <a:noFill/>
+        </p:spPr>
+        <p:txBody>
+          <a:bodyPr wrap="none" rtlCol="0">
+            <a:spAutoFit/>
+          </a:bodyPr>
+          <a:lstStyle/>
+          <a:p>
+            <a:r>
+              <a:rPr kumimoji="1" lang="en-US" altLang="ja-JP" dirty="0">
+                <a:latin typeface="times" panose="02020603050405020304" pitchFamily="18" charset="0"/>
+                <a:cs typeface="times" panose="02020603050405020304" pitchFamily="18" charset="0"/>
+              </a:rPr>
+              <a:t>x</a:t>
+            </a:r>
+            <a:endParaRPr kumimoji="1" lang="ja-JP" altLang="en-US" dirty="0">
+              <a:latin typeface="times" panose="02020603050405020304" pitchFamily="18" charset="0"/>
+              <a:cs typeface="times" panose="02020603050405020304" pitchFamily="18" charset="0"/>
+            </a:endParaRPr>
+          </a:p>
+        </p:txBody>
+      </p:sp>
+      <p:sp>
+        <p:nvSpPr>
+          <p:cNvPr id="27" name="TextBox 26">
+            <a:extLst>
+              <a:ext uri="{FF2B5EF4-FFF2-40B4-BE49-F238E27FC236}">
+                <a16:creationId xmlns:a16="http://schemas.microsoft.com/office/drawing/2014/main" id="{45933B71-7ACB-C1A1-34FF-889442FA1DC5}"/>
+              </a:ext>
+            </a:extLst>
+          </p:cNvPr>
+          <p:cNvSpPr txBox="1"/>
+          <p:nvPr/>
+        </p:nvSpPr>
+        <p:spPr>
+          <a:xfrm>
+            <a:off x="2667607" y="1796446"/>
+            <a:ext cx="300082" cy="369332"/>
+          </a:xfrm>
+          <a:prstGeom prst="rect">
+            <a:avLst/>
+          </a:prstGeom>
+          <a:noFill/>
+        </p:spPr>
+        <p:txBody>
+          <a:bodyPr wrap="none" rtlCol="0">
+            <a:spAutoFit/>
+          </a:bodyPr>
+          <a:lstStyle/>
+          <a:p>
+            <a:r>
+              <a:rPr kumimoji="1" lang="en-US" altLang="ja-JP" dirty="0">
+                <a:latin typeface="times" panose="02020603050405020304" pitchFamily="18" charset="0"/>
+                <a:cs typeface="times" panose="02020603050405020304" pitchFamily="18" charset="0"/>
+              </a:rPr>
+              <a:t>y</a:t>
+            </a:r>
+            <a:endParaRPr kumimoji="1" lang="ja-JP" altLang="en-US" dirty="0">
+              <a:latin typeface="times" panose="02020603050405020304" pitchFamily="18" charset="0"/>
+              <a:cs typeface="times" panose="02020603050405020304" pitchFamily="18" charset="0"/>
+            </a:endParaRPr>
+          </a:p>
+        </p:txBody>
+      </p:sp>
+      <p:sp>
+        <p:nvSpPr>
+          <p:cNvPr id="28" name="TextBox 27">
+            <a:extLst>
+              <a:ext uri="{FF2B5EF4-FFF2-40B4-BE49-F238E27FC236}">
+                <a16:creationId xmlns:a16="http://schemas.microsoft.com/office/drawing/2014/main" id="{1EF9845A-C1C0-0CD0-DB34-DBACAF9D5F39}"/>
+              </a:ext>
+            </a:extLst>
+          </p:cNvPr>
+          <p:cNvSpPr txBox="1"/>
+          <p:nvPr/>
+        </p:nvSpPr>
+        <p:spPr>
+          <a:xfrm>
+            <a:off x="7675642" y="3004643"/>
+            <a:ext cx="287258" cy="369332"/>
+          </a:xfrm>
+          <a:prstGeom prst="rect">
+            <a:avLst/>
+          </a:prstGeom>
+          <a:noFill/>
+        </p:spPr>
+        <p:txBody>
+          <a:bodyPr wrap="none" rtlCol="0">
+            <a:spAutoFit/>
+          </a:bodyPr>
+          <a:lstStyle/>
+          <a:p>
+            <a:r>
+              <a:rPr kumimoji="1" lang="en-US" altLang="ja-JP" dirty="0">
+                <a:latin typeface="times" panose="02020603050405020304" pitchFamily="18" charset="0"/>
+                <a:cs typeface="times" panose="02020603050405020304" pitchFamily="18" charset="0"/>
+              </a:rPr>
+              <a:t>z</a:t>
+            </a:r>
+            <a:endParaRPr kumimoji="1" lang="ja-JP" altLang="en-US" dirty="0">
+              <a:latin typeface="times" panose="02020603050405020304" pitchFamily="18" charset="0"/>
+              <a:cs typeface="times" panose="02020603050405020304" pitchFamily="18" charset="0"/>
+            </a:endParaRPr>
+          </a:p>
+        </p:txBody>
+      </p:sp>
+      <p:cxnSp>
+        <p:nvCxnSpPr>
+          <p:cNvPr id="6" name="Straight Arrow Connector 19">
+            <a:extLst>
+              <a:ext uri="{FF2B5EF4-FFF2-40B4-BE49-F238E27FC236}">
+                <a16:creationId xmlns:a16="http://schemas.microsoft.com/office/drawing/2014/main" id="{43847AF3-BC75-F544-3FC0-463A2872051C}"/>
+              </a:ext>
+            </a:extLst>
+          </p:cNvPr>
+          <p:cNvCxnSpPr>
+            <a:cxnSpLocks/>
+          </p:cNvCxnSpPr>
+          <p:nvPr/>
+        </p:nvCxnSpPr>
+        <p:spPr>
+          <a:xfrm>
+            <a:off x="2946400" y="2165778"/>
+            <a:ext cx="2011715" cy="2446487"/>
+          </a:xfrm>
+          <a:prstGeom prst="straightConnector1">
+            <a:avLst/>
+          </a:prstGeom>
+          <a:ln>
+            <a:prstDash val="sysDot"/>
+            <a:headEnd type="arrow" w="med" len="med"/>
+            <a:tailEnd type="none" w="med" len="med"/>
+          </a:ln>
+        </p:spPr>
+        <p:style>
+          <a:lnRef idx="2">
+            <a:schemeClr val="dk1"/>
+          </a:lnRef>
+          <a:fillRef idx="0">
+            <a:schemeClr val="dk1"/>
+          </a:fillRef>
+          <a:effectRef idx="1">
+            <a:schemeClr val="dk1"/>
+          </a:effectRef>
+          <a:fontRef idx="minor">
+            <a:schemeClr val="tx1"/>
+          </a:fontRef>
+        </p:style>
+      </p:cxnSp>
+      <p:cxnSp>
+        <p:nvCxnSpPr>
+          <p:cNvPr id="31" name="Straight Arrow Connector 19">
+            <a:extLst>
+              <a:ext uri="{FF2B5EF4-FFF2-40B4-BE49-F238E27FC236}">
+                <a16:creationId xmlns:a16="http://schemas.microsoft.com/office/drawing/2014/main" id="{7DCEB1A5-46F8-6541-555F-988B41B21EF2}"/>
+              </a:ext>
+            </a:extLst>
+          </p:cNvPr>
+          <p:cNvCxnSpPr>
+            <a:cxnSpLocks/>
+          </p:cNvCxnSpPr>
+          <p:nvPr/>
+        </p:nvCxnSpPr>
+        <p:spPr>
+          <a:xfrm>
+            <a:off x="3683918" y="3074953"/>
+            <a:ext cx="336564" cy="0"/>
+          </a:xfrm>
+          <a:prstGeom prst="straightConnector1">
+            <a:avLst/>
+          </a:prstGeom>
+          <a:ln>
+            <a:prstDash val="sysDot"/>
+            <a:headEnd type="none" w="med" len="med"/>
+            <a:tailEnd type="none" w="med" len="med"/>
+          </a:ln>
+        </p:spPr>
+        <p:style>
+          <a:lnRef idx="2">
+            <a:schemeClr val="dk1"/>
+          </a:lnRef>
+          <a:fillRef idx="0">
+            <a:schemeClr val="dk1"/>
+          </a:fillRef>
+          <a:effectRef idx="1">
+            <a:schemeClr val="dk1"/>
+          </a:effectRef>
+          <a:fontRef idx="minor">
+            <a:schemeClr val="tx1"/>
+          </a:fontRef>
+        </p:style>
+      </p:cxnSp>
+      <p:grpSp>
+        <p:nvGrpSpPr>
+          <p:cNvPr id="59" name="그룹 58">
+            <a:extLst>
+              <a:ext uri="{FF2B5EF4-FFF2-40B4-BE49-F238E27FC236}">
+                <a16:creationId xmlns:a16="http://schemas.microsoft.com/office/drawing/2014/main" id="{DF4971A3-139E-3877-3B8B-3E6F2B1F5C92}"/>
+              </a:ext>
+            </a:extLst>
+          </p:cNvPr>
+          <p:cNvGrpSpPr/>
+          <p:nvPr/>
+        </p:nvGrpSpPr>
+        <p:grpSpPr>
+          <a:xfrm rot="378356">
+            <a:off x="1830944" y="1847269"/>
+            <a:ext cx="3674235" cy="2561673"/>
+            <a:chOff x="1845071" y="1861618"/>
+            <a:chExt cx="3674235" cy="2561673"/>
+          </a:xfrm>
+        </p:grpSpPr>
+        <p:cxnSp>
+          <p:nvCxnSpPr>
+            <p:cNvPr id="23" name="Straight Arrow Connector 22">
+              <a:extLst>
+                <a:ext uri="{FF2B5EF4-FFF2-40B4-BE49-F238E27FC236}">
+                  <a16:creationId xmlns:a16="http://schemas.microsoft.com/office/drawing/2014/main" id="{0C7E9838-FCBF-ECCF-C53F-8AF1E6AA39D2}"/>
+                </a:ext>
+              </a:extLst>
+            </p:cNvPr>
+            <p:cNvCxnSpPr>
+              <a:cxnSpLocks/>
+            </p:cNvCxnSpPr>
+            <p:nvPr/>
+          </p:nvCxnSpPr>
+          <p:spPr>
+            <a:xfrm flipV="1">
+              <a:off x="1845071" y="3056062"/>
+              <a:ext cx="1888729" cy="1367229"/>
+            </a:xfrm>
+            <a:prstGeom prst="straightConnector1">
+              <a:avLst/>
+            </a:prstGeom>
+            <a:ln>
+              <a:solidFill>
+                <a:srgbClr val="FF0000"/>
+              </a:solidFill>
+              <a:tailEnd type="triangle"/>
+            </a:ln>
+          </p:spPr>
+          <p:style>
+            <a:lnRef idx="2">
+              <a:schemeClr val="dk1"/>
+            </a:lnRef>
+            <a:fillRef idx="0">
+              <a:schemeClr val="dk1"/>
+            </a:fillRef>
+            <a:effectRef idx="1">
+              <a:schemeClr val="dk1"/>
+            </a:effectRef>
+            <a:fontRef idx="minor">
+              <a:schemeClr val="tx1"/>
+            </a:fontRef>
+          </p:style>
+        </p:cxnSp>
+        <p:cxnSp>
+          <p:nvCxnSpPr>
+            <p:cNvPr id="39" name="Straight Arrow Connector 22">
+              <a:extLst>
+                <a:ext uri="{FF2B5EF4-FFF2-40B4-BE49-F238E27FC236}">
+                  <a16:creationId xmlns:a16="http://schemas.microsoft.com/office/drawing/2014/main" id="{3C4257F4-7E7E-9775-6750-7311AAA212EC}"/>
+                </a:ext>
+              </a:extLst>
+            </p:cNvPr>
+            <p:cNvCxnSpPr>
+              <a:cxnSpLocks/>
+            </p:cNvCxnSpPr>
+            <p:nvPr/>
+          </p:nvCxnSpPr>
+          <p:spPr>
+            <a:xfrm rot="21221644" flipV="1">
+              <a:off x="4308375" y="1861618"/>
+              <a:ext cx="1210931" cy="687748"/>
+            </a:xfrm>
+            <a:prstGeom prst="straightConnector1">
+              <a:avLst/>
+            </a:prstGeom>
+            <a:ln>
+              <a:solidFill>
+                <a:srgbClr val="FF0000"/>
+              </a:solidFill>
+              <a:tailEnd type="triangle"/>
+            </a:ln>
+          </p:spPr>
+          <p:style>
+            <a:lnRef idx="2">
+              <a:schemeClr val="dk1"/>
+            </a:lnRef>
+            <a:fillRef idx="0">
+              <a:schemeClr val="dk1"/>
+            </a:fillRef>
+            <a:effectRef idx="1">
+              <a:schemeClr val="dk1"/>
+            </a:effectRef>
+            <a:fontRef idx="minor">
+              <a:schemeClr val="tx1"/>
+            </a:fontRef>
+          </p:style>
+        </p:cxnSp>
+        <p:cxnSp>
+          <p:nvCxnSpPr>
+            <p:cNvPr id="44" name="Straight Arrow Connector 22">
+              <a:extLst>
+                <a:ext uri="{FF2B5EF4-FFF2-40B4-BE49-F238E27FC236}">
+                  <a16:creationId xmlns:a16="http://schemas.microsoft.com/office/drawing/2014/main" id="{775EA508-FBCF-6B3C-36C8-419E2B3AF7DC}"/>
+                </a:ext>
+              </a:extLst>
+            </p:cNvPr>
+            <p:cNvCxnSpPr>
+              <a:cxnSpLocks/>
+            </p:cNvCxnSpPr>
+            <p:nvPr/>
+          </p:nvCxnSpPr>
+          <p:spPr>
+            <a:xfrm flipV="1">
+              <a:off x="3700367" y="2609702"/>
+              <a:ext cx="649919" cy="470469"/>
+            </a:xfrm>
+            <a:prstGeom prst="straightConnector1">
+              <a:avLst/>
+            </a:prstGeom>
+            <a:ln>
+              <a:solidFill>
+                <a:srgbClr val="FF0000"/>
+              </a:solidFill>
+              <a:prstDash val="sysDot"/>
+              <a:headEnd type="none" w="med" len="med"/>
+              <a:tailEnd type="none" w="med" len="med"/>
+            </a:ln>
+          </p:spPr>
+          <p:style>
+            <a:lnRef idx="2">
+              <a:schemeClr val="dk1"/>
+            </a:lnRef>
+            <a:fillRef idx="0">
+              <a:schemeClr val="dk1"/>
+            </a:fillRef>
+            <a:effectRef idx="1">
+              <a:schemeClr val="dk1"/>
+            </a:effectRef>
+            <a:fontRef idx="minor">
+              <a:schemeClr val="tx1"/>
+            </a:fontRef>
+          </p:style>
+        </p:cxnSp>
+      </p:grpSp>
+      <p:sp>
+        <p:nvSpPr>
+          <p:cNvPr id="49" name="막힌 원호 48">
+            <a:extLst>
+              <a:ext uri="{FF2B5EF4-FFF2-40B4-BE49-F238E27FC236}">
+                <a16:creationId xmlns:a16="http://schemas.microsoft.com/office/drawing/2014/main" id="{EAE6A2E7-CB09-B3D8-6EB4-EAFC6C94CBEA}"/>
+              </a:ext>
+            </a:extLst>
+          </p:cNvPr>
+          <p:cNvSpPr/>
+          <p:nvPr/>
+        </p:nvSpPr>
+        <p:spPr>
+          <a:xfrm rot="4701866">
+            <a:off x="4289355" y="2759001"/>
+            <a:ext cx="448730" cy="227548"/>
+          </a:xfrm>
+          <a:prstGeom prst="blockArc">
+            <a:avLst>
+              <a:gd name="adj1" fmla="val 10800000"/>
+              <a:gd name="adj2" fmla="val 21574061"/>
+              <a:gd name="adj3" fmla="val 0"/>
+            </a:avLst>
+          </a:prstGeom>
+        </p:spPr>
+        <p:style>
+          <a:lnRef idx="2">
+            <a:schemeClr val="accent1">
+              <a:shade val="15000"/>
+            </a:schemeClr>
+          </a:lnRef>
+          <a:fillRef idx="1">
+            <a:schemeClr val="accent1"/>
+          </a:fillRef>
+          <a:effectRef idx="0">
+            <a:schemeClr val="accent1"/>
+          </a:effectRef>
+          <a:fontRef idx="minor">
+            <a:schemeClr val="lt1"/>
+          </a:fontRef>
+        </p:style>
+        <p:txBody>
+          <a:bodyPr rtlCol="0" anchor="ctr"/>
+          <a:lstStyle/>
+          <a:p>
+            <a:pPr algn="ctr"/>
+            <a:endParaRPr lang="en-US">
+              <a:solidFill>
+                <a:schemeClr val="tx1"/>
+              </a:solidFill>
+            </a:endParaRPr>
+          </a:p>
+        </p:txBody>
+      </p:sp>
+      <mc:AlternateContent xmlns:mc="http://schemas.openxmlformats.org/markup-compatibility/2006">
+        <mc:Choice xmlns:a14="http://schemas.microsoft.com/office/drawing/2010/main" Requires="a14">
+          <p:sp>
+            <p:nvSpPr>
+              <p:cNvPr id="50" name="TextBox 49">
+                <a:extLst>
+                  <a:ext uri="{FF2B5EF4-FFF2-40B4-BE49-F238E27FC236}">
+                    <a16:creationId xmlns:a16="http://schemas.microsoft.com/office/drawing/2014/main" id="{57F4BA69-D557-1588-83C2-C9943254ACF6}"/>
+                  </a:ext>
+                </a:extLst>
+              </p:cNvPr>
+              <p:cNvSpPr txBox="1"/>
+              <p:nvPr/>
+            </p:nvSpPr>
+            <p:spPr>
+              <a:xfrm>
+                <a:off x="4661968" y="2582222"/>
+                <a:ext cx="270330" cy="369332"/>
+              </a:xfrm>
+              <a:prstGeom prst="rect">
+                <a:avLst/>
+              </a:prstGeom>
+              <a:noFill/>
+            </p:spPr>
+            <p:txBody>
+              <a:bodyPr wrap="none" lIns="0" tIns="0" rIns="0" bIns="0" rtlCol="0">
+                <a:spAutoFit/>
+              </a:bodyPr>
+              <a:lstStyle/>
+              <a:p>
+                <a14:m>
+                  <m:oMathPara xmlns:m="http://schemas.openxmlformats.org/officeDocument/2006/math">
+                    <m:oMathParaPr>
+                      <m:jc m:val="centerGroup"/>
+                    </m:oMathParaPr>
+                    <m:oMath xmlns:m="http://schemas.openxmlformats.org/officeDocument/2006/math">
+                      <m:r>
+                        <a:rPr lang="en-US" sz="2400" i="1" smtClean="0">
+                          <a:latin typeface="Cambria Math" panose="02040503050406030204" pitchFamily="18" charset="0"/>
+                          <a:ea typeface="Cambria Math" panose="02040503050406030204" pitchFamily="18" charset="0"/>
+                        </a:rPr>
+                        <m:t>𝜃</m:t>
+                      </m:r>
+                    </m:oMath>
+                  </m:oMathPara>
+                </a14:m>
+                <a:endParaRPr lang="en-US" sz="2400" dirty="0"/>
+              </a:p>
+            </p:txBody>
+          </p:sp>
+        </mc:Choice>
+        <mc:Fallback>
+          <p:sp>
+            <p:nvSpPr>
+              <p:cNvPr id="50" name="TextBox 49">
+                <a:extLst>
+                  <a:ext uri="{FF2B5EF4-FFF2-40B4-BE49-F238E27FC236}">
+                    <a16:creationId xmlns:a16="http://schemas.microsoft.com/office/drawing/2014/main" id="{57F4BA69-D557-1588-83C2-C9943254ACF6}"/>
+                  </a:ext>
+                </a:extLst>
+              </p:cNvPr>
+              <p:cNvSpPr txBox="1">
+                <a:spLocks noRot="1" noChangeAspect="1" noMove="1" noResize="1" noEditPoints="1" noAdjustHandles="1" noChangeArrowheads="1" noChangeShapeType="1" noTextEdit="1"/>
+              </p:cNvSpPr>
+              <p:nvPr/>
+            </p:nvSpPr>
+            <p:spPr>
+              <a:xfrm>
+                <a:off x="4661968" y="2582222"/>
+                <a:ext cx="270330" cy="369332"/>
+              </a:xfrm>
+              <a:prstGeom prst="rect">
+                <a:avLst/>
+              </a:prstGeom>
+              <a:blipFill>
+                <a:blip r:embed="rId2"/>
+                <a:stretch>
+                  <a:fillRect l="-25000" r="-18182" b="-5000"/>
+                </a:stretch>
+              </a:blipFill>
+            </p:spPr>
+            <p:txBody>
+              <a:bodyPr/>
+              <a:lstStyle/>
+              <a:p>
+                <a:r>
+                  <a:rPr lang="en-US">
+                    <a:noFill/>
+                  </a:rPr>
+                  <a:t> </a:t>
+                </a:r>
+              </a:p>
+            </p:txBody>
+          </p:sp>
+        </mc:Fallback>
+      </mc:AlternateContent>
+      <p:sp>
+        <p:nvSpPr>
+          <p:cNvPr id="68" name="Oval 3">
+            <a:extLst>
+              <a:ext uri="{FF2B5EF4-FFF2-40B4-BE49-F238E27FC236}">
+                <a16:creationId xmlns:a16="http://schemas.microsoft.com/office/drawing/2014/main" id="{04F0E248-FD46-0947-6ADF-5FD6A3554832}"/>
+              </a:ext>
+            </a:extLst>
+          </p:cNvPr>
+          <p:cNvSpPr/>
+          <p:nvPr/>
+        </p:nvSpPr>
+        <p:spPr>
+          <a:xfrm>
+            <a:off x="8356032" y="1981200"/>
+            <a:ext cx="2102457" cy="2120900"/>
+          </a:xfrm>
+          <a:prstGeom prst="ellipse">
+            <a:avLst/>
+          </a:prstGeom>
+          <a:solidFill>
+            <a:schemeClr val="bg2"/>
+          </a:solidFill>
+        </p:spPr>
+        <p:style>
+          <a:lnRef idx="2">
+            <a:schemeClr val="dk1">
+              <a:shade val="15000"/>
+            </a:schemeClr>
+          </a:lnRef>
+          <a:fillRef idx="1">
+            <a:schemeClr val="dk1"/>
+          </a:fillRef>
+          <a:effectRef idx="0">
+            <a:schemeClr val="dk1"/>
+          </a:effectRef>
+          <a:fontRef idx="minor">
+            <a:schemeClr val="lt1"/>
+          </a:fontRef>
+        </p:style>
+        <p:txBody>
+          <a:bodyPr rtlCol="0" anchor="ctr"/>
+          <a:lstStyle/>
+          <a:p>
+            <a:pPr algn="ctr"/>
+            <a:endParaRPr kumimoji="1" lang="ja-JP" altLang="en-US" dirty="0"/>
+          </a:p>
+        </p:txBody>
+      </p:sp>
+      <p:cxnSp>
+        <p:nvCxnSpPr>
+          <p:cNvPr id="69" name="Straight Arrow Connector 19">
+            <a:extLst>
+              <a:ext uri="{FF2B5EF4-FFF2-40B4-BE49-F238E27FC236}">
+                <a16:creationId xmlns:a16="http://schemas.microsoft.com/office/drawing/2014/main" id="{07AA4956-8D9D-7220-8E92-5C9539CC0F5C}"/>
+              </a:ext>
+            </a:extLst>
+          </p:cNvPr>
+          <p:cNvCxnSpPr>
+            <a:cxnSpLocks/>
+          </p:cNvCxnSpPr>
+          <p:nvPr/>
+        </p:nvCxnSpPr>
+        <p:spPr>
+          <a:xfrm flipH="1">
+            <a:off x="9407260" y="3087606"/>
+            <a:ext cx="1556985" cy="0"/>
+          </a:xfrm>
+          <a:prstGeom prst="straightConnector1">
+            <a:avLst/>
+          </a:prstGeom>
+          <a:ln>
+            <a:prstDash val="sysDot"/>
+            <a:headEnd type="arrow" w="med" len="med"/>
+            <a:tailEnd type="none" w="med" len="med"/>
+          </a:ln>
+        </p:spPr>
+        <p:style>
+          <a:lnRef idx="2">
+            <a:schemeClr val="dk1"/>
+          </a:lnRef>
+          <a:fillRef idx="0">
+            <a:schemeClr val="dk1"/>
+          </a:fillRef>
+          <a:effectRef idx="1">
+            <a:schemeClr val="dk1"/>
+          </a:effectRef>
+          <a:fontRef idx="minor">
+            <a:schemeClr val="tx1"/>
+          </a:fontRef>
+        </p:style>
+      </p:cxnSp>
+      <p:cxnSp>
+        <p:nvCxnSpPr>
+          <p:cNvPr id="72" name="Straight Arrow Connector 20">
+            <a:extLst>
+              <a:ext uri="{FF2B5EF4-FFF2-40B4-BE49-F238E27FC236}">
+                <a16:creationId xmlns:a16="http://schemas.microsoft.com/office/drawing/2014/main" id="{8930364A-A9FF-9496-AD49-BFB97F81A8B0}"/>
+              </a:ext>
+            </a:extLst>
+          </p:cNvPr>
+          <p:cNvCxnSpPr>
+            <a:cxnSpLocks/>
+          </p:cNvCxnSpPr>
+          <p:nvPr/>
+        </p:nvCxnSpPr>
+        <p:spPr>
+          <a:xfrm flipV="1">
+            <a:off x="9407260" y="1018745"/>
+            <a:ext cx="0" cy="2096732"/>
+          </a:xfrm>
+          <a:prstGeom prst="straightConnector1">
+            <a:avLst/>
+          </a:prstGeom>
+          <a:ln>
+            <a:prstDash val="sysDot"/>
+            <a:tailEnd type="triangle"/>
+          </a:ln>
+        </p:spPr>
+        <p:style>
+          <a:lnRef idx="2">
+            <a:schemeClr val="dk1"/>
+          </a:lnRef>
+          <a:fillRef idx="0">
+            <a:schemeClr val="dk1"/>
+          </a:fillRef>
+          <a:effectRef idx="1">
+            <a:schemeClr val="dk1"/>
+          </a:effectRef>
+          <a:fontRef idx="minor">
+            <a:schemeClr val="tx1"/>
+          </a:fontRef>
+        </p:style>
+      </p:cxnSp>
+      <p:sp>
+        <p:nvSpPr>
+          <p:cNvPr id="75" name="TextBox 74">
+            <a:extLst>
+              <a:ext uri="{FF2B5EF4-FFF2-40B4-BE49-F238E27FC236}">
+                <a16:creationId xmlns:a16="http://schemas.microsoft.com/office/drawing/2014/main" id="{F09F1BFA-7BE1-387D-8CEE-81974AE0BA44}"/>
+              </a:ext>
+            </a:extLst>
+          </p:cNvPr>
+          <p:cNvSpPr txBox="1"/>
+          <p:nvPr/>
+        </p:nvSpPr>
+        <p:spPr>
+          <a:xfrm>
+            <a:off x="11006380" y="2828839"/>
+            <a:ext cx="300082" cy="369332"/>
+          </a:xfrm>
+          <a:prstGeom prst="rect">
+            <a:avLst/>
+          </a:prstGeom>
+          <a:noFill/>
+        </p:spPr>
+        <p:txBody>
+          <a:bodyPr wrap="square" rtlCol="0">
+            <a:spAutoFit/>
+          </a:bodyPr>
+          <a:lstStyle/>
+          <a:p>
+            <a:r>
+              <a:rPr kumimoji="1" lang="en-US" altLang="ja-JP" dirty="0">
+                <a:latin typeface="times" panose="02020603050405020304" pitchFamily="18" charset="0"/>
+                <a:cs typeface="times" panose="02020603050405020304" pitchFamily="18" charset="0"/>
+              </a:rPr>
+              <a:t>y</a:t>
+            </a:r>
+            <a:endParaRPr kumimoji="1" lang="ja-JP" altLang="en-US" dirty="0">
+              <a:latin typeface="times" panose="02020603050405020304" pitchFamily="18" charset="0"/>
+              <a:cs typeface="times" panose="02020603050405020304" pitchFamily="18" charset="0"/>
+            </a:endParaRPr>
+          </a:p>
+        </p:txBody>
+      </p:sp>
+      <p:sp>
+        <p:nvSpPr>
+          <p:cNvPr id="77" name="TextBox 76">
+            <a:extLst>
+              <a:ext uri="{FF2B5EF4-FFF2-40B4-BE49-F238E27FC236}">
+                <a16:creationId xmlns:a16="http://schemas.microsoft.com/office/drawing/2014/main" id="{850665A2-4987-7290-FD08-E704DC4A8848}"/>
+              </a:ext>
+            </a:extLst>
+          </p:cNvPr>
+          <p:cNvSpPr txBox="1"/>
+          <p:nvPr/>
+        </p:nvSpPr>
+        <p:spPr>
+          <a:xfrm>
+            <a:off x="9407259" y="854949"/>
+            <a:ext cx="300082" cy="369332"/>
+          </a:xfrm>
+          <a:prstGeom prst="rect">
+            <a:avLst/>
+          </a:prstGeom>
+          <a:noFill/>
+        </p:spPr>
+        <p:txBody>
+          <a:bodyPr wrap="none" rtlCol="0">
+            <a:spAutoFit/>
+          </a:bodyPr>
+          <a:lstStyle/>
+          <a:p>
+            <a:r>
+              <a:rPr kumimoji="1" lang="en-US" altLang="ja-JP" dirty="0">
+                <a:latin typeface="times" panose="02020603050405020304" pitchFamily="18" charset="0"/>
+                <a:cs typeface="times" panose="02020603050405020304" pitchFamily="18" charset="0"/>
+              </a:rPr>
+              <a:t>x</a:t>
+            </a:r>
+            <a:endParaRPr kumimoji="1" lang="ja-JP" altLang="en-US" dirty="0">
+              <a:latin typeface="times" panose="02020603050405020304" pitchFamily="18" charset="0"/>
+              <a:cs typeface="times" panose="02020603050405020304" pitchFamily="18" charset="0"/>
+            </a:endParaRPr>
+          </a:p>
+        </p:txBody>
+      </p:sp>
+      <p:cxnSp>
+        <p:nvCxnSpPr>
+          <p:cNvPr id="78" name="Straight Arrow Connector 22">
+            <a:extLst>
+              <a:ext uri="{FF2B5EF4-FFF2-40B4-BE49-F238E27FC236}">
+                <a16:creationId xmlns:a16="http://schemas.microsoft.com/office/drawing/2014/main" id="{128CB1F6-D5ED-EBDA-EFA2-EB8394DBC06D}"/>
+              </a:ext>
+            </a:extLst>
+          </p:cNvPr>
+          <p:cNvCxnSpPr>
+            <a:cxnSpLocks/>
+          </p:cNvCxnSpPr>
+          <p:nvPr/>
+        </p:nvCxnSpPr>
+        <p:spPr>
+          <a:xfrm flipH="1" flipV="1">
+            <a:off x="8656114" y="2828839"/>
+            <a:ext cx="715829" cy="230897"/>
+          </a:xfrm>
+          <a:prstGeom prst="straightConnector1">
+            <a:avLst/>
+          </a:prstGeom>
+          <a:ln>
+            <a:solidFill>
+              <a:srgbClr val="FF0000"/>
+            </a:solidFill>
+            <a:tailEnd type="triangle"/>
+          </a:ln>
+        </p:spPr>
+        <p:style>
+          <a:lnRef idx="2">
+            <a:schemeClr val="dk1"/>
+          </a:lnRef>
+          <a:fillRef idx="0">
+            <a:schemeClr val="dk1"/>
+          </a:fillRef>
+          <a:effectRef idx="1">
+            <a:schemeClr val="dk1"/>
+          </a:effectRef>
+          <a:fontRef idx="minor">
+            <a:schemeClr val="tx1"/>
+          </a:fontRef>
+        </p:style>
+      </p:cxnSp>
+      <p:cxnSp>
+        <p:nvCxnSpPr>
+          <p:cNvPr id="81" name="Straight Arrow Connector 19">
+            <a:extLst>
+              <a:ext uri="{FF2B5EF4-FFF2-40B4-BE49-F238E27FC236}">
+                <a16:creationId xmlns:a16="http://schemas.microsoft.com/office/drawing/2014/main" id="{EF37BE50-DEEA-C125-46D1-A214E377EC9F}"/>
+              </a:ext>
+            </a:extLst>
+          </p:cNvPr>
+          <p:cNvCxnSpPr>
+            <a:cxnSpLocks/>
+          </p:cNvCxnSpPr>
+          <p:nvPr/>
+        </p:nvCxnSpPr>
+        <p:spPr>
+          <a:xfrm flipV="1">
+            <a:off x="8278622" y="3059736"/>
+            <a:ext cx="1128637" cy="1552529"/>
+          </a:xfrm>
+          <a:prstGeom prst="straightConnector1">
+            <a:avLst/>
+          </a:prstGeom>
+          <a:ln>
+            <a:prstDash val="sysDot"/>
+            <a:headEnd type="arrow" w="med" len="med"/>
+            <a:tailEnd type="none" w="med" len="med"/>
+          </a:ln>
+        </p:spPr>
+        <p:style>
+          <a:lnRef idx="2">
+            <a:schemeClr val="dk1"/>
+          </a:lnRef>
+          <a:fillRef idx="0">
+            <a:schemeClr val="dk1"/>
+          </a:fillRef>
+          <a:effectRef idx="1">
+            <a:schemeClr val="dk1"/>
+          </a:effectRef>
+          <a:fontRef idx="minor">
+            <a:schemeClr val="tx1"/>
+          </a:fontRef>
+        </p:style>
+      </p:cxnSp>
+      <p:sp>
+        <p:nvSpPr>
+          <p:cNvPr id="86" name="TextBox 85">
+            <a:extLst>
+              <a:ext uri="{FF2B5EF4-FFF2-40B4-BE49-F238E27FC236}">
+                <a16:creationId xmlns:a16="http://schemas.microsoft.com/office/drawing/2014/main" id="{33DF3E19-ED93-CFF2-CAB8-19358F785F2D}"/>
+              </a:ext>
+            </a:extLst>
+          </p:cNvPr>
+          <p:cNvSpPr txBox="1"/>
+          <p:nvPr/>
+        </p:nvSpPr>
+        <p:spPr>
+          <a:xfrm>
+            <a:off x="8356032" y="4489687"/>
+            <a:ext cx="300082" cy="369332"/>
+          </a:xfrm>
+          <a:prstGeom prst="rect">
+            <a:avLst/>
+          </a:prstGeom>
+          <a:noFill/>
+        </p:spPr>
+        <p:txBody>
+          <a:bodyPr wrap="square" rtlCol="0">
+            <a:spAutoFit/>
+          </a:bodyPr>
+          <a:lstStyle/>
+          <a:p>
+            <a:r>
+              <a:rPr kumimoji="1" lang="en-US" altLang="ja-JP" dirty="0">
+                <a:latin typeface="times" panose="02020603050405020304" pitchFamily="18" charset="0"/>
+                <a:cs typeface="times" panose="02020603050405020304" pitchFamily="18" charset="0"/>
+              </a:rPr>
+              <a:t>z</a:t>
+            </a:r>
+            <a:endParaRPr kumimoji="1" lang="ja-JP" altLang="en-US" dirty="0">
+              <a:latin typeface="times" panose="02020603050405020304" pitchFamily="18" charset="0"/>
+              <a:cs typeface="times" panose="02020603050405020304" pitchFamily="18" charset="0"/>
+            </a:endParaRPr>
+          </a:p>
+        </p:txBody>
+      </p:sp>
+      <p:cxnSp>
+        <p:nvCxnSpPr>
+          <p:cNvPr id="89" name="Straight Arrow Connector 22">
+            <a:extLst>
+              <a:ext uri="{FF2B5EF4-FFF2-40B4-BE49-F238E27FC236}">
+                <a16:creationId xmlns:a16="http://schemas.microsoft.com/office/drawing/2014/main" id="{BF502816-8DA5-6B94-2449-B3934F2C0BDE}"/>
+              </a:ext>
+            </a:extLst>
+          </p:cNvPr>
+          <p:cNvCxnSpPr>
+            <a:cxnSpLocks/>
+          </p:cNvCxnSpPr>
+          <p:nvPr/>
+        </p:nvCxnSpPr>
+        <p:spPr>
+          <a:xfrm flipH="1" flipV="1">
+            <a:off x="8697575" y="2812982"/>
+            <a:ext cx="409605" cy="686600"/>
+          </a:xfrm>
+          <a:prstGeom prst="straightConnector1">
+            <a:avLst/>
+          </a:prstGeom>
+          <a:ln>
+            <a:solidFill>
+              <a:srgbClr val="FF0000"/>
+            </a:solidFill>
+            <a:prstDash val="sysDot"/>
+            <a:headEnd type="none" w="med" len="med"/>
+            <a:tailEnd type="none" w="med" len="med"/>
+          </a:ln>
+        </p:spPr>
+        <p:style>
+          <a:lnRef idx="2">
+            <a:schemeClr val="dk1"/>
+          </a:lnRef>
+          <a:fillRef idx="0">
+            <a:schemeClr val="dk1"/>
+          </a:fillRef>
+          <a:effectRef idx="1">
+            <a:schemeClr val="dk1"/>
+          </a:effectRef>
+          <a:fontRef idx="minor">
+            <a:schemeClr val="tx1"/>
+          </a:fontRef>
+        </p:style>
+      </p:cxnSp>
+      <p:cxnSp>
+        <p:nvCxnSpPr>
+          <p:cNvPr id="93" name="Straight Arrow Connector 22">
+            <a:extLst>
+              <a:ext uri="{FF2B5EF4-FFF2-40B4-BE49-F238E27FC236}">
+                <a16:creationId xmlns:a16="http://schemas.microsoft.com/office/drawing/2014/main" id="{A8A60320-A828-602D-203C-160DC05BF21E}"/>
+              </a:ext>
+            </a:extLst>
+          </p:cNvPr>
+          <p:cNvCxnSpPr>
+            <a:cxnSpLocks/>
+          </p:cNvCxnSpPr>
+          <p:nvPr/>
+        </p:nvCxnSpPr>
+        <p:spPr>
+          <a:xfrm flipH="1">
+            <a:off x="8708367" y="2401697"/>
+            <a:ext cx="359659" cy="397750"/>
+          </a:xfrm>
+          <a:prstGeom prst="straightConnector1">
+            <a:avLst/>
+          </a:prstGeom>
+          <a:ln>
+            <a:solidFill>
+              <a:srgbClr val="FF0000"/>
+            </a:solidFill>
+            <a:prstDash val="sysDot"/>
+            <a:headEnd type="none" w="med" len="med"/>
+            <a:tailEnd type="none" w="med" len="med"/>
+          </a:ln>
+        </p:spPr>
+        <p:style>
+          <a:lnRef idx="2">
+            <a:schemeClr val="dk1"/>
+          </a:lnRef>
+          <a:fillRef idx="0">
+            <a:schemeClr val="dk1"/>
+          </a:fillRef>
+          <a:effectRef idx="1">
+            <a:schemeClr val="dk1"/>
+          </a:effectRef>
+          <a:fontRef idx="minor">
+            <a:schemeClr val="tx1"/>
+          </a:fontRef>
+        </p:style>
+      </p:cxnSp>
+      <p:cxnSp>
+        <p:nvCxnSpPr>
+          <p:cNvPr id="117" name="Straight Arrow Connector 22">
+            <a:extLst>
+              <a:ext uri="{FF2B5EF4-FFF2-40B4-BE49-F238E27FC236}">
+                <a16:creationId xmlns:a16="http://schemas.microsoft.com/office/drawing/2014/main" id="{352E1FEB-FA89-2EAC-20D9-DCCC35FFF44A}"/>
+              </a:ext>
+            </a:extLst>
+          </p:cNvPr>
+          <p:cNvCxnSpPr>
+            <a:cxnSpLocks/>
+          </p:cNvCxnSpPr>
+          <p:nvPr/>
+        </p:nvCxnSpPr>
+        <p:spPr>
+          <a:xfrm flipH="1" flipV="1">
+            <a:off x="9049345" y="2401697"/>
+            <a:ext cx="337977" cy="639953"/>
+          </a:xfrm>
+          <a:prstGeom prst="straightConnector1">
+            <a:avLst/>
+          </a:prstGeom>
+          <a:ln>
+            <a:solidFill>
+              <a:srgbClr val="FF0000"/>
+            </a:solidFill>
+            <a:tailEnd type="triangle"/>
+          </a:ln>
+        </p:spPr>
+        <p:style>
+          <a:lnRef idx="2">
+            <a:schemeClr val="dk1"/>
+          </a:lnRef>
+          <a:fillRef idx="0">
+            <a:schemeClr val="dk1"/>
+          </a:fillRef>
+          <a:effectRef idx="1">
+            <a:schemeClr val="dk1"/>
+          </a:effectRef>
+          <a:fontRef idx="minor">
+            <a:schemeClr val="tx1"/>
+          </a:fontRef>
+        </p:style>
+      </p:cxnSp>
+      <p:cxnSp>
+        <p:nvCxnSpPr>
+          <p:cNvPr id="120" name="Straight Arrow Connector 22">
+            <a:extLst>
+              <a:ext uri="{FF2B5EF4-FFF2-40B4-BE49-F238E27FC236}">
+                <a16:creationId xmlns:a16="http://schemas.microsoft.com/office/drawing/2014/main" id="{0088F283-D1DA-E896-1D30-667CAE9E6630}"/>
+              </a:ext>
+            </a:extLst>
+          </p:cNvPr>
+          <p:cNvCxnSpPr>
+            <a:cxnSpLocks/>
+          </p:cNvCxnSpPr>
+          <p:nvPr/>
+        </p:nvCxnSpPr>
+        <p:spPr>
+          <a:xfrm flipH="1">
+            <a:off x="9092902" y="3076936"/>
+            <a:ext cx="294420" cy="409942"/>
+          </a:xfrm>
+          <a:prstGeom prst="straightConnector1">
+            <a:avLst/>
+          </a:prstGeom>
+          <a:ln>
+            <a:solidFill>
+              <a:srgbClr val="FF0000"/>
+            </a:solidFill>
+            <a:tailEnd type="triangle"/>
+          </a:ln>
+        </p:spPr>
+        <p:style>
+          <a:lnRef idx="2">
+            <a:schemeClr val="dk1"/>
+          </a:lnRef>
+          <a:fillRef idx="0">
+            <a:schemeClr val="dk1"/>
+          </a:fillRef>
+          <a:effectRef idx="1">
+            <a:schemeClr val="dk1"/>
+          </a:effectRef>
+          <a:fontRef idx="minor">
+            <a:schemeClr val="tx1"/>
+          </a:fontRef>
+        </p:style>
+      </p:cxnSp>
+      <p:sp>
+        <p:nvSpPr>
+          <p:cNvPr id="125" name="막힌 원호 124">
+            <a:extLst>
+              <a:ext uri="{FF2B5EF4-FFF2-40B4-BE49-F238E27FC236}">
+                <a16:creationId xmlns:a16="http://schemas.microsoft.com/office/drawing/2014/main" id="{0FB9D7C2-9769-B207-1E1E-B832102DED82}"/>
+              </a:ext>
+            </a:extLst>
+          </p:cNvPr>
+          <p:cNvSpPr/>
+          <p:nvPr/>
+        </p:nvSpPr>
+        <p:spPr>
+          <a:xfrm rot="14184790">
+            <a:off x="9078423" y="3059226"/>
+            <a:ext cx="279822" cy="141896"/>
+          </a:xfrm>
+          <a:prstGeom prst="blockArc">
+            <a:avLst>
+              <a:gd name="adj1" fmla="val 10800000"/>
+              <a:gd name="adj2" fmla="val 21574061"/>
+              <a:gd name="adj3" fmla="val 0"/>
+            </a:avLst>
+          </a:prstGeom>
+        </p:spPr>
+        <p:style>
+          <a:lnRef idx="2">
+            <a:schemeClr val="accent1">
+              <a:shade val="15000"/>
+            </a:schemeClr>
+          </a:lnRef>
+          <a:fillRef idx="1">
+            <a:schemeClr val="accent1"/>
+          </a:fillRef>
+          <a:effectRef idx="0">
+            <a:schemeClr val="accent1"/>
+          </a:effectRef>
+          <a:fontRef idx="minor">
+            <a:schemeClr val="lt1"/>
+          </a:fontRef>
+        </p:style>
+        <p:txBody>
+          <a:bodyPr rtlCol="0" anchor="ctr"/>
+          <a:lstStyle/>
+          <a:p>
+            <a:pPr algn="ctr"/>
+            <a:endParaRPr lang="en-US">
+              <a:solidFill>
+                <a:schemeClr val="tx1"/>
+              </a:solidFill>
+            </a:endParaRPr>
+          </a:p>
+        </p:txBody>
+      </p:sp>
+      <mc:AlternateContent xmlns:mc="http://schemas.openxmlformats.org/markup-compatibility/2006">
+        <mc:Choice xmlns:a14="http://schemas.microsoft.com/office/drawing/2010/main" Requires="a14">
+          <p:sp>
+            <p:nvSpPr>
+              <p:cNvPr id="127" name="TextBox 126">
+                <a:extLst>
+                  <a:ext uri="{FF2B5EF4-FFF2-40B4-BE49-F238E27FC236}">
+                    <a16:creationId xmlns:a16="http://schemas.microsoft.com/office/drawing/2014/main" id="{5A318B9C-9EEE-A303-1A0C-E1AA52D92522}"/>
+                  </a:ext>
+                </a:extLst>
+              </p:cNvPr>
+              <p:cNvSpPr txBox="1"/>
+              <p:nvPr/>
+            </p:nvSpPr>
+            <p:spPr>
+              <a:xfrm>
+                <a:off x="8904532" y="3052387"/>
+                <a:ext cx="270330" cy="369332"/>
+              </a:xfrm>
+              <a:prstGeom prst="rect">
+                <a:avLst/>
+              </a:prstGeom>
+              <a:noFill/>
+            </p:spPr>
+            <p:txBody>
+              <a:bodyPr wrap="none" lIns="0" tIns="0" rIns="0" bIns="0" rtlCol="0">
+                <a:spAutoFit/>
+              </a:bodyPr>
+              <a:lstStyle/>
+              <a:p>
+                <a:pPr/>
+                <a14:m>
+                  <m:oMathPara xmlns:m="http://schemas.openxmlformats.org/officeDocument/2006/math">
+                    <m:oMathParaPr>
+                      <m:jc m:val="centerGroup"/>
+                    </m:oMathParaPr>
+                    <m:oMath xmlns:m="http://schemas.openxmlformats.org/officeDocument/2006/math">
+                      <m:r>
+                        <a:rPr lang="en-US" sz="2400" i="1" smtClean="0">
+                          <a:latin typeface="Cambria Math" panose="02040503050406030204" pitchFamily="18" charset="0"/>
+                          <a:ea typeface="Cambria Math" panose="02040503050406030204" pitchFamily="18" charset="0"/>
+                        </a:rPr>
+                        <m:t>𝜃</m:t>
+                      </m:r>
+                    </m:oMath>
+                  </m:oMathPara>
+                </a14:m>
+                <a:endParaRPr lang="en-US" sz="2400" dirty="0"/>
+              </a:p>
+            </p:txBody>
+          </p:sp>
+        </mc:Choice>
+        <mc:Fallback>
+          <p:sp>
+            <p:nvSpPr>
+              <p:cNvPr id="127" name="TextBox 126">
+                <a:extLst>
+                  <a:ext uri="{FF2B5EF4-FFF2-40B4-BE49-F238E27FC236}">
+                    <a16:creationId xmlns:a16="http://schemas.microsoft.com/office/drawing/2014/main" id="{5A318B9C-9EEE-A303-1A0C-E1AA52D92522}"/>
+                  </a:ext>
+                </a:extLst>
+              </p:cNvPr>
+              <p:cNvSpPr txBox="1">
+                <a:spLocks noRot="1" noChangeAspect="1" noMove="1" noResize="1" noEditPoints="1" noAdjustHandles="1" noChangeArrowheads="1" noChangeShapeType="1" noTextEdit="1"/>
+              </p:cNvSpPr>
+              <p:nvPr/>
+            </p:nvSpPr>
+            <p:spPr>
+              <a:xfrm>
+                <a:off x="8904532" y="3052387"/>
+                <a:ext cx="270330" cy="369332"/>
+              </a:xfrm>
+              <a:prstGeom prst="rect">
+                <a:avLst/>
+              </a:prstGeom>
+              <a:blipFill>
+                <a:blip r:embed="rId3"/>
+                <a:stretch>
+                  <a:fillRect l="-25000" r="-18182" b="-5000"/>
+                </a:stretch>
+              </a:blipFill>
+            </p:spPr>
+            <p:txBody>
+              <a:bodyPr/>
+              <a:lstStyle/>
+              <a:p>
+                <a:r>
+                  <a:rPr lang="en-US">
+                    <a:noFill/>
+                  </a:rPr>
+                  <a:t> </a:t>
+                </a:r>
+              </a:p>
+            </p:txBody>
+          </p:sp>
+        </mc:Fallback>
+      </mc:AlternateContent>
+      <p:sp>
+        <p:nvSpPr>
+          <p:cNvPr id="128" name="화살표: 아래쪽 127">
+            <a:extLst>
+              <a:ext uri="{FF2B5EF4-FFF2-40B4-BE49-F238E27FC236}">
+                <a16:creationId xmlns:a16="http://schemas.microsoft.com/office/drawing/2014/main" id="{FC119CFB-B418-0535-E9DD-634691D8BA00}"/>
+              </a:ext>
+            </a:extLst>
+          </p:cNvPr>
+          <p:cNvSpPr/>
+          <p:nvPr/>
+        </p:nvSpPr>
+        <p:spPr>
+          <a:xfrm rot="3217201">
+            <a:off x="4078016" y="1128800"/>
+            <a:ext cx="460574" cy="990712"/>
+          </a:xfrm>
+          <a:prstGeom prst="downArrow">
+            <a:avLst/>
+          </a:prstGeom>
+        </p:spPr>
+        <p:style>
+          <a:lnRef idx="2">
+            <a:schemeClr val="accent1">
+              <a:shade val="15000"/>
+            </a:schemeClr>
+          </a:lnRef>
+          <a:fillRef idx="1">
+            <a:schemeClr val="accent1"/>
+          </a:fillRef>
+          <a:effectRef idx="0">
+            <a:schemeClr val="accent1"/>
+          </a:effectRef>
+          <a:fontRef idx="minor">
+            <a:schemeClr val="lt1"/>
+          </a:fontRef>
+        </p:style>
+        <p:txBody>
+          <a:bodyPr rtlCol="0" anchor="ctr"/>
+          <a:lstStyle/>
+          <a:p>
+            <a:pPr algn="ctr"/>
+            <a:endParaRPr lang="en-US"/>
+          </a:p>
+        </p:txBody>
+      </p:sp>
+      <p:sp>
+        <p:nvSpPr>
+          <p:cNvPr id="129" name="TextBox 128">
+            <a:extLst>
+              <a:ext uri="{FF2B5EF4-FFF2-40B4-BE49-F238E27FC236}">
+                <a16:creationId xmlns:a16="http://schemas.microsoft.com/office/drawing/2014/main" id="{4B67F157-820A-3D3A-B29F-F2AF00FC54D1}"/>
+              </a:ext>
+            </a:extLst>
+          </p:cNvPr>
+          <p:cNvSpPr txBox="1"/>
+          <p:nvPr/>
+        </p:nvSpPr>
+        <p:spPr>
+          <a:xfrm>
+            <a:off x="4711605" y="1082534"/>
+            <a:ext cx="4012637" cy="369332"/>
+          </a:xfrm>
+          <a:prstGeom prst="rect">
+            <a:avLst/>
+          </a:prstGeom>
+          <a:noFill/>
+        </p:spPr>
+        <p:txBody>
+          <a:bodyPr wrap="none" rtlCol="0">
+            <a:spAutoFit/>
+          </a:bodyPr>
+          <a:lstStyle/>
+          <a:p>
+            <a:r>
+              <a:rPr lang="en-US" dirty="0">
+                <a:latin typeface="Gungsuh" panose="02030600000101010101" pitchFamily="18" charset="-127"/>
+                <a:ea typeface="Gungsuh" panose="02030600000101010101" pitchFamily="18" charset="-127"/>
+              </a:rPr>
+              <a:t>Look at from this perspective</a:t>
+            </a:r>
+          </a:p>
+        </p:txBody>
+      </p:sp>
+      <mc:AlternateContent xmlns:mc="http://schemas.openxmlformats.org/markup-compatibility/2006">
+        <mc:Choice xmlns:a14="http://schemas.microsoft.com/office/drawing/2010/main" Requires="a14">
+          <p:sp>
+            <p:nvSpPr>
+              <p:cNvPr id="131" name="TextBox 130">
+                <a:extLst>
+                  <a:ext uri="{FF2B5EF4-FFF2-40B4-BE49-F238E27FC236}">
+                    <a16:creationId xmlns:a16="http://schemas.microsoft.com/office/drawing/2014/main" id="{0EE8E338-E26F-D850-F319-3470B2D3BED6}"/>
+                  </a:ext>
+                </a:extLst>
+              </p:cNvPr>
+              <p:cNvSpPr txBox="1"/>
+              <p:nvPr/>
+            </p:nvSpPr>
+            <p:spPr>
+              <a:xfrm rot="21357679">
+                <a:off x="9194402" y="3211586"/>
+                <a:ext cx="283411" cy="369332"/>
+              </a:xfrm>
+              <a:prstGeom prst="rect">
+                <a:avLst/>
+              </a:prstGeom>
+              <a:noFill/>
+            </p:spPr>
+            <p:txBody>
+              <a:bodyPr wrap="none" lIns="0" tIns="0" rIns="0" bIns="0" rtlCol="0">
+                <a:spAutoFit/>
+              </a:bodyPr>
+              <a:lstStyle/>
+              <a:p>
+                <a:pPr/>
+                <a14:m>
+                  <m:oMathPara xmlns:m="http://schemas.openxmlformats.org/officeDocument/2006/math">
+                    <m:oMathParaPr>
+                      <m:jc m:val="centerGroup"/>
+                    </m:oMathParaPr>
+                    <m:oMath xmlns:m="http://schemas.openxmlformats.org/officeDocument/2006/math">
+                      <m:r>
+                        <a:rPr lang="en-US" sz="2400" i="1" smtClean="0">
+                          <a:latin typeface="Cambria Math" panose="02040503050406030204" pitchFamily="18" charset="0"/>
+                          <a:ea typeface="Cambria Math" panose="02040503050406030204" pitchFamily="18" charset="0"/>
+                        </a:rPr>
+                        <m:t>𝛽</m:t>
+                      </m:r>
+                    </m:oMath>
+                  </m:oMathPara>
+                </a14:m>
+                <a:endParaRPr lang="en-US" sz="2400" dirty="0"/>
+              </a:p>
+            </p:txBody>
+          </p:sp>
+        </mc:Choice>
+        <mc:Fallback>
+          <p:sp>
+            <p:nvSpPr>
+              <p:cNvPr id="131" name="TextBox 130">
+                <a:extLst>
+                  <a:ext uri="{FF2B5EF4-FFF2-40B4-BE49-F238E27FC236}">
+                    <a16:creationId xmlns:a16="http://schemas.microsoft.com/office/drawing/2014/main" id="{0EE8E338-E26F-D850-F319-3470B2D3BED6}"/>
+                  </a:ext>
+                </a:extLst>
+              </p:cNvPr>
+              <p:cNvSpPr txBox="1">
+                <a:spLocks noRot="1" noChangeAspect="1" noMove="1" noResize="1" noEditPoints="1" noAdjustHandles="1" noChangeArrowheads="1" noChangeShapeType="1" noTextEdit="1"/>
+              </p:cNvSpPr>
+              <p:nvPr/>
+            </p:nvSpPr>
+            <p:spPr>
+              <a:xfrm rot="21357679">
+                <a:off x="9194402" y="3211586"/>
+                <a:ext cx="283411" cy="369332"/>
+              </a:xfrm>
+              <a:prstGeom prst="rect">
+                <a:avLst/>
+              </a:prstGeom>
+              <a:blipFill>
+                <a:blip r:embed="rId4"/>
+                <a:stretch>
+                  <a:fillRect l="-31373" t="-3125" r="-29412" b="-32813"/>
+                </a:stretch>
+              </a:blipFill>
+            </p:spPr>
+            <p:txBody>
+              <a:bodyPr/>
+              <a:lstStyle/>
+              <a:p>
+                <a:r>
+                  <a:rPr lang="en-US">
+                    <a:noFill/>
+                  </a:rPr>
+                  <a:t> </a:t>
+                </a:r>
+              </a:p>
+            </p:txBody>
+          </p:sp>
+        </mc:Fallback>
+      </mc:AlternateContent>
+      <mc:AlternateContent xmlns:mc="http://schemas.openxmlformats.org/markup-compatibility/2006">
+        <mc:Choice xmlns:a14="http://schemas.microsoft.com/office/drawing/2010/main" Requires="a14">
+          <p:sp>
+            <p:nvSpPr>
+              <p:cNvPr id="133" name="TextBox 132">
+                <a:extLst>
+                  <a:ext uri="{FF2B5EF4-FFF2-40B4-BE49-F238E27FC236}">
+                    <a16:creationId xmlns:a16="http://schemas.microsoft.com/office/drawing/2014/main" id="{52F9BC21-A2B1-D757-7F0F-231774C5EB1A}"/>
+                  </a:ext>
+                </a:extLst>
+              </p:cNvPr>
+              <p:cNvSpPr txBox="1"/>
+              <p:nvPr/>
+            </p:nvSpPr>
+            <p:spPr>
+              <a:xfrm rot="20180983">
+                <a:off x="8939007" y="2035808"/>
+                <a:ext cx="396582" cy="369332"/>
+              </a:xfrm>
+              <a:prstGeom prst="rect">
+                <a:avLst/>
+              </a:prstGeom>
+              <a:noFill/>
+            </p:spPr>
+            <p:txBody>
+              <a:bodyPr wrap="none" lIns="0" tIns="0" rIns="0" bIns="0" rtlCol="0">
+                <a:spAutoFit/>
+              </a:bodyPr>
+              <a:lstStyle/>
+              <a:p>
+                <a:pPr/>
+                <a14:m>
+                  <m:oMathPara xmlns:m="http://schemas.openxmlformats.org/officeDocument/2006/math">
+                    <m:oMathParaPr>
+                      <m:jc m:val="centerGroup"/>
+                    </m:oMathParaPr>
+                    <m:oMath xmlns:m="http://schemas.openxmlformats.org/officeDocument/2006/math">
+                      <m:sSub>
+                        <m:sSubPr>
+                          <m:ctrlPr>
+                            <a:rPr lang="en-US" sz="2400" i="1" smtClean="0">
+                              <a:latin typeface="Cambria Math" panose="02040503050406030204" pitchFamily="18" charset="0"/>
+                            </a:rPr>
+                          </m:ctrlPr>
+                        </m:sSubPr>
+                        <m:e>
+                          <m:r>
+                            <a:rPr lang="en-US" sz="2400" b="0" i="1" smtClean="0">
+                              <a:latin typeface="Cambria Math" panose="02040503050406030204" pitchFamily="18" charset="0"/>
+                            </a:rPr>
+                            <m:t>𝑘</m:t>
+                          </m:r>
+                        </m:e>
+                        <m:sub>
+                          <m:r>
+                            <a:rPr lang="en-US" sz="2400" b="0" i="1" smtClean="0">
+                              <a:latin typeface="Cambria Math" panose="02040503050406030204" pitchFamily="18" charset="0"/>
+                            </a:rPr>
+                            <m:t>𝑟</m:t>
+                          </m:r>
+                        </m:sub>
+                      </m:sSub>
+                    </m:oMath>
+                  </m:oMathPara>
+                </a14:m>
+                <a:endParaRPr lang="en-US" sz="2400" dirty="0"/>
+              </a:p>
+            </p:txBody>
+          </p:sp>
+        </mc:Choice>
+        <mc:Fallback>
+          <p:sp>
+            <p:nvSpPr>
+              <p:cNvPr id="133" name="TextBox 132">
+                <a:extLst>
+                  <a:ext uri="{FF2B5EF4-FFF2-40B4-BE49-F238E27FC236}">
+                    <a16:creationId xmlns:a16="http://schemas.microsoft.com/office/drawing/2014/main" id="{52F9BC21-A2B1-D757-7F0F-231774C5EB1A}"/>
+                  </a:ext>
+                </a:extLst>
+              </p:cNvPr>
+              <p:cNvSpPr txBox="1">
+                <a:spLocks noRot="1" noChangeAspect="1" noMove="1" noResize="1" noEditPoints="1" noAdjustHandles="1" noChangeArrowheads="1" noChangeShapeType="1" noTextEdit="1"/>
+              </p:cNvSpPr>
+              <p:nvPr/>
+            </p:nvSpPr>
+            <p:spPr>
+              <a:xfrm rot="20180983">
+                <a:off x="8939007" y="2035808"/>
+                <a:ext cx="396582" cy="369332"/>
+              </a:xfrm>
+              <a:prstGeom prst="rect">
+                <a:avLst/>
+              </a:prstGeom>
+              <a:blipFill>
+                <a:blip r:embed="rId5"/>
+                <a:stretch>
+                  <a:fillRect l="-9412" r="-1176" b="-7229"/>
+                </a:stretch>
+              </a:blipFill>
+            </p:spPr>
+            <p:txBody>
+              <a:bodyPr/>
+              <a:lstStyle/>
+              <a:p>
+                <a:r>
+                  <a:rPr lang="en-US">
+                    <a:noFill/>
+                  </a:rPr>
+                  <a:t> </a:t>
+                </a:r>
+              </a:p>
+            </p:txBody>
+          </p:sp>
+        </mc:Fallback>
+      </mc:AlternateContent>
+    </p:spTree>
+    <p:extLst>
+      <p:ext uri="{BB962C8B-B14F-4D97-AF65-F5344CB8AC3E}">
+        <p14:creationId xmlns:p14="http://schemas.microsoft.com/office/powerpoint/2010/main" val="3905363142"/>
+      </p:ext>
+    </p:extLst>
+  </p:cSld>
+  <p:clrMapOvr>
+    <a:masterClrMapping/>
+  </p:clrMapOvr>
+</p:sld>
+</file>
+
+<file path=ppt/slides/slide11.xml><?xml version="1.0" encoding="utf-8"?>
+<p:sld xmlns:a="http://schemas.openxmlformats.org/drawingml/2006/main" xmlns:r="http://schemas.openxmlformats.org/officeDocument/2006/relationships" xmlns:p="http://schemas.openxmlformats.org/presentationml/2006/main">
+  <p:cSld>
+    <p:spTree>
+      <p:nvGrpSpPr>
+        <p:cNvPr id="1" name=""/>
+        <p:cNvGrpSpPr/>
+        <p:nvPr/>
+      </p:nvGrpSpPr>
+      <p:grpSpPr>
+        <a:xfrm>
+          <a:off x="0" y="0"/>
+          <a:ext cx="0" cy="0"/>
+          <a:chOff x="0" y="0"/>
+          <a:chExt cx="0" cy="0"/>
+        </a:xfrm>
+      </p:grpSpPr>
+      <p:sp>
+        <p:nvSpPr>
+          <p:cNvPr id="21" name="직사각형 20">
+            <a:extLst>
+              <a:ext uri="{FF2B5EF4-FFF2-40B4-BE49-F238E27FC236}">
+                <a16:creationId xmlns:a16="http://schemas.microsoft.com/office/drawing/2014/main" id="{BC226BDC-0CB6-26DE-991B-89CA9E79C5E9}"/>
+              </a:ext>
+            </a:extLst>
+          </p:cNvPr>
+          <p:cNvSpPr/>
+          <p:nvPr/>
+        </p:nvSpPr>
+        <p:spPr>
+          <a:xfrm>
+            <a:off x="2597150" y="810635"/>
+            <a:ext cx="2997200" cy="4749800"/>
+          </a:xfrm>
+          <a:prstGeom prst="rect">
+            <a:avLst/>
+          </a:prstGeom>
+          <a:solidFill>
+            <a:schemeClr val="bg2">
+              <a:lumMod val="75000"/>
+            </a:schemeClr>
+          </a:solidFill>
+        </p:spPr>
+        <p:style>
+          <a:lnRef idx="2">
+            <a:schemeClr val="accent1">
+              <a:shade val="15000"/>
+            </a:schemeClr>
+          </a:lnRef>
+          <a:fillRef idx="1">
+            <a:schemeClr val="accent1"/>
+          </a:fillRef>
+          <a:effectRef idx="0">
+            <a:schemeClr val="accent1"/>
+          </a:effectRef>
+          <a:fontRef idx="minor">
+            <a:schemeClr val="lt1"/>
+          </a:fontRef>
+        </p:style>
+        <p:txBody>
+          <a:bodyPr rtlCol="0" anchor="ctr"/>
+          <a:lstStyle/>
+          <a:p>
+            <a:pPr algn="ctr"/>
+            <a:endParaRPr lang="en-US"/>
+          </a:p>
+        </p:txBody>
+      </p:sp>
+      <p:cxnSp>
+        <p:nvCxnSpPr>
+          <p:cNvPr id="5" name="Straight Arrow Connector 19">
+            <a:extLst>
+              <a:ext uri="{FF2B5EF4-FFF2-40B4-BE49-F238E27FC236}">
+                <a16:creationId xmlns:a16="http://schemas.microsoft.com/office/drawing/2014/main" id="{523D071C-121D-A032-2720-D28BF21A1251}"/>
+              </a:ext>
+            </a:extLst>
+          </p:cNvPr>
+          <p:cNvCxnSpPr>
+            <a:cxnSpLocks/>
+          </p:cNvCxnSpPr>
+          <p:nvPr/>
+        </p:nvCxnSpPr>
+        <p:spPr>
+          <a:xfrm flipH="1">
+            <a:off x="4196798" y="3474956"/>
+            <a:ext cx="1556985" cy="0"/>
+          </a:xfrm>
+          <a:prstGeom prst="straightConnector1">
+            <a:avLst/>
+          </a:prstGeom>
+          <a:ln>
+            <a:prstDash val="sysDot"/>
+            <a:headEnd type="arrow" w="med" len="med"/>
+            <a:tailEnd type="none" w="med" len="med"/>
+          </a:ln>
+        </p:spPr>
+        <p:style>
+          <a:lnRef idx="2">
+            <a:schemeClr val="dk1"/>
+          </a:lnRef>
+          <a:fillRef idx="0">
+            <a:schemeClr val="dk1"/>
+          </a:fillRef>
+          <a:effectRef idx="1">
+            <a:schemeClr val="dk1"/>
+          </a:effectRef>
+          <a:fontRef idx="minor">
+            <a:schemeClr val="tx1"/>
+          </a:fontRef>
+        </p:style>
+      </p:cxnSp>
+      <p:cxnSp>
+        <p:nvCxnSpPr>
+          <p:cNvPr id="6" name="Straight Arrow Connector 20">
+            <a:extLst>
+              <a:ext uri="{FF2B5EF4-FFF2-40B4-BE49-F238E27FC236}">
+                <a16:creationId xmlns:a16="http://schemas.microsoft.com/office/drawing/2014/main" id="{DF332429-EE6C-28DC-FEFB-88421ED4E9D2}"/>
+              </a:ext>
+            </a:extLst>
+          </p:cNvPr>
+          <p:cNvCxnSpPr>
+            <a:cxnSpLocks/>
+          </p:cNvCxnSpPr>
+          <p:nvPr/>
+        </p:nvCxnSpPr>
+        <p:spPr>
+          <a:xfrm flipV="1">
+            <a:off x="4196798" y="1406095"/>
+            <a:ext cx="0" cy="2096732"/>
+          </a:xfrm>
+          <a:prstGeom prst="straightConnector1">
+            <a:avLst/>
+          </a:prstGeom>
+          <a:ln>
+            <a:prstDash val="sysDot"/>
+            <a:tailEnd type="triangle"/>
+          </a:ln>
+        </p:spPr>
+        <p:style>
+          <a:lnRef idx="2">
+            <a:schemeClr val="dk1"/>
+          </a:lnRef>
+          <a:fillRef idx="0">
+            <a:schemeClr val="dk1"/>
+          </a:fillRef>
+          <a:effectRef idx="1">
+            <a:schemeClr val="dk1"/>
+          </a:effectRef>
+          <a:fontRef idx="minor">
+            <a:schemeClr val="tx1"/>
+          </a:fontRef>
+        </p:style>
+      </p:cxnSp>
+      <p:sp>
+        <p:nvSpPr>
+          <p:cNvPr id="7" name="TextBox 6">
+            <a:extLst>
+              <a:ext uri="{FF2B5EF4-FFF2-40B4-BE49-F238E27FC236}">
+                <a16:creationId xmlns:a16="http://schemas.microsoft.com/office/drawing/2014/main" id="{22F6E254-9F7D-C8C6-CBF1-DEE83AD4D96D}"/>
+              </a:ext>
+            </a:extLst>
+          </p:cNvPr>
+          <p:cNvSpPr txBox="1"/>
+          <p:nvPr/>
+        </p:nvSpPr>
+        <p:spPr>
+          <a:xfrm>
+            <a:off x="5795918" y="3216189"/>
+            <a:ext cx="300082" cy="369332"/>
+          </a:xfrm>
+          <a:prstGeom prst="rect">
+            <a:avLst/>
+          </a:prstGeom>
+          <a:noFill/>
+        </p:spPr>
+        <p:txBody>
+          <a:bodyPr wrap="square" rtlCol="0">
+            <a:spAutoFit/>
+          </a:bodyPr>
+          <a:lstStyle/>
+          <a:p>
+            <a:r>
+              <a:rPr kumimoji="1" lang="en-US" altLang="ja-JP" dirty="0">
+                <a:latin typeface="times" panose="02020603050405020304" pitchFamily="18" charset="0"/>
+                <a:cs typeface="times" panose="02020603050405020304" pitchFamily="18" charset="0"/>
+              </a:rPr>
+              <a:t>y</a:t>
+            </a:r>
+            <a:endParaRPr kumimoji="1" lang="ja-JP" altLang="en-US" dirty="0">
+              <a:latin typeface="times" panose="02020603050405020304" pitchFamily="18" charset="0"/>
+              <a:cs typeface="times" panose="02020603050405020304" pitchFamily="18" charset="0"/>
+            </a:endParaRPr>
+          </a:p>
+        </p:txBody>
+      </p:sp>
+      <p:sp>
+        <p:nvSpPr>
+          <p:cNvPr id="8" name="TextBox 7">
+            <a:extLst>
+              <a:ext uri="{FF2B5EF4-FFF2-40B4-BE49-F238E27FC236}">
+                <a16:creationId xmlns:a16="http://schemas.microsoft.com/office/drawing/2014/main" id="{3D6FB2F9-CEEF-5C71-38C6-B799E7956BA7}"/>
+              </a:ext>
+            </a:extLst>
+          </p:cNvPr>
+          <p:cNvSpPr txBox="1"/>
+          <p:nvPr/>
+        </p:nvSpPr>
+        <p:spPr>
+          <a:xfrm>
+            <a:off x="4196797" y="1242299"/>
+            <a:ext cx="300082" cy="369332"/>
+          </a:xfrm>
+          <a:prstGeom prst="rect">
+            <a:avLst/>
+          </a:prstGeom>
+          <a:noFill/>
+        </p:spPr>
+        <p:txBody>
+          <a:bodyPr wrap="none" rtlCol="0">
+            <a:spAutoFit/>
+          </a:bodyPr>
+          <a:lstStyle/>
+          <a:p>
+            <a:r>
+              <a:rPr kumimoji="1" lang="en-US" altLang="ja-JP" dirty="0">
+                <a:latin typeface="times" panose="02020603050405020304" pitchFamily="18" charset="0"/>
+                <a:cs typeface="times" panose="02020603050405020304" pitchFamily="18" charset="0"/>
+              </a:rPr>
+              <a:t>x</a:t>
+            </a:r>
+            <a:endParaRPr kumimoji="1" lang="ja-JP" altLang="en-US" dirty="0">
+              <a:latin typeface="times" panose="02020603050405020304" pitchFamily="18" charset="0"/>
+              <a:cs typeface="times" panose="02020603050405020304" pitchFamily="18" charset="0"/>
+            </a:endParaRPr>
+          </a:p>
+        </p:txBody>
+      </p:sp>
+      <p:cxnSp>
+        <p:nvCxnSpPr>
+          <p:cNvPr id="9" name="Straight Arrow Connector 22">
+            <a:extLst>
+              <a:ext uri="{FF2B5EF4-FFF2-40B4-BE49-F238E27FC236}">
+                <a16:creationId xmlns:a16="http://schemas.microsoft.com/office/drawing/2014/main" id="{D51E3D2A-D8EB-0221-0D95-E2EDDF890051}"/>
+              </a:ext>
+            </a:extLst>
+          </p:cNvPr>
+          <p:cNvCxnSpPr>
+            <a:cxnSpLocks/>
+          </p:cNvCxnSpPr>
+          <p:nvPr/>
+        </p:nvCxnSpPr>
+        <p:spPr>
+          <a:xfrm flipH="1" flipV="1">
+            <a:off x="3445652" y="3216189"/>
+            <a:ext cx="715829" cy="230897"/>
+          </a:xfrm>
+          <a:prstGeom prst="straightConnector1">
+            <a:avLst/>
+          </a:prstGeom>
+          <a:ln>
+            <a:solidFill>
+              <a:srgbClr val="FF0000"/>
+            </a:solidFill>
+            <a:tailEnd type="triangle"/>
+          </a:ln>
+        </p:spPr>
+        <p:style>
+          <a:lnRef idx="2">
+            <a:schemeClr val="dk1"/>
+          </a:lnRef>
+          <a:fillRef idx="0">
+            <a:schemeClr val="dk1"/>
+          </a:fillRef>
+          <a:effectRef idx="1">
+            <a:schemeClr val="dk1"/>
+          </a:effectRef>
+          <a:fontRef idx="minor">
+            <a:schemeClr val="tx1"/>
+          </a:fontRef>
+        </p:style>
+      </p:cxnSp>
+      <p:cxnSp>
+        <p:nvCxnSpPr>
+          <p:cNvPr id="10" name="Straight Arrow Connector 19">
+            <a:extLst>
+              <a:ext uri="{FF2B5EF4-FFF2-40B4-BE49-F238E27FC236}">
+                <a16:creationId xmlns:a16="http://schemas.microsoft.com/office/drawing/2014/main" id="{B9FD379B-DBBB-FF5A-A185-5907F4F2BF8D}"/>
+              </a:ext>
+            </a:extLst>
+          </p:cNvPr>
+          <p:cNvCxnSpPr>
+            <a:cxnSpLocks/>
+          </p:cNvCxnSpPr>
+          <p:nvPr/>
+        </p:nvCxnSpPr>
+        <p:spPr>
+          <a:xfrm flipV="1">
+            <a:off x="3068160" y="3447086"/>
+            <a:ext cx="1128637" cy="1552529"/>
+          </a:xfrm>
+          <a:prstGeom prst="straightConnector1">
+            <a:avLst/>
+          </a:prstGeom>
+          <a:ln>
+            <a:prstDash val="sysDot"/>
+            <a:headEnd type="arrow" w="med" len="med"/>
+            <a:tailEnd type="none" w="med" len="med"/>
+          </a:ln>
+        </p:spPr>
+        <p:style>
+          <a:lnRef idx="2">
+            <a:schemeClr val="dk1"/>
+          </a:lnRef>
+          <a:fillRef idx="0">
+            <a:schemeClr val="dk1"/>
+          </a:fillRef>
+          <a:effectRef idx="1">
+            <a:schemeClr val="dk1"/>
+          </a:effectRef>
+          <a:fontRef idx="minor">
+            <a:schemeClr val="tx1"/>
+          </a:fontRef>
+        </p:style>
+      </p:cxnSp>
+      <p:sp>
+        <p:nvSpPr>
+          <p:cNvPr id="11" name="TextBox 10">
+            <a:extLst>
+              <a:ext uri="{FF2B5EF4-FFF2-40B4-BE49-F238E27FC236}">
+                <a16:creationId xmlns:a16="http://schemas.microsoft.com/office/drawing/2014/main" id="{A8631936-F4D8-87D8-2232-104A29320EC1}"/>
+              </a:ext>
+            </a:extLst>
+          </p:cNvPr>
+          <p:cNvSpPr txBox="1"/>
+          <p:nvPr/>
+        </p:nvSpPr>
+        <p:spPr>
+          <a:xfrm>
+            <a:off x="3145570" y="4877037"/>
+            <a:ext cx="300082" cy="369332"/>
+          </a:xfrm>
+          <a:prstGeom prst="rect">
+            <a:avLst/>
+          </a:prstGeom>
+          <a:noFill/>
+        </p:spPr>
+        <p:txBody>
+          <a:bodyPr wrap="square" rtlCol="0">
+            <a:spAutoFit/>
+          </a:bodyPr>
+          <a:lstStyle/>
+          <a:p>
+            <a:r>
+              <a:rPr kumimoji="1" lang="en-US" altLang="ja-JP" dirty="0">
+                <a:latin typeface="times" panose="02020603050405020304" pitchFamily="18" charset="0"/>
+                <a:cs typeface="times" panose="02020603050405020304" pitchFamily="18" charset="0"/>
+              </a:rPr>
+              <a:t>z</a:t>
+            </a:r>
+            <a:endParaRPr kumimoji="1" lang="ja-JP" altLang="en-US" dirty="0">
+              <a:latin typeface="times" panose="02020603050405020304" pitchFamily="18" charset="0"/>
+              <a:cs typeface="times" panose="02020603050405020304" pitchFamily="18" charset="0"/>
+            </a:endParaRPr>
+          </a:p>
+        </p:txBody>
+      </p:sp>
+      <p:sp>
+        <p:nvSpPr>
+          <p:cNvPr id="16" name="막힌 원호 15">
+            <a:extLst>
+              <a:ext uri="{FF2B5EF4-FFF2-40B4-BE49-F238E27FC236}">
+                <a16:creationId xmlns:a16="http://schemas.microsoft.com/office/drawing/2014/main" id="{EDF5AAF4-1BED-B736-D163-3561D851422D}"/>
+              </a:ext>
+            </a:extLst>
+          </p:cNvPr>
+          <p:cNvSpPr/>
+          <p:nvPr/>
+        </p:nvSpPr>
+        <p:spPr>
+          <a:xfrm rot="14184790">
+            <a:off x="3867961" y="3446576"/>
+            <a:ext cx="279822" cy="141896"/>
+          </a:xfrm>
+          <a:prstGeom prst="blockArc">
+            <a:avLst>
+              <a:gd name="adj1" fmla="val 10800000"/>
+              <a:gd name="adj2" fmla="val 21574061"/>
+              <a:gd name="adj3" fmla="val 0"/>
+            </a:avLst>
+          </a:prstGeom>
+        </p:spPr>
+        <p:style>
+          <a:lnRef idx="2">
+            <a:schemeClr val="accent1">
+              <a:shade val="15000"/>
+            </a:schemeClr>
+          </a:lnRef>
+          <a:fillRef idx="1">
+            <a:schemeClr val="accent1"/>
+          </a:fillRef>
+          <a:effectRef idx="0">
+            <a:schemeClr val="accent1"/>
+          </a:effectRef>
+          <a:fontRef idx="minor">
+            <a:schemeClr val="lt1"/>
+          </a:fontRef>
+        </p:style>
+        <p:txBody>
+          <a:bodyPr rtlCol="0" anchor="ctr"/>
+          <a:lstStyle/>
+          <a:p>
+            <a:pPr algn="ctr"/>
+            <a:endParaRPr lang="en-US">
+              <a:solidFill>
+                <a:schemeClr val="tx1"/>
+              </a:solidFill>
+            </a:endParaRPr>
+          </a:p>
+        </p:txBody>
+      </p:sp>
+      <mc:AlternateContent xmlns:mc="http://schemas.openxmlformats.org/markup-compatibility/2006">
+        <mc:Choice xmlns:a14="http://schemas.microsoft.com/office/drawing/2010/main" Requires="a14">
+          <p:sp>
+            <p:nvSpPr>
+              <p:cNvPr id="17" name="TextBox 16">
+                <a:extLst>
+                  <a:ext uri="{FF2B5EF4-FFF2-40B4-BE49-F238E27FC236}">
+                    <a16:creationId xmlns:a16="http://schemas.microsoft.com/office/drawing/2014/main" id="{7440D176-7991-90F6-4B0F-AD3F045B9EE7}"/>
+                  </a:ext>
+                </a:extLst>
+              </p:cNvPr>
+              <p:cNvSpPr txBox="1"/>
+              <p:nvPr/>
+            </p:nvSpPr>
+            <p:spPr>
+              <a:xfrm>
+                <a:off x="3694070" y="3439737"/>
+                <a:ext cx="270330" cy="369332"/>
+              </a:xfrm>
+              <a:prstGeom prst="rect">
+                <a:avLst/>
+              </a:prstGeom>
+              <a:noFill/>
+            </p:spPr>
+            <p:txBody>
+              <a:bodyPr wrap="none" lIns="0" tIns="0" rIns="0" bIns="0" rtlCol="0">
+                <a:spAutoFit/>
+              </a:bodyPr>
+              <a:lstStyle/>
+              <a:p>
+                <a:pPr/>
+                <a14:m>
+                  <m:oMathPara xmlns:m="http://schemas.openxmlformats.org/officeDocument/2006/math">
+                    <m:oMathParaPr>
+                      <m:jc m:val="centerGroup"/>
+                    </m:oMathParaPr>
+                    <m:oMath xmlns:m="http://schemas.openxmlformats.org/officeDocument/2006/math">
+                      <m:r>
+                        <a:rPr lang="en-US" sz="2400" i="1" smtClean="0">
+                          <a:latin typeface="Cambria Math" panose="02040503050406030204" pitchFamily="18" charset="0"/>
+                          <a:ea typeface="Cambria Math" panose="02040503050406030204" pitchFamily="18" charset="0"/>
+                        </a:rPr>
+                        <m:t>𝜃</m:t>
+                      </m:r>
+                    </m:oMath>
+                  </m:oMathPara>
+                </a14:m>
+                <a:endParaRPr lang="en-US" sz="2400" dirty="0"/>
+              </a:p>
+            </p:txBody>
+          </p:sp>
+        </mc:Choice>
+        <mc:Fallback>
+          <p:sp>
+            <p:nvSpPr>
+              <p:cNvPr id="17" name="TextBox 16">
+                <a:extLst>
+                  <a:ext uri="{FF2B5EF4-FFF2-40B4-BE49-F238E27FC236}">
+                    <a16:creationId xmlns:a16="http://schemas.microsoft.com/office/drawing/2014/main" id="{7440D176-7991-90F6-4B0F-AD3F045B9EE7}"/>
+                  </a:ext>
+                </a:extLst>
+              </p:cNvPr>
+              <p:cNvSpPr txBox="1">
+                <a:spLocks noRot="1" noChangeAspect="1" noMove="1" noResize="1" noEditPoints="1" noAdjustHandles="1" noChangeArrowheads="1" noChangeShapeType="1" noTextEdit="1"/>
+              </p:cNvSpPr>
+              <p:nvPr/>
+            </p:nvSpPr>
+            <p:spPr>
+              <a:xfrm>
+                <a:off x="3694070" y="3439737"/>
+                <a:ext cx="270330" cy="369332"/>
+              </a:xfrm>
+              <a:prstGeom prst="rect">
+                <a:avLst/>
+              </a:prstGeom>
+              <a:blipFill>
+                <a:blip r:embed="rId2"/>
+                <a:stretch>
+                  <a:fillRect l="-25000" r="-18182" b="-4918"/>
+                </a:stretch>
+              </a:blipFill>
+            </p:spPr>
+            <p:txBody>
+              <a:bodyPr/>
+              <a:lstStyle/>
+              <a:p>
+                <a:r>
+                  <a:rPr lang="en-US">
+                    <a:noFill/>
+                  </a:rPr>
+                  <a:t> </a:t>
+                </a:r>
+              </a:p>
+            </p:txBody>
+          </p:sp>
+        </mc:Fallback>
+      </mc:AlternateContent>
+      <p:sp>
+        <p:nvSpPr>
+          <p:cNvPr id="20" name="평행 사변형 19">
+            <a:extLst>
+              <a:ext uri="{FF2B5EF4-FFF2-40B4-BE49-F238E27FC236}">
+                <a16:creationId xmlns:a16="http://schemas.microsoft.com/office/drawing/2014/main" id="{40D37189-5906-ACDA-8E6B-7594B8B30C1D}"/>
+              </a:ext>
+            </a:extLst>
+          </p:cNvPr>
+          <p:cNvSpPr/>
+          <p:nvPr/>
+        </p:nvSpPr>
+        <p:spPr>
+          <a:xfrm rot="809408">
+            <a:off x="1849987" y="995836"/>
+            <a:ext cx="4693622" cy="4440704"/>
+          </a:xfrm>
+          <a:prstGeom prst="parallelogram">
+            <a:avLst/>
+          </a:prstGeom>
+          <a:solidFill>
+            <a:srgbClr val="324D66">
+              <a:alpha val="20000"/>
+            </a:srgbClr>
+          </a:solidFill>
+        </p:spPr>
+        <p:style>
+          <a:lnRef idx="2">
+            <a:schemeClr val="accent1">
+              <a:shade val="15000"/>
+            </a:schemeClr>
+          </a:lnRef>
+          <a:fillRef idx="1">
+            <a:schemeClr val="accent1"/>
+          </a:fillRef>
+          <a:effectRef idx="0">
+            <a:schemeClr val="accent1"/>
+          </a:effectRef>
+          <a:fontRef idx="minor">
+            <a:schemeClr val="lt1"/>
+          </a:fontRef>
+        </p:style>
+        <p:txBody>
+          <a:bodyPr rtlCol="0" anchor="ctr"/>
+          <a:lstStyle/>
+          <a:p>
+            <a:pPr algn="ctr"/>
+            <a:endParaRPr lang="en-US" dirty="0"/>
+          </a:p>
+        </p:txBody>
+      </p:sp>
+      <p:cxnSp>
+        <p:nvCxnSpPr>
+          <p:cNvPr id="35" name="직선 연결선 34">
+            <a:extLst>
+              <a:ext uri="{FF2B5EF4-FFF2-40B4-BE49-F238E27FC236}">
+                <a16:creationId xmlns:a16="http://schemas.microsoft.com/office/drawing/2014/main" id="{1C144106-931E-4B17-7E10-56DD87B9924B}"/>
+              </a:ext>
+            </a:extLst>
+          </p:cNvPr>
+          <p:cNvCxnSpPr>
+            <a:cxnSpLocks/>
+          </p:cNvCxnSpPr>
+          <p:nvPr/>
+        </p:nvCxnSpPr>
+        <p:spPr>
+          <a:xfrm>
+            <a:off x="2597150" y="2527300"/>
+            <a:ext cx="2997200" cy="1758950"/>
+          </a:xfrm>
+          <a:prstGeom prst="line">
+            <a:avLst/>
+          </a:prstGeom>
+          <a:ln>
+            <a:prstDash val="dash"/>
+          </a:ln>
+        </p:spPr>
+        <p:style>
+          <a:lnRef idx="2">
+            <a:schemeClr val="accent1"/>
+          </a:lnRef>
+          <a:fillRef idx="0">
+            <a:schemeClr val="accent1"/>
+          </a:fillRef>
+          <a:effectRef idx="1">
+            <a:schemeClr val="accent1"/>
+          </a:effectRef>
+          <a:fontRef idx="minor">
+            <a:schemeClr val="tx1"/>
+          </a:fontRef>
+        </p:style>
+      </p:cxnSp>
+      <mc:AlternateContent xmlns:mc="http://schemas.openxmlformats.org/markup-compatibility/2006">
+        <mc:Choice xmlns:a14="http://schemas.microsoft.com/office/drawing/2010/main" Requires="a14">
+          <p:sp>
+            <p:nvSpPr>
+              <p:cNvPr id="42" name="TextBox 41">
+                <a:extLst>
+                  <a:ext uri="{FF2B5EF4-FFF2-40B4-BE49-F238E27FC236}">
+                    <a16:creationId xmlns:a16="http://schemas.microsoft.com/office/drawing/2014/main" id="{AF4C7975-B001-A1D7-2EA6-590C481C18EC}"/>
+                  </a:ext>
+                </a:extLst>
+              </p:cNvPr>
+              <p:cNvSpPr txBox="1"/>
+              <p:nvPr/>
+            </p:nvSpPr>
+            <p:spPr>
+              <a:xfrm rot="21330595">
+                <a:off x="2941996" y="2345647"/>
+                <a:ext cx="578620" cy="369332"/>
+              </a:xfrm>
+              <a:prstGeom prst="rect">
+                <a:avLst/>
+              </a:prstGeom>
+              <a:noFill/>
+            </p:spPr>
+            <p:txBody>
+              <a:bodyPr wrap="none" lIns="0" tIns="0" rIns="0" bIns="0" rtlCol="0">
+                <a:spAutoFit/>
+              </a:bodyPr>
+              <a:lstStyle/>
+              <a:p>
+                <a:pPr/>
+                <a14:m>
+                  <m:oMathPara xmlns:m="http://schemas.openxmlformats.org/officeDocument/2006/math">
+                    <m:oMathParaPr>
+                      <m:jc m:val="centerGroup"/>
+                    </m:oMathParaPr>
+                    <m:oMath xmlns:m="http://schemas.openxmlformats.org/officeDocument/2006/math">
+                      <m:sSub>
+                        <m:sSubPr>
+                          <m:ctrlPr>
+                            <a:rPr lang="en-US" sz="2400" i="1" smtClean="0">
+                              <a:latin typeface="Cambria Math" panose="02040503050406030204" pitchFamily="18" charset="0"/>
+                            </a:rPr>
+                          </m:ctrlPr>
+                        </m:sSubPr>
+                        <m:e>
+                          <m:r>
+                            <a:rPr lang="en-US" sz="2400" b="0" i="1" smtClean="0">
+                              <a:latin typeface="Cambria Math" panose="02040503050406030204" pitchFamily="18" charset="0"/>
+                            </a:rPr>
+                            <m:t>𝐸</m:t>
+                          </m:r>
+                        </m:e>
+                        <m:sub>
+                          <m:r>
+                            <a:rPr lang="en-US" sz="2400" b="0" i="1" smtClean="0">
+                              <a:latin typeface="Cambria Math" panose="02040503050406030204" pitchFamily="18" charset="0"/>
+                            </a:rPr>
+                            <m:t>𝑇𝐸</m:t>
+                          </m:r>
+                        </m:sub>
+                      </m:sSub>
+                    </m:oMath>
+                  </m:oMathPara>
+                </a14:m>
+                <a:endParaRPr lang="en-US" sz="2400" dirty="0"/>
+              </a:p>
+            </p:txBody>
+          </p:sp>
+        </mc:Choice>
+        <mc:Fallback>
+          <p:sp>
+            <p:nvSpPr>
+              <p:cNvPr id="42" name="TextBox 41">
+                <a:extLst>
+                  <a:ext uri="{FF2B5EF4-FFF2-40B4-BE49-F238E27FC236}">
+                    <a16:creationId xmlns:a16="http://schemas.microsoft.com/office/drawing/2014/main" id="{AF4C7975-B001-A1D7-2EA6-590C481C18EC}"/>
+                  </a:ext>
+                </a:extLst>
+              </p:cNvPr>
+              <p:cNvSpPr txBox="1">
+                <a:spLocks noRot="1" noChangeAspect="1" noMove="1" noResize="1" noEditPoints="1" noAdjustHandles="1" noChangeArrowheads="1" noChangeShapeType="1" noTextEdit="1"/>
+              </p:cNvSpPr>
+              <p:nvPr/>
+            </p:nvSpPr>
+            <p:spPr>
+              <a:xfrm rot="21330595">
+                <a:off x="2941996" y="2345647"/>
+                <a:ext cx="578620" cy="369332"/>
+              </a:xfrm>
+              <a:prstGeom prst="rect">
+                <a:avLst/>
+              </a:prstGeom>
+              <a:blipFill>
+                <a:blip r:embed="rId3"/>
+                <a:stretch>
+                  <a:fillRect l="-9000" r="-2000" b="-7353"/>
+                </a:stretch>
+              </a:blipFill>
+            </p:spPr>
+            <p:txBody>
+              <a:bodyPr/>
+              <a:lstStyle/>
+              <a:p>
+                <a:r>
+                  <a:rPr lang="en-US">
+                    <a:noFill/>
+                  </a:rPr>
+                  <a:t> </a:t>
+                </a:r>
+              </a:p>
+            </p:txBody>
+          </p:sp>
+        </mc:Fallback>
+      </mc:AlternateContent>
+    </p:spTree>
+    <p:extLst>
+      <p:ext uri="{BB962C8B-B14F-4D97-AF65-F5344CB8AC3E}">
+        <p14:creationId xmlns:p14="http://schemas.microsoft.com/office/powerpoint/2010/main" val="2999866464"/>
       </p:ext>
     </p:extLst>
   </p:cSld>
@@ -10027,15 +12554,6 @@
 </file>
 
 <file path=customXml/item1.xml><?xml version="1.0" encoding="utf-8"?>
-<?mso-contentType ?>
-<FormTemplates xmlns="http://schemas.microsoft.com/sharepoint/v3/contenttype/forms">
-  <Display>DocumentLibraryForm</Display>
-  <Edit>DocumentLibraryForm</Edit>
-  <New>DocumentLibraryForm</New>
-</FormTemplates>
-</file>
-
-<file path=customXml/item2.xml><?xml version="1.0" encoding="utf-8"?>
 <ct:contentTypeSchema xmlns:ct="http://schemas.microsoft.com/office/2006/metadata/contentType" xmlns:ma="http://schemas.microsoft.com/office/2006/metadata/properties/metaAttributes" ct:_="" ma:_="" ma:contentTypeName="ドキュメント" ma:contentTypeID="0x010100D291828BE931164DA279E7DB37510E8B" ma:contentTypeVersion="12" ma:contentTypeDescription="新しいドキュメントを作成します。" ma:contentTypeScope="" ma:versionID="d40e79753e265535ebdef0a9a1630dbe">
   <xsd:schema xmlns:xsd="http://www.w3.org/2001/XMLSchema" xmlns:xs="http://www.w3.org/2001/XMLSchema" xmlns:p="http://schemas.microsoft.com/office/2006/metadata/properties" xmlns:ns3="e5fea337-426f-4878-aaa1-6cc4dbed00d3" targetNamespace="http://schemas.microsoft.com/office/2006/metadata/properties" ma:root="true" ma:fieldsID="909ec013045a4ae227a46cef79b1603d" ns3:_="">
     <xsd:import namespace="e5fea337-426f-4878-aaa1-6cc4dbed00d3"/>
@@ -10229,6 +12747,15 @@
 </ct:contentTypeSchema>
 </file>
 
+<file path=customXml/item2.xml><?xml version="1.0" encoding="utf-8"?>
+<?mso-contentType ?>
+<FormTemplates xmlns="http://schemas.microsoft.com/sharepoint/v3/contenttype/forms">
+  <Display>DocumentLibraryForm</Display>
+  <Edit>DocumentLibraryForm</Edit>
+  <New>DocumentLibraryForm</New>
+</FormTemplates>
+</file>
+
 <file path=customXml/item3.xml><?xml version="1.0" encoding="utf-8"?>
 <p:properties xmlns:p="http://schemas.microsoft.com/office/2006/metadata/properties" xmlns:xsi="http://www.w3.org/2001/XMLSchema-instance" xmlns:pc="http://schemas.microsoft.com/office/infopath/2007/PartnerControls">
   <documentManagement>
@@ -10238,14 +12765,6 @@
 </file>
 
 <file path=customXml/itemProps1.xml><?xml version="1.0" encoding="utf-8"?>
-<ds:datastoreItem xmlns:ds="http://schemas.openxmlformats.org/officeDocument/2006/customXml" ds:itemID="{EBB85C3E-FFAD-4A75-A769-4B97E54A903C}">
-  <ds:schemaRefs>
-    <ds:schemaRef ds:uri="http://schemas.microsoft.com/sharepoint/v3/contenttype/forms"/>
-  </ds:schemaRefs>
-</ds:datastoreItem>
-</file>
-
-<file path=customXml/itemProps2.xml><?xml version="1.0" encoding="utf-8"?>
 <ds:datastoreItem xmlns:ds="http://schemas.openxmlformats.org/officeDocument/2006/customXml" ds:itemID="{6231A16C-3E0A-4893-9CB3-DA6770BA5700}">
   <ds:schemaRefs>
     <ds:schemaRef ds:uri="http://schemas.microsoft.com/office/2006/metadata/contentType"/>
@@ -10259,6 +12778,14 @@
     <ds:schemaRef ds:uri="http://purl.org/dc/elements/1.1/"/>
     <ds:schemaRef ds:uri="http://purl.org/dc/terms/"/>
     <ds:schemaRef ds:uri="http://schemas.microsoft.com/internal/obd"/>
+  </ds:schemaRefs>
+</ds:datastoreItem>
+</file>
+
+<file path=customXml/itemProps2.xml><?xml version="1.0" encoding="utf-8"?>
+<ds:datastoreItem xmlns:ds="http://schemas.openxmlformats.org/officeDocument/2006/customXml" ds:itemID="{EBB85C3E-FFAD-4A75-A769-4B97E54A903C}">
+  <ds:schemaRefs>
+    <ds:schemaRef ds:uri="http://schemas.microsoft.com/sharepoint/v3/contenttype/forms"/>
   </ds:schemaRefs>
 </ds:datastoreItem>
 </file>

--- a/Materials.pptx
+++ b/Materials.pptx
@@ -8,14 +8,15 @@
     <p:sldId id="256" r:id="rId5"/>
     <p:sldId id="257" r:id="rId6"/>
     <p:sldId id="258" r:id="rId7"/>
-    <p:sldId id="259" r:id="rId8"/>
-    <p:sldId id="260" r:id="rId9"/>
-    <p:sldId id="261" r:id="rId10"/>
-    <p:sldId id="262" r:id="rId11"/>
-    <p:sldId id="263" r:id="rId12"/>
-    <p:sldId id="264" r:id="rId13"/>
-    <p:sldId id="266" r:id="rId14"/>
-    <p:sldId id="267" r:id="rId15"/>
+    <p:sldId id="268" r:id="rId8"/>
+    <p:sldId id="259" r:id="rId9"/>
+    <p:sldId id="260" r:id="rId10"/>
+    <p:sldId id="261" r:id="rId11"/>
+    <p:sldId id="262" r:id="rId12"/>
+    <p:sldId id="263" r:id="rId13"/>
+    <p:sldId id="264" r:id="rId14"/>
+    <p:sldId id="266" r:id="rId15"/>
+    <p:sldId id="267" r:id="rId16"/>
   </p:sldIdLst>
   <p:sldSz cx="12192000" cy="6858000"/>
   <p:notesSz cx="6858000" cy="9144000"/>
@@ -125,7 +126,7 @@
 <file path=ppt/revisionInfo.xml><?xml version="1.0" encoding="utf-8"?>
 <p1510:revInfo xmlns:a="http://schemas.openxmlformats.org/drawingml/2006/main" xmlns:r="http://schemas.openxmlformats.org/officeDocument/2006/relationships" xmlns:p1510="http://schemas.microsoft.com/office/powerpoint/2015/10/main">
   <p1510:revLst>
-    <p1510:client id="{D7E556E5-4621-4DA7-B0AC-26EEABCF8A3F}" v="25" dt="2026-06-11T12:42:04.323"/>
+    <p1510:client id="{C7F86D9B-447A-41E3-A63F-8920382A99EF}" v="4" dt="2026-07-17T03:13:44.785"/>
   </p1510:revLst>
 </p1510:revInfo>
 </file>
@@ -135,230 +136,110 @@
   <pc:docChgLst>
     <pc:chgData name="全 香玉" userId="1f3450e5-81b9-4f7a-82d7-841c32c029e0" providerId="ADAL" clId="{670531AC-1667-4F97-B1A6-5D38F8A44A79}"/>
     <pc:docChg chg="undo custSel addSld modSld">
-      <pc:chgData name="全 香玉" userId="1f3450e5-81b9-4f7a-82d7-841c32c029e0" providerId="ADAL" clId="{670531AC-1667-4F97-B1A6-5D38F8A44A79}" dt="2026-06-11T12:42:08.875" v="128" actId="1076"/>
+      <pc:chgData name="全 香玉" userId="1f3450e5-81b9-4f7a-82d7-841c32c029e0" providerId="ADAL" clId="{670531AC-1667-4F97-B1A6-5D38F8A44A79}" dt="2026-07-17T03:13:46.705" v="188" actId="20577"/>
       <pc:docMkLst>
         <pc:docMk/>
       </pc:docMkLst>
       <pc:sldChg chg="addSp delSp modSp add mod">
-        <pc:chgData name="全 香玉" userId="1f3450e5-81b9-4f7a-82d7-841c32c029e0" providerId="ADAL" clId="{670531AC-1667-4F97-B1A6-5D38F8A44A79}" dt="2026-06-11T12:42:08.875" v="128" actId="1076"/>
+        <pc:chgData name="全 香玉" userId="1f3450e5-81b9-4f7a-82d7-841c32c029e0" providerId="ADAL" clId="{670531AC-1667-4F97-B1A6-5D38F8A44A79}" dt="2026-07-17T03:13:46.705" v="188" actId="20577"/>
         <pc:sldMkLst>
           <pc:docMk/>
-          <pc:sldMk cId="3363106213" sldId="262"/>
+          <pc:sldMk cId="3041934445" sldId="268"/>
         </pc:sldMkLst>
-        <pc:spChg chg="add del mod ord">
-          <ac:chgData name="全 香玉" userId="1f3450e5-81b9-4f7a-82d7-841c32c029e0" providerId="ADAL" clId="{670531AC-1667-4F97-B1A6-5D38F8A44A79}" dt="2026-06-11T12:37:32.504" v="32" actId="478"/>
+        <pc:spChg chg="del mod">
+          <ac:chgData name="全 香玉" userId="1f3450e5-81b9-4f7a-82d7-841c32c029e0" providerId="ADAL" clId="{670531AC-1667-4F97-B1A6-5D38F8A44A79}" dt="2026-07-17T03:09:15.268" v="157" actId="478"/>
           <ac:spMkLst>
             <pc:docMk/>
-            <pc:sldMk cId="3363106213" sldId="262"/>
-            <ac:spMk id="13" creationId="{F1B90D87-F2AE-676A-5DCE-4A8F59658478}"/>
+            <pc:sldMk cId="3041934445" sldId="268"/>
+            <ac:spMk id="14" creationId="{F4632D58-47AB-1274-78A2-C3A4C9BBB101}"/>
+          </ac:spMkLst>
+        </pc:spChg>
+        <pc:spChg chg="mod">
+          <ac:chgData name="全 香玉" userId="1f3450e5-81b9-4f7a-82d7-841c32c029e0" providerId="ADAL" clId="{670531AC-1667-4F97-B1A6-5D38F8A44A79}" dt="2026-07-17T03:08:21.525" v="154" actId="1076"/>
+          <ac:spMkLst>
+            <pc:docMk/>
+            <pc:sldMk cId="3041934445" sldId="268"/>
+            <ac:spMk id="16" creationId="{C5B0D60D-1456-3E1C-73F8-93DE5569D9AF}"/>
+          </ac:spMkLst>
+        </pc:spChg>
+        <pc:spChg chg="mod">
+          <ac:chgData name="全 香玉" userId="1f3450e5-81b9-4f7a-82d7-841c32c029e0" providerId="ADAL" clId="{670531AC-1667-4F97-B1A6-5D38F8A44A79}" dt="2026-07-17T03:13:46.705" v="188" actId="20577"/>
+          <ac:spMkLst>
+            <pc:docMk/>
+            <pc:sldMk cId="3041934445" sldId="268"/>
+            <ac:spMk id="17" creationId="{E62A6218-D51E-A281-2173-9DE048FA601F}"/>
+          </ac:spMkLst>
+        </pc:spChg>
+        <pc:spChg chg="del mod">
+          <ac:chgData name="全 香玉" userId="1f3450e5-81b9-4f7a-82d7-841c32c029e0" providerId="ADAL" clId="{670531AC-1667-4F97-B1A6-5D38F8A44A79}" dt="2026-07-17T03:09:17.007" v="158" actId="478"/>
+          <ac:spMkLst>
+            <pc:docMk/>
+            <pc:sldMk cId="3041934445" sldId="268"/>
+            <ac:spMk id="18" creationId="{8069AF3B-A6BD-F688-6E11-3E379DA2E062}"/>
+          </ac:spMkLst>
+        </pc:spChg>
+        <pc:spChg chg="add del mod">
+          <ac:chgData name="全 香玉" userId="1f3450e5-81b9-4f7a-82d7-841c32c029e0" providerId="ADAL" clId="{670531AC-1667-4F97-B1A6-5D38F8A44A79}" dt="2026-07-17T03:09:54.961" v="170" actId="22"/>
+          <ac:spMkLst>
+            <pc:docMk/>
+            <pc:sldMk cId="3041934445" sldId="268"/>
+            <ac:spMk id="42" creationId="{8B973AEE-D6A4-2C31-3023-0AE4B2A550CA}"/>
+          </ac:spMkLst>
+        </pc:spChg>
+        <pc:spChg chg="add del mod">
+          <ac:chgData name="全 香玉" userId="1f3450e5-81b9-4f7a-82d7-841c32c029e0" providerId="ADAL" clId="{670531AC-1667-4F97-B1A6-5D38F8A44A79}" dt="2026-07-17T03:09:49.652" v="166" actId="22"/>
+          <ac:spMkLst>
+            <pc:docMk/>
+            <pc:sldMk cId="3041934445" sldId="268"/>
+            <ac:spMk id="44" creationId="{C02D52AB-BB4C-8DD4-F5DD-1971DA2445B6}"/>
           </ac:spMkLst>
         </pc:spChg>
         <pc:spChg chg="add mod">
-          <ac:chgData name="全 香玉" userId="1f3450e5-81b9-4f7a-82d7-841c32c029e0" providerId="ADAL" clId="{670531AC-1667-4F97-B1A6-5D38F8A44A79}" dt="2026-06-11T12:36:43.075" v="16" actId="1076"/>
+          <ac:chgData name="全 香玉" userId="1f3450e5-81b9-4f7a-82d7-841c32c029e0" providerId="ADAL" clId="{670531AC-1667-4F97-B1A6-5D38F8A44A79}" dt="2026-07-17T03:13:26.421" v="186" actId="20577"/>
           <ac:spMkLst>
             <pc:docMk/>
-            <pc:sldMk cId="3363106213" sldId="262"/>
-            <ac:spMk id="14" creationId="{AA898FDB-40F3-868E-F9BA-AC4B9F3D2D96}"/>
+            <pc:sldMk cId="3041934445" sldId="268"/>
+            <ac:spMk id="54" creationId="{287BF06D-E5D3-14D7-4367-5633832A9E6C}"/>
           </ac:spMkLst>
         </pc:spChg>
         <pc:spChg chg="add mod">
-          <ac:chgData name="全 香玉" userId="1f3450e5-81b9-4f7a-82d7-841c32c029e0" providerId="ADAL" clId="{670531AC-1667-4F97-B1A6-5D38F8A44A79}" dt="2026-06-11T12:37:31.197" v="31" actId="14100"/>
+          <ac:chgData name="全 香玉" userId="1f3450e5-81b9-4f7a-82d7-841c32c029e0" providerId="ADAL" clId="{670531AC-1667-4F97-B1A6-5D38F8A44A79}" dt="2026-07-17T03:13:16.977" v="183" actId="1076"/>
           <ac:spMkLst>
             <pc:docMk/>
-            <pc:sldMk cId="3363106213" sldId="262"/>
-            <ac:spMk id="15" creationId="{83FD3DB5-19E4-3FCC-22A3-F9F8A4FE7211}"/>
-          </ac:spMkLst>
-        </pc:spChg>
-        <pc:spChg chg="add del mod">
-          <ac:chgData name="全 香玉" userId="1f3450e5-81b9-4f7a-82d7-841c32c029e0" providerId="ADAL" clId="{670531AC-1667-4F97-B1A6-5D38F8A44A79}" dt="2026-06-11T12:37:33.354" v="33" actId="478"/>
-          <ac:spMkLst>
-            <pc:docMk/>
-            <pc:sldMk cId="3363106213" sldId="262"/>
-            <ac:spMk id="16" creationId="{E065223F-2AAC-A58A-6759-C86C4B796E09}"/>
-          </ac:spMkLst>
-        </pc:spChg>
-        <pc:spChg chg="add del mod">
-          <ac:chgData name="全 香玉" userId="1f3450e5-81b9-4f7a-82d7-841c32c029e0" providerId="ADAL" clId="{670531AC-1667-4F97-B1A6-5D38F8A44A79}" dt="2026-06-11T12:37:33.919" v="34" actId="478"/>
-          <ac:spMkLst>
-            <pc:docMk/>
-            <pc:sldMk cId="3363106213" sldId="262"/>
-            <ac:spMk id="19" creationId="{0DBC9D3F-8367-B8A9-4ADE-9D4F8E53F19C}"/>
-          </ac:spMkLst>
-        </pc:spChg>
-        <pc:spChg chg="add del mod">
-          <ac:chgData name="全 香玉" userId="1f3450e5-81b9-4f7a-82d7-841c32c029e0" providerId="ADAL" clId="{670531AC-1667-4F97-B1A6-5D38F8A44A79}" dt="2026-06-11T12:37:34.535" v="35" actId="478"/>
-          <ac:spMkLst>
-            <pc:docMk/>
-            <pc:sldMk cId="3363106213" sldId="262"/>
-            <ac:spMk id="22" creationId="{D0060E31-5B50-9745-8369-BA851F453DE5}"/>
-          </ac:spMkLst>
-        </pc:spChg>
-        <pc:spChg chg="add mod">
-          <ac:chgData name="全 香玉" userId="1f3450e5-81b9-4f7a-82d7-841c32c029e0" providerId="ADAL" clId="{670531AC-1667-4F97-B1A6-5D38F8A44A79}" dt="2026-06-11T12:38:07.283" v="47" actId="1076"/>
-          <ac:spMkLst>
-            <pc:docMk/>
-            <pc:sldMk cId="3363106213" sldId="262"/>
-            <ac:spMk id="24" creationId="{E168952E-433B-1F90-F5D4-5DA21FCFBE26}"/>
-          </ac:spMkLst>
-        </pc:spChg>
-        <pc:spChg chg="add mod">
-          <ac:chgData name="全 香玉" userId="1f3450e5-81b9-4f7a-82d7-841c32c029e0" providerId="ADAL" clId="{670531AC-1667-4F97-B1A6-5D38F8A44A79}" dt="2026-06-11T12:38:05.873" v="46" actId="1076"/>
-          <ac:spMkLst>
-            <pc:docMk/>
-            <pc:sldMk cId="3363106213" sldId="262"/>
-            <ac:spMk id="25" creationId="{E7AC7E87-E228-D025-A0CE-F1770156BE28}"/>
-          </ac:spMkLst>
-        </pc:spChg>
-        <pc:spChg chg="add mod">
-          <ac:chgData name="全 香玉" userId="1f3450e5-81b9-4f7a-82d7-841c32c029e0" providerId="ADAL" clId="{670531AC-1667-4F97-B1A6-5D38F8A44A79}" dt="2026-06-11T12:38:04.241" v="45" actId="1076"/>
-          <ac:spMkLst>
-            <pc:docMk/>
-            <pc:sldMk cId="3363106213" sldId="262"/>
-            <ac:spMk id="29" creationId="{71D2D838-CEC3-A7E7-01E8-7F43A7074F83}"/>
-          </ac:spMkLst>
-        </pc:spChg>
-        <pc:spChg chg="add mod">
-          <ac:chgData name="全 香玉" userId="1f3450e5-81b9-4f7a-82d7-841c32c029e0" providerId="ADAL" clId="{670531AC-1667-4F97-B1A6-5D38F8A44A79}" dt="2026-06-11T12:38:03.008" v="44" actId="1076"/>
-          <ac:spMkLst>
-            <pc:docMk/>
-            <pc:sldMk cId="3363106213" sldId="262"/>
-            <ac:spMk id="30" creationId="{E70D00BF-2DA4-B210-B70F-331637E1798E}"/>
-          </ac:spMkLst>
-        </pc:spChg>
-        <pc:spChg chg="add mod">
-          <ac:chgData name="全 香玉" userId="1f3450e5-81b9-4f7a-82d7-841c32c029e0" providerId="ADAL" clId="{670531AC-1667-4F97-B1A6-5D38F8A44A79}" dt="2026-06-11T12:39:43.475" v="93" actId="1076"/>
-          <ac:spMkLst>
-            <pc:docMk/>
-            <pc:sldMk cId="3363106213" sldId="262"/>
-            <ac:spMk id="37" creationId="{6388989A-2EB6-A86C-015D-D2A8792D4FCF}"/>
-          </ac:spMkLst>
-        </pc:spChg>
-        <pc:spChg chg="add mod">
-          <ac:chgData name="全 香玉" userId="1f3450e5-81b9-4f7a-82d7-841c32c029e0" providerId="ADAL" clId="{670531AC-1667-4F97-B1A6-5D38F8A44A79}" dt="2026-06-11T12:40:50.395" v="102" actId="1076"/>
-          <ac:spMkLst>
-            <pc:docMk/>
-            <pc:sldMk cId="3363106213" sldId="262"/>
-            <ac:spMk id="38" creationId="{2B0282C4-34AC-42E7-8F53-F6A4BE656C29}"/>
-          </ac:spMkLst>
-        </pc:spChg>
-        <pc:spChg chg="add mod">
-          <ac:chgData name="全 香玉" userId="1f3450e5-81b9-4f7a-82d7-841c32c029e0" providerId="ADAL" clId="{670531AC-1667-4F97-B1A6-5D38F8A44A79}" dt="2026-06-11T12:42:00.577" v="125" actId="14100"/>
-          <ac:spMkLst>
-            <pc:docMk/>
-            <pc:sldMk cId="3363106213" sldId="262"/>
-            <ac:spMk id="39" creationId="{B2C1686C-695C-F70C-BAD6-9341B75390C3}"/>
-          </ac:spMkLst>
-        </pc:spChg>
-        <pc:spChg chg="add del mod">
-          <ac:chgData name="全 香玉" userId="1f3450e5-81b9-4f7a-82d7-841c32c029e0" providerId="ADAL" clId="{670531AC-1667-4F97-B1A6-5D38F8A44A79}" dt="2026-06-11T12:42:02.238" v="126" actId="478"/>
-          <ac:spMkLst>
-            <pc:docMk/>
-            <pc:sldMk cId="3363106213" sldId="262"/>
-            <ac:spMk id="40" creationId="{709F6137-03BC-240E-8B6A-0D01AE516847}"/>
-          </ac:spMkLst>
-        </pc:spChg>
-        <pc:spChg chg="add mod">
-          <ac:chgData name="全 香玉" userId="1f3450e5-81b9-4f7a-82d7-841c32c029e0" providerId="ADAL" clId="{670531AC-1667-4F97-B1A6-5D38F8A44A79}" dt="2026-06-11T12:41:32.195" v="114" actId="1076"/>
-          <ac:spMkLst>
-            <pc:docMk/>
-            <pc:sldMk cId="3363106213" sldId="262"/>
-            <ac:spMk id="41" creationId="{566FF6FB-E984-DC3B-B409-0BA5913CC6E7}"/>
-          </ac:spMkLst>
-        </pc:spChg>
-        <pc:spChg chg="add mod">
-          <ac:chgData name="全 香玉" userId="1f3450e5-81b9-4f7a-82d7-841c32c029e0" providerId="ADAL" clId="{670531AC-1667-4F97-B1A6-5D38F8A44A79}" dt="2026-06-11T12:41:36.340" v="116" actId="1076"/>
-          <ac:spMkLst>
-            <pc:docMk/>
-            <pc:sldMk cId="3363106213" sldId="262"/>
-            <ac:spMk id="42" creationId="{E142564C-0FCF-0D7A-D946-221C2AD988A1}"/>
-          </ac:spMkLst>
-        </pc:spChg>
-        <pc:spChg chg="add mod">
-          <ac:chgData name="全 香玉" userId="1f3450e5-81b9-4f7a-82d7-841c32c029e0" providerId="ADAL" clId="{670531AC-1667-4F97-B1A6-5D38F8A44A79}" dt="2026-06-11T12:41:40.556" v="118" actId="1076"/>
-          <ac:spMkLst>
-            <pc:docMk/>
-            <pc:sldMk cId="3363106213" sldId="262"/>
-            <ac:spMk id="43" creationId="{5464174D-F154-823A-BAC4-982B62E22CF0}"/>
-          </ac:spMkLst>
-        </pc:spChg>
-        <pc:spChg chg="add mod">
-          <ac:chgData name="全 香玉" userId="1f3450e5-81b9-4f7a-82d7-841c32c029e0" providerId="ADAL" clId="{670531AC-1667-4F97-B1A6-5D38F8A44A79}" dt="2026-06-11T12:41:44.188" v="120" actId="1076"/>
-          <ac:spMkLst>
-            <pc:docMk/>
-            <pc:sldMk cId="3363106213" sldId="262"/>
-            <ac:spMk id="44" creationId="{2893BB8A-D5AA-CBBB-7565-CAD84FAD3F87}"/>
-          </ac:spMkLst>
-        </pc:spChg>
-        <pc:spChg chg="add mod">
-          <ac:chgData name="全 香玉" userId="1f3450e5-81b9-4f7a-82d7-841c32c029e0" providerId="ADAL" clId="{670531AC-1667-4F97-B1A6-5D38F8A44A79}" dt="2026-06-11T12:41:50.075" v="122" actId="1076"/>
-          <ac:spMkLst>
-            <pc:docMk/>
-            <pc:sldMk cId="3363106213" sldId="262"/>
-            <ac:spMk id="45" creationId="{4A61DF6C-59C8-6394-3BA1-940CCE4B8314}"/>
-          </ac:spMkLst>
-        </pc:spChg>
-        <pc:spChg chg="add mod">
-          <ac:chgData name="全 香玉" userId="1f3450e5-81b9-4f7a-82d7-841c32c029e0" providerId="ADAL" clId="{670531AC-1667-4F97-B1A6-5D38F8A44A79}" dt="2026-06-11T12:42:08.875" v="128" actId="1076"/>
-          <ac:spMkLst>
-            <pc:docMk/>
-            <pc:sldMk cId="3363106213" sldId="262"/>
-            <ac:spMk id="46" creationId="{29DB7FD7-AD53-9045-387F-947A1994C533}"/>
+            <pc:sldMk cId="3041934445" sldId="268"/>
+            <ac:spMk id="56" creationId="{718C072A-79B7-E8E6-2EFE-E27A6A8BF9F2}"/>
           </ac:spMkLst>
         </pc:spChg>
         <pc:cxnChg chg="add mod">
-          <ac:chgData name="全 香玉" userId="1f3450e5-81b9-4f7a-82d7-841c32c029e0" providerId="ADAL" clId="{670531AC-1667-4F97-B1A6-5D38F8A44A79}" dt="2026-06-11T12:35:54.388" v="6" actId="14100"/>
+          <ac:chgData name="全 香玉" userId="1f3450e5-81b9-4f7a-82d7-841c32c029e0" providerId="ADAL" clId="{670531AC-1667-4F97-B1A6-5D38F8A44A79}" dt="2026-07-17T03:07:15.870" v="138" actId="1076"/>
           <ac:cxnSpMkLst>
             <pc:docMk/>
-            <pc:sldMk cId="3363106213" sldId="262"/>
-            <ac:cxnSpMk id="3" creationId="{DA312E9E-08BD-40B9-3E30-8EA145F9C634}"/>
+            <pc:sldMk cId="3041934445" sldId="268"/>
+            <ac:cxnSpMk id="10" creationId="{11C1B729-71AF-E499-8D77-0743BB9453EB}"/>
           </ac:cxnSpMkLst>
         </pc:cxnChg>
         <pc:cxnChg chg="add mod">
-          <ac:chgData name="全 香玉" userId="1f3450e5-81b9-4f7a-82d7-841c32c029e0" providerId="ADAL" clId="{670531AC-1667-4F97-B1A6-5D38F8A44A79}" dt="2026-06-11T12:35:57.043" v="7" actId="14100"/>
+          <ac:chgData name="全 香玉" userId="1f3450e5-81b9-4f7a-82d7-841c32c029e0" providerId="ADAL" clId="{670531AC-1667-4F97-B1A6-5D38F8A44A79}" dt="2026-07-17T03:11:06.631" v="176" actId="14100"/>
           <ac:cxnSpMkLst>
             <pc:docMk/>
-            <pc:sldMk cId="3363106213" sldId="262"/>
-            <ac:cxnSpMk id="6" creationId="{932AFEE0-9F31-6713-F97F-59C2210F12E2}"/>
+            <pc:sldMk cId="3041934445" sldId="268"/>
+            <ac:cxnSpMk id="24" creationId="{32E592DE-1510-3F3F-5820-0CE8A2840572}"/>
           </ac:cxnSpMkLst>
         </pc:cxnChg>
         <pc:cxnChg chg="mod">
-          <ac:chgData name="全 香玉" userId="1f3450e5-81b9-4f7a-82d7-841c32c029e0" providerId="ADAL" clId="{670531AC-1667-4F97-B1A6-5D38F8A44A79}" dt="2026-06-11T12:36:02.912" v="9" actId="14100"/>
+          <ac:chgData name="全 香玉" userId="1f3450e5-81b9-4f7a-82d7-841c32c029e0" providerId="ADAL" clId="{670531AC-1667-4F97-B1A6-5D38F8A44A79}" dt="2026-07-17T03:07:08.801" v="134" actId="14100"/>
           <ac:cxnSpMkLst>
             <pc:docMk/>
-            <pc:sldMk cId="3363106213" sldId="262"/>
-            <ac:cxnSpMk id="7" creationId="{7A6AE2C9-EDEC-4F2C-6B59-CA7EDA86C274}"/>
+            <pc:sldMk cId="3041934445" sldId="268"/>
+            <ac:cxnSpMk id="40" creationId="{C823132E-4C09-6130-B040-27D536789369}"/>
           </ac:cxnSpMkLst>
         </pc:cxnChg>
         <pc:cxnChg chg="mod">
-          <ac:chgData name="全 香玉" userId="1f3450e5-81b9-4f7a-82d7-841c32c029e0" providerId="ADAL" clId="{670531AC-1667-4F97-B1A6-5D38F8A44A79}" dt="2026-06-11T12:35:59.931" v="8" actId="14100"/>
+          <ac:chgData name="全 香玉" userId="1f3450e5-81b9-4f7a-82d7-841c32c029e0" providerId="ADAL" clId="{670531AC-1667-4F97-B1A6-5D38F8A44A79}" dt="2026-07-17T03:10:44.583" v="174" actId="14100"/>
           <ac:cxnSpMkLst>
             <pc:docMk/>
-            <pc:sldMk cId="3363106213" sldId="262"/>
-            <ac:cxnSpMk id="8" creationId="{D8289FD3-1CB9-AAA8-0969-12D0AFECF816}"/>
-          </ac:cxnSpMkLst>
-        </pc:cxnChg>
-        <pc:cxnChg chg="add mod">
-          <ac:chgData name="全 香玉" userId="1f3450e5-81b9-4f7a-82d7-841c32c029e0" providerId="ADAL" clId="{670531AC-1667-4F97-B1A6-5D38F8A44A79}" dt="2026-06-11T12:38:49.195" v="56" actId="1076"/>
-          <ac:cxnSpMkLst>
-            <pc:docMk/>
-            <pc:sldMk cId="3363106213" sldId="262"/>
-            <ac:cxnSpMk id="31" creationId="{4B175DA7-3ED6-430B-F907-180649D80370}"/>
-          </ac:cxnSpMkLst>
-        </pc:cxnChg>
-        <pc:cxnChg chg="add mod">
-          <ac:chgData name="全 香玉" userId="1f3450e5-81b9-4f7a-82d7-841c32c029e0" providerId="ADAL" clId="{670531AC-1667-4F97-B1A6-5D38F8A44A79}" dt="2026-06-11T12:38:46.005" v="55" actId="1036"/>
-          <ac:cxnSpMkLst>
-            <pc:docMk/>
-            <pc:sldMk cId="3363106213" sldId="262"/>
-            <ac:cxnSpMk id="34" creationId="{E661173F-737E-9D38-0A7D-73522C19C8CE}"/>
-          </ac:cxnSpMkLst>
-        </pc:cxnChg>
-        <pc:cxnChg chg="add mod">
-          <ac:chgData name="全 香玉" userId="1f3450e5-81b9-4f7a-82d7-841c32c029e0" providerId="ADAL" clId="{670531AC-1667-4F97-B1A6-5D38F8A44A79}" dt="2026-06-11T12:40:09.983" v="94" actId="208"/>
-          <ac:cxnSpMkLst>
-            <pc:docMk/>
-            <pc:sldMk cId="3363106213" sldId="262"/>
-            <ac:cxnSpMk id="36" creationId="{6C5C2136-BF76-C1E2-E81D-0519B6F0C3C0}"/>
+            <pc:sldMk cId="3041934445" sldId="268"/>
+            <ac:cxnSpMk id="41" creationId="{4DCED330-D698-3CD9-478D-60C71CFFE4DF}"/>
           </ac:cxnSpMkLst>
         </pc:cxnChg>
       </pc:sldChg>
@@ -516,7 +397,7 @@
           <a:p>
             <a:fld id="{9236E18D-A30F-4D3C-BC15-86FA9E93A319}" type="datetimeFigureOut">
               <a:rPr kumimoji="1" lang="ja-JP" altLang="en-US" smtClean="0"/>
-              <a:t>2026/6/29</a:t>
+              <a:t>2026/7/17</a:t>
             </a:fld>
             <a:endParaRPr kumimoji="1" lang="ja-JP" altLang="en-US"/>
           </a:p>
@@ -716,7 +597,7 @@
           <a:p>
             <a:fld id="{9236E18D-A30F-4D3C-BC15-86FA9E93A319}" type="datetimeFigureOut">
               <a:rPr kumimoji="1" lang="ja-JP" altLang="en-US" smtClean="0"/>
-              <a:t>2026/6/29</a:t>
+              <a:t>2026/7/17</a:t>
             </a:fld>
             <a:endParaRPr kumimoji="1" lang="ja-JP" altLang="en-US"/>
           </a:p>
@@ -926,7 +807,7 @@
           <a:p>
             <a:fld id="{9236E18D-A30F-4D3C-BC15-86FA9E93A319}" type="datetimeFigureOut">
               <a:rPr kumimoji="1" lang="ja-JP" altLang="en-US" smtClean="0"/>
-              <a:t>2026/6/29</a:t>
+              <a:t>2026/7/17</a:t>
             </a:fld>
             <a:endParaRPr kumimoji="1" lang="ja-JP" altLang="en-US"/>
           </a:p>
@@ -1126,7 +1007,7 @@
           <a:p>
             <a:fld id="{9236E18D-A30F-4D3C-BC15-86FA9E93A319}" type="datetimeFigureOut">
               <a:rPr kumimoji="1" lang="ja-JP" altLang="en-US" smtClean="0"/>
-              <a:t>2026/6/29</a:t>
+              <a:t>2026/7/17</a:t>
             </a:fld>
             <a:endParaRPr kumimoji="1" lang="ja-JP" altLang="en-US"/>
           </a:p>
@@ -1402,7 +1283,7 @@
           <a:p>
             <a:fld id="{9236E18D-A30F-4D3C-BC15-86FA9E93A319}" type="datetimeFigureOut">
               <a:rPr kumimoji="1" lang="ja-JP" altLang="en-US" smtClean="0"/>
-              <a:t>2026/6/29</a:t>
+              <a:t>2026/7/17</a:t>
             </a:fld>
             <a:endParaRPr kumimoji="1" lang="ja-JP" altLang="en-US"/>
           </a:p>
@@ -1670,7 +1551,7 @@
           <a:p>
             <a:fld id="{9236E18D-A30F-4D3C-BC15-86FA9E93A319}" type="datetimeFigureOut">
               <a:rPr kumimoji="1" lang="ja-JP" altLang="en-US" smtClean="0"/>
-              <a:t>2026/6/29</a:t>
+              <a:t>2026/7/17</a:t>
             </a:fld>
             <a:endParaRPr kumimoji="1" lang="ja-JP" altLang="en-US"/>
           </a:p>
@@ -2085,7 +1966,7 @@
           <a:p>
             <a:fld id="{9236E18D-A30F-4D3C-BC15-86FA9E93A319}" type="datetimeFigureOut">
               <a:rPr kumimoji="1" lang="ja-JP" altLang="en-US" smtClean="0"/>
-              <a:t>2026/6/29</a:t>
+              <a:t>2026/7/17</a:t>
             </a:fld>
             <a:endParaRPr kumimoji="1" lang="ja-JP" altLang="en-US"/>
           </a:p>
@@ -2227,7 +2108,7 @@
           <a:p>
             <a:fld id="{9236E18D-A30F-4D3C-BC15-86FA9E93A319}" type="datetimeFigureOut">
               <a:rPr kumimoji="1" lang="ja-JP" altLang="en-US" smtClean="0"/>
-              <a:t>2026/6/29</a:t>
+              <a:t>2026/7/17</a:t>
             </a:fld>
             <a:endParaRPr kumimoji="1" lang="ja-JP" altLang="en-US"/>
           </a:p>
@@ -2340,7 +2221,7 @@
           <a:p>
             <a:fld id="{9236E18D-A30F-4D3C-BC15-86FA9E93A319}" type="datetimeFigureOut">
               <a:rPr kumimoji="1" lang="ja-JP" altLang="en-US" smtClean="0"/>
-              <a:t>2026/6/29</a:t>
+              <a:t>2026/7/17</a:t>
             </a:fld>
             <a:endParaRPr kumimoji="1" lang="ja-JP" altLang="en-US"/>
           </a:p>
@@ -2653,7 +2534,7 @@
           <a:p>
             <a:fld id="{9236E18D-A30F-4D3C-BC15-86FA9E93A319}" type="datetimeFigureOut">
               <a:rPr kumimoji="1" lang="ja-JP" altLang="en-US" smtClean="0"/>
-              <a:t>2026/6/29</a:t>
+              <a:t>2026/7/17</a:t>
             </a:fld>
             <a:endParaRPr kumimoji="1" lang="ja-JP" altLang="en-US"/>
           </a:p>
@@ -2942,7 +2823,7 @@
           <a:p>
             <a:fld id="{9236E18D-A30F-4D3C-BC15-86FA9E93A319}" type="datetimeFigureOut">
               <a:rPr kumimoji="1" lang="ja-JP" altLang="en-US" smtClean="0"/>
-              <a:t>2026/6/29</a:t>
+              <a:t>2026/7/17</a:t>
             </a:fld>
             <a:endParaRPr kumimoji="1" lang="ja-JP" altLang="en-US"/>
           </a:p>
@@ -3185,7 +3066,7 @@
           <a:p>
             <a:fld id="{9236E18D-A30F-4D3C-BC15-86FA9E93A319}" type="datetimeFigureOut">
               <a:rPr kumimoji="1" lang="ja-JP" altLang="en-US" smtClean="0"/>
-              <a:t>2026/6/29</a:t>
+              <a:t>2026/7/17</a:t>
             </a:fld>
             <a:endParaRPr kumimoji="1" lang="ja-JP" altLang="en-US"/>
           </a:p>
@@ -4451,6 +4332,96 @@
   <p:cSld>
     <p:spTree>
       <p:nvGrpSpPr>
+        <p:cNvPr id="1" name=""/>
+        <p:cNvGrpSpPr/>
+        <p:nvPr/>
+      </p:nvGrpSpPr>
+      <p:grpSpPr>
+        <a:xfrm>
+          <a:off x="0" y="0"/>
+          <a:ext cx="0" cy="0"/>
+          <a:chOff x="0" y="0"/>
+          <a:chExt cx="0" cy="0"/>
+        </a:xfrm>
+      </p:grpSpPr>
+      <p:pic>
+        <p:nvPicPr>
+          <p:cNvPr id="5" name="그림 4">
+            <a:extLst>
+              <a:ext uri="{FF2B5EF4-FFF2-40B4-BE49-F238E27FC236}">
+                <a16:creationId xmlns:a16="http://schemas.microsoft.com/office/drawing/2014/main" id="{414CC4C9-79AC-AC4A-2FA0-0C87D8914DF0}"/>
+              </a:ext>
+            </a:extLst>
+          </p:cNvPr>
+          <p:cNvPicPr>
+            <a:picLocks noChangeAspect="1"/>
+          </p:cNvPicPr>
+          <p:nvPr/>
+        </p:nvPicPr>
+        <p:blipFill>
+          <a:blip r:embed="rId2"/>
+          <a:stretch>
+            <a:fillRect/>
+          </a:stretch>
+        </p:blipFill>
+        <p:spPr>
+          <a:xfrm>
+            <a:off x="343427" y="0"/>
+            <a:ext cx="7059526" cy="6858000"/>
+          </a:xfrm>
+          <a:prstGeom prst="rect">
+            <a:avLst/>
+          </a:prstGeom>
+        </p:spPr>
+      </p:pic>
+      <p:pic>
+        <p:nvPicPr>
+          <p:cNvPr id="7" name="그림 6">
+            <a:extLst>
+              <a:ext uri="{FF2B5EF4-FFF2-40B4-BE49-F238E27FC236}">
+                <a16:creationId xmlns:a16="http://schemas.microsoft.com/office/drawing/2014/main" id="{59682CF8-21B5-9BFA-D0EE-75A936A6A080}"/>
+              </a:ext>
+            </a:extLst>
+          </p:cNvPr>
+          <p:cNvPicPr>
+            <a:picLocks noChangeAspect="1"/>
+          </p:cNvPicPr>
+          <p:nvPr/>
+        </p:nvPicPr>
+        <p:blipFill>
+          <a:blip r:embed="rId3"/>
+          <a:stretch>
+            <a:fillRect/>
+          </a:stretch>
+        </p:blipFill>
+        <p:spPr>
+          <a:xfrm>
+            <a:off x="6245271" y="3166946"/>
+            <a:ext cx="5673241" cy="2902353"/>
+          </a:xfrm>
+          <a:prstGeom prst="rect">
+            <a:avLst/>
+          </a:prstGeom>
+        </p:spPr>
+      </p:pic>
+    </p:spTree>
+    <p:extLst>
+      <p:ext uri="{BB962C8B-B14F-4D97-AF65-F5344CB8AC3E}">
+        <p14:creationId xmlns:p14="http://schemas.microsoft.com/office/powerpoint/2010/main" val="271509145"/>
+      </p:ext>
+    </p:extLst>
+  </p:cSld>
+  <p:clrMapOvr>
+    <a:masterClrMapping/>
+  </p:clrMapOvr>
+</p:sld>
+</file>
+
+<file path=ppt/slides/slide11.xml><?xml version="1.0" encoding="utf-8"?>
+<p:sld xmlns:a="http://schemas.openxmlformats.org/drawingml/2006/main" xmlns:r="http://schemas.openxmlformats.org/officeDocument/2006/relationships" xmlns:p="http://schemas.openxmlformats.org/presentationml/2006/main">
+  <p:cSld>
+    <p:spTree>
+      <p:nvGrpSpPr>
         <p:cNvPr id="1" name="">
           <a:extLst>
             <a:ext uri="{FF2B5EF4-FFF2-40B4-BE49-F238E27FC236}">
@@ -5151,8 +5122,8 @@
           </a:p>
         </p:txBody>
       </p:sp>
-      <mc:AlternateContent xmlns:mc="http://schemas.openxmlformats.org/markup-compatibility/2006">
-        <mc:Choice xmlns:a14="http://schemas.microsoft.com/office/drawing/2010/main" Requires="a14">
+      <mc:AlternateContent xmlns:mc="http://schemas.openxmlformats.org/markup-compatibility/2006" xmlns:a14="http://schemas.microsoft.com/office/drawing/2010/main">
+        <mc:Choice Requires="a14">
           <p:sp>
             <p:nvSpPr>
               <p:cNvPr id="50" name="TextBox 49">
@@ -5181,6 +5152,7 @@
               </a:bodyPr>
               <a:lstStyle/>
               <a:p>
+                <a:pPr/>
                 <a14:m>
                   <m:oMathPara xmlns:m="http://schemas.openxmlformats.org/officeDocument/2006/math">
                     <m:oMathParaPr>
@@ -5202,7 +5174,7 @@
             </p:txBody>
           </p:sp>
         </mc:Choice>
-        <mc:Fallback>
+        <mc:Fallback xmlns="">
           <p:sp>
             <p:nvSpPr>
               <p:cNvPr id="50" name="TextBox 49">
@@ -5828,8 +5800,8 @@
           </a:p>
         </p:txBody>
       </p:sp>
-      <mc:AlternateContent xmlns:mc="http://schemas.openxmlformats.org/markup-compatibility/2006">
-        <mc:Choice xmlns:a14="http://schemas.microsoft.com/office/drawing/2010/main" Requires="a14">
+      <mc:AlternateContent xmlns:mc="http://schemas.openxmlformats.org/markup-compatibility/2006" xmlns:a14="http://schemas.microsoft.com/office/drawing/2010/main">
+        <mc:Choice Requires="a14">
           <p:sp>
             <p:nvSpPr>
               <p:cNvPr id="127" name="TextBox 126">
@@ -5880,7 +5852,7 @@
             </p:txBody>
           </p:sp>
         </mc:Choice>
-        <mc:Fallback>
+        <mc:Fallback xmlns="">
           <p:sp>
             <p:nvSpPr>
               <p:cNvPr id="127" name="TextBox 126">
@@ -6009,8 +5981,8 @@
           </a:p>
         </p:txBody>
       </p:sp>
-      <mc:AlternateContent xmlns:mc="http://schemas.openxmlformats.org/markup-compatibility/2006">
-        <mc:Choice xmlns:a14="http://schemas.microsoft.com/office/drawing/2010/main" Requires="a14">
+      <mc:AlternateContent xmlns:mc="http://schemas.openxmlformats.org/markup-compatibility/2006" xmlns:a14="http://schemas.microsoft.com/office/drawing/2010/main">
+        <mc:Choice Requires="a14">
           <p:sp>
             <p:nvSpPr>
               <p:cNvPr id="131" name="TextBox 130">
@@ -6061,7 +6033,7 @@
             </p:txBody>
           </p:sp>
         </mc:Choice>
-        <mc:Fallback>
+        <mc:Fallback xmlns="">
           <p:sp>
             <p:nvSpPr>
               <p:cNvPr id="131" name="TextBox 130">
@@ -6106,8 +6078,8 @@
           </p:sp>
         </mc:Fallback>
       </mc:AlternateContent>
-      <mc:AlternateContent xmlns:mc="http://schemas.openxmlformats.org/markup-compatibility/2006">
-        <mc:Choice xmlns:a14="http://schemas.microsoft.com/office/drawing/2010/main" Requires="a14">
+      <mc:AlternateContent xmlns:mc="http://schemas.openxmlformats.org/markup-compatibility/2006" xmlns:a14="http://schemas.microsoft.com/office/drawing/2010/main">
+        <mc:Choice Requires="a14">
           <p:sp>
             <p:nvSpPr>
               <p:cNvPr id="133" name="TextBox 132">
@@ -6176,7 +6148,7 @@
             </p:txBody>
           </p:sp>
         </mc:Choice>
-        <mc:Fallback>
+        <mc:Fallback xmlns="">
           <p:sp>
             <p:nvSpPr>
               <p:cNvPr id="133" name="TextBox 132">
@@ -6234,7 +6206,7 @@
 </p:sld>
 </file>
 
-<file path=ppt/slides/slide11.xml><?xml version="1.0" encoding="utf-8"?>
+<file path=ppt/slides/slide12.xml><?xml version="1.0" encoding="utf-8"?>
 <p:sld xmlns:a="http://schemas.openxmlformats.org/drawingml/2006/main" xmlns:r="http://schemas.openxmlformats.org/officeDocument/2006/relationships" xmlns:p="http://schemas.openxmlformats.org/presentationml/2006/main">
   <p:cSld>
     <p:spTree>
@@ -6654,8 +6626,8 @@
           </a:p>
         </p:txBody>
       </p:sp>
-      <mc:AlternateContent xmlns:mc="http://schemas.openxmlformats.org/markup-compatibility/2006">
-        <mc:Choice xmlns:a14="http://schemas.microsoft.com/office/drawing/2010/main" Requires="a14">
+      <mc:AlternateContent xmlns:mc="http://schemas.openxmlformats.org/markup-compatibility/2006" xmlns:a14="http://schemas.microsoft.com/office/drawing/2010/main">
+        <mc:Choice Requires="a14">
           <p:sp>
             <p:nvSpPr>
               <p:cNvPr id="17" name="TextBox 16">
@@ -6706,7 +6678,7 @@
             </p:txBody>
           </p:sp>
         </mc:Choice>
-        <mc:Fallback>
+        <mc:Fallback xmlns="">
           <p:sp>
             <p:nvSpPr>
               <p:cNvPr id="17" name="TextBox 16">
@@ -6843,8 +6815,8 @@
           </a:fontRef>
         </p:style>
       </p:cxnSp>
-      <mc:AlternateContent xmlns:mc="http://schemas.openxmlformats.org/markup-compatibility/2006">
-        <mc:Choice xmlns:a14="http://schemas.microsoft.com/office/drawing/2010/main" Requires="a14">
+      <mc:AlternateContent xmlns:mc="http://schemas.openxmlformats.org/markup-compatibility/2006" xmlns:a14="http://schemas.microsoft.com/office/drawing/2010/main">
+        <mc:Choice Requires="a14">
           <p:sp>
             <p:nvSpPr>
               <p:cNvPr id="42" name="TextBox 41">
@@ -6913,7 +6885,7 @@
             </p:txBody>
           </p:sp>
         </mc:Choice>
-        <mc:Fallback>
+        <mc:Fallback xmlns="">
           <p:sp>
             <p:nvSpPr>
               <p:cNvPr id="42" name="TextBox 41">
@@ -9813,7 +9785,13 @@
   <p:cSld>
     <p:spTree>
       <p:nvGrpSpPr>
-        <p:cNvPr id="1" name=""/>
+        <p:cNvPr id="1" name="">
+          <a:extLst>
+            <a:ext uri="{FF2B5EF4-FFF2-40B4-BE49-F238E27FC236}">
+              <a16:creationId xmlns:a16="http://schemas.microsoft.com/office/drawing/2014/main" id="{3C59E926-6C7B-AC9C-1C77-635F352094A8}"/>
+            </a:ext>
+          </a:extLst>
+        </p:cNvPr>
         <p:cNvGrpSpPr/>
         <p:nvPr/>
       </p:nvGrpSpPr>
@@ -9827,10 +9805,10 @@
       </p:grpSpPr>
       <p:sp>
         <p:nvSpPr>
-          <p:cNvPr id="4" name="Oval 3">
-            <a:extLst>
-              <a:ext uri="{FF2B5EF4-FFF2-40B4-BE49-F238E27FC236}">
-                <a16:creationId xmlns:a16="http://schemas.microsoft.com/office/drawing/2014/main" id="{DE1CD74A-F737-D5D1-554B-70604072A7E3}"/>
+          <p:cNvPr id="15" name="Freeform: Shape 14">
+            <a:extLst>
+              <a:ext uri="{FF2B5EF4-FFF2-40B4-BE49-F238E27FC236}">
+                <a16:creationId xmlns:a16="http://schemas.microsoft.com/office/drawing/2014/main" id="{2E7851B3-4AF0-AC00-B567-D4C7F50C4816}"/>
               </a:ext>
             </a:extLst>
           </p:cNvPr>
@@ -9839,29 +9817,63 @@
         </p:nvSpPr>
         <p:spPr>
           <a:xfrm>
-            <a:off x="2946400" y="1981200"/>
-            <a:ext cx="1479550" cy="2120900"/>
-          </a:xfrm>
-          <a:prstGeom prst="ellipse">
-            <a:avLst/>
-          </a:prstGeom>
-          <a:solidFill>
-            <a:schemeClr val="bg2">
-              <a:lumMod val="90000"/>
-            </a:schemeClr>
-          </a:solidFill>
+            <a:off x="7793411" y="3680594"/>
+            <a:ext cx="39225" cy="107950"/>
+          </a:xfrm>
+          <a:custGeom>
+            <a:avLst/>
+            <a:gdLst>
+              <a:gd name="csX0" fmla="*/ 39225 w 39225"/>
+              <a:gd name="csY0" fmla="*/ 0 h 107950"/>
+              <a:gd name="csX1" fmla="*/ 1125 w 39225"/>
+              <a:gd name="csY1" fmla="*/ 50800 h 107950"/>
+              <a:gd name="csX2" fmla="*/ 13825 w 39225"/>
+              <a:gd name="csY2" fmla="*/ 107950 h 107950"/>
+            </a:gdLst>
+            <a:ahLst/>
+            <a:cxnLst>
+              <a:cxn ang="0">
+                <a:pos x="csX0" y="csY0"/>
+              </a:cxn>
+              <a:cxn ang="0">
+                <a:pos x="csX1" y="csY1"/>
+              </a:cxn>
+              <a:cxn ang="0">
+                <a:pos x="csX2" y="csY2"/>
+              </a:cxn>
+            </a:cxnLst>
+            <a:rect l="l" t="t" r="r" b="b"/>
+            <a:pathLst>
+              <a:path w="39225" h="107950">
+                <a:moveTo>
+                  <a:pt x="39225" y="0"/>
+                </a:moveTo>
+                <a:cubicBezTo>
+                  <a:pt x="22291" y="16404"/>
+                  <a:pt x="5358" y="32808"/>
+                  <a:pt x="1125" y="50800"/>
+                </a:cubicBezTo>
+                <a:cubicBezTo>
+                  <a:pt x="-3108" y="68792"/>
+                  <a:pt x="5358" y="88371"/>
+                  <a:pt x="13825" y="107950"/>
+                </a:cubicBezTo>
+              </a:path>
+            </a:pathLst>
+          </a:custGeom>
+          <a:noFill/>
         </p:spPr>
         <p:style>
           <a:lnRef idx="2">
-            <a:schemeClr val="dk1">
+            <a:schemeClr val="accent1">
               <a:shade val="15000"/>
             </a:schemeClr>
           </a:lnRef>
           <a:fillRef idx="1">
-            <a:schemeClr val="dk1"/>
+            <a:schemeClr val="accent1"/>
           </a:fillRef>
           <a:effectRef idx="0">
-            <a:schemeClr val="dk1"/>
+            <a:schemeClr val="accent1"/>
           </a:effectRef>
           <a:fontRef idx="minor">
             <a:schemeClr val="lt1"/>
@@ -9872,16 +9884,16 @@
           <a:lstStyle/>
           <a:p>
             <a:pPr algn="ctr"/>
-            <a:endParaRPr kumimoji="1" lang="ja-JP" altLang="en-US" dirty="0"/>
-          </a:p>
-        </p:txBody>
-      </p:sp>
-      <p:sp>
-        <p:nvSpPr>
-          <p:cNvPr id="5" name="Oval 4">
-            <a:extLst>
-              <a:ext uri="{FF2B5EF4-FFF2-40B4-BE49-F238E27FC236}">
-                <a16:creationId xmlns:a16="http://schemas.microsoft.com/office/drawing/2014/main" id="{B8967F52-3B59-05D8-ABAB-EABB44C8059D}"/>
+            <a:endParaRPr kumimoji="1" lang="ja-JP" altLang="en-US"/>
+          </a:p>
+        </p:txBody>
+      </p:sp>
+      <p:sp>
+        <p:nvSpPr>
+          <p:cNvPr id="16" name="Freeform: Shape 15">
+            <a:extLst>
+              <a:ext uri="{FF2B5EF4-FFF2-40B4-BE49-F238E27FC236}">
+                <a16:creationId xmlns:a16="http://schemas.microsoft.com/office/drawing/2014/main" id="{C5B0D60D-1456-3E1C-73F8-93DE5569D9AF}"/>
               </a:ext>
             </a:extLst>
           </p:cNvPr>
@@ -9889,28 +9901,64 @@
           <p:nvPr/>
         </p:nvSpPr>
         <p:spPr>
-          <a:xfrm>
-            <a:off x="3282950" y="2495550"/>
-            <a:ext cx="737532" cy="1057234"/>
-          </a:xfrm>
-          <a:prstGeom prst="ellipse">
-            <a:avLst/>
-          </a:prstGeom>
-          <a:solidFill>
-            <a:schemeClr val="bg1"/>
-          </a:solidFill>
+          <a:xfrm rot="3536901">
+            <a:off x="6931396" y="4062264"/>
+            <a:ext cx="106211" cy="214277"/>
+          </a:xfrm>
+          <a:custGeom>
+            <a:avLst/>
+            <a:gdLst>
+              <a:gd name="csX0" fmla="*/ 50800 w 55688"/>
+              <a:gd name="csY0" fmla="*/ 0 h 133350"/>
+              <a:gd name="csX1" fmla="*/ 50800 w 55688"/>
+              <a:gd name="csY1" fmla="*/ 82550 h 133350"/>
+              <a:gd name="csX2" fmla="*/ 0 w 55688"/>
+              <a:gd name="csY2" fmla="*/ 133350 h 133350"/>
+            </a:gdLst>
+            <a:ahLst/>
+            <a:cxnLst>
+              <a:cxn ang="0">
+                <a:pos x="csX0" y="csY0"/>
+              </a:cxn>
+              <a:cxn ang="0">
+                <a:pos x="csX1" y="csY1"/>
+              </a:cxn>
+              <a:cxn ang="0">
+                <a:pos x="csX2" y="csY2"/>
+              </a:cxn>
+            </a:cxnLst>
+            <a:rect l="l" t="t" r="r" b="b"/>
+            <a:pathLst>
+              <a:path w="55688" h="133350">
+                <a:moveTo>
+                  <a:pt x="50800" y="0"/>
+                </a:moveTo>
+                <a:cubicBezTo>
+                  <a:pt x="55033" y="30162"/>
+                  <a:pt x="59267" y="60325"/>
+                  <a:pt x="50800" y="82550"/>
+                </a:cubicBezTo>
+                <a:cubicBezTo>
+                  <a:pt x="42333" y="104775"/>
+                  <a:pt x="21166" y="119062"/>
+                  <a:pt x="0" y="133350"/>
+                </a:cubicBezTo>
+              </a:path>
+            </a:pathLst>
+          </a:custGeom>
+          <a:noFill/>
         </p:spPr>
         <p:style>
           <a:lnRef idx="2">
-            <a:schemeClr val="dk1">
+            <a:schemeClr val="accent1">
               <a:shade val="15000"/>
             </a:schemeClr>
           </a:lnRef>
           <a:fillRef idx="1">
-            <a:schemeClr val="dk1"/>
+            <a:schemeClr val="accent1"/>
           </a:fillRef>
           <a:effectRef idx="0">
-            <a:schemeClr val="dk1"/>
+            <a:schemeClr val="accent1"/>
           </a:effectRef>
           <a:fontRef idx="minor">
             <a:schemeClr val="lt1"/>
@@ -9925,38 +9973,775 @@
           </a:p>
         </p:txBody>
       </p:sp>
+      <p:sp>
+        <p:nvSpPr>
+          <p:cNvPr id="17" name="TextBox 16">
+            <a:extLst>
+              <a:ext uri="{FF2B5EF4-FFF2-40B4-BE49-F238E27FC236}">
+                <a16:creationId xmlns:a16="http://schemas.microsoft.com/office/drawing/2014/main" id="{E62A6218-D51E-A281-2173-9DE048FA601F}"/>
+              </a:ext>
+            </a:extLst>
+          </p:cNvPr>
+          <p:cNvSpPr txBox="1"/>
+          <p:nvPr/>
+        </p:nvSpPr>
+        <p:spPr>
+          <a:xfrm>
+            <a:off x="6813139" y="4145716"/>
+            <a:ext cx="530220" cy="369332"/>
+          </a:xfrm>
+          <a:prstGeom prst="rect">
+            <a:avLst/>
+          </a:prstGeom>
+          <a:noFill/>
+        </p:spPr>
+        <p:txBody>
+          <a:bodyPr wrap="square">
+            <a:spAutoFit/>
+          </a:bodyPr>
+          <a:lstStyle/>
+          <a:p>
+            <a:r>
+              <a:rPr lang="el-GR" altLang="ja-JP" dirty="0">
+                <a:latin typeface="Century" panose="02040604050505020304" pitchFamily="18" charset="0"/>
+              </a:rPr>
+              <a:t>θ</a:t>
+            </a:r>
+            <a:r>
+              <a:rPr kumimoji="1" lang="en-US" altLang="ja-JP" baseline="-25000" dirty="0">
+                <a:latin typeface="Century" panose="02040604050505020304" pitchFamily="18" charset="0"/>
+              </a:rPr>
+              <a:t>0</a:t>
+            </a:r>
+            <a:endParaRPr kumimoji="1" lang="ja-JP" altLang="en-US" baseline="-25000" dirty="0">
+              <a:latin typeface="Century" panose="02040604050505020304" pitchFamily="18" charset="0"/>
+            </a:endParaRPr>
+          </a:p>
+        </p:txBody>
+      </p:sp>
+      <p:sp>
+        <p:nvSpPr>
+          <p:cNvPr id="19" name="TextBox 18">
+            <a:extLst>
+              <a:ext uri="{FF2B5EF4-FFF2-40B4-BE49-F238E27FC236}">
+                <a16:creationId xmlns:a16="http://schemas.microsoft.com/office/drawing/2014/main" id="{8DFC2540-CDB0-0DD7-481C-B7FBFAA2938E}"/>
+              </a:ext>
+            </a:extLst>
+          </p:cNvPr>
+          <p:cNvSpPr txBox="1"/>
+          <p:nvPr/>
+        </p:nvSpPr>
+        <p:spPr>
+          <a:xfrm>
+            <a:off x="6239908" y="3090493"/>
+            <a:ext cx="492463" cy="369332"/>
+          </a:xfrm>
+          <a:prstGeom prst="rect">
+            <a:avLst/>
+          </a:prstGeom>
+          <a:noFill/>
+        </p:spPr>
+        <p:txBody>
+          <a:bodyPr wrap="square">
+            <a:spAutoFit/>
+          </a:bodyPr>
+          <a:lstStyle/>
+          <a:p>
+            <a:r>
+              <a:rPr lang="el-GR" altLang="ja-JP" dirty="0">
+                <a:latin typeface="Century" panose="02040604050505020304" pitchFamily="18" charset="0"/>
+              </a:rPr>
+              <a:t>φ</a:t>
+            </a:r>
+            <a:r>
+              <a:rPr kumimoji="1" lang="en-US" altLang="ja-JP" baseline="-25000" dirty="0">
+                <a:latin typeface="Century" panose="02040604050505020304" pitchFamily="18" charset="0"/>
+              </a:rPr>
+              <a:t>1</a:t>
+            </a:r>
+            <a:endParaRPr kumimoji="1" lang="ja-JP" altLang="en-US" baseline="-25000" dirty="0">
+              <a:latin typeface="Century" panose="02040604050505020304" pitchFamily="18" charset="0"/>
+            </a:endParaRPr>
+          </a:p>
+        </p:txBody>
+      </p:sp>
+      <p:grpSp>
+        <p:nvGrpSpPr>
+          <p:cNvPr id="34" name="Group 33">
+            <a:extLst>
+              <a:ext uri="{FF2B5EF4-FFF2-40B4-BE49-F238E27FC236}">
+                <a16:creationId xmlns:a16="http://schemas.microsoft.com/office/drawing/2014/main" id="{2F7BB2F2-5ACC-48E9-188D-D5B07F945EEC}"/>
+              </a:ext>
+            </a:extLst>
+          </p:cNvPr>
+          <p:cNvGrpSpPr/>
+          <p:nvPr/>
+        </p:nvGrpSpPr>
+        <p:grpSpPr>
+          <a:xfrm>
+            <a:off x="2324159" y="2313542"/>
+            <a:ext cx="5931078" cy="1481687"/>
+            <a:chOff x="2324159" y="2313542"/>
+            <a:chExt cx="5931078" cy="1481687"/>
+          </a:xfrm>
+        </p:grpSpPr>
+        <p:grpSp>
+          <p:nvGrpSpPr>
+            <p:cNvPr id="31" name="Group 30">
+              <a:extLst>
+                <a:ext uri="{FF2B5EF4-FFF2-40B4-BE49-F238E27FC236}">
+                  <a16:creationId xmlns:a16="http://schemas.microsoft.com/office/drawing/2014/main" id="{40701502-B3DF-5BA5-8E84-EBA1C1EA535A}"/>
+                </a:ext>
+              </a:extLst>
+            </p:cNvPr>
+            <p:cNvGrpSpPr/>
+            <p:nvPr/>
+          </p:nvGrpSpPr>
+          <p:grpSpPr>
+            <a:xfrm>
+              <a:off x="2324159" y="2313542"/>
+              <a:ext cx="5931078" cy="1471057"/>
+              <a:chOff x="2324159" y="2313542"/>
+              <a:chExt cx="5931078" cy="1471057"/>
+            </a:xfrm>
+          </p:grpSpPr>
+          <p:sp>
+            <p:nvSpPr>
+              <p:cNvPr id="4" name="Rectangle 3">
+                <a:extLst>
+                  <a:ext uri="{FF2B5EF4-FFF2-40B4-BE49-F238E27FC236}">
+                    <a16:creationId xmlns:a16="http://schemas.microsoft.com/office/drawing/2014/main" id="{C7C5BD77-BAA8-FAE2-0DC3-9152A3FA5A24}"/>
+                  </a:ext>
+                </a:extLst>
+              </p:cNvPr>
+              <p:cNvSpPr/>
+              <p:nvPr/>
+            </p:nvSpPr>
+            <p:spPr>
+              <a:xfrm>
+                <a:off x="2863850" y="2660649"/>
+                <a:ext cx="2997200" cy="831851"/>
+              </a:xfrm>
+              <a:prstGeom prst="rect">
+                <a:avLst/>
+              </a:prstGeom>
+              <a:noFill/>
+            </p:spPr>
+            <p:style>
+              <a:lnRef idx="2">
+                <a:schemeClr val="accent1">
+                  <a:shade val="15000"/>
+                </a:schemeClr>
+              </a:lnRef>
+              <a:fillRef idx="1">
+                <a:schemeClr val="accent1"/>
+              </a:fillRef>
+              <a:effectRef idx="0">
+                <a:schemeClr val="accent1"/>
+              </a:effectRef>
+              <a:fontRef idx="minor">
+                <a:schemeClr val="lt1"/>
+              </a:fontRef>
+            </p:style>
+            <p:txBody>
+              <a:bodyPr rtlCol="0" anchor="ctr"/>
+              <a:lstStyle/>
+              <a:p>
+                <a:pPr algn="ctr"/>
+                <a:endParaRPr kumimoji="1" lang="ja-JP" altLang="en-US"/>
+              </a:p>
+            </p:txBody>
+          </p:sp>
+          <p:sp>
+            <p:nvSpPr>
+              <p:cNvPr id="5" name="Rectangle 4">
+                <a:extLst>
+                  <a:ext uri="{FF2B5EF4-FFF2-40B4-BE49-F238E27FC236}">
+                    <a16:creationId xmlns:a16="http://schemas.microsoft.com/office/drawing/2014/main" id="{16E4738B-7477-E379-BEB1-92D448020DE1}"/>
+                  </a:ext>
+                </a:extLst>
+              </p:cNvPr>
+              <p:cNvSpPr/>
+              <p:nvPr/>
+            </p:nvSpPr>
+            <p:spPr>
+              <a:xfrm>
+                <a:off x="2863850" y="2397124"/>
+                <a:ext cx="2997200" cy="1387475"/>
+              </a:xfrm>
+              <a:prstGeom prst="rect">
+                <a:avLst/>
+              </a:prstGeom>
+              <a:noFill/>
+            </p:spPr>
+            <p:style>
+              <a:lnRef idx="2">
+                <a:schemeClr val="accent1">
+                  <a:shade val="15000"/>
+                </a:schemeClr>
+              </a:lnRef>
+              <a:fillRef idx="1">
+                <a:schemeClr val="accent1"/>
+              </a:fillRef>
+              <a:effectRef idx="0">
+                <a:schemeClr val="accent1"/>
+              </a:effectRef>
+              <a:fontRef idx="minor">
+                <a:schemeClr val="lt1"/>
+              </a:fontRef>
+            </p:style>
+            <p:txBody>
+              <a:bodyPr rtlCol="0" anchor="ctr"/>
+              <a:lstStyle/>
+              <a:p>
+                <a:pPr algn="ctr"/>
+                <a:endParaRPr kumimoji="1" lang="ja-JP" altLang="en-US"/>
+              </a:p>
+            </p:txBody>
+          </p:sp>
+          <p:cxnSp>
+            <p:nvCxnSpPr>
+              <p:cNvPr id="9" name="Straight Connector 8">
+                <a:extLst>
+                  <a:ext uri="{FF2B5EF4-FFF2-40B4-BE49-F238E27FC236}">
+                    <a16:creationId xmlns:a16="http://schemas.microsoft.com/office/drawing/2014/main" id="{F54E44E0-4175-C96E-B089-0B938600178E}"/>
+                  </a:ext>
+                </a:extLst>
+              </p:cNvPr>
+              <p:cNvCxnSpPr>
+                <a:cxnSpLocks/>
+              </p:cNvCxnSpPr>
+              <p:nvPr/>
+            </p:nvCxnSpPr>
+            <p:spPr>
+              <a:xfrm>
+                <a:off x="2336800" y="3090861"/>
+                <a:ext cx="5918437" cy="0"/>
+              </a:xfrm>
+              <a:prstGeom prst="line">
+                <a:avLst/>
+              </a:prstGeom>
+              <a:ln>
+                <a:prstDash val="dashDot"/>
+              </a:ln>
+            </p:spPr>
+            <p:style>
+              <a:lnRef idx="2">
+                <a:schemeClr val="dk1"/>
+              </a:lnRef>
+              <a:fillRef idx="0">
+                <a:schemeClr val="dk1"/>
+              </a:fillRef>
+              <a:effectRef idx="1">
+                <a:schemeClr val="dk1"/>
+              </a:effectRef>
+              <a:fontRef idx="minor">
+                <a:schemeClr val="tx1"/>
+              </a:fontRef>
+            </p:style>
+          </p:cxnSp>
+          <p:sp>
+            <p:nvSpPr>
+              <p:cNvPr id="11" name="TextBox 10">
+                <a:extLst>
+                  <a:ext uri="{FF2B5EF4-FFF2-40B4-BE49-F238E27FC236}">
+                    <a16:creationId xmlns:a16="http://schemas.microsoft.com/office/drawing/2014/main" id="{016EABB3-4E85-E169-F44D-2452C494D21B}"/>
+                  </a:ext>
+                </a:extLst>
+              </p:cNvPr>
+              <p:cNvSpPr txBox="1"/>
+              <p:nvPr/>
+            </p:nvSpPr>
+            <p:spPr>
+              <a:xfrm>
+                <a:off x="2819517" y="2710654"/>
+                <a:ext cx="410690" cy="369332"/>
+              </a:xfrm>
+              <a:prstGeom prst="rect">
+                <a:avLst/>
+              </a:prstGeom>
+              <a:noFill/>
+            </p:spPr>
+            <p:txBody>
+              <a:bodyPr wrap="none" rtlCol="0">
+                <a:spAutoFit/>
+              </a:bodyPr>
+              <a:lstStyle/>
+              <a:p>
+                <a:r>
+                  <a:rPr kumimoji="1" lang="en-US" altLang="ja-JP" dirty="0">
+                    <a:latin typeface="Century" panose="02040604050505020304" pitchFamily="18" charset="0"/>
+                  </a:rPr>
+                  <a:t>n</a:t>
+                </a:r>
+                <a:r>
+                  <a:rPr kumimoji="1" lang="en-US" altLang="ja-JP" baseline="-25000" dirty="0">
+                    <a:latin typeface="Century" panose="02040604050505020304" pitchFamily="18" charset="0"/>
+                  </a:rPr>
+                  <a:t>1</a:t>
+                </a:r>
+                <a:endParaRPr kumimoji="1" lang="ja-JP" altLang="en-US" baseline="-25000" dirty="0">
+                  <a:latin typeface="Century" panose="02040604050505020304" pitchFamily="18" charset="0"/>
+                </a:endParaRPr>
+              </a:p>
+            </p:txBody>
+          </p:sp>
+          <p:sp>
+            <p:nvSpPr>
+              <p:cNvPr id="12" name="TextBox 11">
+                <a:extLst>
+                  <a:ext uri="{FF2B5EF4-FFF2-40B4-BE49-F238E27FC236}">
+                    <a16:creationId xmlns:a16="http://schemas.microsoft.com/office/drawing/2014/main" id="{0E391A27-DCC7-4D84-A5DD-286E1772E705}"/>
+                  </a:ext>
+                </a:extLst>
+              </p:cNvPr>
+              <p:cNvSpPr txBox="1"/>
+              <p:nvPr/>
+            </p:nvSpPr>
+            <p:spPr>
+              <a:xfrm>
+                <a:off x="2819517" y="2313542"/>
+                <a:ext cx="410690" cy="369332"/>
+              </a:xfrm>
+              <a:prstGeom prst="rect">
+                <a:avLst/>
+              </a:prstGeom>
+              <a:noFill/>
+            </p:spPr>
+            <p:txBody>
+              <a:bodyPr wrap="none" rtlCol="0">
+                <a:spAutoFit/>
+              </a:bodyPr>
+              <a:lstStyle/>
+              <a:p>
+                <a:r>
+                  <a:rPr kumimoji="1" lang="en-US" altLang="ja-JP" dirty="0">
+                    <a:latin typeface="Century" panose="02040604050505020304" pitchFamily="18" charset="0"/>
+                  </a:rPr>
+                  <a:t>n</a:t>
+                </a:r>
+                <a:r>
+                  <a:rPr kumimoji="1" lang="en-US" altLang="ja-JP" baseline="-25000" dirty="0">
+                    <a:latin typeface="Century" panose="02040604050505020304" pitchFamily="18" charset="0"/>
+                  </a:rPr>
+                  <a:t>2</a:t>
+                </a:r>
+                <a:endParaRPr kumimoji="1" lang="ja-JP" altLang="en-US" baseline="-25000" dirty="0">
+                  <a:latin typeface="Century" panose="02040604050505020304" pitchFamily="18" charset="0"/>
+                </a:endParaRPr>
+              </a:p>
+            </p:txBody>
+          </p:sp>
+          <p:sp>
+            <p:nvSpPr>
+              <p:cNvPr id="13" name="TextBox 12">
+                <a:extLst>
+                  <a:ext uri="{FF2B5EF4-FFF2-40B4-BE49-F238E27FC236}">
+                    <a16:creationId xmlns:a16="http://schemas.microsoft.com/office/drawing/2014/main" id="{699E9635-3091-19B1-D2D0-32AADE5689AC}"/>
+                  </a:ext>
+                </a:extLst>
+              </p:cNvPr>
+              <p:cNvSpPr txBox="1"/>
+              <p:nvPr/>
+            </p:nvSpPr>
+            <p:spPr>
+              <a:xfrm>
+                <a:off x="2324159" y="2426608"/>
+                <a:ext cx="410690" cy="369332"/>
+              </a:xfrm>
+              <a:prstGeom prst="rect">
+                <a:avLst/>
+              </a:prstGeom>
+              <a:noFill/>
+            </p:spPr>
+            <p:txBody>
+              <a:bodyPr wrap="none" rtlCol="0">
+                <a:spAutoFit/>
+              </a:bodyPr>
+              <a:lstStyle/>
+              <a:p>
+                <a:r>
+                  <a:rPr kumimoji="1" lang="en-US" altLang="ja-JP" dirty="0">
+                    <a:latin typeface="Century" panose="02040604050505020304" pitchFamily="18" charset="0"/>
+                  </a:rPr>
+                  <a:t>n</a:t>
+                </a:r>
+                <a:r>
+                  <a:rPr kumimoji="1" lang="en-US" altLang="ja-JP" baseline="-25000" dirty="0">
+                    <a:latin typeface="Century" panose="02040604050505020304" pitchFamily="18" charset="0"/>
+                  </a:rPr>
+                  <a:t>0</a:t>
+                </a:r>
+                <a:endParaRPr kumimoji="1" lang="ja-JP" altLang="en-US" baseline="-25000" dirty="0">
+                  <a:latin typeface="Century" panose="02040604050505020304" pitchFamily="18" charset="0"/>
+                </a:endParaRPr>
+              </a:p>
+            </p:txBody>
+          </p:sp>
+          <p:sp>
+            <p:nvSpPr>
+              <p:cNvPr id="20" name="Right Triangle 19">
+                <a:extLst>
+                  <a:ext uri="{FF2B5EF4-FFF2-40B4-BE49-F238E27FC236}">
+                    <a16:creationId xmlns:a16="http://schemas.microsoft.com/office/drawing/2014/main" id="{D4F3D350-3240-1F84-0749-26A082EB18CB}"/>
+                  </a:ext>
+                </a:extLst>
+              </p:cNvPr>
+              <p:cNvSpPr/>
+              <p:nvPr/>
+            </p:nvSpPr>
+            <p:spPr>
+              <a:xfrm>
+                <a:off x="5861050" y="2660650"/>
+                <a:ext cx="2214718" cy="1121209"/>
+              </a:xfrm>
+              <a:prstGeom prst="rtTriangle">
+                <a:avLst/>
+              </a:prstGeom>
+              <a:noFill/>
+            </p:spPr>
+            <p:style>
+              <a:lnRef idx="2">
+                <a:schemeClr val="accent1">
+                  <a:shade val="15000"/>
+                </a:schemeClr>
+              </a:lnRef>
+              <a:fillRef idx="1">
+                <a:schemeClr val="accent1"/>
+              </a:fillRef>
+              <a:effectRef idx="0">
+                <a:schemeClr val="accent1"/>
+              </a:effectRef>
+              <a:fontRef idx="minor">
+                <a:schemeClr val="lt1"/>
+              </a:fontRef>
+            </p:style>
+            <p:txBody>
+              <a:bodyPr rtlCol="0" anchor="ctr"/>
+              <a:lstStyle/>
+              <a:p>
+                <a:pPr algn="ctr"/>
+                <a:endParaRPr kumimoji="1" lang="ja-JP" altLang="en-US"/>
+              </a:p>
+            </p:txBody>
+          </p:sp>
+          <p:cxnSp>
+            <p:nvCxnSpPr>
+              <p:cNvPr id="22" name="Straight Connector 21">
+                <a:extLst>
+                  <a:ext uri="{FF2B5EF4-FFF2-40B4-BE49-F238E27FC236}">
+                    <a16:creationId xmlns:a16="http://schemas.microsoft.com/office/drawing/2014/main" id="{9E079050-06EE-529D-C831-3EEE2FC49786}"/>
+                  </a:ext>
+                </a:extLst>
+              </p:cNvPr>
+              <p:cNvCxnSpPr>
+                <a:cxnSpLocks/>
+                <a:stCxn id="20" idx="0"/>
+              </p:cNvCxnSpPr>
+              <p:nvPr/>
+            </p:nvCxnSpPr>
+            <p:spPr>
+              <a:xfrm flipH="1" flipV="1">
+                <a:off x="5291598" y="2397124"/>
+                <a:ext cx="569452" cy="263526"/>
+              </a:xfrm>
+              <a:prstGeom prst="line">
+                <a:avLst/>
+              </a:prstGeom>
+            </p:spPr>
+            <p:style>
+              <a:lnRef idx="2">
+                <a:schemeClr val="dk1"/>
+              </a:lnRef>
+              <a:fillRef idx="0">
+                <a:schemeClr val="dk1"/>
+              </a:fillRef>
+              <a:effectRef idx="1">
+                <a:schemeClr val="dk1"/>
+              </a:effectRef>
+              <a:fontRef idx="minor">
+                <a:schemeClr val="tx1"/>
+              </a:fontRef>
+            </p:style>
+          </p:cxnSp>
+          <p:sp>
+            <p:nvSpPr>
+              <p:cNvPr id="23" name="Rectangle 22">
+                <a:extLst>
+                  <a:ext uri="{FF2B5EF4-FFF2-40B4-BE49-F238E27FC236}">
+                    <a16:creationId xmlns:a16="http://schemas.microsoft.com/office/drawing/2014/main" id="{09228309-D897-6466-6DCA-0041CDD0E654}"/>
+                  </a:ext>
+                </a:extLst>
+              </p:cNvPr>
+              <p:cNvSpPr/>
+              <p:nvPr/>
+            </p:nvSpPr>
+            <p:spPr>
+              <a:xfrm>
+                <a:off x="5861050" y="3494088"/>
+                <a:ext cx="2214725" cy="287771"/>
+              </a:xfrm>
+              <a:prstGeom prst="rect">
+                <a:avLst/>
+              </a:prstGeom>
+              <a:noFill/>
+            </p:spPr>
+            <p:style>
+              <a:lnRef idx="2">
+                <a:schemeClr val="accent1">
+                  <a:shade val="15000"/>
+                </a:schemeClr>
+              </a:lnRef>
+              <a:fillRef idx="1">
+                <a:schemeClr val="accent1"/>
+              </a:fillRef>
+              <a:effectRef idx="0">
+                <a:schemeClr val="accent1"/>
+              </a:effectRef>
+              <a:fontRef idx="minor">
+                <a:schemeClr val="lt1"/>
+              </a:fontRef>
+            </p:style>
+            <p:txBody>
+              <a:bodyPr rtlCol="0" anchor="ctr"/>
+              <a:lstStyle/>
+              <a:p>
+                <a:pPr algn="ctr"/>
+                <a:endParaRPr kumimoji="1" lang="ja-JP" altLang="en-US"/>
+              </a:p>
+            </p:txBody>
+          </p:sp>
+          <p:sp>
+            <p:nvSpPr>
+              <p:cNvPr id="27" name="Rectangle 26">
+                <a:extLst>
+                  <a:ext uri="{FF2B5EF4-FFF2-40B4-BE49-F238E27FC236}">
+                    <a16:creationId xmlns:a16="http://schemas.microsoft.com/office/drawing/2014/main" id="{6E4818D8-415E-473F-8BC3-E181BE70EA8E}"/>
+                  </a:ext>
+                </a:extLst>
+              </p:cNvPr>
+              <p:cNvSpPr/>
+              <p:nvPr/>
+            </p:nvSpPr>
+            <p:spPr>
+              <a:xfrm>
+                <a:off x="5836416" y="2682873"/>
+                <a:ext cx="58811" cy="1098000"/>
+              </a:xfrm>
+              <a:prstGeom prst="rect">
+                <a:avLst/>
+              </a:prstGeom>
+              <a:solidFill>
+                <a:schemeClr val="bg1"/>
+              </a:solidFill>
+              <a:ln>
+                <a:noFill/>
+              </a:ln>
+            </p:spPr>
+            <p:style>
+              <a:lnRef idx="2">
+                <a:schemeClr val="accent1">
+                  <a:shade val="15000"/>
+                </a:schemeClr>
+              </a:lnRef>
+              <a:fillRef idx="1">
+                <a:schemeClr val="accent1"/>
+              </a:fillRef>
+              <a:effectRef idx="0">
+                <a:schemeClr val="accent1"/>
+              </a:effectRef>
+              <a:fontRef idx="minor">
+                <a:schemeClr val="lt1"/>
+              </a:fontRef>
+            </p:style>
+            <p:txBody>
+              <a:bodyPr rtlCol="0" anchor="ctr"/>
+              <a:lstStyle/>
+              <a:p>
+                <a:pPr algn="ctr"/>
+                <a:endParaRPr kumimoji="1" lang="ja-JP" altLang="en-US"/>
+              </a:p>
+            </p:txBody>
+          </p:sp>
+          <p:cxnSp>
+            <p:nvCxnSpPr>
+              <p:cNvPr id="29" name="Straight Connector 28">
+                <a:extLst>
+                  <a:ext uri="{FF2B5EF4-FFF2-40B4-BE49-F238E27FC236}">
+                    <a16:creationId xmlns:a16="http://schemas.microsoft.com/office/drawing/2014/main" id="{E3D74216-05EB-81F9-5FF2-A04A2E16192E}"/>
+                  </a:ext>
+                </a:extLst>
+              </p:cNvPr>
+              <p:cNvCxnSpPr>
+                <a:cxnSpLocks/>
+              </p:cNvCxnSpPr>
+              <p:nvPr/>
+            </p:nvCxnSpPr>
+            <p:spPr>
+              <a:xfrm>
+                <a:off x="5691499" y="3494088"/>
+                <a:ext cx="404501" cy="0"/>
+              </a:xfrm>
+              <a:prstGeom prst="line">
+                <a:avLst/>
+              </a:prstGeom>
+            </p:spPr>
+            <p:style>
+              <a:lnRef idx="2">
+                <a:schemeClr val="dk1"/>
+              </a:lnRef>
+              <a:fillRef idx="0">
+                <a:schemeClr val="dk1"/>
+              </a:fillRef>
+              <a:effectRef idx="1">
+                <a:schemeClr val="dk1"/>
+              </a:effectRef>
+              <a:fontRef idx="minor">
+                <a:schemeClr val="tx1"/>
+              </a:fontRef>
+            </p:style>
+          </p:cxnSp>
+        </p:grpSp>
+        <p:sp>
+          <p:nvSpPr>
+            <p:cNvPr id="32" name="Right Triangle 31">
+              <a:extLst>
+                <a:ext uri="{FF2B5EF4-FFF2-40B4-BE49-F238E27FC236}">
+                  <a16:creationId xmlns:a16="http://schemas.microsoft.com/office/drawing/2014/main" id="{7DE4F577-CCDD-4D39-4BDB-959A0C81DA2B}"/>
+                </a:ext>
+              </a:extLst>
+            </p:cNvPr>
+            <p:cNvSpPr/>
+            <p:nvPr/>
+          </p:nvSpPr>
+          <p:spPr>
+            <a:xfrm rot="10800000">
+              <a:off x="5219906" y="2357670"/>
+              <a:ext cx="809389" cy="369333"/>
+            </a:xfrm>
+            <a:prstGeom prst="rtTriangle">
+              <a:avLst/>
+            </a:prstGeom>
+            <a:solidFill>
+              <a:schemeClr val="bg1"/>
+            </a:solidFill>
+            <a:ln>
+              <a:noFill/>
+            </a:ln>
+          </p:spPr>
+          <p:style>
+            <a:lnRef idx="2">
+              <a:schemeClr val="accent1">
+                <a:shade val="15000"/>
+              </a:schemeClr>
+            </a:lnRef>
+            <a:fillRef idx="1">
+              <a:schemeClr val="accent1"/>
+            </a:fillRef>
+            <a:effectRef idx="0">
+              <a:schemeClr val="accent1"/>
+            </a:effectRef>
+            <a:fontRef idx="minor">
+              <a:schemeClr val="lt1"/>
+            </a:fontRef>
+          </p:style>
+          <p:txBody>
+            <a:bodyPr rtlCol="0" anchor="ctr"/>
+            <a:lstStyle/>
+            <a:p>
+              <a:pPr algn="ctr"/>
+              <a:endParaRPr kumimoji="1" lang="ja-JP" altLang="en-US"/>
+            </a:p>
+          </p:txBody>
+        </p:sp>
+        <p:sp>
+          <p:nvSpPr>
+            <p:cNvPr id="33" name="Right Triangle 32">
+              <a:extLst>
+                <a:ext uri="{FF2B5EF4-FFF2-40B4-BE49-F238E27FC236}">
+                  <a16:creationId xmlns:a16="http://schemas.microsoft.com/office/drawing/2014/main" id="{111FF909-5BFE-F553-A9A9-F379D179B373}"/>
+                </a:ext>
+              </a:extLst>
+            </p:cNvPr>
+            <p:cNvSpPr/>
+            <p:nvPr/>
+          </p:nvSpPr>
+          <p:spPr>
+            <a:xfrm rot="10800000">
+              <a:off x="7062859" y="3255947"/>
+              <a:ext cx="1037537" cy="539282"/>
+            </a:xfrm>
+            <a:prstGeom prst="rtTriangle">
+              <a:avLst/>
+            </a:prstGeom>
+            <a:solidFill>
+              <a:schemeClr val="bg1"/>
+            </a:solidFill>
+            <a:ln>
+              <a:noFill/>
+            </a:ln>
+          </p:spPr>
+          <p:style>
+            <a:lnRef idx="2">
+              <a:schemeClr val="accent1">
+                <a:shade val="15000"/>
+              </a:schemeClr>
+            </a:lnRef>
+            <a:fillRef idx="1">
+              <a:schemeClr val="accent1"/>
+            </a:fillRef>
+            <a:effectRef idx="0">
+              <a:schemeClr val="accent1"/>
+            </a:effectRef>
+            <a:fontRef idx="minor">
+              <a:schemeClr val="lt1"/>
+            </a:fontRef>
+          </p:style>
+          <p:txBody>
+            <a:bodyPr rtlCol="0" anchor="ctr"/>
+            <a:lstStyle/>
+            <a:p>
+              <a:pPr algn="ctr"/>
+              <a:endParaRPr kumimoji="1" lang="ja-JP" altLang="en-US"/>
+            </a:p>
+          </p:txBody>
+        </p:sp>
+      </p:grpSp>
       <p:cxnSp>
         <p:nvCxnSpPr>
-          <p:cNvPr id="7" name="Straight Connector 6">
-            <a:extLst>
-              <a:ext uri="{FF2B5EF4-FFF2-40B4-BE49-F238E27FC236}">
-                <a16:creationId xmlns:a16="http://schemas.microsoft.com/office/drawing/2014/main" id="{A6259DBD-9E4D-4CC2-BE54-2818D54D0DEF}"/>
+          <p:cNvPr id="6" name="Straight Arrow Connector 5">
+            <a:extLst>
+              <a:ext uri="{FF2B5EF4-FFF2-40B4-BE49-F238E27FC236}">
+                <a16:creationId xmlns:a16="http://schemas.microsoft.com/office/drawing/2014/main" id="{F4DCA604-DDB1-84E1-20BA-3C30E3875B42}"/>
               </a:ext>
             </a:extLst>
           </p:cNvPr>
           <p:cNvCxnSpPr>
-            <a:stCxn id="4" idx="0"/>
+            <a:cxnSpLocks/>
           </p:cNvCxnSpPr>
           <p:nvPr/>
         </p:nvCxnSpPr>
         <p:spPr>
-          <a:xfrm>
-            <a:off x="3686175" y="1981200"/>
-            <a:ext cx="3971925" cy="0"/>
-          </a:xfrm>
-          <a:prstGeom prst="line">
+          <a:xfrm flipV="1">
+            <a:off x="5691499" y="3086641"/>
+            <a:ext cx="1040496" cy="400762"/>
+          </a:xfrm>
+          <a:prstGeom prst="straightConnector1">
             <a:avLst/>
           </a:prstGeom>
+          <a:ln>
+            <a:tailEnd type="triangle"/>
+          </a:ln>
         </p:spPr>
         <p:style>
           <a:lnRef idx="2">
-            <a:schemeClr val="dk1"/>
+            <a:schemeClr val="accent1"/>
           </a:lnRef>
           <a:fillRef idx="0">
-            <a:schemeClr val="dk1"/>
+            <a:schemeClr val="accent1"/>
           </a:fillRef>
           <a:effectRef idx="1">
-            <a:schemeClr val="dk1"/>
+            <a:schemeClr val="accent1"/>
           </a:effectRef>
           <a:fontRef idx="minor">
             <a:schemeClr val="tx1"/>
@@ -9965,157 +10750,22 @@
       </p:cxnSp>
       <p:cxnSp>
         <p:nvCxnSpPr>
-          <p:cNvPr id="8" name="Straight Connector 7">
-            <a:extLst>
-              <a:ext uri="{FF2B5EF4-FFF2-40B4-BE49-F238E27FC236}">
-                <a16:creationId xmlns:a16="http://schemas.microsoft.com/office/drawing/2014/main" id="{0B171B55-E2D9-CB95-0358-6F3DC77B8F29}"/>
+          <p:cNvPr id="40" name="Straight Arrow Connector 39">
+            <a:extLst>
+              <a:ext uri="{FF2B5EF4-FFF2-40B4-BE49-F238E27FC236}">
+                <a16:creationId xmlns:a16="http://schemas.microsoft.com/office/drawing/2014/main" id="{C823132E-4C09-6130-B040-27D536789369}"/>
               </a:ext>
             </a:extLst>
           </p:cNvPr>
           <p:cNvCxnSpPr>
             <a:cxnSpLocks/>
-            <a:stCxn id="4" idx="4"/>
           </p:cNvCxnSpPr>
           <p:nvPr/>
         </p:nvCxnSpPr>
         <p:spPr>
           <a:xfrm>
-            <a:off x="3686175" y="4102100"/>
-            <a:ext cx="4079877" cy="0"/>
-          </a:xfrm>
-          <a:prstGeom prst="line">
-            <a:avLst/>
-          </a:prstGeom>
-        </p:spPr>
-        <p:style>
-          <a:lnRef idx="2">
-            <a:schemeClr val="dk1"/>
-          </a:lnRef>
-          <a:fillRef idx="0">
-            <a:schemeClr val="dk1"/>
-          </a:fillRef>
-          <a:effectRef idx="1">
-            <a:schemeClr val="dk1"/>
-          </a:effectRef>
-          <a:fontRef idx="minor">
-            <a:schemeClr val="tx1"/>
-          </a:fontRef>
-        </p:style>
-      </p:cxnSp>
-      <p:sp>
-        <p:nvSpPr>
-          <p:cNvPr id="17" name="TextBox 16">
-            <a:extLst>
-              <a:ext uri="{FF2B5EF4-FFF2-40B4-BE49-F238E27FC236}">
-                <a16:creationId xmlns:a16="http://schemas.microsoft.com/office/drawing/2014/main" id="{0995D5CF-252B-3FA6-9ACC-88CEA6D1F1B1}"/>
-              </a:ext>
-            </a:extLst>
-          </p:cNvPr>
-          <p:cNvSpPr txBox="1"/>
-          <p:nvPr/>
-        </p:nvSpPr>
-        <p:spPr>
-          <a:xfrm>
-            <a:off x="3407092" y="2071193"/>
-            <a:ext cx="558166" cy="369332"/>
-          </a:xfrm>
-          <a:prstGeom prst="rect">
-            <a:avLst/>
-          </a:prstGeom>
-          <a:noFill/>
-        </p:spPr>
-        <p:txBody>
-          <a:bodyPr wrap="none" rtlCol="0">
-            <a:spAutoFit/>
-          </a:bodyPr>
-          <a:lstStyle/>
-          <a:p>
-            <a:r>
-              <a:rPr kumimoji="1" lang="en-US" altLang="ja-JP" dirty="0" err="1">
-                <a:latin typeface="times" panose="02020603050405020304" pitchFamily="18" charset="0"/>
-                <a:cs typeface="times" panose="02020603050405020304" pitchFamily="18" charset="0"/>
-              </a:rPr>
-              <a:t>n</a:t>
-            </a:r>
-            <a:r>
-              <a:rPr kumimoji="1" lang="en-US" altLang="ja-JP" baseline="-25000" dirty="0" err="1">
-                <a:latin typeface="times" panose="02020603050405020304" pitchFamily="18" charset="0"/>
-                <a:cs typeface="times" panose="02020603050405020304" pitchFamily="18" charset="0"/>
-              </a:rPr>
-              <a:t>clad</a:t>
-            </a:r>
-            <a:endParaRPr kumimoji="1" lang="ja-JP" altLang="en-US" baseline="-25000" dirty="0">
-              <a:latin typeface="times" panose="02020603050405020304" pitchFamily="18" charset="0"/>
-              <a:cs typeface="times" panose="02020603050405020304" pitchFamily="18" charset="0"/>
-            </a:endParaRPr>
-          </a:p>
-        </p:txBody>
-      </p:sp>
-      <p:sp>
-        <p:nvSpPr>
-          <p:cNvPr id="18" name="TextBox 17">
-            <a:extLst>
-              <a:ext uri="{FF2B5EF4-FFF2-40B4-BE49-F238E27FC236}">
-                <a16:creationId xmlns:a16="http://schemas.microsoft.com/office/drawing/2014/main" id="{4F55D5FE-54C5-6F8A-E447-040355450C1F}"/>
-              </a:ext>
-            </a:extLst>
-          </p:cNvPr>
-          <p:cNvSpPr txBox="1"/>
-          <p:nvPr/>
-        </p:nvSpPr>
-        <p:spPr>
-          <a:xfrm>
-            <a:off x="3380549" y="2883993"/>
-            <a:ext cx="566181" cy="369332"/>
-          </a:xfrm>
-          <a:prstGeom prst="rect">
-            <a:avLst/>
-          </a:prstGeom>
-          <a:noFill/>
-        </p:spPr>
-        <p:txBody>
-          <a:bodyPr wrap="none" rtlCol="0">
-            <a:spAutoFit/>
-          </a:bodyPr>
-          <a:lstStyle/>
-          <a:p>
-            <a:r>
-              <a:rPr kumimoji="1" lang="en-US" altLang="ja-JP" dirty="0" err="1">
-                <a:latin typeface="times" panose="02020603050405020304" pitchFamily="18" charset="0"/>
-                <a:cs typeface="times" panose="02020603050405020304" pitchFamily="18" charset="0"/>
-              </a:rPr>
-              <a:t>n</a:t>
-            </a:r>
-            <a:r>
-              <a:rPr kumimoji="1" lang="en-US" altLang="ja-JP" baseline="-25000" dirty="0" err="1">
-                <a:latin typeface="times" panose="02020603050405020304" pitchFamily="18" charset="0"/>
-                <a:cs typeface="times" panose="02020603050405020304" pitchFamily="18" charset="0"/>
-              </a:rPr>
-              <a:t>core</a:t>
-            </a:r>
-            <a:endParaRPr kumimoji="1" lang="ja-JP" altLang="en-US" baseline="-25000" dirty="0">
-              <a:latin typeface="times" panose="02020603050405020304" pitchFamily="18" charset="0"/>
-              <a:cs typeface="times" panose="02020603050405020304" pitchFamily="18" charset="0"/>
-            </a:endParaRPr>
-          </a:p>
-        </p:txBody>
-      </p:sp>
-      <p:cxnSp>
-        <p:nvCxnSpPr>
-          <p:cNvPr id="20" name="Straight Arrow Connector 19">
-            <a:extLst>
-              <a:ext uri="{FF2B5EF4-FFF2-40B4-BE49-F238E27FC236}">
-                <a16:creationId xmlns:a16="http://schemas.microsoft.com/office/drawing/2014/main" id="{045E283A-093A-FB76-0A34-F470FCF62CEA}"/>
-              </a:ext>
-            </a:extLst>
-          </p:cNvPr>
-          <p:cNvCxnSpPr/>
-          <p:nvPr/>
-        </p:nvCxnSpPr>
-        <p:spPr>
-          <a:xfrm>
-            <a:off x="1693193" y="3150632"/>
-            <a:ext cx="996950" cy="0"/>
+            <a:off x="6738165" y="3101028"/>
+            <a:ext cx="100439" cy="714848"/>
           </a:xfrm>
           <a:prstGeom prst="straightConnector1">
             <a:avLst/>
@@ -10126,13 +10776,13 @@
         </p:spPr>
         <p:style>
           <a:lnRef idx="2">
-            <a:schemeClr val="dk1"/>
+            <a:schemeClr val="accent1"/>
           </a:lnRef>
           <a:fillRef idx="0">
-            <a:schemeClr val="dk1"/>
+            <a:schemeClr val="accent1"/>
           </a:fillRef>
           <a:effectRef idx="1">
-            <a:schemeClr val="dk1"/>
+            <a:schemeClr val="accent1"/>
           </a:effectRef>
           <a:fontRef idx="minor">
             <a:schemeClr val="tx1"/>
@@ -10141,10 +10791,10 @@
       </p:cxnSp>
       <p:cxnSp>
         <p:nvCxnSpPr>
-          <p:cNvPr id="21" name="Straight Arrow Connector 20">
-            <a:extLst>
-              <a:ext uri="{FF2B5EF4-FFF2-40B4-BE49-F238E27FC236}">
-                <a16:creationId xmlns:a16="http://schemas.microsoft.com/office/drawing/2014/main" id="{F81FB1E9-7425-2D48-5201-E3CD6A91171E}"/>
+          <p:cNvPr id="41" name="Straight Connector 40">
+            <a:extLst>
+              <a:ext uri="{FF2B5EF4-FFF2-40B4-BE49-F238E27FC236}">
+                <a16:creationId xmlns:a16="http://schemas.microsoft.com/office/drawing/2014/main" id="{4DCED330-D698-3CD9-478D-60C71CFFE4DF}"/>
               </a:ext>
             </a:extLst>
           </p:cNvPr>
@@ -10155,8 +10805,170 @@
         </p:nvCxnSpPr>
         <p:spPr>
           <a:xfrm flipV="1">
-            <a:off x="1699543" y="2356882"/>
-            <a:ext cx="0" cy="787400"/>
+            <a:off x="6386067" y="2611274"/>
+            <a:ext cx="582342" cy="1193851"/>
+          </a:xfrm>
+          <a:prstGeom prst="line">
+            <a:avLst/>
+          </a:prstGeom>
+          <a:ln>
+            <a:prstDash val="dashDot"/>
+          </a:ln>
+        </p:spPr>
+        <p:style>
+          <a:lnRef idx="2">
+            <a:schemeClr val="dk1"/>
+          </a:lnRef>
+          <a:fillRef idx="0">
+            <a:schemeClr val="dk1"/>
+          </a:fillRef>
+          <a:effectRef idx="1">
+            <a:schemeClr val="dk1"/>
+          </a:effectRef>
+          <a:fontRef idx="minor">
+            <a:schemeClr val="tx1"/>
+          </a:fontRef>
+        </p:style>
+      </p:cxnSp>
+      <p:sp>
+        <p:nvSpPr>
+          <p:cNvPr id="46" name="Freeform: Shape 45">
+            <a:extLst>
+              <a:ext uri="{FF2B5EF4-FFF2-40B4-BE49-F238E27FC236}">
+                <a16:creationId xmlns:a16="http://schemas.microsoft.com/office/drawing/2014/main" id="{F58110F3-9F90-2967-956E-62F236064162}"/>
+              </a:ext>
+            </a:extLst>
+          </p:cNvPr>
+          <p:cNvSpPr/>
+          <p:nvPr/>
+        </p:nvSpPr>
+        <p:spPr>
+          <a:xfrm rot="7663402">
+            <a:off x="6561307" y="3152505"/>
+            <a:ext cx="45719" cy="155505"/>
+          </a:xfrm>
+          <a:custGeom>
+            <a:avLst/>
+            <a:gdLst>
+              <a:gd name="csX0" fmla="*/ 50800 w 55688"/>
+              <a:gd name="csY0" fmla="*/ 0 h 133350"/>
+              <a:gd name="csX1" fmla="*/ 50800 w 55688"/>
+              <a:gd name="csY1" fmla="*/ 82550 h 133350"/>
+              <a:gd name="csX2" fmla="*/ 0 w 55688"/>
+              <a:gd name="csY2" fmla="*/ 133350 h 133350"/>
+            </a:gdLst>
+            <a:ahLst/>
+            <a:cxnLst>
+              <a:cxn ang="0">
+                <a:pos x="csX0" y="csY0"/>
+              </a:cxn>
+              <a:cxn ang="0">
+                <a:pos x="csX1" y="csY1"/>
+              </a:cxn>
+              <a:cxn ang="0">
+                <a:pos x="csX2" y="csY2"/>
+              </a:cxn>
+            </a:cxnLst>
+            <a:rect l="l" t="t" r="r" b="b"/>
+            <a:pathLst>
+              <a:path w="55688" h="133350">
+                <a:moveTo>
+                  <a:pt x="50800" y="0"/>
+                </a:moveTo>
+                <a:cubicBezTo>
+                  <a:pt x="55033" y="30162"/>
+                  <a:pt x="59267" y="60325"/>
+                  <a:pt x="50800" y="82550"/>
+                </a:cubicBezTo>
+                <a:cubicBezTo>
+                  <a:pt x="42333" y="104775"/>
+                  <a:pt x="21166" y="119062"/>
+                  <a:pt x="0" y="133350"/>
+                </a:cubicBezTo>
+              </a:path>
+            </a:pathLst>
+          </a:custGeom>
+          <a:noFill/>
+        </p:spPr>
+        <p:style>
+          <a:lnRef idx="2">
+            <a:schemeClr val="accent1">
+              <a:shade val="15000"/>
+            </a:schemeClr>
+          </a:lnRef>
+          <a:fillRef idx="1">
+            <a:schemeClr val="accent1"/>
+          </a:fillRef>
+          <a:effectRef idx="0">
+            <a:schemeClr val="accent1"/>
+          </a:effectRef>
+          <a:fontRef idx="minor">
+            <a:schemeClr val="lt1"/>
+          </a:fontRef>
+        </p:style>
+        <p:txBody>
+          <a:bodyPr rtlCol="0" anchor="ctr"/>
+          <a:lstStyle/>
+          <a:p>
+            <a:pPr algn="ctr"/>
+            <a:endParaRPr kumimoji="1" lang="ja-JP" altLang="en-US"/>
+          </a:p>
+        </p:txBody>
+      </p:sp>
+      <p:sp>
+        <p:nvSpPr>
+          <p:cNvPr id="47" name="TextBox 46">
+            <a:extLst>
+              <a:ext uri="{FF2B5EF4-FFF2-40B4-BE49-F238E27FC236}">
+                <a16:creationId xmlns:a16="http://schemas.microsoft.com/office/drawing/2014/main" id="{015E8ECF-A14C-4482-3236-A62B6ED07609}"/>
+              </a:ext>
+            </a:extLst>
+          </p:cNvPr>
+          <p:cNvSpPr txBox="1"/>
+          <p:nvPr/>
+        </p:nvSpPr>
+        <p:spPr>
+          <a:xfrm>
+            <a:off x="7317902" y="3487403"/>
+            <a:ext cx="415498" cy="369332"/>
+          </a:xfrm>
+          <a:prstGeom prst="rect">
+            <a:avLst/>
+          </a:prstGeom>
+          <a:noFill/>
+        </p:spPr>
+        <p:txBody>
+          <a:bodyPr wrap="none" rtlCol="0">
+            <a:spAutoFit/>
+          </a:bodyPr>
+          <a:lstStyle/>
+          <a:p>
+            <a:r>
+              <a:rPr kumimoji="1" lang="el-GR" altLang="ja-JP" dirty="0"/>
+              <a:t>β</a:t>
+            </a:r>
+            <a:endParaRPr kumimoji="1" lang="ja-JP" altLang="en-US" dirty="0"/>
+          </a:p>
+        </p:txBody>
+      </p:sp>
+      <p:cxnSp>
+        <p:nvCxnSpPr>
+          <p:cNvPr id="3" name="Straight Arrow Connector 2">
+            <a:extLst>
+              <a:ext uri="{FF2B5EF4-FFF2-40B4-BE49-F238E27FC236}">
+                <a16:creationId xmlns:a16="http://schemas.microsoft.com/office/drawing/2014/main" id="{369B93FA-A836-15A2-8422-D8E6F6EB975C}"/>
+              </a:ext>
+            </a:extLst>
+          </p:cNvPr>
+          <p:cNvCxnSpPr>
+            <a:cxnSpLocks/>
+          </p:cNvCxnSpPr>
+          <p:nvPr/>
+        </p:nvCxnSpPr>
+        <p:spPr>
+          <a:xfrm>
+            <a:off x="2863850" y="2710654"/>
+            <a:ext cx="2865957" cy="783434"/>
           </a:xfrm>
           <a:prstGeom prst="straightConnector1">
             <a:avLst/>
@@ -10167,13 +10979,13 @@
         </p:spPr>
         <p:style>
           <a:lnRef idx="2">
-            <a:schemeClr val="dk1"/>
+            <a:schemeClr val="accent1"/>
           </a:lnRef>
           <a:fillRef idx="0">
-            <a:schemeClr val="dk1"/>
+            <a:schemeClr val="accent1"/>
           </a:fillRef>
           <a:effectRef idx="1">
-            <a:schemeClr val="dk1"/>
+            <a:schemeClr val="accent1"/>
           </a:effectRef>
           <a:fontRef idx="minor">
             <a:schemeClr val="tx1"/>
@@ -10182,10 +10994,10 @@
       </p:cxnSp>
       <p:cxnSp>
         <p:nvCxnSpPr>
-          <p:cNvPr id="23" name="Straight Arrow Connector 22">
-            <a:extLst>
-              <a:ext uri="{FF2B5EF4-FFF2-40B4-BE49-F238E27FC236}">
-                <a16:creationId xmlns:a16="http://schemas.microsoft.com/office/drawing/2014/main" id="{061D44DA-3B20-BA49-6B9B-F417DECF01FC}"/>
+          <p:cNvPr id="25" name="Straight Connector 24">
+            <a:extLst>
+              <a:ext uri="{FF2B5EF4-FFF2-40B4-BE49-F238E27FC236}">
+                <a16:creationId xmlns:a16="http://schemas.microsoft.com/office/drawing/2014/main" id="{88360D6E-B40A-540D-2A51-56D95A9AEF3E}"/>
               </a:ext>
             </a:extLst>
           </p:cNvPr>
@@ -10195,15 +11007,15 @@
           <p:nvPr/>
         </p:nvCxnSpPr>
         <p:spPr>
-          <a:xfrm>
-            <a:off x="1699543" y="3150632"/>
-            <a:ext cx="679450" cy="323850"/>
-          </a:xfrm>
-          <a:prstGeom prst="straightConnector1">
+          <a:xfrm flipV="1">
+            <a:off x="5681581" y="2810586"/>
+            <a:ext cx="7550" cy="680917"/>
+          </a:xfrm>
+          <a:prstGeom prst="line">
             <a:avLst/>
           </a:prstGeom>
           <a:ln>
-            <a:tailEnd type="triangle"/>
+            <a:prstDash val="dashDot"/>
           </a:ln>
         </p:spPr>
         <p:style>
@@ -10223,10 +11035,10 @@
       </p:cxnSp>
       <p:sp>
         <p:nvSpPr>
-          <p:cNvPr id="26" name="TextBox 25">
-            <a:extLst>
-              <a:ext uri="{FF2B5EF4-FFF2-40B4-BE49-F238E27FC236}">
-                <a16:creationId xmlns:a16="http://schemas.microsoft.com/office/drawing/2014/main" id="{BD3E61E5-18F8-6307-9D1F-99A44501E02F}"/>
+          <p:cNvPr id="35" name="TextBox 34">
+            <a:extLst>
+              <a:ext uri="{FF2B5EF4-FFF2-40B4-BE49-F238E27FC236}">
+                <a16:creationId xmlns:a16="http://schemas.microsoft.com/office/drawing/2014/main" id="{FEBC8218-1154-75CC-32C1-1D312C3ABE7B}"/>
               </a:ext>
             </a:extLst>
           </p:cNvPr>
@@ -10235,8 +11047,8 @@
         </p:nvSpPr>
         <p:spPr>
           <a:xfrm>
-            <a:off x="1549502" y="1981200"/>
-            <a:ext cx="300082" cy="369332"/>
+            <a:off x="5646710" y="3018912"/>
+            <a:ext cx="394676" cy="369332"/>
           </a:xfrm>
           <a:prstGeom prst="rect">
             <a:avLst/>
@@ -10244,31 +11056,202 @@
           <a:noFill/>
         </p:spPr>
         <p:txBody>
-          <a:bodyPr wrap="none" rtlCol="0">
+          <a:bodyPr wrap="square">
             <a:spAutoFit/>
           </a:bodyPr>
           <a:lstStyle/>
           <a:p>
             <a:r>
-              <a:rPr kumimoji="1" lang="en-US" altLang="ja-JP" dirty="0">
-                <a:latin typeface="times" panose="02020603050405020304" pitchFamily="18" charset="0"/>
-                <a:cs typeface="times" panose="02020603050405020304" pitchFamily="18" charset="0"/>
+              <a:rPr kumimoji="1" lang="el-GR" altLang="ja-JP" dirty="0">
+                <a:latin typeface="Century" panose="02040604050505020304" pitchFamily="18" charset="0"/>
               </a:rPr>
-              <a:t>x</a:t>
+              <a:t>θ</a:t>
             </a:r>
-            <a:endParaRPr kumimoji="1" lang="ja-JP" altLang="en-US" dirty="0">
-              <a:latin typeface="times" panose="02020603050405020304" pitchFamily="18" charset="0"/>
-              <a:cs typeface="times" panose="02020603050405020304" pitchFamily="18" charset="0"/>
+            <a:r>
+              <a:rPr kumimoji="1" lang="en-US" altLang="ja-JP" baseline="-25000" dirty="0">
+                <a:latin typeface="Century" panose="02040604050505020304" pitchFamily="18" charset="0"/>
+              </a:rPr>
+              <a:t>1</a:t>
+            </a:r>
+            <a:endParaRPr kumimoji="1" lang="ja-JP" altLang="en-US" baseline="-25000" dirty="0">
+              <a:latin typeface="Century" panose="02040604050505020304" pitchFamily="18" charset="0"/>
             </a:endParaRPr>
           </a:p>
         </p:txBody>
       </p:sp>
       <p:sp>
         <p:nvSpPr>
-          <p:cNvPr id="27" name="TextBox 26">
-            <a:extLst>
-              <a:ext uri="{FF2B5EF4-FFF2-40B4-BE49-F238E27FC236}">
-                <a16:creationId xmlns:a16="http://schemas.microsoft.com/office/drawing/2014/main" id="{9222EEB3-9C8E-EB00-0555-56FAFEE6E44C}"/>
+          <p:cNvPr id="36" name="Freeform: Shape 35">
+            <a:extLst>
+              <a:ext uri="{FF2B5EF4-FFF2-40B4-BE49-F238E27FC236}">
+                <a16:creationId xmlns:a16="http://schemas.microsoft.com/office/drawing/2014/main" id="{0695FF3A-421D-FEBC-16A2-C6BF92F47D79}"/>
+              </a:ext>
+            </a:extLst>
+          </p:cNvPr>
+          <p:cNvSpPr/>
+          <p:nvPr/>
+        </p:nvSpPr>
+        <p:spPr>
+          <a:xfrm rot="13480235">
+            <a:off x="5682754" y="3356826"/>
+            <a:ext cx="156416" cy="79377"/>
+          </a:xfrm>
+          <a:custGeom>
+            <a:avLst/>
+            <a:gdLst>
+              <a:gd name="csX0" fmla="*/ 0 w 127000"/>
+              <a:gd name="csY0" fmla="*/ 76200 h 78610"/>
+              <a:gd name="csX1" fmla="*/ 88900 w 127000"/>
+              <a:gd name="csY1" fmla="*/ 69850 h 78610"/>
+              <a:gd name="csX2" fmla="*/ 127000 w 127000"/>
+              <a:gd name="csY2" fmla="*/ 0 h 78610"/>
+            </a:gdLst>
+            <a:ahLst/>
+            <a:cxnLst>
+              <a:cxn ang="0">
+                <a:pos x="csX0" y="csY0"/>
+              </a:cxn>
+              <a:cxn ang="0">
+                <a:pos x="csX1" y="csY1"/>
+              </a:cxn>
+              <a:cxn ang="0">
+                <a:pos x="csX2" y="csY2"/>
+              </a:cxn>
+            </a:cxnLst>
+            <a:rect l="l" t="t" r="r" b="b"/>
+            <a:pathLst>
+              <a:path w="127000" h="78610">
+                <a:moveTo>
+                  <a:pt x="0" y="76200"/>
+                </a:moveTo>
+                <a:cubicBezTo>
+                  <a:pt x="34396" y="78316"/>
+                  <a:pt x="67733" y="82550"/>
+                  <a:pt x="88900" y="69850"/>
+                </a:cubicBezTo>
+                <a:cubicBezTo>
+                  <a:pt x="110067" y="57150"/>
+                  <a:pt x="118533" y="28575"/>
+                  <a:pt x="127000" y="0"/>
+                </a:cubicBezTo>
+              </a:path>
+            </a:pathLst>
+          </a:custGeom>
+          <a:noFill/>
+        </p:spPr>
+        <p:style>
+          <a:lnRef idx="2">
+            <a:schemeClr val="accent1">
+              <a:shade val="15000"/>
+            </a:schemeClr>
+          </a:lnRef>
+          <a:fillRef idx="1">
+            <a:schemeClr val="accent1"/>
+          </a:fillRef>
+          <a:effectRef idx="0">
+            <a:schemeClr val="accent1"/>
+          </a:effectRef>
+          <a:fontRef idx="minor">
+            <a:schemeClr val="lt1"/>
+          </a:fontRef>
+        </p:style>
+        <p:txBody>
+          <a:bodyPr rtlCol="0" anchor="ctr"/>
+          <a:lstStyle/>
+          <a:p>
+            <a:pPr algn="ctr"/>
+            <a:endParaRPr kumimoji="1" lang="ja-JP" altLang="en-US"/>
+          </a:p>
+        </p:txBody>
+      </p:sp>
+      <p:cxnSp>
+        <p:nvCxnSpPr>
+          <p:cNvPr id="10" name="Straight Arrow Connector 39">
+            <a:extLst>
+              <a:ext uri="{FF2B5EF4-FFF2-40B4-BE49-F238E27FC236}">
+                <a16:creationId xmlns:a16="http://schemas.microsoft.com/office/drawing/2014/main" id="{11C1B729-71AF-E499-8D77-0743BB9453EB}"/>
+              </a:ext>
+            </a:extLst>
+          </p:cNvPr>
+          <p:cNvCxnSpPr>
+            <a:cxnSpLocks/>
+          </p:cNvCxnSpPr>
+          <p:nvPr/>
+        </p:nvCxnSpPr>
+        <p:spPr>
+          <a:xfrm>
+            <a:off x="6838604" y="3780873"/>
+            <a:ext cx="479291" cy="757487"/>
+          </a:xfrm>
+          <a:prstGeom prst="straightConnector1">
+            <a:avLst/>
+          </a:prstGeom>
+          <a:ln>
+            <a:tailEnd type="triangle"/>
+          </a:ln>
+        </p:spPr>
+        <p:style>
+          <a:lnRef idx="2">
+            <a:schemeClr val="accent1"/>
+          </a:lnRef>
+          <a:fillRef idx="0">
+            <a:schemeClr val="accent1"/>
+          </a:fillRef>
+          <a:effectRef idx="1">
+            <a:schemeClr val="accent1"/>
+          </a:effectRef>
+          <a:fontRef idx="minor">
+            <a:schemeClr val="tx1"/>
+          </a:fontRef>
+        </p:style>
+      </p:cxnSp>
+      <p:cxnSp>
+        <p:nvCxnSpPr>
+          <p:cNvPr id="24" name="Straight Connector 40">
+            <a:extLst>
+              <a:ext uri="{FF2B5EF4-FFF2-40B4-BE49-F238E27FC236}">
+                <a16:creationId xmlns:a16="http://schemas.microsoft.com/office/drawing/2014/main" id="{32E592DE-1510-3F3F-5820-0CE8A2840572}"/>
+              </a:ext>
+            </a:extLst>
+          </p:cNvPr>
+          <p:cNvCxnSpPr>
+            <a:cxnSpLocks/>
+          </p:cNvCxnSpPr>
+          <p:nvPr/>
+        </p:nvCxnSpPr>
+        <p:spPr>
+          <a:xfrm flipH="1" flipV="1">
+            <a:off x="6808997" y="2721898"/>
+            <a:ext cx="56327" cy="1648489"/>
+          </a:xfrm>
+          <a:prstGeom prst="line">
+            <a:avLst/>
+          </a:prstGeom>
+          <a:ln>
+            <a:prstDash val="dashDot"/>
+          </a:ln>
+        </p:spPr>
+        <p:style>
+          <a:lnRef idx="2">
+            <a:schemeClr val="dk1"/>
+          </a:lnRef>
+          <a:fillRef idx="0">
+            <a:schemeClr val="dk1"/>
+          </a:fillRef>
+          <a:effectRef idx="1">
+            <a:schemeClr val="dk1"/>
+          </a:effectRef>
+          <a:fontRef idx="minor">
+            <a:schemeClr val="tx1"/>
+          </a:fontRef>
+        </p:style>
+      </p:cxnSp>
+      <p:sp>
+        <p:nvSpPr>
+          <p:cNvPr id="54" name="TextBox 34">
+            <a:extLst>
+              <a:ext uri="{FF2B5EF4-FFF2-40B4-BE49-F238E27FC236}">
+                <a16:creationId xmlns:a16="http://schemas.microsoft.com/office/drawing/2014/main" id="{287BF06D-E5D3-14D7-4367-5633832A9E6C}"/>
               </a:ext>
             </a:extLst>
           </p:cNvPr>
@@ -10277,8 +11260,8 @@
         </p:nvSpPr>
         <p:spPr>
           <a:xfrm>
-            <a:off x="2363845" y="3312557"/>
-            <a:ext cx="300082" cy="369332"/>
+            <a:off x="6778196" y="3176810"/>
+            <a:ext cx="394676" cy="369332"/>
           </a:xfrm>
           <a:prstGeom prst="rect">
             <a:avLst/>
@@ -10286,71 +11269,118 @@
           <a:noFill/>
         </p:spPr>
         <p:txBody>
-          <a:bodyPr wrap="none" rtlCol="0">
+          <a:bodyPr wrap="square">
             <a:spAutoFit/>
           </a:bodyPr>
           <a:lstStyle/>
           <a:p>
             <a:r>
-              <a:rPr kumimoji="1" lang="en-US" altLang="ja-JP" dirty="0">
-                <a:latin typeface="times" panose="02020603050405020304" pitchFamily="18" charset="0"/>
-                <a:cs typeface="times" panose="02020603050405020304" pitchFamily="18" charset="0"/>
+              <a:rPr kumimoji="1" lang="el-GR" altLang="ja-JP" dirty="0">
+                <a:latin typeface="Century" panose="02040604050505020304" pitchFamily="18" charset="0"/>
               </a:rPr>
-              <a:t>y</a:t>
+              <a:t>θ</a:t>
             </a:r>
-            <a:endParaRPr kumimoji="1" lang="ja-JP" altLang="en-US" dirty="0">
-              <a:latin typeface="times" panose="02020603050405020304" pitchFamily="18" charset="0"/>
-              <a:cs typeface="times" panose="02020603050405020304" pitchFamily="18" charset="0"/>
+            <a:r>
+              <a:rPr lang="en-US" altLang="ja-JP" baseline="-25000" dirty="0">
+                <a:latin typeface="Century" panose="02040604050505020304" pitchFamily="18" charset="0"/>
+              </a:rPr>
+              <a:t>2</a:t>
+            </a:r>
+            <a:endParaRPr kumimoji="1" lang="ja-JP" altLang="en-US" baseline="-25000" dirty="0">
+              <a:latin typeface="Century" panose="02040604050505020304" pitchFamily="18" charset="0"/>
             </a:endParaRPr>
           </a:p>
         </p:txBody>
       </p:sp>
       <p:sp>
         <p:nvSpPr>
-          <p:cNvPr id="28" name="TextBox 27">
-            <a:extLst>
-              <a:ext uri="{FF2B5EF4-FFF2-40B4-BE49-F238E27FC236}">
-                <a16:creationId xmlns:a16="http://schemas.microsoft.com/office/drawing/2014/main" id="{76B9B83F-2574-D5EF-8F4C-7699F3AB710E}"/>
-              </a:ext>
-            </a:extLst>
-          </p:cNvPr>
-          <p:cNvSpPr txBox="1"/>
-          <p:nvPr/>
-        </p:nvSpPr>
-        <p:spPr>
-          <a:xfrm>
-            <a:off x="2385343" y="2813050"/>
-            <a:ext cx="287258" cy="369332"/>
-          </a:xfrm>
-          <a:prstGeom prst="rect">
-            <a:avLst/>
-          </a:prstGeom>
+          <p:cNvPr id="56" name="Freeform: Shape 35">
+            <a:extLst>
+              <a:ext uri="{FF2B5EF4-FFF2-40B4-BE49-F238E27FC236}">
+                <a16:creationId xmlns:a16="http://schemas.microsoft.com/office/drawing/2014/main" id="{718C072A-79B7-E8E6-2EFE-E27A6A8BF9F2}"/>
+              </a:ext>
+            </a:extLst>
+          </p:cNvPr>
+          <p:cNvSpPr/>
+          <p:nvPr/>
+        </p:nvSpPr>
+        <p:spPr>
+          <a:xfrm rot="12316830">
+            <a:off x="6783156" y="3267757"/>
+            <a:ext cx="51832" cy="55696"/>
+          </a:xfrm>
+          <a:custGeom>
+            <a:avLst/>
+            <a:gdLst>
+              <a:gd name="csX0" fmla="*/ 0 w 127000"/>
+              <a:gd name="csY0" fmla="*/ 76200 h 78610"/>
+              <a:gd name="csX1" fmla="*/ 88900 w 127000"/>
+              <a:gd name="csY1" fmla="*/ 69850 h 78610"/>
+              <a:gd name="csX2" fmla="*/ 127000 w 127000"/>
+              <a:gd name="csY2" fmla="*/ 0 h 78610"/>
+            </a:gdLst>
+            <a:ahLst/>
+            <a:cxnLst>
+              <a:cxn ang="0">
+                <a:pos x="csX0" y="csY0"/>
+              </a:cxn>
+              <a:cxn ang="0">
+                <a:pos x="csX1" y="csY1"/>
+              </a:cxn>
+              <a:cxn ang="0">
+                <a:pos x="csX2" y="csY2"/>
+              </a:cxn>
+            </a:cxnLst>
+            <a:rect l="l" t="t" r="r" b="b"/>
+            <a:pathLst>
+              <a:path w="127000" h="78610">
+                <a:moveTo>
+                  <a:pt x="0" y="76200"/>
+                </a:moveTo>
+                <a:cubicBezTo>
+                  <a:pt x="34396" y="78316"/>
+                  <a:pt x="67733" y="82550"/>
+                  <a:pt x="88900" y="69850"/>
+                </a:cubicBezTo>
+                <a:cubicBezTo>
+                  <a:pt x="110067" y="57150"/>
+                  <a:pt x="118533" y="28575"/>
+                  <a:pt x="127000" y="0"/>
+                </a:cubicBezTo>
+              </a:path>
+            </a:pathLst>
+          </a:custGeom>
           <a:noFill/>
         </p:spPr>
-        <p:txBody>
-          <a:bodyPr wrap="none" rtlCol="0">
-            <a:spAutoFit/>
-          </a:bodyPr>
+        <p:style>
+          <a:lnRef idx="2">
+            <a:schemeClr val="accent1">
+              <a:shade val="15000"/>
+            </a:schemeClr>
+          </a:lnRef>
+          <a:fillRef idx="1">
+            <a:schemeClr val="accent1"/>
+          </a:fillRef>
+          <a:effectRef idx="0">
+            <a:schemeClr val="accent1"/>
+          </a:effectRef>
+          <a:fontRef idx="minor">
+            <a:schemeClr val="lt1"/>
+          </a:fontRef>
+        </p:style>
+        <p:txBody>
+          <a:bodyPr rtlCol="0" anchor="ctr"/>
           <a:lstStyle/>
           <a:p>
-            <a:r>
-              <a:rPr kumimoji="1" lang="en-US" altLang="ja-JP" dirty="0">
-                <a:latin typeface="times" panose="02020603050405020304" pitchFamily="18" charset="0"/>
-                <a:cs typeface="times" panose="02020603050405020304" pitchFamily="18" charset="0"/>
-              </a:rPr>
-              <a:t>z</a:t>
-            </a:r>
-            <a:endParaRPr kumimoji="1" lang="ja-JP" altLang="en-US" dirty="0">
-              <a:latin typeface="times" panose="02020603050405020304" pitchFamily="18" charset="0"/>
-              <a:cs typeface="times" panose="02020603050405020304" pitchFamily="18" charset="0"/>
-            </a:endParaRPr>
+            <a:pPr algn="ctr"/>
+            <a:endParaRPr kumimoji="1" lang="ja-JP" altLang="en-US"/>
           </a:p>
         </p:txBody>
       </p:sp>
     </p:spTree>
     <p:extLst>
       <p:ext uri="{BB962C8B-B14F-4D97-AF65-F5344CB8AC3E}">
-        <p14:creationId xmlns:p14="http://schemas.microsoft.com/office/powerpoint/2010/main" val="3849236896"/>
+        <p14:creationId xmlns:p14="http://schemas.microsoft.com/office/powerpoint/2010/main" val="3041934445"/>
       </p:ext>
     </p:extLst>
   </p:cSld>
@@ -10377,100 +11407,532 @@
           <a:chExt cx="0" cy="0"/>
         </a:xfrm>
       </p:grpSpPr>
-      <p:pic>
-        <p:nvPicPr>
-          <p:cNvPr id="5" name="Picture 4">
-            <a:extLst>
-              <a:ext uri="{FF2B5EF4-FFF2-40B4-BE49-F238E27FC236}">
-                <a16:creationId xmlns:a16="http://schemas.microsoft.com/office/drawing/2014/main" id="{1006BB5F-6D76-3735-F631-64DB3A86CFBC}"/>
-              </a:ext>
-            </a:extLst>
-          </p:cNvPr>
-          <p:cNvPicPr>
-            <a:picLocks noChangeAspect="1"/>
-          </p:cNvPicPr>
-          <p:nvPr/>
-        </p:nvPicPr>
-        <p:blipFill>
-          <a:blip r:embed="rId2"/>
-          <a:stretch>
-            <a:fillRect/>
-          </a:stretch>
-        </p:blipFill>
+      <p:sp>
+        <p:nvSpPr>
+          <p:cNvPr id="4" name="Oval 3">
+            <a:extLst>
+              <a:ext uri="{FF2B5EF4-FFF2-40B4-BE49-F238E27FC236}">
+                <a16:creationId xmlns:a16="http://schemas.microsoft.com/office/drawing/2014/main" id="{DE1CD74A-F737-D5D1-554B-70604072A7E3}"/>
+              </a:ext>
+            </a:extLst>
+          </p:cNvPr>
+          <p:cNvSpPr/>
+          <p:nvPr/>
+        </p:nvSpPr>
         <p:spPr>
           <a:xfrm>
-            <a:off x="6096000" y="2792358"/>
-            <a:ext cx="5696745" cy="3134162"/>
+            <a:off x="2946400" y="1981200"/>
+            <a:ext cx="1479550" cy="2120900"/>
+          </a:xfrm>
+          <a:prstGeom prst="ellipse">
+            <a:avLst/>
+          </a:prstGeom>
+          <a:solidFill>
+            <a:schemeClr val="bg2">
+              <a:lumMod val="90000"/>
+            </a:schemeClr>
+          </a:solidFill>
+        </p:spPr>
+        <p:style>
+          <a:lnRef idx="2">
+            <a:schemeClr val="dk1">
+              <a:shade val="15000"/>
+            </a:schemeClr>
+          </a:lnRef>
+          <a:fillRef idx="1">
+            <a:schemeClr val="dk1"/>
+          </a:fillRef>
+          <a:effectRef idx="0">
+            <a:schemeClr val="dk1"/>
+          </a:effectRef>
+          <a:fontRef idx="minor">
+            <a:schemeClr val="lt1"/>
+          </a:fontRef>
+        </p:style>
+        <p:txBody>
+          <a:bodyPr rtlCol="0" anchor="ctr"/>
+          <a:lstStyle/>
+          <a:p>
+            <a:pPr algn="ctr"/>
+            <a:endParaRPr kumimoji="1" lang="ja-JP" altLang="en-US" dirty="0"/>
+          </a:p>
+        </p:txBody>
+      </p:sp>
+      <p:sp>
+        <p:nvSpPr>
+          <p:cNvPr id="5" name="Oval 4">
+            <a:extLst>
+              <a:ext uri="{FF2B5EF4-FFF2-40B4-BE49-F238E27FC236}">
+                <a16:creationId xmlns:a16="http://schemas.microsoft.com/office/drawing/2014/main" id="{B8967F52-3B59-05D8-ABAB-EABB44C8059D}"/>
+              </a:ext>
+            </a:extLst>
+          </p:cNvPr>
+          <p:cNvSpPr/>
+          <p:nvPr/>
+        </p:nvSpPr>
+        <p:spPr>
+          <a:xfrm>
+            <a:off x="3282950" y="2495550"/>
+            <a:ext cx="737532" cy="1057234"/>
+          </a:xfrm>
+          <a:prstGeom prst="ellipse">
+            <a:avLst/>
+          </a:prstGeom>
+          <a:solidFill>
+            <a:schemeClr val="bg1"/>
+          </a:solidFill>
+        </p:spPr>
+        <p:style>
+          <a:lnRef idx="2">
+            <a:schemeClr val="dk1">
+              <a:shade val="15000"/>
+            </a:schemeClr>
+          </a:lnRef>
+          <a:fillRef idx="1">
+            <a:schemeClr val="dk1"/>
+          </a:fillRef>
+          <a:effectRef idx="0">
+            <a:schemeClr val="dk1"/>
+          </a:effectRef>
+          <a:fontRef idx="minor">
+            <a:schemeClr val="lt1"/>
+          </a:fontRef>
+        </p:style>
+        <p:txBody>
+          <a:bodyPr rtlCol="0" anchor="ctr"/>
+          <a:lstStyle/>
+          <a:p>
+            <a:pPr algn="ctr"/>
+            <a:endParaRPr kumimoji="1" lang="ja-JP" altLang="en-US"/>
+          </a:p>
+        </p:txBody>
+      </p:sp>
+      <p:cxnSp>
+        <p:nvCxnSpPr>
+          <p:cNvPr id="7" name="Straight Connector 6">
+            <a:extLst>
+              <a:ext uri="{FF2B5EF4-FFF2-40B4-BE49-F238E27FC236}">
+                <a16:creationId xmlns:a16="http://schemas.microsoft.com/office/drawing/2014/main" id="{A6259DBD-9E4D-4CC2-BE54-2818D54D0DEF}"/>
+              </a:ext>
+            </a:extLst>
+          </p:cNvPr>
+          <p:cNvCxnSpPr>
+            <a:stCxn id="4" idx="0"/>
+          </p:cNvCxnSpPr>
+          <p:nvPr/>
+        </p:nvCxnSpPr>
+        <p:spPr>
+          <a:xfrm>
+            <a:off x="3686175" y="1981200"/>
+            <a:ext cx="3971925" cy="0"/>
+          </a:xfrm>
+          <a:prstGeom prst="line">
+            <a:avLst/>
+          </a:prstGeom>
+        </p:spPr>
+        <p:style>
+          <a:lnRef idx="2">
+            <a:schemeClr val="dk1"/>
+          </a:lnRef>
+          <a:fillRef idx="0">
+            <a:schemeClr val="dk1"/>
+          </a:fillRef>
+          <a:effectRef idx="1">
+            <a:schemeClr val="dk1"/>
+          </a:effectRef>
+          <a:fontRef idx="minor">
+            <a:schemeClr val="tx1"/>
+          </a:fontRef>
+        </p:style>
+      </p:cxnSp>
+      <p:cxnSp>
+        <p:nvCxnSpPr>
+          <p:cNvPr id="8" name="Straight Connector 7">
+            <a:extLst>
+              <a:ext uri="{FF2B5EF4-FFF2-40B4-BE49-F238E27FC236}">
+                <a16:creationId xmlns:a16="http://schemas.microsoft.com/office/drawing/2014/main" id="{0B171B55-E2D9-CB95-0358-6F3DC77B8F29}"/>
+              </a:ext>
+            </a:extLst>
+          </p:cNvPr>
+          <p:cNvCxnSpPr>
+            <a:cxnSpLocks/>
+            <a:stCxn id="4" idx="4"/>
+          </p:cNvCxnSpPr>
+          <p:nvPr/>
+        </p:nvCxnSpPr>
+        <p:spPr>
+          <a:xfrm>
+            <a:off x="3686175" y="4102100"/>
+            <a:ext cx="4079877" cy="0"/>
+          </a:xfrm>
+          <a:prstGeom prst="line">
+            <a:avLst/>
+          </a:prstGeom>
+        </p:spPr>
+        <p:style>
+          <a:lnRef idx="2">
+            <a:schemeClr val="dk1"/>
+          </a:lnRef>
+          <a:fillRef idx="0">
+            <a:schemeClr val="dk1"/>
+          </a:fillRef>
+          <a:effectRef idx="1">
+            <a:schemeClr val="dk1"/>
+          </a:effectRef>
+          <a:fontRef idx="minor">
+            <a:schemeClr val="tx1"/>
+          </a:fontRef>
+        </p:style>
+      </p:cxnSp>
+      <p:sp>
+        <p:nvSpPr>
+          <p:cNvPr id="17" name="TextBox 16">
+            <a:extLst>
+              <a:ext uri="{FF2B5EF4-FFF2-40B4-BE49-F238E27FC236}">
+                <a16:creationId xmlns:a16="http://schemas.microsoft.com/office/drawing/2014/main" id="{0995D5CF-252B-3FA6-9ACC-88CEA6D1F1B1}"/>
+              </a:ext>
+            </a:extLst>
+          </p:cNvPr>
+          <p:cNvSpPr txBox="1"/>
+          <p:nvPr/>
+        </p:nvSpPr>
+        <p:spPr>
+          <a:xfrm>
+            <a:off x="3407092" y="2071193"/>
+            <a:ext cx="558166" cy="369332"/>
           </a:xfrm>
           <a:prstGeom prst="rect">
             <a:avLst/>
           </a:prstGeom>
-        </p:spPr>
-      </p:pic>
-      <p:pic>
-        <p:nvPicPr>
-          <p:cNvPr id="7" name="Picture 6">
-            <a:extLst>
-              <a:ext uri="{FF2B5EF4-FFF2-40B4-BE49-F238E27FC236}">
-                <a16:creationId xmlns:a16="http://schemas.microsoft.com/office/drawing/2014/main" id="{BA3767D0-4433-CD71-E66E-E5B50F3EB88D}"/>
-              </a:ext>
-            </a:extLst>
-          </p:cNvPr>
-          <p:cNvPicPr>
-            <a:picLocks noChangeAspect="1"/>
-          </p:cNvPicPr>
-          <p:nvPr/>
-        </p:nvPicPr>
-        <p:blipFill>
-          <a:blip r:embed="rId3"/>
-          <a:stretch>
-            <a:fillRect/>
-          </a:stretch>
-        </p:blipFill>
+          <a:noFill/>
+        </p:spPr>
+        <p:txBody>
+          <a:bodyPr wrap="none" rtlCol="0">
+            <a:spAutoFit/>
+          </a:bodyPr>
+          <a:lstStyle/>
+          <a:p>
+            <a:r>
+              <a:rPr kumimoji="1" lang="en-US" altLang="ja-JP" dirty="0" err="1">
+                <a:latin typeface="times" panose="02020603050405020304" pitchFamily="18" charset="0"/>
+                <a:cs typeface="times" panose="02020603050405020304" pitchFamily="18" charset="0"/>
+              </a:rPr>
+              <a:t>n</a:t>
+            </a:r>
+            <a:r>
+              <a:rPr kumimoji="1" lang="en-US" altLang="ja-JP" baseline="-25000" dirty="0" err="1">
+                <a:latin typeface="times" panose="02020603050405020304" pitchFamily="18" charset="0"/>
+                <a:cs typeface="times" panose="02020603050405020304" pitchFamily="18" charset="0"/>
+              </a:rPr>
+              <a:t>clad</a:t>
+            </a:r>
+            <a:endParaRPr kumimoji="1" lang="ja-JP" altLang="en-US" baseline="-25000" dirty="0">
+              <a:latin typeface="times" panose="02020603050405020304" pitchFamily="18" charset="0"/>
+              <a:cs typeface="times" panose="02020603050405020304" pitchFamily="18" charset="0"/>
+            </a:endParaRPr>
+          </a:p>
+        </p:txBody>
+      </p:sp>
+      <p:sp>
+        <p:nvSpPr>
+          <p:cNvPr id="18" name="TextBox 17">
+            <a:extLst>
+              <a:ext uri="{FF2B5EF4-FFF2-40B4-BE49-F238E27FC236}">
+                <a16:creationId xmlns:a16="http://schemas.microsoft.com/office/drawing/2014/main" id="{4F55D5FE-54C5-6F8A-E447-040355450C1F}"/>
+              </a:ext>
+            </a:extLst>
+          </p:cNvPr>
+          <p:cNvSpPr txBox="1"/>
+          <p:nvPr/>
+        </p:nvSpPr>
         <p:spPr>
           <a:xfrm>
-            <a:off x="235425" y="2792358"/>
-            <a:ext cx="5860575" cy="2843180"/>
+            <a:off x="3380549" y="2883993"/>
+            <a:ext cx="566181" cy="369332"/>
           </a:xfrm>
           <a:prstGeom prst="rect">
             <a:avLst/>
           </a:prstGeom>
-        </p:spPr>
-      </p:pic>
-      <p:pic>
-        <p:nvPicPr>
-          <p:cNvPr id="9" name="Picture 8">
-            <a:extLst>
-              <a:ext uri="{FF2B5EF4-FFF2-40B4-BE49-F238E27FC236}">
-                <a16:creationId xmlns:a16="http://schemas.microsoft.com/office/drawing/2014/main" id="{57D4E51C-9E36-37CB-B5B6-49229FB8522E}"/>
-              </a:ext>
-            </a:extLst>
-          </p:cNvPr>
-          <p:cNvPicPr>
-            <a:picLocks noChangeAspect="1"/>
-          </p:cNvPicPr>
-          <p:nvPr/>
-        </p:nvPicPr>
-        <p:blipFill>
-          <a:blip r:embed="rId4"/>
-          <a:stretch>
-            <a:fillRect/>
-          </a:stretch>
-        </p:blipFill>
+          <a:noFill/>
+        </p:spPr>
+        <p:txBody>
+          <a:bodyPr wrap="none" rtlCol="0">
+            <a:spAutoFit/>
+          </a:bodyPr>
+          <a:lstStyle/>
+          <a:p>
+            <a:r>
+              <a:rPr kumimoji="1" lang="en-US" altLang="ja-JP" dirty="0" err="1">
+                <a:latin typeface="times" panose="02020603050405020304" pitchFamily="18" charset="0"/>
+                <a:cs typeface="times" panose="02020603050405020304" pitchFamily="18" charset="0"/>
+              </a:rPr>
+              <a:t>n</a:t>
+            </a:r>
+            <a:r>
+              <a:rPr kumimoji="1" lang="en-US" altLang="ja-JP" baseline="-25000" dirty="0" err="1">
+                <a:latin typeface="times" panose="02020603050405020304" pitchFamily="18" charset="0"/>
+                <a:cs typeface="times" panose="02020603050405020304" pitchFamily="18" charset="0"/>
+              </a:rPr>
+              <a:t>core</a:t>
+            </a:r>
+            <a:endParaRPr kumimoji="1" lang="ja-JP" altLang="en-US" baseline="-25000" dirty="0">
+              <a:latin typeface="times" panose="02020603050405020304" pitchFamily="18" charset="0"/>
+              <a:cs typeface="times" panose="02020603050405020304" pitchFamily="18" charset="0"/>
+            </a:endParaRPr>
+          </a:p>
+        </p:txBody>
+      </p:sp>
+      <p:cxnSp>
+        <p:nvCxnSpPr>
+          <p:cNvPr id="20" name="Straight Arrow Connector 19">
+            <a:extLst>
+              <a:ext uri="{FF2B5EF4-FFF2-40B4-BE49-F238E27FC236}">
+                <a16:creationId xmlns:a16="http://schemas.microsoft.com/office/drawing/2014/main" id="{045E283A-093A-FB76-0A34-F470FCF62CEA}"/>
+              </a:ext>
+            </a:extLst>
+          </p:cNvPr>
+          <p:cNvCxnSpPr/>
+          <p:nvPr/>
+        </p:nvCxnSpPr>
         <p:spPr>
           <a:xfrm>
-            <a:off x="235425" y="-101047"/>
-            <a:ext cx="11557320" cy="2893405"/>
+            <a:off x="1693193" y="3150632"/>
+            <a:ext cx="996950" cy="0"/>
+          </a:xfrm>
+          <a:prstGeom prst="straightConnector1">
+            <a:avLst/>
+          </a:prstGeom>
+          <a:ln>
+            <a:tailEnd type="triangle"/>
+          </a:ln>
+        </p:spPr>
+        <p:style>
+          <a:lnRef idx="2">
+            <a:schemeClr val="dk1"/>
+          </a:lnRef>
+          <a:fillRef idx="0">
+            <a:schemeClr val="dk1"/>
+          </a:fillRef>
+          <a:effectRef idx="1">
+            <a:schemeClr val="dk1"/>
+          </a:effectRef>
+          <a:fontRef idx="minor">
+            <a:schemeClr val="tx1"/>
+          </a:fontRef>
+        </p:style>
+      </p:cxnSp>
+      <p:cxnSp>
+        <p:nvCxnSpPr>
+          <p:cNvPr id="21" name="Straight Arrow Connector 20">
+            <a:extLst>
+              <a:ext uri="{FF2B5EF4-FFF2-40B4-BE49-F238E27FC236}">
+                <a16:creationId xmlns:a16="http://schemas.microsoft.com/office/drawing/2014/main" id="{F81FB1E9-7425-2D48-5201-E3CD6A91171E}"/>
+              </a:ext>
+            </a:extLst>
+          </p:cNvPr>
+          <p:cNvCxnSpPr>
+            <a:cxnSpLocks/>
+          </p:cNvCxnSpPr>
+          <p:nvPr/>
+        </p:nvCxnSpPr>
+        <p:spPr>
+          <a:xfrm flipV="1">
+            <a:off x="1699543" y="2356882"/>
+            <a:ext cx="0" cy="787400"/>
+          </a:xfrm>
+          <a:prstGeom prst="straightConnector1">
+            <a:avLst/>
+          </a:prstGeom>
+          <a:ln>
+            <a:tailEnd type="triangle"/>
+          </a:ln>
+        </p:spPr>
+        <p:style>
+          <a:lnRef idx="2">
+            <a:schemeClr val="dk1"/>
+          </a:lnRef>
+          <a:fillRef idx="0">
+            <a:schemeClr val="dk1"/>
+          </a:fillRef>
+          <a:effectRef idx="1">
+            <a:schemeClr val="dk1"/>
+          </a:effectRef>
+          <a:fontRef idx="minor">
+            <a:schemeClr val="tx1"/>
+          </a:fontRef>
+        </p:style>
+      </p:cxnSp>
+      <p:cxnSp>
+        <p:nvCxnSpPr>
+          <p:cNvPr id="23" name="Straight Arrow Connector 22">
+            <a:extLst>
+              <a:ext uri="{FF2B5EF4-FFF2-40B4-BE49-F238E27FC236}">
+                <a16:creationId xmlns:a16="http://schemas.microsoft.com/office/drawing/2014/main" id="{061D44DA-3B20-BA49-6B9B-F417DECF01FC}"/>
+              </a:ext>
+            </a:extLst>
+          </p:cNvPr>
+          <p:cNvCxnSpPr>
+            <a:cxnSpLocks/>
+          </p:cNvCxnSpPr>
+          <p:nvPr/>
+        </p:nvCxnSpPr>
+        <p:spPr>
+          <a:xfrm>
+            <a:off x="1699543" y="3150632"/>
+            <a:ext cx="679450" cy="323850"/>
+          </a:xfrm>
+          <a:prstGeom prst="straightConnector1">
+            <a:avLst/>
+          </a:prstGeom>
+          <a:ln>
+            <a:tailEnd type="triangle"/>
+          </a:ln>
+        </p:spPr>
+        <p:style>
+          <a:lnRef idx="2">
+            <a:schemeClr val="dk1"/>
+          </a:lnRef>
+          <a:fillRef idx="0">
+            <a:schemeClr val="dk1"/>
+          </a:fillRef>
+          <a:effectRef idx="1">
+            <a:schemeClr val="dk1"/>
+          </a:effectRef>
+          <a:fontRef idx="minor">
+            <a:schemeClr val="tx1"/>
+          </a:fontRef>
+        </p:style>
+      </p:cxnSp>
+      <p:sp>
+        <p:nvSpPr>
+          <p:cNvPr id="26" name="TextBox 25">
+            <a:extLst>
+              <a:ext uri="{FF2B5EF4-FFF2-40B4-BE49-F238E27FC236}">
+                <a16:creationId xmlns:a16="http://schemas.microsoft.com/office/drawing/2014/main" id="{BD3E61E5-18F8-6307-9D1F-99A44501E02F}"/>
+              </a:ext>
+            </a:extLst>
+          </p:cNvPr>
+          <p:cNvSpPr txBox="1"/>
+          <p:nvPr/>
+        </p:nvSpPr>
+        <p:spPr>
+          <a:xfrm>
+            <a:off x="1549502" y="1981200"/>
+            <a:ext cx="300082" cy="369332"/>
           </a:xfrm>
           <a:prstGeom prst="rect">
             <a:avLst/>
           </a:prstGeom>
-        </p:spPr>
-      </p:pic>
+          <a:noFill/>
+        </p:spPr>
+        <p:txBody>
+          <a:bodyPr wrap="none" rtlCol="0">
+            <a:spAutoFit/>
+          </a:bodyPr>
+          <a:lstStyle/>
+          <a:p>
+            <a:r>
+              <a:rPr kumimoji="1" lang="en-US" altLang="ja-JP" dirty="0">
+                <a:latin typeface="times" panose="02020603050405020304" pitchFamily="18" charset="0"/>
+                <a:cs typeface="times" panose="02020603050405020304" pitchFamily="18" charset="0"/>
+              </a:rPr>
+              <a:t>x</a:t>
+            </a:r>
+            <a:endParaRPr kumimoji="1" lang="ja-JP" altLang="en-US" dirty="0">
+              <a:latin typeface="times" panose="02020603050405020304" pitchFamily="18" charset="0"/>
+              <a:cs typeface="times" panose="02020603050405020304" pitchFamily="18" charset="0"/>
+            </a:endParaRPr>
+          </a:p>
+        </p:txBody>
+      </p:sp>
+      <p:sp>
+        <p:nvSpPr>
+          <p:cNvPr id="27" name="TextBox 26">
+            <a:extLst>
+              <a:ext uri="{FF2B5EF4-FFF2-40B4-BE49-F238E27FC236}">
+                <a16:creationId xmlns:a16="http://schemas.microsoft.com/office/drawing/2014/main" id="{9222EEB3-9C8E-EB00-0555-56FAFEE6E44C}"/>
+              </a:ext>
+            </a:extLst>
+          </p:cNvPr>
+          <p:cNvSpPr txBox="1"/>
+          <p:nvPr/>
+        </p:nvSpPr>
+        <p:spPr>
+          <a:xfrm>
+            <a:off x="2363845" y="3312557"/>
+            <a:ext cx="300082" cy="369332"/>
+          </a:xfrm>
+          <a:prstGeom prst="rect">
+            <a:avLst/>
+          </a:prstGeom>
+          <a:noFill/>
+        </p:spPr>
+        <p:txBody>
+          <a:bodyPr wrap="none" rtlCol="0">
+            <a:spAutoFit/>
+          </a:bodyPr>
+          <a:lstStyle/>
+          <a:p>
+            <a:r>
+              <a:rPr kumimoji="1" lang="en-US" altLang="ja-JP" dirty="0">
+                <a:latin typeface="times" panose="02020603050405020304" pitchFamily="18" charset="0"/>
+                <a:cs typeface="times" panose="02020603050405020304" pitchFamily="18" charset="0"/>
+              </a:rPr>
+              <a:t>y</a:t>
+            </a:r>
+            <a:endParaRPr kumimoji="1" lang="ja-JP" altLang="en-US" dirty="0">
+              <a:latin typeface="times" panose="02020603050405020304" pitchFamily="18" charset="0"/>
+              <a:cs typeface="times" panose="02020603050405020304" pitchFamily="18" charset="0"/>
+            </a:endParaRPr>
+          </a:p>
+        </p:txBody>
+      </p:sp>
+      <p:sp>
+        <p:nvSpPr>
+          <p:cNvPr id="28" name="TextBox 27">
+            <a:extLst>
+              <a:ext uri="{FF2B5EF4-FFF2-40B4-BE49-F238E27FC236}">
+                <a16:creationId xmlns:a16="http://schemas.microsoft.com/office/drawing/2014/main" id="{76B9B83F-2574-D5EF-8F4C-7699F3AB710E}"/>
+              </a:ext>
+            </a:extLst>
+          </p:cNvPr>
+          <p:cNvSpPr txBox="1"/>
+          <p:nvPr/>
+        </p:nvSpPr>
+        <p:spPr>
+          <a:xfrm>
+            <a:off x="2385343" y="2813050"/>
+            <a:ext cx="287258" cy="369332"/>
+          </a:xfrm>
+          <a:prstGeom prst="rect">
+            <a:avLst/>
+          </a:prstGeom>
+          <a:noFill/>
+        </p:spPr>
+        <p:txBody>
+          <a:bodyPr wrap="none" rtlCol="0">
+            <a:spAutoFit/>
+          </a:bodyPr>
+          <a:lstStyle/>
+          <a:p>
+            <a:r>
+              <a:rPr kumimoji="1" lang="en-US" altLang="ja-JP" dirty="0">
+                <a:latin typeface="times" panose="02020603050405020304" pitchFamily="18" charset="0"/>
+                <a:cs typeface="times" panose="02020603050405020304" pitchFamily="18" charset="0"/>
+              </a:rPr>
+              <a:t>z</a:t>
+            </a:r>
+            <a:endParaRPr kumimoji="1" lang="ja-JP" altLang="en-US" dirty="0">
+              <a:latin typeface="times" panose="02020603050405020304" pitchFamily="18" charset="0"/>
+              <a:cs typeface="times" panose="02020603050405020304" pitchFamily="18" charset="0"/>
+            </a:endParaRPr>
+          </a:p>
+        </p:txBody>
+      </p:sp>
     </p:spTree>
     <p:extLst>
       <p:ext uri="{BB962C8B-B14F-4D97-AF65-F5344CB8AC3E}">
-        <p14:creationId xmlns:p14="http://schemas.microsoft.com/office/powerpoint/2010/main" val="1097254049"/>
+        <p14:creationId xmlns:p14="http://schemas.microsoft.com/office/powerpoint/2010/main" val="3849236896"/>
       </p:ext>
     </p:extLst>
   </p:cSld>
@@ -10502,6 +11964,126 @@
           <p:cNvPr id="5" name="Picture 4">
             <a:extLst>
               <a:ext uri="{FF2B5EF4-FFF2-40B4-BE49-F238E27FC236}">
+                <a16:creationId xmlns:a16="http://schemas.microsoft.com/office/drawing/2014/main" id="{1006BB5F-6D76-3735-F631-64DB3A86CFBC}"/>
+              </a:ext>
+            </a:extLst>
+          </p:cNvPr>
+          <p:cNvPicPr>
+            <a:picLocks noChangeAspect="1"/>
+          </p:cNvPicPr>
+          <p:nvPr/>
+        </p:nvPicPr>
+        <p:blipFill>
+          <a:blip r:embed="rId2"/>
+          <a:stretch>
+            <a:fillRect/>
+          </a:stretch>
+        </p:blipFill>
+        <p:spPr>
+          <a:xfrm>
+            <a:off x="6096000" y="2792358"/>
+            <a:ext cx="5696745" cy="3134162"/>
+          </a:xfrm>
+          <a:prstGeom prst="rect">
+            <a:avLst/>
+          </a:prstGeom>
+        </p:spPr>
+      </p:pic>
+      <p:pic>
+        <p:nvPicPr>
+          <p:cNvPr id="7" name="Picture 6">
+            <a:extLst>
+              <a:ext uri="{FF2B5EF4-FFF2-40B4-BE49-F238E27FC236}">
+                <a16:creationId xmlns:a16="http://schemas.microsoft.com/office/drawing/2014/main" id="{BA3767D0-4433-CD71-E66E-E5B50F3EB88D}"/>
+              </a:ext>
+            </a:extLst>
+          </p:cNvPr>
+          <p:cNvPicPr>
+            <a:picLocks noChangeAspect="1"/>
+          </p:cNvPicPr>
+          <p:nvPr/>
+        </p:nvPicPr>
+        <p:blipFill>
+          <a:blip r:embed="rId3"/>
+          <a:stretch>
+            <a:fillRect/>
+          </a:stretch>
+        </p:blipFill>
+        <p:spPr>
+          <a:xfrm>
+            <a:off x="235425" y="2792358"/>
+            <a:ext cx="5860575" cy="2843180"/>
+          </a:xfrm>
+          <a:prstGeom prst="rect">
+            <a:avLst/>
+          </a:prstGeom>
+        </p:spPr>
+      </p:pic>
+      <p:pic>
+        <p:nvPicPr>
+          <p:cNvPr id="9" name="Picture 8">
+            <a:extLst>
+              <a:ext uri="{FF2B5EF4-FFF2-40B4-BE49-F238E27FC236}">
+                <a16:creationId xmlns:a16="http://schemas.microsoft.com/office/drawing/2014/main" id="{57D4E51C-9E36-37CB-B5B6-49229FB8522E}"/>
+              </a:ext>
+            </a:extLst>
+          </p:cNvPr>
+          <p:cNvPicPr>
+            <a:picLocks noChangeAspect="1"/>
+          </p:cNvPicPr>
+          <p:nvPr/>
+        </p:nvPicPr>
+        <p:blipFill>
+          <a:blip r:embed="rId4"/>
+          <a:stretch>
+            <a:fillRect/>
+          </a:stretch>
+        </p:blipFill>
+        <p:spPr>
+          <a:xfrm>
+            <a:off x="235425" y="-101047"/>
+            <a:ext cx="11557320" cy="2893405"/>
+          </a:xfrm>
+          <a:prstGeom prst="rect">
+            <a:avLst/>
+          </a:prstGeom>
+        </p:spPr>
+      </p:pic>
+    </p:spTree>
+    <p:extLst>
+      <p:ext uri="{BB962C8B-B14F-4D97-AF65-F5344CB8AC3E}">
+        <p14:creationId xmlns:p14="http://schemas.microsoft.com/office/powerpoint/2010/main" val="1097254049"/>
+      </p:ext>
+    </p:extLst>
+  </p:cSld>
+  <p:clrMapOvr>
+    <a:masterClrMapping/>
+  </p:clrMapOvr>
+</p:sld>
+</file>
+
+<file path=ppt/slides/slide7.xml><?xml version="1.0" encoding="utf-8"?>
+<p:sld xmlns:a="http://schemas.openxmlformats.org/drawingml/2006/main" xmlns:r="http://schemas.openxmlformats.org/officeDocument/2006/relationships" xmlns:p="http://schemas.openxmlformats.org/presentationml/2006/main">
+  <p:cSld>
+    <p:spTree>
+      <p:nvGrpSpPr>
+        <p:cNvPr id="1" name=""/>
+        <p:cNvGrpSpPr/>
+        <p:nvPr/>
+      </p:nvGrpSpPr>
+      <p:grpSpPr>
+        <a:xfrm>
+          <a:off x="0" y="0"/>
+          <a:ext cx="0" cy="0"/>
+          <a:chOff x="0" y="0"/>
+          <a:chExt cx="0" cy="0"/>
+        </a:xfrm>
+      </p:grpSpPr>
+      <p:pic>
+        <p:nvPicPr>
+          <p:cNvPr id="5" name="Picture 4">
+            <a:extLst>
+              <a:ext uri="{FF2B5EF4-FFF2-40B4-BE49-F238E27FC236}">
                 <a16:creationId xmlns:a16="http://schemas.microsoft.com/office/drawing/2014/main" id="{4DA489AF-E837-9982-E5AC-FB7663DA356F}"/>
               </a:ext>
             </a:extLst>
@@ -10579,7 +12161,7 @@
 </p:sld>
 </file>
 
-<file path=ppt/slides/slide7.xml><?xml version="1.0" encoding="utf-8"?>
+<file path=ppt/slides/slide8.xml><?xml version="1.0" encoding="utf-8"?>
 <p:sld xmlns:a="http://schemas.openxmlformats.org/drawingml/2006/main" xmlns:r="http://schemas.openxmlformats.org/officeDocument/2006/relationships" xmlns:p="http://schemas.openxmlformats.org/presentationml/2006/main">
   <p:cSld>
     <p:spTree>
@@ -12062,83 +13644,6 @@
     <p:extLst>
       <p:ext uri="{BB962C8B-B14F-4D97-AF65-F5344CB8AC3E}">
         <p14:creationId xmlns:p14="http://schemas.microsoft.com/office/powerpoint/2010/main" val="3363106213"/>
-      </p:ext>
-    </p:extLst>
-  </p:cSld>
-  <p:clrMapOvr>
-    <a:masterClrMapping/>
-  </p:clrMapOvr>
-</p:sld>
-</file>
-
-<file path=ppt/slides/slide8.xml><?xml version="1.0" encoding="utf-8"?>
-<p:sld xmlns:a="http://schemas.openxmlformats.org/drawingml/2006/main" xmlns:r="http://schemas.openxmlformats.org/officeDocument/2006/relationships" xmlns:p="http://schemas.openxmlformats.org/presentationml/2006/main">
-  <p:cSld>
-    <p:spTree>
-      <p:nvGrpSpPr>
-        <p:cNvPr id="1" name=""/>
-        <p:cNvGrpSpPr/>
-        <p:nvPr/>
-      </p:nvGrpSpPr>
-      <p:grpSpPr>
-        <a:xfrm>
-          <a:off x="0" y="0"/>
-          <a:ext cx="0" cy="0"/>
-          <a:chOff x="0" y="0"/>
-          <a:chExt cx="0" cy="0"/>
-        </a:xfrm>
-      </p:grpSpPr>
-      <p:pic>
-        <p:nvPicPr>
-          <p:cNvPr id="1026" name="Picture 2">
-            <a:extLst>
-              <a:ext uri="{FF2B5EF4-FFF2-40B4-BE49-F238E27FC236}">
-                <a16:creationId xmlns:a16="http://schemas.microsoft.com/office/drawing/2014/main" id="{3485933C-CB95-47C5-8504-790EE28B027D}"/>
-              </a:ext>
-            </a:extLst>
-          </p:cNvPr>
-          <p:cNvPicPr>
-            <a:picLocks noChangeAspect="1" noChangeArrowheads="1"/>
-          </p:cNvPicPr>
-          <p:nvPr/>
-        </p:nvPicPr>
-        <p:blipFill>
-          <a:blip r:embed="rId2">
-            <a:extLst>
-              <a:ext uri="{28A0092B-C50C-407E-A947-70E740481C1C}">
-                <a14:useLocalDpi xmlns:a14="http://schemas.microsoft.com/office/drawing/2010/main" val="0"/>
-              </a:ext>
-            </a:extLst>
-          </a:blip>
-          <a:srcRect/>
-          <a:stretch>
-            <a:fillRect/>
-          </a:stretch>
-        </p:blipFill>
-        <p:spPr bwMode="auto">
-          <a:xfrm>
-            <a:off x="2660650" y="1268413"/>
-            <a:ext cx="5715000" cy="3800475"/>
-          </a:xfrm>
-          <a:prstGeom prst="rect">
-            <a:avLst/>
-          </a:prstGeom>
-          <a:noFill/>
-          <a:extLst>
-            <a:ext uri="{909E8E84-426E-40DD-AFC4-6F175D3DCCD1}">
-              <a14:hiddenFill xmlns:a14="http://schemas.microsoft.com/office/drawing/2010/main">
-                <a:solidFill>
-                  <a:srgbClr val="FFFFFF"/>
-                </a:solidFill>
-              </a14:hiddenFill>
-            </a:ext>
-          </a:extLst>
-        </p:spPr>
-      </p:pic>
-    </p:spTree>
-    <p:extLst>
-      <p:ext uri="{BB962C8B-B14F-4D97-AF65-F5344CB8AC3E}">
-        <p14:creationId xmlns:p14="http://schemas.microsoft.com/office/powerpoint/2010/main" val="2490935508"/>
       </p:ext>
     </p:extLst>
   </p:cSld>
@@ -12167,68 +13672,55 @@
       </p:grpSpPr>
       <p:pic>
         <p:nvPicPr>
-          <p:cNvPr id="5" name="그림 4">
-            <a:extLst>
-              <a:ext uri="{FF2B5EF4-FFF2-40B4-BE49-F238E27FC236}">
-                <a16:creationId xmlns:a16="http://schemas.microsoft.com/office/drawing/2014/main" id="{414CC4C9-79AC-AC4A-2FA0-0C87D8914DF0}"/>
+          <p:cNvPr id="1026" name="Picture 2">
+            <a:extLst>
+              <a:ext uri="{FF2B5EF4-FFF2-40B4-BE49-F238E27FC236}">
+                <a16:creationId xmlns:a16="http://schemas.microsoft.com/office/drawing/2014/main" id="{3485933C-CB95-47C5-8504-790EE28B027D}"/>
               </a:ext>
             </a:extLst>
           </p:cNvPr>
           <p:cNvPicPr>
-            <a:picLocks noChangeAspect="1"/>
+            <a:picLocks noChangeAspect="1" noChangeArrowheads="1"/>
           </p:cNvPicPr>
           <p:nvPr/>
         </p:nvPicPr>
         <p:blipFill>
-          <a:blip r:embed="rId2"/>
+          <a:blip r:embed="rId2">
+            <a:extLst>
+              <a:ext uri="{28A0092B-C50C-407E-A947-70E740481C1C}">
+                <a14:useLocalDpi xmlns:a14="http://schemas.microsoft.com/office/drawing/2010/main" val="0"/>
+              </a:ext>
+            </a:extLst>
+          </a:blip>
+          <a:srcRect/>
           <a:stretch>
             <a:fillRect/>
           </a:stretch>
         </p:blipFill>
-        <p:spPr>
+        <p:spPr bwMode="auto">
           <a:xfrm>
-            <a:off x="343427" y="0"/>
-            <a:ext cx="7059526" cy="6858000"/>
+            <a:off x="2660650" y="1268413"/>
+            <a:ext cx="5715000" cy="3800475"/>
           </a:xfrm>
           <a:prstGeom prst="rect">
             <a:avLst/>
           </a:prstGeom>
-        </p:spPr>
-      </p:pic>
-      <p:pic>
-        <p:nvPicPr>
-          <p:cNvPr id="7" name="그림 6">
-            <a:extLst>
-              <a:ext uri="{FF2B5EF4-FFF2-40B4-BE49-F238E27FC236}">
-                <a16:creationId xmlns:a16="http://schemas.microsoft.com/office/drawing/2014/main" id="{59682CF8-21B5-9BFA-D0EE-75A936A6A080}"/>
-              </a:ext>
-            </a:extLst>
-          </p:cNvPr>
-          <p:cNvPicPr>
-            <a:picLocks noChangeAspect="1"/>
-          </p:cNvPicPr>
-          <p:nvPr/>
-        </p:nvPicPr>
-        <p:blipFill>
-          <a:blip r:embed="rId3"/>
-          <a:stretch>
-            <a:fillRect/>
-          </a:stretch>
-        </p:blipFill>
-        <p:spPr>
-          <a:xfrm>
-            <a:off x="6245271" y="3166946"/>
-            <a:ext cx="5673241" cy="2902353"/>
-          </a:xfrm>
-          <a:prstGeom prst="rect">
-            <a:avLst/>
-          </a:prstGeom>
+          <a:noFill/>
+          <a:extLst>
+            <a:ext uri="{909E8E84-426E-40DD-AFC4-6F175D3DCCD1}">
+              <a14:hiddenFill xmlns:a14="http://schemas.microsoft.com/office/drawing/2010/main">
+                <a:solidFill>
+                  <a:srgbClr val="FFFFFF"/>
+                </a:solidFill>
+              </a14:hiddenFill>
+            </a:ext>
+          </a:extLst>
         </p:spPr>
       </p:pic>
     </p:spTree>
     <p:extLst>
       <p:ext uri="{BB962C8B-B14F-4D97-AF65-F5344CB8AC3E}">
-        <p14:creationId xmlns:p14="http://schemas.microsoft.com/office/powerpoint/2010/main" val="271509145"/>
+        <p14:creationId xmlns:p14="http://schemas.microsoft.com/office/powerpoint/2010/main" val="2490935508"/>
       </p:ext>
     </p:extLst>
   </p:cSld>
@@ -12554,6 +14046,15 @@
 </file>
 
 <file path=customXml/item1.xml><?xml version="1.0" encoding="utf-8"?>
+<?mso-contentType ?>
+<FormTemplates xmlns="http://schemas.microsoft.com/sharepoint/v3/contenttype/forms">
+  <Display>DocumentLibraryForm</Display>
+  <Edit>DocumentLibraryForm</Edit>
+  <New>DocumentLibraryForm</New>
+</FormTemplates>
+</file>
+
+<file path=customXml/item2.xml><?xml version="1.0" encoding="utf-8"?>
 <ct:contentTypeSchema xmlns:ct="http://schemas.microsoft.com/office/2006/metadata/contentType" xmlns:ma="http://schemas.microsoft.com/office/2006/metadata/properties/metaAttributes" ct:_="" ma:_="" ma:contentTypeName="ドキュメント" ma:contentTypeID="0x010100D291828BE931164DA279E7DB37510E8B" ma:contentTypeVersion="12" ma:contentTypeDescription="新しいドキュメントを作成します。" ma:contentTypeScope="" ma:versionID="d40e79753e265535ebdef0a9a1630dbe">
   <xsd:schema xmlns:xsd="http://www.w3.org/2001/XMLSchema" xmlns:xs="http://www.w3.org/2001/XMLSchema" xmlns:p="http://schemas.microsoft.com/office/2006/metadata/properties" xmlns:ns3="e5fea337-426f-4878-aaa1-6cc4dbed00d3" targetNamespace="http://schemas.microsoft.com/office/2006/metadata/properties" ma:root="true" ma:fieldsID="909ec013045a4ae227a46cef79b1603d" ns3:_="">
     <xsd:import namespace="e5fea337-426f-4878-aaa1-6cc4dbed00d3"/>
@@ -12747,15 +14248,6 @@
 </ct:contentTypeSchema>
 </file>
 
-<file path=customXml/item2.xml><?xml version="1.0" encoding="utf-8"?>
-<?mso-contentType ?>
-<FormTemplates xmlns="http://schemas.microsoft.com/sharepoint/v3/contenttype/forms">
-  <Display>DocumentLibraryForm</Display>
-  <Edit>DocumentLibraryForm</Edit>
-  <New>DocumentLibraryForm</New>
-</FormTemplates>
-</file>
-
 <file path=customXml/item3.xml><?xml version="1.0" encoding="utf-8"?>
 <p:properties xmlns:p="http://schemas.microsoft.com/office/2006/metadata/properties" xmlns:xsi="http://www.w3.org/2001/XMLSchema-instance" xmlns:pc="http://schemas.microsoft.com/office/infopath/2007/PartnerControls">
   <documentManagement>
@@ -12765,6 +14257,14 @@
 </file>
 
 <file path=customXml/itemProps1.xml><?xml version="1.0" encoding="utf-8"?>
+<ds:datastoreItem xmlns:ds="http://schemas.openxmlformats.org/officeDocument/2006/customXml" ds:itemID="{EBB85C3E-FFAD-4A75-A769-4B97E54A903C}">
+  <ds:schemaRefs>
+    <ds:schemaRef ds:uri="http://schemas.microsoft.com/sharepoint/v3/contenttype/forms"/>
+  </ds:schemaRefs>
+</ds:datastoreItem>
+</file>
+
+<file path=customXml/itemProps2.xml><?xml version="1.0" encoding="utf-8"?>
 <ds:datastoreItem xmlns:ds="http://schemas.openxmlformats.org/officeDocument/2006/customXml" ds:itemID="{6231A16C-3E0A-4893-9CB3-DA6770BA5700}">
   <ds:schemaRefs>
     <ds:schemaRef ds:uri="http://schemas.microsoft.com/office/2006/metadata/contentType"/>
@@ -12778,14 +14278,6 @@
     <ds:schemaRef ds:uri="http://purl.org/dc/elements/1.1/"/>
     <ds:schemaRef ds:uri="http://purl.org/dc/terms/"/>
     <ds:schemaRef ds:uri="http://schemas.microsoft.com/internal/obd"/>
-  </ds:schemaRefs>
-</ds:datastoreItem>
-</file>
-
-<file path=customXml/itemProps2.xml><?xml version="1.0" encoding="utf-8"?>
-<ds:datastoreItem xmlns:ds="http://schemas.openxmlformats.org/officeDocument/2006/customXml" ds:itemID="{EBB85C3E-FFAD-4A75-A769-4B97E54A903C}">
-  <ds:schemaRefs>
-    <ds:schemaRef ds:uri="http://schemas.microsoft.com/sharepoint/v3/contenttype/forms"/>
   </ds:schemaRefs>
 </ds:datastoreItem>
 </file>

--- a/Materials.pptx
+++ b/Materials.pptx
@@ -17,9 +17,12 @@
     <p:sldId id="264" r:id="rId14"/>
     <p:sldId id="266" r:id="rId15"/>
     <p:sldId id="267" r:id="rId16"/>
+    <p:sldId id="272" r:id="rId17"/>
+    <p:sldId id="271" r:id="rId18"/>
+    <p:sldId id="273" r:id="rId19"/>
   </p:sldIdLst>
   <p:sldSz cx="12192000" cy="6858000"/>
-  <p:notesSz cx="6858000" cy="9144000"/>
+  <p:notesSz cx="7102475" cy="9388475"/>
   <p:defaultTextStyle>
     <a:defPPr>
       <a:defRPr lang="ja-JP"/>
@@ -126,7 +129,7 @@
 <file path=ppt/revisionInfo.xml><?xml version="1.0" encoding="utf-8"?>
 <p1510:revInfo xmlns:a="http://schemas.openxmlformats.org/drawingml/2006/main" xmlns:r="http://schemas.openxmlformats.org/officeDocument/2006/relationships" xmlns:p1510="http://schemas.microsoft.com/office/powerpoint/2015/10/main">
   <p1510:revLst>
-    <p1510:client id="{C7F86D9B-447A-41E3-A63F-8920382A99EF}" v="4" dt="2026-07-17T03:13:44.785"/>
+    <p1510:client id="{C7F86D9B-447A-41E3-A63F-8920382A99EF}" v="429" dt="2026-07-23T10:51:11.552"/>
   </p1510:revLst>
 </p1510:revInfo>
 </file>
@@ -135,8 +138,8 @@
 <pc:chgInfo xmlns:a="http://schemas.openxmlformats.org/drawingml/2006/main" xmlns:r="http://schemas.openxmlformats.org/officeDocument/2006/relationships" xmlns:ac="http://schemas.microsoft.com/office/drawing/2013/main/command" xmlns:pc="http://schemas.microsoft.com/office/powerpoint/2013/main/command">
   <pc:docChgLst>
     <pc:chgData name="全 香玉" userId="1f3450e5-81b9-4f7a-82d7-841c32c029e0" providerId="ADAL" clId="{670531AC-1667-4F97-B1A6-5D38F8A44A79}"/>
-    <pc:docChg chg="undo custSel addSld modSld">
-      <pc:chgData name="全 香玉" userId="1f3450e5-81b9-4f7a-82d7-841c32c029e0" providerId="ADAL" clId="{670531AC-1667-4F97-B1A6-5D38F8A44A79}" dt="2026-07-17T03:13:46.705" v="188" actId="20577"/>
+    <pc:docChg chg="undo redo custSel addSld delSld modSld sldOrd">
+      <pc:chgData name="全 香玉" userId="1f3450e5-81b9-4f7a-82d7-841c32c029e0" providerId="ADAL" clId="{670531AC-1667-4F97-B1A6-5D38F8A44A79}" dt="2026-07-23T10:52:18.564" v="2823" actId="1076"/>
       <pc:docMkLst>
         <pc:docMk/>
       </pc:docMkLst>
@@ -146,14 +149,6 @@
           <pc:docMk/>
           <pc:sldMk cId="3041934445" sldId="268"/>
         </pc:sldMkLst>
-        <pc:spChg chg="del mod">
-          <ac:chgData name="全 香玉" userId="1f3450e5-81b9-4f7a-82d7-841c32c029e0" providerId="ADAL" clId="{670531AC-1667-4F97-B1A6-5D38F8A44A79}" dt="2026-07-17T03:09:15.268" v="157" actId="478"/>
-          <ac:spMkLst>
-            <pc:docMk/>
-            <pc:sldMk cId="3041934445" sldId="268"/>
-            <ac:spMk id="14" creationId="{F4632D58-47AB-1274-78A2-C3A4C9BBB101}"/>
-          </ac:spMkLst>
-        </pc:spChg>
         <pc:spChg chg="mod">
           <ac:chgData name="全 香玉" userId="1f3450e5-81b9-4f7a-82d7-841c32c029e0" providerId="ADAL" clId="{670531AC-1667-4F97-B1A6-5D38F8A44A79}" dt="2026-07-17T03:08:21.525" v="154" actId="1076"/>
           <ac:spMkLst>
@@ -168,30 +163,6 @@
             <pc:docMk/>
             <pc:sldMk cId="3041934445" sldId="268"/>
             <ac:spMk id="17" creationId="{E62A6218-D51E-A281-2173-9DE048FA601F}"/>
-          </ac:spMkLst>
-        </pc:spChg>
-        <pc:spChg chg="del mod">
-          <ac:chgData name="全 香玉" userId="1f3450e5-81b9-4f7a-82d7-841c32c029e0" providerId="ADAL" clId="{670531AC-1667-4F97-B1A6-5D38F8A44A79}" dt="2026-07-17T03:09:17.007" v="158" actId="478"/>
-          <ac:spMkLst>
-            <pc:docMk/>
-            <pc:sldMk cId="3041934445" sldId="268"/>
-            <ac:spMk id="18" creationId="{8069AF3B-A6BD-F688-6E11-3E379DA2E062}"/>
-          </ac:spMkLst>
-        </pc:spChg>
-        <pc:spChg chg="add del mod">
-          <ac:chgData name="全 香玉" userId="1f3450e5-81b9-4f7a-82d7-841c32c029e0" providerId="ADAL" clId="{670531AC-1667-4F97-B1A6-5D38F8A44A79}" dt="2026-07-17T03:09:54.961" v="170" actId="22"/>
-          <ac:spMkLst>
-            <pc:docMk/>
-            <pc:sldMk cId="3041934445" sldId="268"/>
-            <ac:spMk id="42" creationId="{8B973AEE-D6A4-2C31-3023-0AE4B2A550CA}"/>
-          </ac:spMkLst>
-        </pc:spChg>
-        <pc:spChg chg="add del mod">
-          <ac:chgData name="全 香玉" userId="1f3450e5-81b9-4f7a-82d7-841c32c029e0" providerId="ADAL" clId="{670531AC-1667-4F97-B1A6-5D38F8A44A79}" dt="2026-07-17T03:09:49.652" v="166" actId="22"/>
-          <ac:spMkLst>
-            <pc:docMk/>
-            <pc:sldMk cId="3041934445" sldId="268"/>
-            <ac:spMk id="44" creationId="{C02D52AB-BB4C-8DD4-F5DD-1971DA2445B6}"/>
           </ac:spMkLst>
         </pc:spChg>
         <pc:spChg chg="add mod">
@@ -240,6 +211,1185 @@
             <pc:docMk/>
             <pc:sldMk cId="3041934445" sldId="268"/>
             <ac:cxnSpMk id="41" creationId="{4DCED330-D698-3CD9-478D-60C71CFFE4DF}"/>
+          </ac:cxnSpMkLst>
+        </pc:cxnChg>
+      </pc:sldChg>
+      <pc:sldChg chg="addSp delSp modSp new del mod setBg">
+        <pc:chgData name="全 香玉" userId="1f3450e5-81b9-4f7a-82d7-841c32c029e0" providerId="ADAL" clId="{670531AC-1667-4F97-B1A6-5D38F8A44A79}" dt="2026-07-23T02:35:25.284" v="2305" actId="47"/>
+        <pc:sldMkLst>
+          <pc:docMk/>
+          <pc:sldMk cId="3109571289" sldId="269"/>
+        </pc:sldMkLst>
+      </pc:sldChg>
+      <pc:sldChg chg="add del">
+        <pc:chgData name="全 香玉" userId="1f3450e5-81b9-4f7a-82d7-841c32c029e0" providerId="ADAL" clId="{670531AC-1667-4F97-B1A6-5D38F8A44A79}" dt="2026-07-23T02:35:23.089" v="2304" actId="47"/>
+        <pc:sldMkLst>
+          <pc:docMk/>
+          <pc:sldMk cId="1116325694" sldId="270"/>
+        </pc:sldMkLst>
+      </pc:sldChg>
+      <pc:sldChg chg="addSp delSp modSp add mod ord">
+        <pc:chgData name="全 香玉" userId="1f3450e5-81b9-4f7a-82d7-841c32c029e0" providerId="ADAL" clId="{670531AC-1667-4F97-B1A6-5D38F8A44A79}" dt="2026-07-23T10:52:18.564" v="2823" actId="1076"/>
+        <pc:sldMkLst>
+          <pc:docMk/>
+          <pc:sldMk cId="320822935" sldId="271"/>
+        </pc:sldMkLst>
+        <pc:spChg chg="add del mod ord">
+          <ac:chgData name="全 香玉" userId="1f3450e5-81b9-4f7a-82d7-841c32c029e0" providerId="ADAL" clId="{670531AC-1667-4F97-B1A6-5D38F8A44A79}" dt="2026-07-23T02:16:57.729" v="1858" actId="478"/>
+          <ac:spMkLst>
+            <pc:docMk/>
+            <pc:sldMk cId="320822935" sldId="271"/>
+            <ac:spMk id="27" creationId="{FFD9A9D9-2967-FA03-E1BD-B19A9D41DF5A}"/>
+          </ac:spMkLst>
+        </pc:spChg>
+        <pc:spChg chg="add del mod ord">
+          <ac:chgData name="全 香玉" userId="1f3450e5-81b9-4f7a-82d7-841c32c029e0" providerId="ADAL" clId="{670531AC-1667-4F97-B1A6-5D38F8A44A79}" dt="2026-07-23T02:19:15.481" v="1875" actId="478"/>
+          <ac:spMkLst>
+            <pc:docMk/>
+            <pc:sldMk cId="320822935" sldId="271"/>
+            <ac:spMk id="28" creationId="{B59C5699-7ABD-A1C5-7832-2ED8D96D7A46}"/>
+          </ac:spMkLst>
+        </pc:spChg>
+        <pc:spChg chg="add del mod ord">
+          <ac:chgData name="全 香玉" userId="1f3450e5-81b9-4f7a-82d7-841c32c029e0" providerId="ADAL" clId="{670531AC-1667-4F97-B1A6-5D38F8A44A79}" dt="2026-07-23T02:12:30.406" v="1723" actId="478"/>
+          <ac:spMkLst>
+            <pc:docMk/>
+            <pc:sldMk cId="320822935" sldId="271"/>
+            <ac:spMk id="29" creationId="{F3A9DA67-D51D-C994-487A-DAF76C5C852B}"/>
+          </ac:spMkLst>
+        </pc:spChg>
+        <pc:spChg chg="add mod ord">
+          <ac:chgData name="全 香玉" userId="1f3450e5-81b9-4f7a-82d7-841c32c029e0" providerId="ADAL" clId="{670531AC-1667-4F97-B1A6-5D38F8A44A79}" dt="2026-07-23T09:30:35.788" v="2377" actId="165"/>
+          <ac:spMkLst>
+            <pc:docMk/>
+            <pc:sldMk cId="320822935" sldId="271"/>
+            <ac:spMk id="31" creationId="{053F6D08-41BC-F51C-A6F6-B8CDB7DC25E7}"/>
+          </ac:spMkLst>
+        </pc:spChg>
+        <pc:spChg chg="add mod ord">
+          <ac:chgData name="全 香玉" userId="1f3450e5-81b9-4f7a-82d7-841c32c029e0" providerId="ADAL" clId="{670531AC-1667-4F97-B1A6-5D38F8A44A79}" dt="2026-07-23T10:01:50.617" v="2536" actId="14100"/>
+          <ac:spMkLst>
+            <pc:docMk/>
+            <pc:sldMk cId="320822935" sldId="271"/>
+            <ac:spMk id="34" creationId="{9B4C47D8-5653-946E-25C0-E3D177A3002B}"/>
+          </ac:spMkLst>
+        </pc:spChg>
+        <pc:spChg chg="add mod ord">
+          <ac:chgData name="全 香玉" userId="1f3450e5-81b9-4f7a-82d7-841c32c029e0" providerId="ADAL" clId="{670531AC-1667-4F97-B1A6-5D38F8A44A79}" dt="2026-07-23T02:27:00.001" v="2092" actId="16959"/>
+          <ac:spMkLst>
+            <pc:docMk/>
+            <pc:sldMk cId="320822935" sldId="271"/>
+            <ac:spMk id="36" creationId="{56E31054-4C6F-71D5-6FD0-6EBCCEDE91C6}"/>
+          </ac:spMkLst>
+        </pc:spChg>
+        <pc:spChg chg="add mod topLvl">
+          <ac:chgData name="全 香玉" userId="1f3450e5-81b9-4f7a-82d7-841c32c029e0" providerId="ADAL" clId="{670531AC-1667-4F97-B1A6-5D38F8A44A79}" dt="2026-07-23T09:30:54.694" v="2382" actId="164"/>
+          <ac:spMkLst>
+            <pc:docMk/>
+            <pc:sldMk cId="320822935" sldId="271"/>
+            <ac:spMk id="60" creationId="{87CA5E10-8FFB-FF0D-4C15-679FFB0122AE}"/>
+          </ac:spMkLst>
+        </pc:spChg>
+        <pc:spChg chg="add mod topLvl">
+          <ac:chgData name="全 香玉" userId="1f3450e5-81b9-4f7a-82d7-841c32c029e0" providerId="ADAL" clId="{670531AC-1667-4F97-B1A6-5D38F8A44A79}" dt="2026-07-23T09:30:54.694" v="2382" actId="164"/>
+          <ac:spMkLst>
+            <pc:docMk/>
+            <pc:sldMk cId="320822935" sldId="271"/>
+            <ac:spMk id="63" creationId="{2D9CC5A0-C964-FFF0-E492-7C7F2DEE61EA}"/>
+          </ac:spMkLst>
+        </pc:spChg>
+        <pc:spChg chg="mod topLvl">
+          <ac:chgData name="全 香玉" userId="1f3450e5-81b9-4f7a-82d7-841c32c029e0" providerId="ADAL" clId="{670531AC-1667-4F97-B1A6-5D38F8A44A79}" dt="2026-07-23T09:30:35.788" v="2377" actId="165"/>
+          <ac:spMkLst>
+            <pc:docMk/>
+            <pc:sldMk cId="320822935" sldId="271"/>
+            <ac:spMk id="130" creationId="{22BFB687-C0E6-FB0D-1AAA-840E9FC83963}"/>
+          </ac:spMkLst>
+        </pc:spChg>
+        <pc:spChg chg="add mod">
+          <ac:chgData name="全 香玉" userId="1f3450e5-81b9-4f7a-82d7-841c32c029e0" providerId="ADAL" clId="{670531AC-1667-4F97-B1A6-5D38F8A44A79}" dt="2026-07-23T09:30:54.694" v="2382" actId="164"/>
+          <ac:spMkLst>
+            <pc:docMk/>
+            <pc:sldMk cId="320822935" sldId="271"/>
+            <ac:spMk id="133" creationId="{0C0F2BBB-A0F2-09E4-7A21-C03B3DD56AF8}"/>
+          </ac:spMkLst>
+        </pc:spChg>
+        <pc:spChg chg="add mod">
+          <ac:chgData name="全 香玉" userId="1f3450e5-81b9-4f7a-82d7-841c32c029e0" providerId="ADAL" clId="{670531AC-1667-4F97-B1A6-5D38F8A44A79}" dt="2026-07-23T09:30:54.694" v="2382" actId="164"/>
+          <ac:spMkLst>
+            <pc:docMk/>
+            <pc:sldMk cId="320822935" sldId="271"/>
+            <ac:spMk id="137" creationId="{67EA756C-7178-2337-255A-A4B77D6AF8D1}"/>
+          </ac:spMkLst>
+        </pc:spChg>
+        <pc:spChg chg="add mod">
+          <ac:chgData name="全 香玉" userId="1f3450e5-81b9-4f7a-82d7-841c32c029e0" providerId="ADAL" clId="{670531AC-1667-4F97-B1A6-5D38F8A44A79}" dt="2026-07-23T09:30:54.694" v="2382" actId="164"/>
+          <ac:spMkLst>
+            <pc:docMk/>
+            <pc:sldMk cId="320822935" sldId="271"/>
+            <ac:spMk id="139" creationId="{14B5F41D-01F2-C36C-6088-61A4F03794DA}"/>
+          </ac:spMkLst>
+        </pc:spChg>
+        <pc:spChg chg="mod topLvl">
+          <ac:chgData name="全 香玉" userId="1f3450e5-81b9-4f7a-82d7-841c32c029e0" providerId="ADAL" clId="{670531AC-1667-4F97-B1A6-5D38F8A44A79}" dt="2026-07-23T09:30:35.788" v="2377" actId="165"/>
+          <ac:spMkLst>
+            <pc:docMk/>
+            <pc:sldMk cId="320822935" sldId="271"/>
+            <ac:spMk id="140" creationId="{FA72BF2D-E283-9927-82F3-17E3D17C66C2}"/>
+          </ac:spMkLst>
+        </pc:spChg>
+        <pc:spChg chg="del mod topLvl">
+          <ac:chgData name="全 香玉" userId="1f3450e5-81b9-4f7a-82d7-841c32c029e0" providerId="ADAL" clId="{670531AC-1667-4F97-B1A6-5D38F8A44A79}" dt="2026-07-23T02:23:32.891" v="2060" actId="478"/>
+          <ac:spMkLst>
+            <pc:docMk/>
+            <pc:sldMk cId="320822935" sldId="271"/>
+            <ac:spMk id="141" creationId="{5EF8C26F-9158-3BD3-4ABA-6A618303F457}"/>
+          </ac:spMkLst>
+        </pc:spChg>
+        <pc:spChg chg="add mod topLvl">
+          <ac:chgData name="全 香玉" userId="1f3450e5-81b9-4f7a-82d7-841c32c029e0" providerId="ADAL" clId="{670531AC-1667-4F97-B1A6-5D38F8A44A79}" dt="2026-07-23T09:30:54.694" v="2382" actId="164"/>
+          <ac:spMkLst>
+            <pc:docMk/>
+            <pc:sldMk cId="320822935" sldId="271"/>
+            <ac:spMk id="144" creationId="{49E8488A-CE86-DE29-4D91-21BFADF57941}"/>
+          </ac:spMkLst>
+        </pc:spChg>
+        <pc:spChg chg="add mod ord">
+          <ac:chgData name="全 香玉" userId="1f3450e5-81b9-4f7a-82d7-841c32c029e0" providerId="ADAL" clId="{670531AC-1667-4F97-B1A6-5D38F8A44A79}" dt="2026-07-23T10:46:50.570" v="2781" actId="164"/>
+          <ac:spMkLst>
+            <pc:docMk/>
+            <pc:sldMk cId="320822935" sldId="271"/>
+            <ac:spMk id="145" creationId="{D6C9D1BC-CE0C-7411-21DD-4C0C237BFF11}"/>
+          </ac:spMkLst>
+        </pc:spChg>
+        <pc:spChg chg="add mod ord">
+          <ac:chgData name="全 香玉" userId="1f3450e5-81b9-4f7a-82d7-841c32c029e0" providerId="ADAL" clId="{670531AC-1667-4F97-B1A6-5D38F8A44A79}" dt="2026-07-23T10:46:50.570" v="2781" actId="164"/>
+          <ac:spMkLst>
+            <pc:docMk/>
+            <pc:sldMk cId="320822935" sldId="271"/>
+            <ac:spMk id="147" creationId="{78FC8C47-95BE-12D3-AA4B-E942B16BCE1A}"/>
+          </ac:spMkLst>
+        </pc:spChg>
+        <pc:spChg chg="add mod">
+          <ac:chgData name="全 香玉" userId="1f3450e5-81b9-4f7a-82d7-841c32c029e0" providerId="ADAL" clId="{670531AC-1667-4F97-B1A6-5D38F8A44A79}" dt="2026-07-23T10:46:50.570" v="2781" actId="164"/>
+          <ac:spMkLst>
+            <pc:docMk/>
+            <pc:sldMk cId="320822935" sldId="271"/>
+            <ac:spMk id="177" creationId="{0C0E0EEB-5816-CE46-43F4-C1C0972C8938}"/>
+          </ac:spMkLst>
+        </pc:spChg>
+        <pc:spChg chg="mod topLvl">
+          <ac:chgData name="全 香玉" userId="1f3450e5-81b9-4f7a-82d7-841c32c029e0" providerId="ADAL" clId="{670531AC-1667-4F97-B1A6-5D38F8A44A79}" dt="2026-07-23T09:30:35.788" v="2377" actId="165"/>
+          <ac:spMkLst>
+            <pc:docMk/>
+            <pc:sldMk cId="320822935" sldId="271"/>
+            <ac:spMk id="178" creationId="{2A2BC753-74A4-22CD-55C6-2A9758ED9DAA}"/>
+          </ac:spMkLst>
+        </pc:spChg>
+        <pc:spChg chg="mod ord topLvl">
+          <ac:chgData name="全 香玉" userId="1f3450e5-81b9-4f7a-82d7-841c32c029e0" providerId="ADAL" clId="{670531AC-1667-4F97-B1A6-5D38F8A44A79}" dt="2026-07-23T09:30:35.788" v="2377" actId="165"/>
+          <ac:spMkLst>
+            <pc:docMk/>
+            <pc:sldMk cId="320822935" sldId="271"/>
+            <ac:spMk id="180" creationId="{8F953448-758B-31CD-0A02-20F48018AC22}"/>
+          </ac:spMkLst>
+        </pc:spChg>
+        <pc:spChg chg="del mod topLvl">
+          <ac:chgData name="全 香玉" userId="1f3450e5-81b9-4f7a-82d7-841c32c029e0" providerId="ADAL" clId="{670531AC-1667-4F97-B1A6-5D38F8A44A79}" dt="2026-07-23T02:07:09.122" v="1558" actId="478"/>
+          <ac:spMkLst>
+            <pc:docMk/>
+            <pc:sldMk cId="320822935" sldId="271"/>
+            <ac:spMk id="181" creationId="{F5112C38-B312-357A-72EF-0EE7DBC94A85}"/>
+          </ac:spMkLst>
+        </pc:spChg>
+        <pc:spChg chg="mod topLvl">
+          <ac:chgData name="全 香玉" userId="1f3450e5-81b9-4f7a-82d7-841c32c029e0" providerId="ADAL" clId="{670531AC-1667-4F97-B1A6-5D38F8A44A79}" dt="2026-07-23T02:27:00.001" v="2092" actId="16959"/>
+          <ac:spMkLst>
+            <pc:docMk/>
+            <pc:sldMk cId="320822935" sldId="271"/>
+            <ac:spMk id="183" creationId="{023170A7-EE8B-6405-9336-2916FF6DC7E4}"/>
+          </ac:spMkLst>
+        </pc:spChg>
+        <pc:spChg chg="del mod topLvl">
+          <ac:chgData name="全 香玉" userId="1f3450e5-81b9-4f7a-82d7-841c32c029e0" providerId="ADAL" clId="{670531AC-1667-4F97-B1A6-5D38F8A44A79}" dt="2026-07-23T02:10:21.985" v="1667" actId="478"/>
+          <ac:spMkLst>
+            <pc:docMk/>
+            <pc:sldMk cId="320822935" sldId="271"/>
+            <ac:spMk id="187" creationId="{D0E5ED6B-F5EA-0182-2ACC-212170B3EDE7}"/>
+          </ac:spMkLst>
+        </pc:spChg>
+        <pc:spChg chg="del mod topLvl">
+          <ac:chgData name="全 香玉" userId="1f3450e5-81b9-4f7a-82d7-841c32c029e0" providerId="ADAL" clId="{670531AC-1667-4F97-B1A6-5D38F8A44A79}" dt="2026-07-23T02:19:15.481" v="1875" actId="478"/>
+          <ac:spMkLst>
+            <pc:docMk/>
+            <pc:sldMk cId="320822935" sldId="271"/>
+            <ac:spMk id="189" creationId="{E316FA86-1BF0-B3C7-CFFB-B03CA543C481}"/>
+          </ac:spMkLst>
+        </pc:spChg>
+        <pc:spChg chg="add del">
+          <ac:chgData name="全 香玉" userId="1f3450e5-81b9-4f7a-82d7-841c32c029e0" providerId="ADAL" clId="{670531AC-1667-4F97-B1A6-5D38F8A44A79}" dt="2026-07-23T09:35:29.613" v="2425" actId="478"/>
+          <ac:spMkLst>
+            <pc:docMk/>
+            <pc:sldMk cId="320822935" sldId="271"/>
+            <ac:spMk id="190" creationId="{FEDAA750-3B69-DE98-1501-A2BBE804E0E8}"/>
+          </ac:spMkLst>
+        </pc:spChg>
+        <pc:spChg chg="mod topLvl">
+          <ac:chgData name="全 香玉" userId="1f3450e5-81b9-4f7a-82d7-841c32c029e0" providerId="ADAL" clId="{670531AC-1667-4F97-B1A6-5D38F8A44A79}" dt="2026-07-23T02:27:00.001" v="2092" actId="16959"/>
+          <ac:spMkLst>
+            <pc:docMk/>
+            <pc:sldMk cId="320822935" sldId="271"/>
+            <ac:spMk id="191" creationId="{D0DA9189-6A2D-5C33-F1C7-7F50887983BB}"/>
+          </ac:spMkLst>
+        </pc:spChg>
+        <pc:spChg chg="add del mod">
+          <ac:chgData name="全 香玉" userId="1f3450e5-81b9-4f7a-82d7-841c32c029e0" providerId="ADAL" clId="{670531AC-1667-4F97-B1A6-5D38F8A44A79}" dt="2026-07-23T09:35:59.977" v="2429" actId="11529"/>
+          <ac:spMkLst>
+            <pc:docMk/>
+            <pc:sldMk cId="320822935" sldId="271"/>
+            <ac:spMk id="192" creationId="{617BD96F-44A1-6704-0A1A-9238664EF6AC}"/>
+          </ac:spMkLst>
+        </pc:spChg>
+        <pc:spChg chg="add mod">
+          <ac:chgData name="全 香玉" userId="1f3450e5-81b9-4f7a-82d7-841c32c029e0" providerId="ADAL" clId="{670531AC-1667-4F97-B1A6-5D38F8A44A79}" dt="2026-07-23T10:46:50.570" v="2781" actId="164"/>
+          <ac:spMkLst>
+            <pc:docMk/>
+            <pc:sldMk cId="320822935" sldId="271"/>
+            <ac:spMk id="193" creationId="{5F2773B3-850F-8B3B-89F1-0DFFFAF28E45}"/>
+          </ac:spMkLst>
+        </pc:spChg>
+        <pc:spChg chg="add mod">
+          <ac:chgData name="全 香玉" userId="1f3450e5-81b9-4f7a-82d7-841c32c029e0" providerId="ADAL" clId="{670531AC-1667-4F97-B1A6-5D38F8A44A79}" dt="2026-07-23T10:46:50.570" v="2781" actId="164"/>
+          <ac:spMkLst>
+            <pc:docMk/>
+            <pc:sldMk cId="320822935" sldId="271"/>
+            <ac:spMk id="194" creationId="{F714665F-88F8-A173-1FC4-485C43F341D0}"/>
+          </ac:spMkLst>
+        </pc:spChg>
+        <pc:spChg chg="mod topLvl">
+          <ac:chgData name="全 香玉" userId="1f3450e5-81b9-4f7a-82d7-841c32c029e0" providerId="ADAL" clId="{670531AC-1667-4F97-B1A6-5D38F8A44A79}" dt="2026-07-23T02:27:00.001" v="2092" actId="16959"/>
+          <ac:spMkLst>
+            <pc:docMk/>
+            <pc:sldMk cId="320822935" sldId="271"/>
+            <ac:spMk id="196" creationId="{16FBB22E-A9A0-33EF-6667-C1ECD9251DD6}"/>
+          </ac:spMkLst>
+        </pc:spChg>
+        <pc:spChg chg="mod topLvl">
+          <ac:chgData name="全 香玉" userId="1f3450e5-81b9-4f7a-82d7-841c32c029e0" providerId="ADAL" clId="{670531AC-1667-4F97-B1A6-5D38F8A44A79}" dt="2026-07-23T02:27:00.001" v="2092" actId="16959"/>
+          <ac:spMkLst>
+            <pc:docMk/>
+            <pc:sldMk cId="320822935" sldId="271"/>
+            <ac:spMk id="199" creationId="{FA67BE37-6E72-0E99-6032-D1BB595475CA}"/>
+          </ac:spMkLst>
+        </pc:spChg>
+        <pc:spChg chg="mod topLvl">
+          <ac:chgData name="全 香玉" userId="1f3450e5-81b9-4f7a-82d7-841c32c029e0" providerId="ADAL" clId="{670531AC-1667-4F97-B1A6-5D38F8A44A79}" dt="2026-07-23T02:27:00.001" v="2092" actId="16959"/>
+          <ac:spMkLst>
+            <pc:docMk/>
+            <pc:sldMk cId="320822935" sldId="271"/>
+            <ac:spMk id="201" creationId="{074B58AF-8E92-D535-1FCF-BDF1F2891A69}"/>
+          </ac:spMkLst>
+        </pc:spChg>
+        <pc:spChg chg="mod">
+          <ac:chgData name="全 香玉" userId="1f3450e5-81b9-4f7a-82d7-841c32c029e0" providerId="ADAL" clId="{670531AC-1667-4F97-B1A6-5D38F8A44A79}" dt="2026-07-23T02:20:50.369" v="1883" actId="1076"/>
+          <ac:spMkLst>
+            <pc:docMk/>
+            <pc:sldMk cId="320822935" sldId="271"/>
+            <ac:spMk id="203" creationId="{95356ABD-AC5C-BED3-27C2-8A1C46A62254}"/>
+          </ac:spMkLst>
+        </pc:spChg>
+        <pc:spChg chg="mod">
+          <ac:chgData name="全 香玉" userId="1f3450e5-81b9-4f7a-82d7-841c32c029e0" providerId="ADAL" clId="{670531AC-1667-4F97-B1A6-5D38F8A44A79}" dt="2026-07-23T09:30:35.788" v="2377" actId="165"/>
+          <ac:spMkLst>
+            <pc:docMk/>
+            <pc:sldMk cId="320822935" sldId="271"/>
+            <ac:spMk id="212" creationId="{092AF00C-4641-0E1C-0B67-753240ED7557}"/>
+          </ac:spMkLst>
+        </pc:spChg>
+        <pc:spChg chg="add del mod ord">
+          <ac:chgData name="全 香玉" userId="1f3450e5-81b9-4f7a-82d7-841c32c029e0" providerId="ADAL" clId="{670531AC-1667-4F97-B1A6-5D38F8A44A79}" dt="2026-07-23T10:52:07.942" v="2816" actId="478"/>
+          <ac:spMkLst>
+            <pc:docMk/>
+            <pc:sldMk cId="320822935" sldId="271"/>
+            <ac:spMk id="220" creationId="{407ED3E9-F43C-94F6-4132-4527AFE67117}"/>
+          </ac:spMkLst>
+        </pc:spChg>
+        <pc:spChg chg="add del mod ord">
+          <ac:chgData name="全 香玉" userId="1f3450e5-81b9-4f7a-82d7-841c32c029e0" providerId="ADAL" clId="{670531AC-1667-4F97-B1A6-5D38F8A44A79}" dt="2026-07-23T10:01:46.349" v="2535" actId="478"/>
+          <ac:spMkLst>
+            <pc:docMk/>
+            <pc:sldMk cId="320822935" sldId="271"/>
+            <ac:spMk id="229" creationId="{BBAD08DA-CC7A-B0C6-0196-05BD0D20AC70}"/>
+          </ac:spMkLst>
+        </pc:spChg>
+        <pc:spChg chg="add del ord">
+          <ac:chgData name="全 香玉" userId="1f3450e5-81b9-4f7a-82d7-841c32c029e0" providerId="ADAL" clId="{670531AC-1667-4F97-B1A6-5D38F8A44A79}" dt="2026-07-23T10:23:06.258" v="2593" actId="11529"/>
+          <ac:spMkLst>
+            <pc:docMk/>
+            <pc:sldMk cId="320822935" sldId="271"/>
+            <ac:spMk id="254" creationId="{5A54AD7F-087F-EE8B-4E5A-CCD417DB7B9A}"/>
+          </ac:spMkLst>
+        </pc:spChg>
+        <pc:spChg chg="add del mod">
+          <ac:chgData name="全 香玉" userId="1f3450e5-81b9-4f7a-82d7-841c32c029e0" providerId="ADAL" clId="{670531AC-1667-4F97-B1A6-5D38F8A44A79}" dt="2026-07-23T10:24:39.289" v="2606" actId="478"/>
+          <ac:spMkLst>
+            <pc:docMk/>
+            <pc:sldMk cId="320822935" sldId="271"/>
+            <ac:spMk id="255" creationId="{D659BD4F-130B-2A5C-1AF6-B556A487B493}"/>
+          </ac:spMkLst>
+        </pc:spChg>
+        <pc:spChg chg="add mod">
+          <ac:chgData name="全 香玉" userId="1f3450e5-81b9-4f7a-82d7-841c32c029e0" providerId="ADAL" clId="{670531AC-1667-4F97-B1A6-5D38F8A44A79}" dt="2026-07-23T10:47:08.571" v="2784" actId="1076"/>
+          <ac:spMkLst>
+            <pc:docMk/>
+            <pc:sldMk cId="320822935" sldId="271"/>
+            <ac:spMk id="260" creationId="{35224B4F-E20D-8F62-31A6-DD4951021291}"/>
+          </ac:spMkLst>
+        </pc:spChg>
+        <pc:spChg chg="add del mod ord">
+          <ac:chgData name="全 香玉" userId="1f3450e5-81b9-4f7a-82d7-841c32c029e0" providerId="ADAL" clId="{670531AC-1667-4F97-B1A6-5D38F8A44A79}" dt="2026-07-23T10:52:10.989" v="2819" actId="478"/>
+          <ac:spMkLst>
+            <pc:docMk/>
+            <pc:sldMk cId="320822935" sldId="271"/>
+            <ac:spMk id="278" creationId="{B78E66E3-EBF8-FD26-E47B-9FA7E5796691}"/>
+          </ac:spMkLst>
+        </pc:spChg>
+        <pc:spChg chg="add del mod ord">
+          <ac:chgData name="全 香玉" userId="1f3450e5-81b9-4f7a-82d7-841c32c029e0" providerId="ADAL" clId="{670531AC-1667-4F97-B1A6-5D38F8A44A79}" dt="2026-07-23T10:52:08.829" v="2817" actId="478"/>
+          <ac:spMkLst>
+            <pc:docMk/>
+            <pc:sldMk cId="320822935" sldId="271"/>
+            <ac:spMk id="279" creationId="{5FBFD174-2408-6656-11B1-7888DA8932EB}"/>
+          </ac:spMkLst>
+        </pc:spChg>
+        <pc:spChg chg="add del mod">
+          <ac:chgData name="全 香玉" userId="1f3450e5-81b9-4f7a-82d7-841c32c029e0" providerId="ADAL" clId="{670531AC-1667-4F97-B1A6-5D38F8A44A79}" dt="2026-07-23T10:38:43.487" v="2732" actId="478"/>
+          <ac:spMkLst>
+            <pc:docMk/>
+            <pc:sldMk cId="320822935" sldId="271"/>
+            <ac:spMk id="281" creationId="{9AC6C243-5AFF-F5FF-F51E-87A949FD8094}"/>
+          </ac:spMkLst>
+        </pc:spChg>
+        <pc:spChg chg="add del">
+          <ac:chgData name="全 香玉" userId="1f3450e5-81b9-4f7a-82d7-841c32c029e0" providerId="ADAL" clId="{670531AC-1667-4F97-B1A6-5D38F8A44A79}" dt="2026-07-23T10:39:09.830" v="2734" actId="478"/>
+          <ac:spMkLst>
+            <pc:docMk/>
+            <pc:sldMk cId="320822935" sldId="271"/>
+            <ac:spMk id="282" creationId="{9E0E18F1-0735-DBFC-3065-E68BD408F226}"/>
+          </ac:spMkLst>
+        </pc:spChg>
+        <pc:spChg chg="add del">
+          <ac:chgData name="全 香玉" userId="1f3450e5-81b9-4f7a-82d7-841c32c029e0" providerId="ADAL" clId="{670531AC-1667-4F97-B1A6-5D38F8A44A79}" dt="2026-07-23T10:52:14.440" v="2822" actId="478"/>
+          <ac:spMkLst>
+            <pc:docMk/>
+            <pc:sldMk cId="320822935" sldId="271"/>
+            <ac:spMk id="283" creationId="{36D6306A-C174-232D-CFBA-E50701C69659}"/>
+          </ac:spMkLst>
+        </pc:spChg>
+        <pc:spChg chg="add del">
+          <ac:chgData name="全 香玉" userId="1f3450e5-81b9-4f7a-82d7-841c32c029e0" providerId="ADAL" clId="{670531AC-1667-4F97-B1A6-5D38F8A44A79}" dt="2026-07-23T10:52:12.135" v="2820" actId="478"/>
+          <ac:spMkLst>
+            <pc:docMk/>
+            <pc:sldMk cId="320822935" sldId="271"/>
+            <ac:spMk id="284" creationId="{DA89A084-8168-804C-4264-BC7C752FC629}"/>
+          </ac:spMkLst>
+        </pc:spChg>
+        <pc:spChg chg="add mod ord">
+          <ac:chgData name="全 香玉" userId="1f3450e5-81b9-4f7a-82d7-841c32c029e0" providerId="ADAL" clId="{670531AC-1667-4F97-B1A6-5D38F8A44A79}" dt="2026-07-23T10:47:29.112" v="2785" actId="14100"/>
+          <ac:spMkLst>
+            <pc:docMk/>
+            <pc:sldMk cId="320822935" sldId="271"/>
+            <ac:spMk id="287" creationId="{424EF706-D0D6-1FF6-E923-78BCEDE021E6}"/>
+          </ac:spMkLst>
+        </pc:spChg>
+        <pc:spChg chg="add del mod ord">
+          <ac:chgData name="全 香玉" userId="1f3450e5-81b9-4f7a-82d7-841c32c029e0" providerId="ADAL" clId="{670531AC-1667-4F97-B1A6-5D38F8A44A79}" dt="2026-07-23T10:52:13.237" v="2821" actId="478"/>
+          <ac:spMkLst>
+            <pc:docMk/>
+            <pc:sldMk cId="320822935" sldId="271"/>
+            <ac:spMk id="291" creationId="{D6946235-9C2D-2E63-CF57-F56679DBAF38}"/>
+          </ac:spMkLst>
+        </pc:spChg>
+        <pc:grpChg chg="mod">
+          <ac:chgData name="全 香玉" userId="1f3450e5-81b9-4f7a-82d7-841c32c029e0" providerId="ADAL" clId="{670531AC-1667-4F97-B1A6-5D38F8A44A79}" dt="2026-07-23T09:30:54.694" v="2382" actId="164"/>
+          <ac:grpSpMkLst>
+            <pc:docMk/>
+            <pc:sldMk cId="320822935" sldId="271"/>
+            <ac:grpSpMk id="37" creationId="{523E0F75-90EC-EC08-EC0F-ADCD9661C9A2}"/>
+          </ac:grpSpMkLst>
+        </pc:grpChg>
+        <pc:grpChg chg="add mod">
+          <ac:chgData name="全 香玉" userId="1f3450e5-81b9-4f7a-82d7-841c32c029e0" providerId="ADAL" clId="{670531AC-1667-4F97-B1A6-5D38F8A44A79}" dt="2026-07-23T09:30:30.551" v="2376" actId="1076"/>
+          <ac:grpSpMkLst>
+            <pc:docMk/>
+            <pc:sldMk cId="320822935" sldId="271"/>
+            <ac:grpSpMk id="167" creationId="{F47602E7-7789-D153-03A2-5BF243FEE7B6}"/>
+          </ac:grpSpMkLst>
+        </pc:grpChg>
+        <pc:grpChg chg="add mod">
+          <ac:chgData name="全 香玉" userId="1f3450e5-81b9-4f7a-82d7-841c32c029e0" providerId="ADAL" clId="{670531AC-1667-4F97-B1A6-5D38F8A44A79}" dt="2026-07-23T10:52:18.564" v="2823" actId="1076"/>
+          <ac:grpSpMkLst>
+            <pc:docMk/>
+            <pc:sldMk cId="320822935" sldId="271"/>
+            <ac:grpSpMk id="171" creationId="{676647FD-B9D8-F8CB-BADF-142739ADCF25}"/>
+          </ac:grpSpMkLst>
+        </pc:grpChg>
+        <pc:grpChg chg="del">
+          <ac:chgData name="全 香玉" userId="1f3450e5-81b9-4f7a-82d7-841c32c029e0" providerId="ADAL" clId="{670531AC-1667-4F97-B1A6-5D38F8A44A79}" dt="2026-07-23T02:06:56.821" v="1555" actId="165"/>
+          <ac:grpSpMkLst>
+            <pc:docMk/>
+            <pc:sldMk cId="320822935" sldId="271"/>
+            <ac:grpSpMk id="182" creationId="{BBB59E1B-4FF0-490A-26C6-572CD115A998}"/>
+          </ac:grpSpMkLst>
+        </pc:grpChg>
+        <pc:grpChg chg="mod">
+          <ac:chgData name="全 香玉" userId="1f3450e5-81b9-4f7a-82d7-841c32c029e0" providerId="ADAL" clId="{670531AC-1667-4F97-B1A6-5D38F8A44A79}" dt="2026-07-23T02:01:24.518" v="1199" actId="1076"/>
+          <ac:grpSpMkLst>
+            <pc:docMk/>
+            <pc:sldMk cId="320822935" sldId="271"/>
+            <ac:grpSpMk id="210" creationId="{30C23E97-AE9B-2D4B-27CF-8B18946BF5A0}"/>
+          </ac:grpSpMkLst>
+        </pc:grpChg>
+        <pc:grpChg chg="add mod">
+          <ac:chgData name="全 香玉" userId="1f3450e5-81b9-4f7a-82d7-841c32c029e0" providerId="ADAL" clId="{670531AC-1667-4F97-B1A6-5D38F8A44A79}" dt="2026-07-23T10:45:41.042" v="2779" actId="164"/>
+          <ac:grpSpMkLst>
+            <pc:docMk/>
+            <pc:sldMk cId="320822935" sldId="271"/>
+            <ac:grpSpMk id="285" creationId="{67FC5463-D511-12DF-3BA9-921ADDFF2600}"/>
+          </ac:grpSpMkLst>
+        </pc:grpChg>
+        <pc:grpChg chg="add del mod">
+          <ac:chgData name="全 香玉" userId="1f3450e5-81b9-4f7a-82d7-841c32c029e0" providerId="ADAL" clId="{670531AC-1667-4F97-B1A6-5D38F8A44A79}" dt="2026-07-23T10:52:02.846" v="2814" actId="478"/>
+          <ac:grpSpMkLst>
+            <pc:docMk/>
+            <pc:sldMk cId="320822935" sldId="271"/>
+            <ac:grpSpMk id="288" creationId="{8A131B54-56A0-7238-4268-1587E6E479F5}"/>
+          </ac:grpSpMkLst>
+        </pc:grpChg>
+        <pc:grpChg chg="add del mod">
+          <ac:chgData name="全 香玉" userId="1f3450e5-81b9-4f7a-82d7-841c32c029e0" providerId="ADAL" clId="{670531AC-1667-4F97-B1A6-5D38F8A44A79}" dt="2026-07-23T10:52:05.204" v="2815" actId="478"/>
+          <ac:grpSpMkLst>
+            <pc:docMk/>
+            <pc:sldMk cId="320822935" sldId="271"/>
+            <ac:grpSpMk id="289" creationId="{E715D5C9-D24D-FD67-7BA3-DE754E043FA9}"/>
+          </ac:grpSpMkLst>
+        </pc:grpChg>
+        <pc:cxnChg chg="add mod">
+          <ac:chgData name="全 香玉" userId="1f3450e5-81b9-4f7a-82d7-841c32c029e0" providerId="ADAL" clId="{670531AC-1667-4F97-B1A6-5D38F8A44A79}" dt="2026-07-23T02:25:11.682" v="2078" actId="1076"/>
+          <ac:cxnSpMkLst>
+            <pc:docMk/>
+            <pc:sldMk cId="320822935" sldId="271"/>
+            <ac:cxnSpMk id="5" creationId="{26570B17-F552-E6EA-5480-FE1282944121}"/>
+          </ac:cxnSpMkLst>
+        </pc:cxnChg>
+        <pc:cxnChg chg="add mod">
+          <ac:chgData name="全 香玉" userId="1f3450e5-81b9-4f7a-82d7-841c32c029e0" providerId="ADAL" clId="{670531AC-1667-4F97-B1A6-5D38F8A44A79}" dt="2026-07-23T02:25:05.558" v="2076" actId="1076"/>
+          <ac:cxnSpMkLst>
+            <pc:docMk/>
+            <pc:sldMk cId="320822935" sldId="271"/>
+            <ac:cxnSpMk id="6" creationId="{70412230-B909-5321-2D54-5ED8C3918027}"/>
+          </ac:cxnSpMkLst>
+        </pc:cxnChg>
+        <pc:cxnChg chg="add mod">
+          <ac:chgData name="全 香玉" userId="1f3450e5-81b9-4f7a-82d7-841c32c029e0" providerId="ADAL" clId="{670531AC-1667-4F97-B1A6-5D38F8A44A79}" dt="2026-07-23T02:25:16.677" v="2080" actId="1076"/>
+          <ac:cxnSpMkLst>
+            <pc:docMk/>
+            <pc:sldMk cId="320822935" sldId="271"/>
+            <ac:cxnSpMk id="7" creationId="{E7C3E9B0-9473-D3DB-E115-BAA569A6627B}"/>
+          </ac:cxnSpMkLst>
+        </pc:cxnChg>
+        <pc:cxnChg chg="add mod">
+          <ac:chgData name="全 香玉" userId="1f3450e5-81b9-4f7a-82d7-841c32c029e0" providerId="ADAL" clId="{670531AC-1667-4F97-B1A6-5D38F8A44A79}" dt="2026-07-23T02:03:25.169" v="1342" actId="1038"/>
+          <ac:cxnSpMkLst>
+            <pc:docMk/>
+            <pc:sldMk cId="320822935" sldId="271"/>
+            <ac:cxnSpMk id="12" creationId="{63F6F569-48BB-671E-B253-615713DFC82E}"/>
+          </ac:cxnSpMkLst>
+        </pc:cxnChg>
+        <pc:cxnChg chg="add mod">
+          <ac:chgData name="全 香玉" userId="1f3450e5-81b9-4f7a-82d7-841c32c029e0" providerId="ADAL" clId="{670531AC-1667-4F97-B1A6-5D38F8A44A79}" dt="2026-07-23T02:03:24.300" v="1341" actId="1038"/>
+          <ac:cxnSpMkLst>
+            <pc:docMk/>
+            <pc:sldMk cId="320822935" sldId="271"/>
+            <ac:cxnSpMk id="13" creationId="{F9C66CBD-B29E-8B38-0297-479F654AF13F}"/>
+          </ac:cxnSpMkLst>
+        </pc:cxnChg>
+        <pc:cxnChg chg="add mod">
+          <ac:chgData name="全 香玉" userId="1f3450e5-81b9-4f7a-82d7-841c32c029e0" providerId="ADAL" clId="{670531AC-1667-4F97-B1A6-5D38F8A44A79}" dt="2026-07-23T02:02:26.658" v="1282" actId="1076"/>
+          <ac:cxnSpMkLst>
+            <pc:docMk/>
+            <pc:sldMk cId="320822935" sldId="271"/>
+            <ac:cxnSpMk id="14" creationId="{EA0651D3-F6F3-ED88-396E-B1551949C6BD}"/>
+          </ac:cxnSpMkLst>
+        </pc:cxnChg>
+        <pc:cxnChg chg="add mod">
+          <ac:chgData name="全 香玉" userId="1f3450e5-81b9-4f7a-82d7-841c32c029e0" providerId="ADAL" clId="{670531AC-1667-4F97-B1A6-5D38F8A44A79}" dt="2026-07-23T02:02:00.866" v="1209" actId="1035"/>
+          <ac:cxnSpMkLst>
+            <pc:docMk/>
+            <pc:sldMk cId="320822935" sldId="271"/>
+            <ac:cxnSpMk id="15" creationId="{316CBBD2-3CDF-8AB8-23AB-00BE64B8D754}"/>
+          </ac:cxnSpMkLst>
+        </pc:cxnChg>
+        <pc:cxnChg chg="add mod">
+          <ac:chgData name="全 香玉" userId="1f3450e5-81b9-4f7a-82d7-841c32c029e0" providerId="ADAL" clId="{670531AC-1667-4F97-B1A6-5D38F8A44A79}" dt="2026-07-23T02:04:10.928" v="1352" actId="1076"/>
+          <ac:cxnSpMkLst>
+            <pc:docMk/>
+            <pc:sldMk cId="320822935" sldId="271"/>
+            <ac:cxnSpMk id="16" creationId="{B7C41C58-D085-04FF-7B4E-4A32BCC6D01E}"/>
+          </ac:cxnSpMkLst>
+        </pc:cxnChg>
+        <pc:cxnChg chg="add mod">
+          <ac:chgData name="全 香玉" userId="1f3450e5-81b9-4f7a-82d7-841c32c029e0" providerId="ADAL" clId="{670531AC-1667-4F97-B1A6-5D38F8A44A79}" dt="2026-07-23T02:04:10.928" v="1352" actId="1076"/>
+          <ac:cxnSpMkLst>
+            <pc:docMk/>
+            <pc:sldMk cId="320822935" sldId="271"/>
+            <ac:cxnSpMk id="17" creationId="{745CD498-5BC0-8ED8-FDF8-62F50292128D}"/>
+          </ac:cxnSpMkLst>
+        </pc:cxnChg>
+        <pc:cxnChg chg="add mod">
+          <ac:chgData name="全 香玉" userId="1f3450e5-81b9-4f7a-82d7-841c32c029e0" providerId="ADAL" clId="{670531AC-1667-4F97-B1A6-5D38F8A44A79}" dt="2026-07-23T02:04:10.928" v="1352" actId="1076"/>
+          <ac:cxnSpMkLst>
+            <pc:docMk/>
+            <pc:sldMk cId="320822935" sldId="271"/>
+            <ac:cxnSpMk id="18" creationId="{AB6349A2-576A-6C22-8143-16516B4E3C6E}"/>
+          </ac:cxnSpMkLst>
+        </pc:cxnChg>
+        <pc:cxnChg chg="add mod">
+          <ac:chgData name="全 香玉" userId="1f3450e5-81b9-4f7a-82d7-841c32c029e0" providerId="ADAL" clId="{670531AC-1667-4F97-B1A6-5D38F8A44A79}" dt="2026-07-23T02:04:10.928" v="1352" actId="1076"/>
+          <ac:cxnSpMkLst>
+            <pc:docMk/>
+            <pc:sldMk cId="320822935" sldId="271"/>
+            <ac:cxnSpMk id="19" creationId="{51D85B5F-A07F-7176-4009-7604BDECFB0A}"/>
+          </ac:cxnSpMkLst>
+        </pc:cxnChg>
+        <pc:cxnChg chg="add mod ord">
+          <ac:chgData name="全 香玉" userId="1f3450e5-81b9-4f7a-82d7-841c32c029e0" providerId="ADAL" clId="{670531AC-1667-4F97-B1A6-5D38F8A44A79}" dt="2026-07-23T02:05:00.554" v="1431" actId="167"/>
+          <ac:cxnSpMkLst>
+            <pc:docMk/>
+            <pc:sldMk cId="320822935" sldId="271"/>
+            <ac:cxnSpMk id="20" creationId="{4069FAE7-DCE3-8368-4C29-3D6328386224}"/>
+          </ac:cxnSpMkLst>
+        </pc:cxnChg>
+        <pc:cxnChg chg="add mod">
+          <ac:chgData name="全 香玉" userId="1f3450e5-81b9-4f7a-82d7-841c32c029e0" providerId="ADAL" clId="{670531AC-1667-4F97-B1A6-5D38F8A44A79}" dt="2026-07-23T02:23:43.122" v="2061" actId="14100"/>
+          <ac:cxnSpMkLst>
+            <pc:docMk/>
+            <pc:sldMk cId="320822935" sldId="271"/>
+            <ac:cxnSpMk id="42" creationId="{37DA9B1E-7E83-1C5A-34AE-7B7E7D6EAAF7}"/>
+          </ac:cxnSpMkLst>
+        </pc:cxnChg>
+        <pc:cxnChg chg="add mod">
+          <ac:chgData name="全 香玉" userId="1f3450e5-81b9-4f7a-82d7-841c32c029e0" providerId="ADAL" clId="{670531AC-1667-4F97-B1A6-5D38F8A44A79}" dt="2026-07-23T09:30:54.694" v="2382" actId="164"/>
+          <ac:cxnSpMkLst>
+            <pc:docMk/>
+            <pc:sldMk cId="320822935" sldId="271"/>
+            <ac:cxnSpMk id="45" creationId="{95E6A913-5B89-DE48-23E5-C409E51A29CF}"/>
+          </ac:cxnSpMkLst>
+        </pc:cxnChg>
+        <pc:cxnChg chg="add mod">
+          <ac:chgData name="全 香玉" userId="1f3450e5-81b9-4f7a-82d7-841c32c029e0" providerId="ADAL" clId="{670531AC-1667-4F97-B1A6-5D38F8A44A79}" dt="2026-07-23T09:30:54.694" v="2382" actId="164"/>
+          <ac:cxnSpMkLst>
+            <pc:docMk/>
+            <pc:sldMk cId="320822935" sldId="271"/>
+            <ac:cxnSpMk id="46" creationId="{288B4B7A-E52F-C99A-6E89-382554E3C11E}"/>
+          </ac:cxnSpMkLst>
+        </pc:cxnChg>
+        <pc:cxnChg chg="add mod">
+          <ac:chgData name="全 香玉" userId="1f3450e5-81b9-4f7a-82d7-841c32c029e0" providerId="ADAL" clId="{670531AC-1667-4F97-B1A6-5D38F8A44A79}" dt="2026-07-23T09:30:16.409" v="2374" actId="1076"/>
+          <ac:cxnSpMkLst>
+            <pc:docMk/>
+            <pc:sldMk cId="320822935" sldId="271"/>
+            <ac:cxnSpMk id="50" creationId="{4332A866-32C7-5247-FECA-A36AA40669A7}"/>
+          </ac:cxnSpMkLst>
+        </pc:cxnChg>
+        <pc:cxnChg chg="mod">
+          <ac:chgData name="全 香玉" userId="1f3450e5-81b9-4f7a-82d7-841c32c029e0" providerId="ADAL" clId="{670531AC-1667-4F97-B1A6-5D38F8A44A79}" dt="2026-07-23T02:19:56.377" v="1879" actId="1582"/>
+          <ac:cxnSpMkLst>
+            <pc:docMk/>
+            <pc:sldMk cId="320822935" sldId="271"/>
+            <ac:cxnSpMk id="129" creationId="{639B7E91-3F4A-EBBD-C91D-5768D1AF3314}"/>
+          </ac:cxnSpMkLst>
+        </pc:cxnChg>
+        <pc:cxnChg chg="mod topLvl">
+          <ac:chgData name="全 香玉" userId="1f3450e5-81b9-4f7a-82d7-841c32c029e0" providerId="ADAL" clId="{670531AC-1667-4F97-B1A6-5D38F8A44A79}" dt="2026-07-23T02:06:56.821" v="1555" actId="165"/>
+          <ac:cxnSpMkLst>
+            <pc:docMk/>
+            <pc:sldMk cId="320822935" sldId="271"/>
+            <ac:cxnSpMk id="131" creationId="{1F611055-F9A2-BD5C-B2D4-D911B7632ACE}"/>
+          </ac:cxnSpMkLst>
+        </pc:cxnChg>
+        <pc:cxnChg chg="mod topLvl">
+          <ac:chgData name="全 香玉" userId="1f3450e5-81b9-4f7a-82d7-841c32c029e0" providerId="ADAL" clId="{670531AC-1667-4F97-B1A6-5D38F8A44A79}" dt="2026-07-23T02:06:56.821" v="1555" actId="165"/>
+          <ac:cxnSpMkLst>
+            <pc:docMk/>
+            <pc:sldMk cId="320822935" sldId="271"/>
+            <ac:cxnSpMk id="132" creationId="{7E00D959-AC30-E395-E395-2F650D884ED1}"/>
+          </ac:cxnSpMkLst>
+        </pc:cxnChg>
+        <pc:cxnChg chg="del mod topLvl">
+          <ac:chgData name="全 香玉" userId="1f3450e5-81b9-4f7a-82d7-841c32c029e0" providerId="ADAL" clId="{670531AC-1667-4F97-B1A6-5D38F8A44A79}" dt="2026-07-23T02:11:47.122" v="1715" actId="478"/>
+          <ac:cxnSpMkLst>
+            <pc:docMk/>
+            <pc:sldMk cId="320822935" sldId="271"/>
+            <ac:cxnSpMk id="134" creationId="{520862A8-9786-241D-58B8-193971A1E7A9}"/>
+          </ac:cxnSpMkLst>
+        </pc:cxnChg>
+        <pc:cxnChg chg="mod">
+          <ac:chgData name="全 香玉" userId="1f3450e5-81b9-4f7a-82d7-841c32c029e0" providerId="ADAL" clId="{670531AC-1667-4F97-B1A6-5D38F8A44A79}" dt="2026-07-23T02:11:20.903" v="1673" actId="1076"/>
+          <ac:cxnSpMkLst>
+            <pc:docMk/>
+            <pc:sldMk cId="320822935" sldId="271"/>
+            <ac:cxnSpMk id="135" creationId="{8FD917A6-592F-607D-8BF3-628EDE51C2A5}"/>
+          </ac:cxnSpMkLst>
+        </pc:cxnChg>
+        <pc:cxnChg chg="mod">
+          <ac:chgData name="全 香玉" userId="1f3450e5-81b9-4f7a-82d7-841c32c029e0" providerId="ADAL" clId="{670531AC-1667-4F97-B1A6-5D38F8A44A79}" dt="2026-07-23T02:23:47.618" v="2062" actId="14100"/>
+          <ac:cxnSpMkLst>
+            <pc:docMk/>
+            <pc:sldMk cId="320822935" sldId="271"/>
+            <ac:cxnSpMk id="142" creationId="{AC96840D-D78E-8D7F-46E8-A471D899BA2F}"/>
+          </ac:cxnSpMkLst>
+        </pc:cxnChg>
+        <pc:cxnChg chg="add del mod">
+          <ac:chgData name="全 香玉" userId="1f3450e5-81b9-4f7a-82d7-841c32c029e0" providerId="ADAL" clId="{670531AC-1667-4F97-B1A6-5D38F8A44A79}" dt="2026-07-23T09:32:33.493" v="2405" actId="478"/>
+          <ac:cxnSpMkLst>
+            <pc:docMk/>
+            <pc:sldMk cId="320822935" sldId="271"/>
+            <ac:cxnSpMk id="146" creationId="{FD47928C-27B1-8612-A3A3-3DF7F25C429F}"/>
+          </ac:cxnSpMkLst>
+        </pc:cxnChg>
+        <pc:cxnChg chg="add del mod">
+          <ac:chgData name="全 香玉" userId="1f3450e5-81b9-4f7a-82d7-841c32c029e0" providerId="ADAL" clId="{670531AC-1667-4F97-B1A6-5D38F8A44A79}" dt="2026-07-23T09:32:27.206" v="2402" actId="478"/>
+          <ac:cxnSpMkLst>
+            <pc:docMk/>
+            <pc:sldMk cId="320822935" sldId="271"/>
+            <ac:cxnSpMk id="148" creationId="{819E9A56-F731-ABF1-19F4-12F7E09CA628}"/>
+          </ac:cxnSpMkLst>
+        </pc:cxnChg>
+        <pc:cxnChg chg="del">
+          <ac:chgData name="全 香玉" userId="1f3450e5-81b9-4f7a-82d7-841c32c029e0" providerId="ADAL" clId="{670531AC-1667-4F97-B1A6-5D38F8A44A79}" dt="2026-07-23T01:59:27.480" v="1137" actId="478"/>
+          <ac:cxnSpMkLst>
+            <pc:docMk/>
+            <pc:sldMk cId="320822935" sldId="271"/>
+            <ac:cxnSpMk id="153" creationId="{9C92DD70-9CA5-45C1-9F5E-239DC35EA5DE}"/>
+          </ac:cxnSpMkLst>
+        </pc:cxnChg>
+        <pc:cxnChg chg="add del mod">
+          <ac:chgData name="全 香玉" userId="1f3450e5-81b9-4f7a-82d7-841c32c029e0" providerId="ADAL" clId="{670531AC-1667-4F97-B1A6-5D38F8A44A79}" dt="2026-07-23T09:32:32.188" v="2404" actId="478"/>
+          <ac:cxnSpMkLst>
+            <pc:docMk/>
+            <pc:sldMk cId="320822935" sldId="271"/>
+            <ac:cxnSpMk id="154" creationId="{951DB6E8-98F0-CBFE-DA46-B8444A0D0701}"/>
+          </ac:cxnSpMkLst>
+        </pc:cxnChg>
+        <pc:cxnChg chg="add del mod">
+          <ac:chgData name="全 香玉" userId="1f3450e5-81b9-4f7a-82d7-841c32c029e0" providerId="ADAL" clId="{670531AC-1667-4F97-B1A6-5D38F8A44A79}" dt="2026-07-23T09:00:07.205" v="2365" actId="478"/>
+          <ac:cxnSpMkLst>
+            <pc:docMk/>
+            <pc:sldMk cId="320822935" sldId="271"/>
+            <ac:cxnSpMk id="157" creationId="{EA6F8B3E-060F-59D7-1A9D-50EDAFA3EAEF}"/>
+          </ac:cxnSpMkLst>
+        </pc:cxnChg>
+        <pc:cxnChg chg="del">
+          <ac:chgData name="全 香玉" userId="1f3450e5-81b9-4f7a-82d7-841c32c029e0" providerId="ADAL" clId="{670531AC-1667-4F97-B1A6-5D38F8A44A79}" dt="2026-07-23T01:59:26.058" v="1136" actId="478"/>
+          <ac:cxnSpMkLst>
+            <pc:docMk/>
+            <pc:sldMk cId="320822935" sldId="271"/>
+            <ac:cxnSpMk id="158" creationId="{43FFACA5-1E80-21CC-0BF1-E2812692B3AB}"/>
+          </ac:cxnSpMkLst>
+        </pc:cxnChg>
+        <pc:cxnChg chg="del mod">
+          <ac:chgData name="全 香玉" userId="1f3450e5-81b9-4f7a-82d7-841c32c029e0" providerId="ADAL" clId="{670531AC-1667-4F97-B1A6-5D38F8A44A79}" dt="2026-07-23T01:59:24.027" v="1135" actId="478"/>
+          <ac:cxnSpMkLst>
+            <pc:docMk/>
+            <pc:sldMk cId="320822935" sldId="271"/>
+            <ac:cxnSpMk id="159" creationId="{40E63A3C-2CCF-9E1B-206F-EEA09D4F499A}"/>
+          </ac:cxnSpMkLst>
+        </pc:cxnChg>
+        <pc:cxnChg chg="mod">
+          <ac:chgData name="全 香玉" userId="1f3450e5-81b9-4f7a-82d7-841c32c029e0" providerId="ADAL" clId="{670531AC-1667-4F97-B1A6-5D38F8A44A79}" dt="2026-07-23T02:24:55.826" v="2074" actId="14100"/>
+          <ac:cxnSpMkLst>
+            <pc:docMk/>
+            <pc:sldMk cId="320822935" sldId="271"/>
+            <ac:cxnSpMk id="160" creationId="{875859F5-07DC-22F0-BAEA-DDF1F9C71522}"/>
+          </ac:cxnSpMkLst>
+        </pc:cxnChg>
+        <pc:cxnChg chg="add del mod">
+          <ac:chgData name="全 香玉" userId="1f3450e5-81b9-4f7a-82d7-841c32c029e0" providerId="ADAL" clId="{670531AC-1667-4F97-B1A6-5D38F8A44A79}" dt="2026-07-23T09:32:30.949" v="2403" actId="478"/>
+          <ac:cxnSpMkLst>
+            <pc:docMk/>
+            <pc:sldMk cId="320822935" sldId="271"/>
+            <ac:cxnSpMk id="162" creationId="{9E3194D0-E3A7-E947-B8B6-A882A5BEF505}"/>
+          </ac:cxnSpMkLst>
+        </pc:cxnChg>
+        <pc:cxnChg chg="mod">
+          <ac:chgData name="全 香玉" userId="1f3450e5-81b9-4f7a-82d7-841c32c029e0" providerId="ADAL" clId="{670531AC-1667-4F97-B1A6-5D38F8A44A79}" dt="2026-07-23T02:10:58.347" v="1670" actId="1036"/>
+          <ac:cxnSpMkLst>
+            <pc:docMk/>
+            <pc:sldMk cId="320822935" sldId="271"/>
+            <ac:cxnSpMk id="163" creationId="{FD737309-5506-701E-4240-BC1D9CAB0CE3}"/>
+          </ac:cxnSpMkLst>
+        </pc:cxnChg>
+        <pc:cxnChg chg="add mod">
+          <ac:chgData name="全 香玉" userId="1f3450e5-81b9-4f7a-82d7-841c32c029e0" providerId="ADAL" clId="{670531AC-1667-4F97-B1A6-5D38F8A44A79}" dt="2026-07-23T10:46:50.570" v="2781" actId="164"/>
+          <ac:cxnSpMkLst>
+            <pc:docMk/>
+            <pc:sldMk cId="320822935" sldId="271"/>
+            <ac:cxnSpMk id="164" creationId="{25CAEF57-C271-9C79-7E48-CF3EBDE77D1E}"/>
+          </ac:cxnSpMkLst>
+        </pc:cxnChg>
+        <pc:cxnChg chg="del">
+          <ac:chgData name="全 香玉" userId="1f3450e5-81b9-4f7a-82d7-841c32c029e0" providerId="ADAL" clId="{670531AC-1667-4F97-B1A6-5D38F8A44A79}" dt="2026-07-23T02:00:58.669" v="1189" actId="478"/>
+          <ac:cxnSpMkLst>
+            <pc:docMk/>
+            <pc:sldMk cId="320822935" sldId="271"/>
+            <ac:cxnSpMk id="165" creationId="{34A2464D-2AD2-8FCC-DD4F-D9C8E6042047}"/>
+          </ac:cxnSpMkLst>
+        </pc:cxnChg>
+        <pc:cxnChg chg="add mod ord">
+          <ac:chgData name="全 香玉" userId="1f3450e5-81b9-4f7a-82d7-841c32c029e0" providerId="ADAL" clId="{670531AC-1667-4F97-B1A6-5D38F8A44A79}" dt="2026-07-23T10:10:18.362" v="2553" actId="208"/>
+          <ac:cxnSpMkLst>
+            <pc:docMk/>
+            <pc:sldMk cId="320822935" sldId="271"/>
+            <ac:cxnSpMk id="166" creationId="{004C5E66-F4D2-3765-6F44-66C141D4046C}"/>
+          </ac:cxnSpMkLst>
+        </pc:cxnChg>
+        <pc:cxnChg chg="del">
+          <ac:chgData name="全 香玉" userId="1f3450e5-81b9-4f7a-82d7-841c32c029e0" providerId="ADAL" clId="{670531AC-1667-4F97-B1A6-5D38F8A44A79}" dt="2026-07-23T02:00:58.669" v="1189" actId="478"/>
+          <ac:cxnSpMkLst>
+            <pc:docMk/>
+            <pc:sldMk cId="320822935" sldId="271"/>
+            <ac:cxnSpMk id="168" creationId="{9499294F-03AC-9884-2FB5-4B17B57F356A}"/>
+          </ac:cxnSpMkLst>
+        </pc:cxnChg>
+        <pc:cxnChg chg="del">
+          <ac:chgData name="全 香玉" userId="1f3450e5-81b9-4f7a-82d7-841c32c029e0" providerId="ADAL" clId="{670531AC-1667-4F97-B1A6-5D38F8A44A79}" dt="2026-07-23T02:00:58.669" v="1189" actId="478"/>
+          <ac:cxnSpMkLst>
+            <pc:docMk/>
+            <pc:sldMk cId="320822935" sldId="271"/>
+            <ac:cxnSpMk id="169" creationId="{330A9D0D-3042-4742-85E8-69FB1DBF4DA4}"/>
+          </ac:cxnSpMkLst>
+        </pc:cxnChg>
+        <pc:cxnChg chg="del">
+          <ac:chgData name="全 香玉" userId="1f3450e5-81b9-4f7a-82d7-841c32c029e0" providerId="ADAL" clId="{670531AC-1667-4F97-B1A6-5D38F8A44A79}" dt="2026-07-23T02:00:58.669" v="1189" actId="478"/>
+          <ac:cxnSpMkLst>
+            <pc:docMk/>
+            <pc:sldMk cId="320822935" sldId="271"/>
+            <ac:cxnSpMk id="170" creationId="{BE361835-1293-07D1-DB72-CD0FAD6EFD57}"/>
+          </ac:cxnSpMkLst>
+        </pc:cxnChg>
+        <pc:cxnChg chg="mod">
+          <ac:chgData name="全 香玉" userId="1f3450e5-81b9-4f7a-82d7-841c32c029e0" providerId="ADAL" clId="{670531AC-1667-4F97-B1A6-5D38F8A44A79}" dt="2026-07-23T02:02:24.758" v="1281" actId="1076"/>
+          <ac:cxnSpMkLst>
+            <pc:docMk/>
+            <pc:sldMk cId="320822935" sldId="271"/>
+            <ac:cxnSpMk id="173" creationId="{17626213-B6BE-4EBB-34E4-2244CACCEED0}"/>
+          </ac:cxnSpMkLst>
+        </pc:cxnChg>
+        <pc:cxnChg chg="del">
+          <ac:chgData name="全 香玉" userId="1f3450e5-81b9-4f7a-82d7-841c32c029e0" providerId="ADAL" clId="{670531AC-1667-4F97-B1A6-5D38F8A44A79}" dt="2026-07-23T02:00:58.669" v="1189" actId="478"/>
+          <ac:cxnSpMkLst>
+            <pc:docMk/>
+            <pc:sldMk cId="320822935" sldId="271"/>
+            <ac:cxnSpMk id="174" creationId="{023B8548-C31C-F75A-833F-1F1337BB6F93}"/>
+          </ac:cxnSpMkLst>
+        </pc:cxnChg>
+        <pc:cxnChg chg="del">
+          <ac:chgData name="全 香玉" userId="1f3450e5-81b9-4f7a-82d7-841c32c029e0" providerId="ADAL" clId="{670531AC-1667-4F97-B1A6-5D38F8A44A79}" dt="2026-07-23T02:00:58.669" v="1189" actId="478"/>
+          <ac:cxnSpMkLst>
+            <pc:docMk/>
+            <pc:sldMk cId="320822935" sldId="271"/>
+            <ac:cxnSpMk id="175" creationId="{71FF5CAF-0EA7-1028-63F0-5A58101360D9}"/>
+          </ac:cxnSpMkLst>
+        </pc:cxnChg>
+        <pc:cxnChg chg="del">
+          <ac:chgData name="全 香玉" userId="1f3450e5-81b9-4f7a-82d7-841c32c029e0" providerId="ADAL" clId="{670531AC-1667-4F97-B1A6-5D38F8A44A79}" dt="2026-07-23T02:00:58.669" v="1189" actId="478"/>
+          <ac:cxnSpMkLst>
+            <pc:docMk/>
+            <pc:sldMk cId="320822935" sldId="271"/>
+            <ac:cxnSpMk id="176" creationId="{EF61DF78-0C96-C432-2F45-B7DD221E3A2E}"/>
+          </ac:cxnSpMkLst>
+        </pc:cxnChg>
+        <pc:cxnChg chg="add mod">
+          <ac:chgData name="全 香玉" userId="1f3450e5-81b9-4f7a-82d7-841c32c029e0" providerId="ADAL" clId="{670531AC-1667-4F97-B1A6-5D38F8A44A79}" dt="2026-07-23T10:52:05.204" v="2815" actId="478"/>
+          <ac:cxnSpMkLst>
+            <pc:docMk/>
+            <pc:sldMk cId="320822935" sldId="271"/>
+            <ac:cxnSpMk id="185" creationId="{7BFF2DB0-2389-03AF-8790-D3724A3EE597}"/>
+          </ac:cxnSpMkLst>
+        </pc:cxnChg>
+        <pc:cxnChg chg="add mod">
+          <ac:chgData name="全 香玉" userId="1f3450e5-81b9-4f7a-82d7-841c32c029e0" providerId="ADAL" clId="{670531AC-1667-4F97-B1A6-5D38F8A44A79}" dt="2026-07-23T10:00:34.096" v="2523" actId="14100"/>
+          <ac:cxnSpMkLst>
+            <pc:docMk/>
+            <pc:sldMk cId="320822935" sldId="271"/>
+            <ac:cxnSpMk id="197" creationId="{7D87D7C4-658C-53CC-74C0-2BAEF419EBE3}"/>
+          </ac:cxnSpMkLst>
+        </pc:cxnChg>
+        <pc:cxnChg chg="add mod">
+          <ac:chgData name="全 香玉" userId="1f3450e5-81b9-4f7a-82d7-841c32c029e0" providerId="ADAL" clId="{670531AC-1667-4F97-B1A6-5D38F8A44A79}" dt="2026-07-23T10:46:50.570" v="2781" actId="164"/>
+          <ac:cxnSpMkLst>
+            <pc:docMk/>
+            <pc:sldMk cId="320822935" sldId="271"/>
+            <ac:cxnSpMk id="205" creationId="{DB172EC3-5292-4629-ECAE-0F59157851D4}"/>
+          </ac:cxnSpMkLst>
+        </pc:cxnChg>
+        <pc:cxnChg chg="mod">
+          <ac:chgData name="全 香玉" userId="1f3450e5-81b9-4f7a-82d7-841c32c029e0" providerId="ADAL" clId="{670531AC-1667-4F97-B1A6-5D38F8A44A79}" dt="2026-07-23T02:27:22.822" v="2097" actId="14100"/>
+          <ac:cxnSpMkLst>
+            <pc:docMk/>
+            <pc:sldMk cId="320822935" sldId="271"/>
+            <ac:cxnSpMk id="208" creationId="{6B74278D-C87D-8862-29F7-368C42A6F1E5}"/>
+          </ac:cxnSpMkLst>
+        </pc:cxnChg>
+        <pc:cxnChg chg="add del mod">
+          <ac:chgData name="全 香玉" userId="1f3450e5-81b9-4f7a-82d7-841c32c029e0" providerId="ADAL" clId="{670531AC-1667-4F97-B1A6-5D38F8A44A79}" dt="2026-07-23T09:40:24.966" v="2454" actId="478"/>
+          <ac:cxnSpMkLst>
+            <pc:docMk/>
+            <pc:sldMk cId="320822935" sldId="271"/>
+            <ac:cxnSpMk id="209" creationId="{7857D8B4-8831-36F0-F150-C1BE6756A855}"/>
+          </ac:cxnSpMkLst>
+        </pc:cxnChg>
+        <pc:cxnChg chg="add del mod">
+          <ac:chgData name="全 香玉" userId="1f3450e5-81b9-4f7a-82d7-841c32c029e0" providerId="ADAL" clId="{670531AC-1667-4F97-B1A6-5D38F8A44A79}" dt="2026-07-23T09:40:35.958" v="2457" actId="478"/>
+          <ac:cxnSpMkLst>
+            <pc:docMk/>
+            <pc:sldMk cId="320822935" sldId="271"/>
+            <ac:cxnSpMk id="211" creationId="{FBBDD0D9-9775-4832-DF6E-2896B87E2779}"/>
+          </ac:cxnSpMkLst>
+        </pc:cxnChg>
+        <pc:cxnChg chg="add mod">
+          <ac:chgData name="全 香玉" userId="1f3450e5-81b9-4f7a-82d7-841c32c029e0" providerId="ADAL" clId="{670531AC-1667-4F97-B1A6-5D38F8A44A79}" dt="2026-07-23T10:46:50.570" v="2781" actId="164"/>
+          <ac:cxnSpMkLst>
+            <pc:docMk/>
+            <pc:sldMk cId="320822935" sldId="271"/>
+            <ac:cxnSpMk id="215" creationId="{3F0DEE14-9B17-D157-D366-E1C27C1DC482}"/>
+          </ac:cxnSpMkLst>
+        </pc:cxnChg>
+        <pc:cxnChg chg="add mod">
+          <ac:chgData name="全 香玉" userId="1f3450e5-81b9-4f7a-82d7-841c32c029e0" providerId="ADAL" clId="{670531AC-1667-4F97-B1A6-5D38F8A44A79}" dt="2026-07-23T10:10:18.362" v="2553" actId="208"/>
+          <ac:cxnSpMkLst>
+            <pc:docMk/>
+            <pc:sldMk cId="320822935" sldId="271"/>
+            <ac:cxnSpMk id="218" creationId="{F1B4D3CC-73A0-8F1F-0131-914F8B641E98}"/>
+          </ac:cxnSpMkLst>
+        </pc:cxnChg>
+        <pc:cxnChg chg="add mod">
+          <ac:chgData name="全 香玉" userId="1f3450e5-81b9-4f7a-82d7-841c32c029e0" providerId="ADAL" clId="{670531AC-1667-4F97-B1A6-5D38F8A44A79}" dt="2026-07-23T10:10:18.362" v="2553" actId="208"/>
+          <ac:cxnSpMkLst>
+            <pc:docMk/>
+            <pc:sldMk cId="320822935" sldId="271"/>
+            <ac:cxnSpMk id="219" creationId="{6B31631A-0F07-FFD3-DA27-78CDC3C6834B}"/>
+          </ac:cxnSpMkLst>
+        </pc:cxnChg>
+        <pc:cxnChg chg="add mod">
+          <ac:chgData name="全 香玉" userId="1f3450e5-81b9-4f7a-82d7-841c32c029e0" providerId="ADAL" clId="{670531AC-1667-4F97-B1A6-5D38F8A44A79}" dt="2026-07-23T10:11:05.893" v="2559" actId="1076"/>
+          <ac:cxnSpMkLst>
+            <pc:docMk/>
+            <pc:sldMk cId="320822935" sldId="271"/>
+            <ac:cxnSpMk id="221" creationId="{105EB2EC-A13D-7617-536A-E4BAEEA14F2F}"/>
+          </ac:cxnSpMkLst>
+        </pc:cxnChg>
+        <pc:cxnChg chg="add del mod">
+          <ac:chgData name="全 香玉" userId="1f3450e5-81b9-4f7a-82d7-841c32c029e0" providerId="ADAL" clId="{670531AC-1667-4F97-B1A6-5D38F8A44A79}" dt="2026-07-23T09:58:02.497" v="2511" actId="478"/>
+          <ac:cxnSpMkLst>
+            <pc:docMk/>
+            <pc:sldMk cId="320822935" sldId="271"/>
+            <ac:cxnSpMk id="224" creationId="{AB8EEDBE-110B-D203-6E91-6FE4BC983D01}"/>
+          </ac:cxnSpMkLst>
+        </pc:cxnChg>
+        <pc:cxnChg chg="add mod">
+          <ac:chgData name="全 香玉" userId="1f3450e5-81b9-4f7a-82d7-841c32c029e0" providerId="ADAL" clId="{670531AC-1667-4F97-B1A6-5D38F8A44A79}" dt="2026-07-23T10:52:05.204" v="2815" actId="478"/>
+          <ac:cxnSpMkLst>
+            <pc:docMk/>
+            <pc:sldMk cId="320822935" sldId="271"/>
+            <ac:cxnSpMk id="231" creationId="{20236023-DCE5-CA6A-B03F-99043A274337}"/>
+          </ac:cxnSpMkLst>
+        </pc:cxnChg>
+        <pc:cxnChg chg="add del mod">
+          <ac:chgData name="全 香玉" userId="1f3450e5-81b9-4f7a-82d7-841c32c029e0" providerId="ADAL" clId="{670531AC-1667-4F97-B1A6-5D38F8A44A79}" dt="2026-07-23T10:06:58.155" v="2542" actId="11529"/>
+          <ac:cxnSpMkLst>
+            <pc:docMk/>
+            <pc:sldMk cId="320822935" sldId="271"/>
+            <ac:cxnSpMk id="235" creationId="{1154FAD0-9CF4-C2AC-0ED6-42CFC8EF609F}"/>
+          </ac:cxnSpMkLst>
+        </pc:cxnChg>
+        <pc:cxnChg chg="add mod">
+          <ac:chgData name="全 香玉" userId="1f3450e5-81b9-4f7a-82d7-841c32c029e0" providerId="ADAL" clId="{670531AC-1667-4F97-B1A6-5D38F8A44A79}" dt="2026-07-23T10:11:13.820" v="2563" actId="1076"/>
+          <ac:cxnSpMkLst>
+            <pc:docMk/>
+            <pc:sldMk cId="320822935" sldId="271"/>
+            <ac:cxnSpMk id="241" creationId="{AFA5CF65-990C-2E54-7C2F-B57FBF9F2A53}"/>
+          </ac:cxnSpMkLst>
+        </pc:cxnChg>
+        <pc:cxnChg chg="add mod">
+          <ac:chgData name="全 香玉" userId="1f3450e5-81b9-4f7a-82d7-841c32c029e0" providerId="ADAL" clId="{670531AC-1667-4F97-B1A6-5D38F8A44A79}" dt="2026-07-23T10:46:50.570" v="2781" actId="164"/>
+          <ac:cxnSpMkLst>
+            <pc:docMk/>
+            <pc:sldMk cId="320822935" sldId="271"/>
+            <ac:cxnSpMk id="242" creationId="{CB088162-0339-CBA8-0522-22CCA640CBBF}"/>
+          </ac:cxnSpMkLst>
+        </pc:cxnChg>
+        <pc:cxnChg chg="add del mod">
+          <ac:chgData name="全 香玉" userId="1f3450e5-81b9-4f7a-82d7-841c32c029e0" providerId="ADAL" clId="{670531AC-1667-4F97-B1A6-5D38F8A44A79}" dt="2026-07-23T10:21:26.889" v="2585" actId="478"/>
+          <ac:cxnSpMkLst>
+            <pc:docMk/>
+            <pc:sldMk cId="320822935" sldId="271"/>
+            <ac:cxnSpMk id="243" creationId="{805DDF42-205F-9055-663B-C1D38DEAB966}"/>
+          </ac:cxnSpMkLst>
+        </pc:cxnChg>
+        <pc:cxnChg chg="add del">
+          <ac:chgData name="全 香玉" userId="1f3450e5-81b9-4f7a-82d7-841c32c029e0" providerId="ADAL" clId="{670531AC-1667-4F97-B1A6-5D38F8A44A79}" dt="2026-07-23T10:17:46.229" v="2571" actId="478"/>
+          <ac:cxnSpMkLst>
+            <pc:docMk/>
+            <pc:sldMk cId="320822935" sldId="271"/>
+            <ac:cxnSpMk id="247" creationId="{BD4A2DC6-C97D-4CE1-5F46-D6B881A413A1}"/>
+          </ac:cxnSpMkLst>
+        </pc:cxnChg>
+        <pc:cxnChg chg="add del mod">
+          <ac:chgData name="全 香玉" userId="1f3450e5-81b9-4f7a-82d7-841c32c029e0" providerId="ADAL" clId="{670531AC-1667-4F97-B1A6-5D38F8A44A79}" dt="2026-07-23T10:21:32.332" v="2587" actId="478"/>
+          <ac:cxnSpMkLst>
+            <pc:docMk/>
+            <pc:sldMk cId="320822935" sldId="271"/>
+            <ac:cxnSpMk id="248" creationId="{196F661A-AC4E-79A0-E7C1-09275430531B}"/>
+          </ac:cxnSpMkLst>
+        </pc:cxnChg>
+        <pc:cxnChg chg="add del mod">
+          <ac:chgData name="全 香玉" userId="1f3450e5-81b9-4f7a-82d7-841c32c029e0" providerId="ADAL" clId="{670531AC-1667-4F97-B1A6-5D38F8A44A79}" dt="2026-07-23T10:21:29.660" v="2586" actId="478"/>
+          <ac:cxnSpMkLst>
+            <pc:docMk/>
+            <pc:sldMk cId="320822935" sldId="271"/>
+            <ac:cxnSpMk id="250" creationId="{4D3C5614-8BA6-2950-3594-5A6F3C5E6342}"/>
+          </ac:cxnSpMkLst>
+        </pc:cxnChg>
+        <pc:cxnChg chg="add del mod">
+          <ac:chgData name="全 香玉" userId="1f3450e5-81b9-4f7a-82d7-841c32c029e0" providerId="ADAL" clId="{670531AC-1667-4F97-B1A6-5D38F8A44A79}" dt="2026-07-23T10:19:32.935" v="2583" actId="478"/>
+          <ac:cxnSpMkLst>
+            <pc:docMk/>
+            <pc:sldMk cId="320822935" sldId="271"/>
+            <ac:cxnSpMk id="252" creationId="{2C034CD1-91A2-9E0E-BEB8-231013CA93C7}"/>
+          </ac:cxnSpMkLst>
+        </pc:cxnChg>
+        <pc:cxnChg chg="add del">
+          <ac:chgData name="全 香玉" userId="1f3450e5-81b9-4f7a-82d7-841c32c029e0" providerId="ADAL" clId="{670531AC-1667-4F97-B1A6-5D38F8A44A79}" dt="2026-07-23T10:26:23.587" v="2610" actId="478"/>
+          <ac:cxnSpMkLst>
+            <pc:docMk/>
+            <pc:sldMk cId="320822935" sldId="271"/>
+            <ac:cxnSpMk id="257" creationId="{E31BE453-0124-561A-4873-0C8E12F550F4}"/>
+          </ac:cxnSpMkLst>
+        </pc:cxnChg>
+        <pc:cxnChg chg="add del mod">
+          <ac:chgData name="全 香玉" userId="1f3450e5-81b9-4f7a-82d7-841c32c029e0" providerId="ADAL" clId="{670531AC-1667-4F97-B1A6-5D38F8A44A79}" dt="2026-07-23T10:26:24.504" v="2611" actId="478"/>
+          <ac:cxnSpMkLst>
+            <pc:docMk/>
+            <pc:sldMk cId="320822935" sldId="271"/>
+            <ac:cxnSpMk id="258" creationId="{2576EF54-8430-6859-779B-6405AFA4D0B6}"/>
+          </ac:cxnSpMkLst>
+        </pc:cxnChg>
+        <pc:cxnChg chg="add del mod">
+          <ac:chgData name="全 香玉" userId="1f3450e5-81b9-4f7a-82d7-841c32c029e0" providerId="ADAL" clId="{670531AC-1667-4F97-B1A6-5D38F8A44A79}" dt="2026-07-23T10:43:13.648" v="2759" actId="1076"/>
+          <ac:cxnSpMkLst>
+            <pc:docMk/>
+            <pc:sldMk cId="320822935" sldId="271"/>
+            <ac:cxnSpMk id="262" creationId="{C244CA01-9C7F-E6A5-05AE-CF9E4D986776}"/>
+          </ac:cxnSpMkLst>
+        </pc:cxnChg>
+        <pc:cxnChg chg="add mod">
+          <ac:chgData name="全 香玉" userId="1f3450e5-81b9-4f7a-82d7-841c32c029e0" providerId="ADAL" clId="{670531AC-1667-4F97-B1A6-5D38F8A44A79}" dt="2026-07-23T10:43:10.260" v="2758" actId="1076"/>
+          <ac:cxnSpMkLst>
+            <pc:docMk/>
+            <pc:sldMk cId="320822935" sldId="271"/>
+            <ac:cxnSpMk id="267" creationId="{4E0BFC17-FF4B-6DA9-8A87-74714C34FD9B}"/>
+          </ac:cxnSpMkLst>
+        </pc:cxnChg>
+        <pc:cxnChg chg="add mod">
+          <ac:chgData name="全 香玉" userId="1f3450e5-81b9-4f7a-82d7-841c32c029e0" providerId="ADAL" clId="{670531AC-1667-4F97-B1A6-5D38F8A44A79}" dt="2026-07-23T10:43:05.828" v="2757" actId="14100"/>
+          <ac:cxnSpMkLst>
+            <pc:docMk/>
+            <pc:sldMk cId="320822935" sldId="271"/>
+            <ac:cxnSpMk id="273" creationId="{124A14AB-C677-0625-0876-6F8E81493924}"/>
+          </ac:cxnSpMkLst>
+        </pc:cxnChg>
+        <pc:cxnChg chg="add del mod">
+          <ac:chgData name="全 香玉" userId="1f3450e5-81b9-4f7a-82d7-841c32c029e0" providerId="ADAL" clId="{670531AC-1667-4F97-B1A6-5D38F8A44A79}" dt="2026-07-23T10:52:10.187" v="2818" actId="478"/>
+          <ac:cxnSpMkLst>
+            <pc:docMk/>
+            <pc:sldMk cId="320822935" sldId="271"/>
+            <ac:cxnSpMk id="276" creationId="{5A363A23-732C-48FB-5F27-5EDA1C3F2464}"/>
+          </ac:cxnSpMkLst>
+        </pc:cxnChg>
+      </pc:sldChg>
+      <pc:sldChg chg="addSp modSp add mod">
+        <pc:chgData name="全 香玉" userId="1f3450e5-81b9-4f7a-82d7-841c32c029e0" providerId="ADAL" clId="{670531AC-1667-4F97-B1A6-5D38F8A44A79}" dt="2026-07-23T02:36:21.628" v="2328"/>
+        <pc:sldMkLst>
+          <pc:docMk/>
+          <pc:sldMk cId="3765132764" sldId="272"/>
+        </pc:sldMkLst>
+        <pc:spChg chg="add mod">
+          <ac:chgData name="全 香玉" userId="1f3450e5-81b9-4f7a-82d7-841c32c029e0" providerId="ADAL" clId="{670531AC-1667-4F97-B1A6-5D38F8A44A79}" dt="2026-07-23T02:36:21.628" v="2328"/>
+          <ac:spMkLst>
+            <pc:docMk/>
+            <pc:sldMk cId="3765132764" sldId="272"/>
+            <ac:spMk id="3" creationId="{60F48FD9-03D9-85AB-75A4-844BE93043CC}"/>
+          </ac:spMkLst>
+        </pc:spChg>
+        <pc:cxnChg chg="mod">
+          <ac:chgData name="全 香玉" userId="1f3450e5-81b9-4f7a-82d7-841c32c029e0" providerId="ADAL" clId="{670531AC-1667-4F97-B1A6-5D38F8A44A79}" dt="2026-07-23T02:27:37.988" v="2098" actId="14100"/>
+          <ac:cxnSpMkLst>
+            <pc:docMk/>
+            <pc:sldMk cId="3765132764" sldId="272"/>
+            <ac:cxnSpMk id="208" creationId="{BCB8AD9C-EC91-B69E-699F-E113CD1D22CA}"/>
+          </ac:cxnSpMkLst>
+        </pc:cxnChg>
+      </pc:sldChg>
+      <pc:sldChg chg="addSp delSp modSp add mod">
+        <pc:chgData name="全 香玉" userId="1f3450e5-81b9-4f7a-82d7-841c32c029e0" providerId="ADAL" clId="{670531AC-1667-4F97-B1A6-5D38F8A44A79}" dt="2026-07-23T10:51:14.781" v="2813" actId="167"/>
+        <pc:sldMkLst>
+          <pc:docMk/>
+          <pc:sldMk cId="1669152728" sldId="273"/>
+        </pc:sldMkLst>
+        <pc:spChg chg="del mod">
+          <ac:chgData name="全 香玉" userId="1f3450e5-81b9-4f7a-82d7-841c32c029e0" providerId="ADAL" clId="{670531AC-1667-4F97-B1A6-5D38F8A44A79}" dt="2026-07-23T10:49:01.605" v="2798" actId="478"/>
+          <ac:spMkLst>
+            <pc:docMk/>
+            <pc:sldMk cId="1669152728" sldId="273"/>
+            <ac:spMk id="260" creationId="{23190031-BA3D-A9F5-7152-99078F2BE0D3}"/>
+          </ac:spMkLst>
+        </pc:spChg>
+        <pc:spChg chg="mod">
+          <ac:chgData name="全 香玉" userId="1f3450e5-81b9-4f7a-82d7-841c32c029e0" providerId="ADAL" clId="{670531AC-1667-4F97-B1A6-5D38F8A44A79}" dt="2026-07-23T10:50:35.350" v="2808" actId="1076"/>
+          <ac:spMkLst>
+            <pc:docMk/>
+            <pc:sldMk cId="1669152728" sldId="273"/>
+            <ac:spMk id="278" creationId="{8D9FA2DC-0E53-E479-45CD-338719FAA1E2}"/>
+          </ac:spMkLst>
+        </pc:spChg>
+        <pc:spChg chg="mod">
+          <ac:chgData name="全 香玉" userId="1f3450e5-81b9-4f7a-82d7-841c32c029e0" providerId="ADAL" clId="{670531AC-1667-4F97-B1A6-5D38F8A44A79}" dt="2026-07-23T10:50:35.350" v="2808" actId="1076"/>
+          <ac:spMkLst>
+            <pc:docMk/>
+            <pc:sldMk cId="1669152728" sldId="273"/>
+            <ac:spMk id="279" creationId="{B018BA33-4E8F-2B27-A7A4-DC5F0B4EB6B2}"/>
+          </ac:spMkLst>
+        </pc:spChg>
+        <pc:spChg chg="mod">
+          <ac:chgData name="全 香玉" userId="1f3450e5-81b9-4f7a-82d7-841c32c029e0" providerId="ADAL" clId="{670531AC-1667-4F97-B1A6-5D38F8A44A79}" dt="2026-07-23T10:50:35.350" v="2808" actId="1076"/>
+          <ac:spMkLst>
+            <pc:docMk/>
+            <pc:sldMk cId="1669152728" sldId="273"/>
+            <ac:spMk id="283" creationId="{5CBEC4DF-8416-53BE-62FA-AB584CA2FDC3}"/>
+          </ac:spMkLst>
+        </pc:spChg>
+        <pc:spChg chg="mod">
+          <ac:chgData name="全 香玉" userId="1f3450e5-81b9-4f7a-82d7-841c32c029e0" providerId="ADAL" clId="{670531AC-1667-4F97-B1A6-5D38F8A44A79}" dt="2026-07-23T10:50:35.350" v="2808" actId="1076"/>
+          <ac:spMkLst>
+            <pc:docMk/>
+            <pc:sldMk cId="1669152728" sldId="273"/>
+            <ac:spMk id="284" creationId="{EEDDE005-8C39-0DF2-9F3E-0912B2A0A016}"/>
+          </ac:spMkLst>
+        </pc:spChg>
+        <pc:spChg chg="mod">
+          <ac:chgData name="全 香玉" userId="1f3450e5-81b9-4f7a-82d7-841c32c029e0" providerId="ADAL" clId="{670531AC-1667-4F97-B1A6-5D38F8A44A79}" dt="2026-07-23T10:51:11.552" v="2812" actId="165"/>
+          <ac:spMkLst>
+            <pc:docMk/>
+            <pc:sldMk cId="1669152728" sldId="273"/>
+            <ac:spMk id="287" creationId="{C920431D-B32D-9B75-6171-7D166C2F7CD5}"/>
+          </ac:spMkLst>
+        </pc:spChg>
+        <pc:spChg chg="mod ord topLvl">
+          <ac:chgData name="全 香玉" userId="1f3450e5-81b9-4f7a-82d7-841c32c029e0" providerId="ADAL" clId="{670531AC-1667-4F97-B1A6-5D38F8A44A79}" dt="2026-07-23T10:51:14.781" v="2813" actId="167"/>
+          <ac:spMkLst>
+            <pc:docMk/>
+            <pc:sldMk cId="1669152728" sldId="273"/>
+            <ac:spMk id="291" creationId="{4032F71E-450D-7E1F-90C2-0635FB33D38F}"/>
+          </ac:spMkLst>
+        </pc:spChg>
+        <pc:grpChg chg="add del mod">
+          <ac:chgData name="全 香玉" userId="1f3450e5-81b9-4f7a-82d7-841c32c029e0" providerId="ADAL" clId="{670531AC-1667-4F97-B1A6-5D38F8A44A79}" dt="2026-07-23T10:49:22.313" v="2801" actId="165"/>
+          <ac:grpSpMkLst>
+            <pc:docMk/>
+            <pc:sldMk cId="1669152728" sldId="273"/>
+            <ac:grpSpMk id="2" creationId="{4008402C-532C-C434-B6FD-F109BDB99C8C}"/>
+          </ac:grpSpMkLst>
+        </pc:grpChg>
+        <pc:grpChg chg="add del mod">
+          <ac:chgData name="全 香玉" userId="1f3450e5-81b9-4f7a-82d7-841c32c029e0" providerId="ADAL" clId="{670531AC-1667-4F97-B1A6-5D38F8A44A79}" dt="2026-07-23T10:51:11.552" v="2812" actId="165"/>
+          <ac:grpSpMkLst>
+            <pc:docMk/>
+            <pc:sldMk cId="1669152728" sldId="273"/>
+            <ac:grpSpMk id="3" creationId="{A03EEE1C-2A4B-58FA-D46B-770FC66B5A75}"/>
+          </ac:grpSpMkLst>
+        </pc:grpChg>
+        <pc:grpChg chg="del">
+          <ac:chgData name="全 香玉" userId="1f3450e5-81b9-4f7a-82d7-841c32c029e0" providerId="ADAL" clId="{670531AC-1667-4F97-B1A6-5D38F8A44A79}" dt="2026-07-23T10:48:26.037" v="2790" actId="478"/>
+          <ac:grpSpMkLst>
+            <pc:docMk/>
+            <pc:sldMk cId="1669152728" sldId="273"/>
+            <ac:grpSpMk id="171" creationId="{0F75828E-79BC-C379-1376-38C2236C7574}"/>
+          </ac:grpSpMkLst>
+        </pc:grpChg>
+        <pc:grpChg chg="mod">
+          <ac:chgData name="全 香玉" userId="1f3450e5-81b9-4f7a-82d7-841c32c029e0" providerId="ADAL" clId="{670531AC-1667-4F97-B1A6-5D38F8A44A79}" dt="2026-07-23T10:51:11.552" v="2812" actId="165"/>
+          <ac:grpSpMkLst>
+            <pc:docMk/>
+            <pc:sldMk cId="1669152728" sldId="273"/>
+            <ac:grpSpMk id="285" creationId="{91EC8264-C0A6-E592-A000-854BC2F983D4}"/>
+          </ac:grpSpMkLst>
+        </pc:grpChg>
+        <pc:grpChg chg="mod topLvl">
+          <ac:chgData name="全 香玉" userId="1f3450e5-81b9-4f7a-82d7-841c32c029e0" providerId="ADAL" clId="{670531AC-1667-4F97-B1A6-5D38F8A44A79}" dt="2026-07-23T10:51:11.552" v="2812" actId="165"/>
+          <ac:grpSpMkLst>
+            <pc:docMk/>
+            <pc:sldMk cId="1669152728" sldId="273"/>
+            <ac:grpSpMk id="288" creationId="{30BE6C6D-F483-1CBB-45F0-9DCB9570A1C0}"/>
+          </ac:grpSpMkLst>
+        </pc:grpChg>
+        <pc:grpChg chg="mod">
+          <ac:chgData name="全 香玉" userId="1f3450e5-81b9-4f7a-82d7-841c32c029e0" providerId="ADAL" clId="{670531AC-1667-4F97-B1A6-5D38F8A44A79}" dt="2026-07-23T10:48:50.148" v="2796" actId="1076"/>
+          <ac:grpSpMkLst>
+            <pc:docMk/>
+            <pc:sldMk cId="1669152728" sldId="273"/>
+            <ac:grpSpMk id="289" creationId="{03A168F5-7312-7202-0397-C4E305F5CCAE}"/>
+          </ac:grpSpMkLst>
+        </pc:grpChg>
+        <pc:cxnChg chg="mod">
+          <ac:chgData name="全 香玉" userId="1f3450e5-81b9-4f7a-82d7-841c32c029e0" providerId="ADAL" clId="{670531AC-1667-4F97-B1A6-5D38F8A44A79}" dt="2026-07-23T10:48:26.037" v="2790" actId="478"/>
+          <ac:cxnSpMkLst>
+            <pc:docMk/>
+            <pc:sldMk cId="1669152728" sldId="273"/>
+            <ac:cxnSpMk id="50" creationId="{485C4F42-9E02-CFE2-4904-B894E4BBCA54}"/>
+          </ac:cxnSpMkLst>
+        </pc:cxnChg>
+        <pc:cxnChg chg="mod">
+          <ac:chgData name="全 香玉" userId="1f3450e5-81b9-4f7a-82d7-841c32c029e0" providerId="ADAL" clId="{670531AC-1667-4F97-B1A6-5D38F8A44A79}" dt="2026-07-23T10:51:11.552" v="2812" actId="165"/>
+          <ac:cxnSpMkLst>
+            <pc:docMk/>
+            <pc:sldMk cId="1669152728" sldId="273"/>
+            <ac:cxnSpMk id="262" creationId="{25A0D2BA-7ADE-0412-0654-A3E9C40279B3}"/>
+          </ac:cxnSpMkLst>
+        </pc:cxnChg>
+        <pc:cxnChg chg="mod">
+          <ac:chgData name="全 香玉" userId="1f3450e5-81b9-4f7a-82d7-841c32c029e0" providerId="ADAL" clId="{670531AC-1667-4F97-B1A6-5D38F8A44A79}" dt="2026-07-23T10:51:11.552" v="2812" actId="165"/>
+          <ac:cxnSpMkLst>
+            <pc:docMk/>
+            <pc:sldMk cId="1669152728" sldId="273"/>
+            <ac:cxnSpMk id="267" creationId="{436164A0-B519-2103-643E-DEB888D4664D}"/>
+          </ac:cxnSpMkLst>
+        </pc:cxnChg>
+        <pc:cxnChg chg="mod">
+          <ac:chgData name="全 香玉" userId="1f3450e5-81b9-4f7a-82d7-841c32c029e0" providerId="ADAL" clId="{670531AC-1667-4F97-B1A6-5D38F8A44A79}" dt="2026-07-23T10:51:11.552" v="2812" actId="165"/>
+          <ac:cxnSpMkLst>
+            <pc:docMk/>
+            <pc:sldMk cId="1669152728" sldId="273"/>
+            <ac:cxnSpMk id="273" creationId="{4EDEC711-BDB5-9BCC-827D-BD5449A7DDBD}"/>
+          </ac:cxnSpMkLst>
+        </pc:cxnChg>
+        <pc:cxnChg chg="mod">
+          <ac:chgData name="全 香玉" userId="1f3450e5-81b9-4f7a-82d7-841c32c029e0" providerId="ADAL" clId="{670531AC-1667-4F97-B1A6-5D38F8A44A79}" dt="2026-07-23T10:50:35.350" v="2808" actId="1076"/>
+          <ac:cxnSpMkLst>
+            <pc:docMk/>
+            <pc:sldMk cId="1669152728" sldId="273"/>
+            <ac:cxnSpMk id="276" creationId="{BA564435-F521-B91F-43D9-65F5C51DAF26}"/>
           </ac:cxnSpMkLst>
         </pc:cxnChg>
       </pc:sldChg>
@@ -397,7 +1547,7 @@
           <a:p>
             <a:fld id="{9236E18D-A30F-4D3C-BC15-86FA9E93A319}" type="datetimeFigureOut">
               <a:rPr kumimoji="1" lang="ja-JP" altLang="en-US" smtClean="0"/>
-              <a:t>2026/7/17</a:t>
+              <a:t>2026/7/23</a:t>
             </a:fld>
             <a:endParaRPr kumimoji="1" lang="ja-JP" altLang="en-US"/>
           </a:p>
@@ -597,7 +1747,7 @@
           <a:p>
             <a:fld id="{9236E18D-A30F-4D3C-BC15-86FA9E93A319}" type="datetimeFigureOut">
               <a:rPr kumimoji="1" lang="ja-JP" altLang="en-US" smtClean="0"/>
-              <a:t>2026/7/17</a:t>
+              <a:t>2026/7/23</a:t>
             </a:fld>
             <a:endParaRPr kumimoji="1" lang="ja-JP" altLang="en-US"/>
           </a:p>
@@ -807,7 +1957,7 @@
           <a:p>
             <a:fld id="{9236E18D-A30F-4D3C-BC15-86FA9E93A319}" type="datetimeFigureOut">
               <a:rPr kumimoji="1" lang="ja-JP" altLang="en-US" smtClean="0"/>
-              <a:t>2026/7/17</a:t>
+              <a:t>2026/7/23</a:t>
             </a:fld>
             <a:endParaRPr kumimoji="1" lang="ja-JP" altLang="en-US"/>
           </a:p>
@@ -1007,7 +2157,7 @@
           <a:p>
             <a:fld id="{9236E18D-A30F-4D3C-BC15-86FA9E93A319}" type="datetimeFigureOut">
               <a:rPr kumimoji="1" lang="ja-JP" altLang="en-US" smtClean="0"/>
-              <a:t>2026/7/17</a:t>
+              <a:t>2026/7/23</a:t>
             </a:fld>
             <a:endParaRPr kumimoji="1" lang="ja-JP" altLang="en-US"/>
           </a:p>
@@ -1283,7 +2433,7 @@
           <a:p>
             <a:fld id="{9236E18D-A30F-4D3C-BC15-86FA9E93A319}" type="datetimeFigureOut">
               <a:rPr kumimoji="1" lang="ja-JP" altLang="en-US" smtClean="0"/>
-              <a:t>2026/7/17</a:t>
+              <a:t>2026/7/23</a:t>
             </a:fld>
             <a:endParaRPr kumimoji="1" lang="ja-JP" altLang="en-US"/>
           </a:p>
@@ -1551,7 +2701,7 @@
           <a:p>
             <a:fld id="{9236E18D-A30F-4D3C-BC15-86FA9E93A319}" type="datetimeFigureOut">
               <a:rPr kumimoji="1" lang="ja-JP" altLang="en-US" smtClean="0"/>
-              <a:t>2026/7/17</a:t>
+              <a:t>2026/7/23</a:t>
             </a:fld>
             <a:endParaRPr kumimoji="1" lang="ja-JP" altLang="en-US"/>
           </a:p>
@@ -1966,7 +3116,7 @@
           <a:p>
             <a:fld id="{9236E18D-A30F-4D3C-BC15-86FA9E93A319}" type="datetimeFigureOut">
               <a:rPr kumimoji="1" lang="ja-JP" altLang="en-US" smtClean="0"/>
-              <a:t>2026/7/17</a:t>
+              <a:t>2026/7/23</a:t>
             </a:fld>
             <a:endParaRPr kumimoji="1" lang="ja-JP" altLang="en-US"/>
           </a:p>
@@ -2108,7 +3258,7 @@
           <a:p>
             <a:fld id="{9236E18D-A30F-4D3C-BC15-86FA9E93A319}" type="datetimeFigureOut">
               <a:rPr kumimoji="1" lang="ja-JP" altLang="en-US" smtClean="0"/>
-              <a:t>2026/7/17</a:t>
+              <a:t>2026/7/23</a:t>
             </a:fld>
             <a:endParaRPr kumimoji="1" lang="ja-JP" altLang="en-US"/>
           </a:p>
@@ -2221,7 +3371,7 @@
           <a:p>
             <a:fld id="{9236E18D-A30F-4D3C-BC15-86FA9E93A319}" type="datetimeFigureOut">
               <a:rPr kumimoji="1" lang="ja-JP" altLang="en-US" smtClean="0"/>
-              <a:t>2026/7/17</a:t>
+              <a:t>2026/7/23</a:t>
             </a:fld>
             <a:endParaRPr kumimoji="1" lang="ja-JP" altLang="en-US"/>
           </a:p>
@@ -2534,7 +3684,7 @@
           <a:p>
             <a:fld id="{9236E18D-A30F-4D3C-BC15-86FA9E93A319}" type="datetimeFigureOut">
               <a:rPr kumimoji="1" lang="ja-JP" altLang="en-US" smtClean="0"/>
-              <a:t>2026/7/17</a:t>
+              <a:t>2026/7/23</a:t>
             </a:fld>
             <a:endParaRPr kumimoji="1" lang="ja-JP" altLang="en-US"/>
           </a:p>
@@ -2823,7 +3973,7 @@
           <a:p>
             <a:fld id="{9236E18D-A30F-4D3C-BC15-86FA9E93A319}" type="datetimeFigureOut">
               <a:rPr kumimoji="1" lang="ja-JP" altLang="en-US" smtClean="0"/>
-              <a:t>2026/7/17</a:t>
+              <a:t>2026/7/23</a:t>
             </a:fld>
             <a:endParaRPr kumimoji="1" lang="ja-JP" altLang="en-US"/>
           </a:p>
@@ -3066,7 +4216,7 @@
           <a:p>
             <a:fld id="{9236E18D-A30F-4D3C-BC15-86FA9E93A319}" type="datetimeFigureOut">
               <a:rPr kumimoji="1" lang="ja-JP" altLang="en-US" smtClean="0"/>
-              <a:t>2026/7/17</a:t>
+              <a:t>2026/7/23</a:t>
             </a:fld>
             <a:endParaRPr kumimoji="1" lang="ja-JP" altLang="en-US"/>
           </a:p>
@@ -6934,6 +8084,7216 @@
     <p:extLst>
       <p:ext uri="{BB962C8B-B14F-4D97-AF65-F5344CB8AC3E}">
         <p14:creationId xmlns:p14="http://schemas.microsoft.com/office/powerpoint/2010/main" val="2999866464"/>
+      </p:ext>
+    </p:extLst>
+  </p:cSld>
+  <p:clrMapOvr>
+    <a:masterClrMapping/>
+  </p:clrMapOvr>
+</p:sld>
+</file>
+
+<file path=ppt/slides/slide13.xml><?xml version="1.0" encoding="utf-8"?>
+<p:sld xmlns:a="http://schemas.openxmlformats.org/drawingml/2006/main" xmlns:r="http://schemas.openxmlformats.org/officeDocument/2006/relationships" xmlns:p="http://schemas.openxmlformats.org/presentationml/2006/main">
+  <p:cSld>
+    <p:spTree>
+      <p:nvGrpSpPr>
+        <p:cNvPr id="1" name="">
+          <a:extLst>
+            <a:ext uri="{FF2B5EF4-FFF2-40B4-BE49-F238E27FC236}">
+              <a16:creationId xmlns:a16="http://schemas.microsoft.com/office/drawing/2014/main" id="{D009AA68-DDEC-F3D7-35E8-8926B52124F6}"/>
+            </a:ext>
+          </a:extLst>
+        </p:cNvPr>
+        <p:cNvGrpSpPr/>
+        <p:nvPr/>
+      </p:nvGrpSpPr>
+      <p:grpSpPr>
+        <a:xfrm>
+          <a:off x="0" y="0"/>
+          <a:ext cx="0" cy="0"/>
+          <a:chOff x="0" y="0"/>
+          <a:chExt cx="0" cy="0"/>
+        </a:xfrm>
+      </p:grpSpPr>
+      <p:grpSp>
+        <p:nvGrpSpPr>
+          <p:cNvPr id="37" name="グループ化 36">
+            <a:extLst>
+              <a:ext uri="{FF2B5EF4-FFF2-40B4-BE49-F238E27FC236}">
+                <a16:creationId xmlns:a16="http://schemas.microsoft.com/office/drawing/2014/main" id="{B0115726-E806-55EE-2B83-000BF5746B61}"/>
+              </a:ext>
+            </a:extLst>
+          </p:cNvPr>
+          <p:cNvGrpSpPr/>
+          <p:nvPr/>
+        </p:nvGrpSpPr>
+        <p:grpSpPr>
+          <a:xfrm>
+            <a:off x="618799" y="1281136"/>
+            <a:ext cx="7079648" cy="4663773"/>
+            <a:chOff x="-1373774" y="1231188"/>
+            <a:chExt cx="7079648" cy="4663773"/>
+          </a:xfrm>
+        </p:grpSpPr>
+        <p:sp>
+          <p:nvSpPr>
+            <p:cNvPr id="180" name="二等辺三角形 179">
+              <a:extLst>
+                <a:ext uri="{FF2B5EF4-FFF2-40B4-BE49-F238E27FC236}">
+                  <a16:creationId xmlns:a16="http://schemas.microsoft.com/office/drawing/2014/main" id="{94C44971-444A-E1C1-8841-CAF1141CCDB3}"/>
+                </a:ext>
+              </a:extLst>
+            </p:cNvPr>
+            <p:cNvSpPr/>
+            <p:nvPr/>
+          </p:nvSpPr>
+          <p:spPr>
+            <a:xfrm rot="8323263">
+              <a:off x="707068" y="1526725"/>
+              <a:ext cx="1427346" cy="3305339"/>
+            </a:xfrm>
+            <a:prstGeom prst="triangle">
+              <a:avLst>
+                <a:gd name="adj" fmla="val 0"/>
+              </a:avLst>
+            </a:prstGeom>
+            <a:solidFill>
+              <a:schemeClr val="bg2">
+                <a:lumMod val="50000"/>
+                <a:alpha val="20000"/>
+              </a:schemeClr>
+            </a:solidFill>
+            <a:ln>
+              <a:noFill/>
+            </a:ln>
+          </p:spPr>
+          <p:style>
+            <a:lnRef idx="2">
+              <a:schemeClr val="accent1">
+                <a:shade val="15000"/>
+              </a:schemeClr>
+            </a:lnRef>
+            <a:fillRef idx="1">
+              <a:schemeClr val="accent1"/>
+            </a:fillRef>
+            <a:effectRef idx="0">
+              <a:schemeClr val="accent1"/>
+            </a:effectRef>
+            <a:fontRef idx="minor">
+              <a:schemeClr val="lt1"/>
+            </a:fontRef>
+          </p:style>
+          <p:txBody>
+            <a:bodyPr rtlCol="0" anchor="ctr"/>
+            <a:lstStyle/>
+            <a:p>
+              <a:pPr algn="ctr"/>
+              <a:endParaRPr lang="en-US"/>
+            </a:p>
+          </p:txBody>
+        </p:sp>
+        <p:sp>
+          <p:nvSpPr>
+            <p:cNvPr id="36" name="正方形/長方形 35">
+              <a:extLst>
+                <a:ext uri="{FF2B5EF4-FFF2-40B4-BE49-F238E27FC236}">
+                  <a16:creationId xmlns:a16="http://schemas.microsoft.com/office/drawing/2014/main" id="{CC7B028F-2901-FE64-86EA-6EA3D3AECFA4}"/>
+                </a:ext>
+              </a:extLst>
+            </p:cNvPr>
+            <p:cNvSpPr/>
+            <p:nvPr/>
+          </p:nvSpPr>
+          <p:spPr>
+            <a:xfrm rot="3743983">
+              <a:off x="-885231" y="1162212"/>
+              <a:ext cx="2422166" cy="3399252"/>
+            </a:xfrm>
+            <a:prstGeom prst="rect">
+              <a:avLst/>
+            </a:prstGeom>
+            <a:solidFill>
+              <a:schemeClr val="bg1"/>
+            </a:solidFill>
+            <a:ln>
+              <a:noFill/>
+            </a:ln>
+          </p:spPr>
+          <p:style>
+            <a:lnRef idx="2">
+              <a:schemeClr val="accent1">
+                <a:shade val="15000"/>
+              </a:schemeClr>
+            </a:lnRef>
+            <a:fillRef idx="1">
+              <a:schemeClr val="accent1"/>
+            </a:fillRef>
+            <a:effectRef idx="0">
+              <a:schemeClr val="accent1"/>
+            </a:effectRef>
+            <a:fontRef idx="minor">
+              <a:schemeClr val="lt1"/>
+            </a:fontRef>
+          </p:style>
+          <p:txBody>
+            <a:bodyPr rtlCol="0" anchor="ctr"/>
+            <a:lstStyle/>
+            <a:p>
+              <a:pPr algn="ctr"/>
+              <a:endParaRPr lang="en-US"/>
+            </a:p>
+          </p:txBody>
+        </p:sp>
+        <p:sp>
+          <p:nvSpPr>
+            <p:cNvPr id="31" name="二等辺三角形 30">
+              <a:extLst>
+                <a:ext uri="{FF2B5EF4-FFF2-40B4-BE49-F238E27FC236}">
+                  <a16:creationId xmlns:a16="http://schemas.microsoft.com/office/drawing/2014/main" id="{BDE71F19-20A1-802F-45AD-59663E22BDD1}"/>
+                </a:ext>
+              </a:extLst>
+            </p:cNvPr>
+            <p:cNvSpPr/>
+            <p:nvPr/>
+          </p:nvSpPr>
+          <p:spPr>
+            <a:xfrm rot="19105234">
+              <a:off x="3578609" y="3339293"/>
+              <a:ext cx="885421" cy="2130097"/>
+            </a:xfrm>
+            <a:prstGeom prst="triangle">
+              <a:avLst>
+                <a:gd name="adj" fmla="val 0"/>
+              </a:avLst>
+            </a:prstGeom>
+            <a:solidFill>
+              <a:schemeClr val="bg2">
+                <a:lumMod val="50000"/>
+                <a:alpha val="20000"/>
+              </a:schemeClr>
+            </a:solidFill>
+            <a:ln>
+              <a:noFill/>
+            </a:ln>
+          </p:spPr>
+          <p:style>
+            <a:lnRef idx="2">
+              <a:schemeClr val="accent1">
+                <a:shade val="15000"/>
+              </a:schemeClr>
+            </a:lnRef>
+            <a:fillRef idx="1">
+              <a:schemeClr val="accent1"/>
+            </a:fillRef>
+            <a:effectRef idx="0">
+              <a:schemeClr val="accent1"/>
+            </a:effectRef>
+            <a:fontRef idx="minor">
+              <a:schemeClr val="lt1"/>
+            </a:fontRef>
+          </p:style>
+          <p:txBody>
+            <a:bodyPr rtlCol="0" anchor="ctr"/>
+            <a:lstStyle/>
+            <a:p>
+              <a:pPr algn="ctr"/>
+              <a:endParaRPr lang="en-US"/>
+            </a:p>
+          </p:txBody>
+        </p:sp>
+        <p:sp>
+          <p:nvSpPr>
+            <p:cNvPr id="34" name="正方形/長方形 33">
+              <a:extLst>
+                <a:ext uri="{FF2B5EF4-FFF2-40B4-BE49-F238E27FC236}">
+                  <a16:creationId xmlns:a16="http://schemas.microsoft.com/office/drawing/2014/main" id="{ABF489C3-516F-435A-1F7B-E5E06E2346E6}"/>
+                </a:ext>
+              </a:extLst>
+            </p:cNvPr>
+            <p:cNvSpPr/>
+            <p:nvPr/>
+          </p:nvSpPr>
+          <p:spPr>
+            <a:xfrm rot="1777756">
+              <a:off x="4571930" y="4766818"/>
+              <a:ext cx="939369" cy="1128143"/>
+            </a:xfrm>
+            <a:prstGeom prst="rect">
+              <a:avLst/>
+            </a:prstGeom>
+            <a:solidFill>
+              <a:schemeClr val="bg1"/>
+            </a:solidFill>
+            <a:ln>
+              <a:noFill/>
+            </a:ln>
+          </p:spPr>
+          <p:style>
+            <a:lnRef idx="2">
+              <a:schemeClr val="accent1">
+                <a:shade val="15000"/>
+              </a:schemeClr>
+            </a:lnRef>
+            <a:fillRef idx="1">
+              <a:schemeClr val="accent1"/>
+            </a:fillRef>
+            <a:effectRef idx="0">
+              <a:schemeClr val="accent1"/>
+            </a:effectRef>
+            <a:fontRef idx="minor">
+              <a:schemeClr val="lt1"/>
+            </a:fontRef>
+          </p:style>
+          <p:txBody>
+            <a:bodyPr rtlCol="0" anchor="ctr"/>
+            <a:lstStyle/>
+            <a:p>
+              <a:pPr algn="ctr"/>
+              <a:endParaRPr lang="en-US"/>
+            </a:p>
+          </p:txBody>
+        </p:sp>
+        <p:cxnSp>
+          <p:nvCxnSpPr>
+            <p:cNvPr id="20" name="直線コネクタ 19">
+              <a:extLst>
+                <a:ext uri="{FF2B5EF4-FFF2-40B4-BE49-F238E27FC236}">
+                  <a16:creationId xmlns:a16="http://schemas.microsoft.com/office/drawing/2014/main" id="{69EF57C9-3445-51C0-1A67-1BF3586C3C41}"/>
+                </a:ext>
+              </a:extLst>
+            </p:cNvPr>
+            <p:cNvCxnSpPr>
+              <a:cxnSpLocks/>
+            </p:cNvCxnSpPr>
+            <p:nvPr/>
+          </p:nvCxnSpPr>
+          <p:spPr>
+            <a:xfrm flipH="1">
+              <a:off x="1881919" y="2923745"/>
+              <a:ext cx="597326" cy="77939"/>
+            </a:xfrm>
+            <a:prstGeom prst="line">
+              <a:avLst/>
+            </a:prstGeom>
+            <a:ln>
+              <a:headEnd type="arrow" w="med" len="med"/>
+              <a:tailEnd type="arrow" w="med" len="med"/>
+            </a:ln>
+          </p:spPr>
+          <p:style>
+            <a:lnRef idx="1">
+              <a:schemeClr val="accent5"/>
+            </a:lnRef>
+            <a:fillRef idx="0">
+              <a:schemeClr val="accent5"/>
+            </a:fillRef>
+            <a:effectRef idx="0">
+              <a:schemeClr val="accent5"/>
+            </a:effectRef>
+            <a:fontRef idx="minor">
+              <a:schemeClr val="tx1"/>
+            </a:fontRef>
+          </p:style>
+        </p:cxnSp>
+        <p:sp>
+          <p:nvSpPr>
+            <p:cNvPr id="178" name="円弧 177">
+              <a:extLst>
+                <a:ext uri="{FF2B5EF4-FFF2-40B4-BE49-F238E27FC236}">
+                  <a16:creationId xmlns:a16="http://schemas.microsoft.com/office/drawing/2014/main" id="{0518B459-13B7-E8F1-5C65-6D5864A8F32B}"/>
+                </a:ext>
+              </a:extLst>
+            </p:cNvPr>
+            <p:cNvSpPr/>
+            <p:nvPr/>
+          </p:nvSpPr>
+          <p:spPr>
+            <a:xfrm rot="16200000">
+              <a:off x="2459254" y="3516836"/>
+              <a:ext cx="301908" cy="252800"/>
+            </a:xfrm>
+            <a:prstGeom prst="arc">
+              <a:avLst/>
+            </a:prstGeom>
+          </p:spPr>
+          <p:style>
+            <a:lnRef idx="2">
+              <a:schemeClr val="dk1"/>
+            </a:lnRef>
+            <a:fillRef idx="0">
+              <a:schemeClr val="dk1"/>
+            </a:fillRef>
+            <a:effectRef idx="1">
+              <a:schemeClr val="dk1"/>
+            </a:effectRef>
+            <a:fontRef idx="minor">
+              <a:schemeClr val="tx1"/>
+            </a:fontRef>
+          </p:style>
+          <p:txBody>
+            <a:bodyPr rtlCol="0" anchor="ctr"/>
+            <a:lstStyle/>
+            <a:p>
+              <a:pPr algn="ctr"/>
+              <a:endParaRPr lang="en-US"/>
+            </a:p>
+          </p:txBody>
+        </p:sp>
+        <p:cxnSp>
+          <p:nvCxnSpPr>
+            <p:cNvPr id="173" name="直線コネクタ 172">
+              <a:extLst>
+                <a:ext uri="{FF2B5EF4-FFF2-40B4-BE49-F238E27FC236}">
+                  <a16:creationId xmlns:a16="http://schemas.microsoft.com/office/drawing/2014/main" id="{0E062E9A-F9D9-E5DA-F0EF-C6E523134825}"/>
+                </a:ext>
+              </a:extLst>
+            </p:cNvPr>
+            <p:cNvCxnSpPr>
+              <a:cxnSpLocks/>
+            </p:cNvCxnSpPr>
+            <p:nvPr/>
+          </p:nvCxnSpPr>
+          <p:spPr>
+            <a:xfrm flipH="1">
+              <a:off x="1795779" y="2824353"/>
+              <a:ext cx="597326" cy="77939"/>
+            </a:xfrm>
+            <a:prstGeom prst="line">
+              <a:avLst/>
+            </a:prstGeom>
+            <a:ln>
+              <a:headEnd type="arrow" w="med" len="med"/>
+              <a:tailEnd type="arrow" w="med" len="med"/>
+            </a:ln>
+          </p:spPr>
+          <p:style>
+            <a:lnRef idx="1">
+              <a:schemeClr val="accent5"/>
+            </a:lnRef>
+            <a:fillRef idx="0">
+              <a:schemeClr val="accent5"/>
+            </a:fillRef>
+            <a:effectRef idx="0">
+              <a:schemeClr val="accent5"/>
+            </a:effectRef>
+            <a:fontRef idx="minor">
+              <a:schemeClr val="tx1"/>
+            </a:fontRef>
+          </p:style>
+        </p:cxnSp>
+        <p:cxnSp>
+          <p:nvCxnSpPr>
+            <p:cNvPr id="163" name="直線矢印コネクタ 162">
+              <a:extLst>
+                <a:ext uri="{FF2B5EF4-FFF2-40B4-BE49-F238E27FC236}">
+                  <a16:creationId xmlns:a16="http://schemas.microsoft.com/office/drawing/2014/main" id="{17E9F655-18B7-0116-BFC1-FB8A1E2DD4DB}"/>
+                </a:ext>
+              </a:extLst>
+            </p:cNvPr>
+            <p:cNvCxnSpPr>
+              <a:cxnSpLocks/>
+            </p:cNvCxnSpPr>
+            <p:nvPr/>
+          </p:nvCxnSpPr>
+          <p:spPr>
+            <a:xfrm flipH="1" flipV="1">
+              <a:off x="1086740" y="1699147"/>
+              <a:ext cx="1934960" cy="2235736"/>
+            </a:xfrm>
+            <a:prstGeom prst="straightConnector1">
+              <a:avLst/>
+            </a:prstGeom>
+            <a:ln>
+              <a:tailEnd type="triangle"/>
+            </a:ln>
+          </p:spPr>
+          <p:style>
+            <a:lnRef idx="2">
+              <a:schemeClr val="accent5"/>
+            </a:lnRef>
+            <a:fillRef idx="0">
+              <a:schemeClr val="accent5"/>
+            </a:fillRef>
+            <a:effectRef idx="1">
+              <a:schemeClr val="accent5"/>
+            </a:effectRef>
+            <a:fontRef idx="minor">
+              <a:schemeClr val="tx1"/>
+            </a:fontRef>
+          </p:style>
+        </p:cxnSp>
+        <p:cxnSp>
+          <p:nvCxnSpPr>
+            <p:cNvPr id="129" name="直線コネクタ 128">
+              <a:extLst>
+                <a:ext uri="{FF2B5EF4-FFF2-40B4-BE49-F238E27FC236}">
+                  <a16:creationId xmlns:a16="http://schemas.microsoft.com/office/drawing/2014/main" id="{48135102-48D7-1B27-88D8-C266BD36DE1B}"/>
+                </a:ext>
+              </a:extLst>
+            </p:cNvPr>
+            <p:cNvCxnSpPr>
+              <a:cxnSpLocks/>
+            </p:cNvCxnSpPr>
+            <p:nvPr/>
+          </p:nvCxnSpPr>
+          <p:spPr>
+            <a:xfrm flipH="1" flipV="1">
+              <a:off x="844186" y="2902292"/>
+              <a:ext cx="4800402" cy="2285112"/>
+            </a:xfrm>
+            <a:prstGeom prst="line">
+              <a:avLst/>
+            </a:prstGeom>
+            <a:ln w="19050">
+              <a:headEnd type="none" w="med" len="med"/>
+              <a:tailEnd type="none" w="med" len="med"/>
+            </a:ln>
+          </p:spPr>
+          <p:style>
+            <a:lnRef idx="1">
+              <a:schemeClr val="accent1"/>
+            </a:lnRef>
+            <a:fillRef idx="0">
+              <a:schemeClr val="accent1"/>
+            </a:fillRef>
+            <a:effectRef idx="0">
+              <a:schemeClr val="accent1"/>
+            </a:effectRef>
+            <a:fontRef idx="minor">
+              <a:schemeClr val="tx1"/>
+            </a:fontRef>
+          </p:style>
+        </p:cxnSp>
+        <p:sp>
+          <p:nvSpPr>
+            <p:cNvPr id="130" name="直方体 129">
+              <a:extLst>
+                <a:ext uri="{FF2B5EF4-FFF2-40B4-BE49-F238E27FC236}">
+                  <a16:creationId xmlns:a16="http://schemas.microsoft.com/office/drawing/2014/main" id="{7DEAD4EC-F38F-89E2-F41F-B61BE82A6D9F}"/>
+                </a:ext>
+              </a:extLst>
+            </p:cNvPr>
+            <p:cNvSpPr/>
+            <p:nvPr/>
+          </p:nvSpPr>
+          <p:spPr>
+            <a:xfrm rot="10800000" flipV="1">
+              <a:off x="1103376" y="2144463"/>
+              <a:ext cx="3453647" cy="3280211"/>
+            </a:xfrm>
+            <a:prstGeom prst="cube">
+              <a:avLst>
+                <a:gd name="adj" fmla="val 16324"/>
+              </a:avLst>
+            </a:prstGeom>
+            <a:gradFill>
+              <a:gsLst>
+                <a:gs pos="0">
+                  <a:schemeClr val="accent1">
+                    <a:satMod val="103000"/>
+                    <a:lumMod val="102000"/>
+                    <a:tint val="94000"/>
+                    <a:alpha val="50000"/>
+                  </a:schemeClr>
+                </a:gs>
+                <a:gs pos="50000">
+                  <a:schemeClr val="accent1">
+                    <a:satMod val="110000"/>
+                    <a:lumMod val="100000"/>
+                    <a:shade val="100000"/>
+                    <a:alpha val="50000"/>
+                  </a:schemeClr>
+                </a:gs>
+                <a:gs pos="100000">
+                  <a:schemeClr val="accent1">
+                    <a:lumMod val="99000"/>
+                    <a:satMod val="120000"/>
+                    <a:shade val="78000"/>
+                    <a:alpha val="50000"/>
+                  </a:schemeClr>
+                </a:gs>
+              </a:gsLst>
+            </a:gradFill>
+            <a:scene3d>
+              <a:camera prst="orthographicFront">
+                <a:rot lat="600000" lon="19200000" rev="0"/>
+              </a:camera>
+              <a:lightRig rig="threePt" dir="t"/>
+            </a:scene3d>
+          </p:spPr>
+          <p:style>
+            <a:lnRef idx="0">
+              <a:schemeClr val="accent1"/>
+            </a:lnRef>
+            <a:fillRef idx="3">
+              <a:schemeClr val="accent1"/>
+            </a:fillRef>
+            <a:effectRef idx="3">
+              <a:schemeClr val="accent1"/>
+            </a:effectRef>
+            <a:fontRef idx="minor">
+              <a:schemeClr val="lt1"/>
+            </a:fontRef>
+          </p:style>
+          <p:txBody>
+            <a:bodyPr rtlCol="0" anchor="ctr"/>
+            <a:lstStyle/>
+            <a:p>
+              <a:pPr algn="ctr"/>
+              <a:endParaRPr lang="en-US" dirty="0"/>
+            </a:p>
+          </p:txBody>
+        </p:sp>
+        <p:cxnSp>
+          <p:nvCxnSpPr>
+            <p:cNvPr id="131" name="直線コネクタ 130">
+              <a:extLst>
+                <a:ext uri="{FF2B5EF4-FFF2-40B4-BE49-F238E27FC236}">
+                  <a16:creationId xmlns:a16="http://schemas.microsoft.com/office/drawing/2014/main" id="{95D827C9-24A9-F348-593D-E133CBD51F28}"/>
+                </a:ext>
+              </a:extLst>
+            </p:cNvPr>
+            <p:cNvCxnSpPr>
+              <a:cxnSpLocks/>
+            </p:cNvCxnSpPr>
+            <p:nvPr/>
+          </p:nvCxnSpPr>
+          <p:spPr>
+            <a:xfrm flipV="1">
+              <a:off x="130284" y="3542322"/>
+              <a:ext cx="5575590" cy="790353"/>
+            </a:xfrm>
+            <a:prstGeom prst="line">
+              <a:avLst/>
+            </a:prstGeom>
+            <a:ln w="9525">
+              <a:prstDash val="sysDash"/>
+              <a:headEnd type="arrow" w="med" len="med"/>
+              <a:tailEnd type="none" w="med" len="med"/>
+            </a:ln>
+          </p:spPr>
+          <p:style>
+            <a:lnRef idx="2">
+              <a:schemeClr val="accent1"/>
+            </a:lnRef>
+            <a:fillRef idx="0">
+              <a:schemeClr val="accent1"/>
+            </a:fillRef>
+            <a:effectRef idx="1">
+              <a:schemeClr val="accent1"/>
+            </a:effectRef>
+            <a:fontRef idx="minor">
+              <a:schemeClr val="tx1"/>
+            </a:fontRef>
+          </p:style>
+        </p:cxnSp>
+        <p:cxnSp>
+          <p:nvCxnSpPr>
+            <p:cNvPr id="132" name="直線コネクタ 131">
+              <a:extLst>
+                <a:ext uri="{FF2B5EF4-FFF2-40B4-BE49-F238E27FC236}">
+                  <a16:creationId xmlns:a16="http://schemas.microsoft.com/office/drawing/2014/main" id="{AA30353D-95B6-59DD-4DFE-ACEC9D3B5B6C}"/>
+                </a:ext>
+              </a:extLst>
+            </p:cNvPr>
+            <p:cNvCxnSpPr>
+              <a:cxnSpLocks/>
+            </p:cNvCxnSpPr>
+            <p:nvPr/>
+          </p:nvCxnSpPr>
+          <p:spPr>
+            <a:xfrm>
+              <a:off x="3010072" y="1385976"/>
+              <a:ext cx="0" cy="2550589"/>
+            </a:xfrm>
+            <a:prstGeom prst="line">
+              <a:avLst/>
+            </a:prstGeom>
+            <a:ln w="9525">
+              <a:prstDash val="sysDash"/>
+              <a:headEnd type="arrow" w="med" len="med"/>
+              <a:tailEnd type="none" w="med" len="med"/>
+            </a:ln>
+          </p:spPr>
+          <p:style>
+            <a:lnRef idx="2">
+              <a:schemeClr val="accent1"/>
+            </a:lnRef>
+            <a:fillRef idx="0">
+              <a:schemeClr val="accent1"/>
+            </a:fillRef>
+            <a:effectRef idx="1">
+              <a:schemeClr val="accent1"/>
+            </a:effectRef>
+            <a:fontRef idx="minor">
+              <a:schemeClr val="tx1"/>
+            </a:fontRef>
+          </p:style>
+        </p:cxnSp>
+        <p:cxnSp>
+          <p:nvCxnSpPr>
+            <p:cNvPr id="135" name="直線コネクタ 134">
+              <a:extLst>
+                <a:ext uri="{FF2B5EF4-FFF2-40B4-BE49-F238E27FC236}">
+                  <a16:creationId xmlns:a16="http://schemas.microsoft.com/office/drawing/2014/main" id="{54B33FA6-89B3-DBC7-B345-7CCFFB2512C2}"/>
+                </a:ext>
+              </a:extLst>
+            </p:cNvPr>
+            <p:cNvCxnSpPr>
+              <a:cxnSpLocks/>
+            </p:cNvCxnSpPr>
+            <p:nvPr/>
+          </p:nvCxnSpPr>
+          <p:spPr>
+            <a:xfrm>
+              <a:off x="1531875" y="3641603"/>
+              <a:ext cx="372635" cy="436057"/>
+            </a:xfrm>
+            <a:prstGeom prst="line">
+              <a:avLst/>
+            </a:prstGeom>
+            <a:ln w="9525">
+              <a:solidFill>
+                <a:schemeClr val="bg2">
+                  <a:lumMod val="75000"/>
+                </a:schemeClr>
+              </a:solidFill>
+              <a:prstDash val="sysDash"/>
+              <a:headEnd type="none" w="med" len="med"/>
+              <a:tailEnd type="none" w="med" len="med"/>
+            </a:ln>
+          </p:spPr>
+          <p:style>
+            <a:lnRef idx="2">
+              <a:schemeClr val="accent1"/>
+            </a:lnRef>
+            <a:fillRef idx="0">
+              <a:schemeClr val="accent1"/>
+            </a:fillRef>
+            <a:effectRef idx="1">
+              <a:schemeClr val="accent1"/>
+            </a:effectRef>
+            <a:fontRef idx="minor">
+              <a:schemeClr val="tx1"/>
+            </a:fontRef>
+          </p:style>
+        </p:cxnSp>
+        <p:sp>
+          <p:nvSpPr>
+            <p:cNvPr id="140" name="二等辺三角形 139">
+              <a:extLst>
+                <a:ext uri="{FF2B5EF4-FFF2-40B4-BE49-F238E27FC236}">
+                  <a16:creationId xmlns:a16="http://schemas.microsoft.com/office/drawing/2014/main" id="{E8B2045E-0C1B-7D26-C9EA-444A90235C59}"/>
+                </a:ext>
+              </a:extLst>
+            </p:cNvPr>
+            <p:cNvSpPr/>
+            <p:nvPr/>
+          </p:nvSpPr>
+          <p:spPr>
+            <a:xfrm rot="912908">
+              <a:off x="191573" y="3781640"/>
+              <a:ext cx="4428076" cy="1155771"/>
+            </a:xfrm>
+            <a:prstGeom prst="triangle">
+              <a:avLst>
+                <a:gd name="adj" fmla="val 60257"/>
+              </a:avLst>
+            </a:prstGeom>
+            <a:solidFill>
+              <a:schemeClr val="bg2">
+                <a:lumMod val="50000"/>
+                <a:alpha val="20000"/>
+              </a:schemeClr>
+            </a:solidFill>
+            <a:ln>
+              <a:noFill/>
+            </a:ln>
+          </p:spPr>
+          <p:style>
+            <a:lnRef idx="2">
+              <a:schemeClr val="accent1">
+                <a:shade val="15000"/>
+              </a:schemeClr>
+            </a:lnRef>
+            <a:fillRef idx="1">
+              <a:schemeClr val="accent1"/>
+            </a:fillRef>
+            <a:effectRef idx="0">
+              <a:schemeClr val="accent1"/>
+            </a:effectRef>
+            <a:fontRef idx="minor">
+              <a:schemeClr val="lt1"/>
+            </a:fontRef>
+          </p:style>
+          <p:txBody>
+            <a:bodyPr rtlCol="0" anchor="ctr"/>
+            <a:lstStyle/>
+            <a:p>
+              <a:pPr algn="ctr"/>
+              <a:endParaRPr lang="en-US"/>
+            </a:p>
+          </p:txBody>
+        </p:sp>
+        <p:sp>
+          <p:nvSpPr>
+            <p:cNvPr id="141" name="二等辺三角形 140">
+              <a:extLst>
+                <a:ext uri="{FF2B5EF4-FFF2-40B4-BE49-F238E27FC236}">
+                  <a16:creationId xmlns:a16="http://schemas.microsoft.com/office/drawing/2014/main" id="{0664521F-1DC3-47CC-51DE-CA2ADA353317}"/>
+                </a:ext>
+              </a:extLst>
+            </p:cNvPr>
+            <p:cNvSpPr/>
+            <p:nvPr/>
+          </p:nvSpPr>
+          <p:spPr>
+            <a:xfrm rot="17954400" flipH="1">
+              <a:off x="2983728" y="3053239"/>
+              <a:ext cx="2202807" cy="1982192"/>
+            </a:xfrm>
+            <a:prstGeom prst="triangle">
+              <a:avLst>
+                <a:gd name="adj" fmla="val 68976"/>
+              </a:avLst>
+            </a:prstGeom>
+            <a:solidFill>
+              <a:schemeClr val="bg2">
+                <a:lumMod val="50000"/>
+                <a:alpha val="20000"/>
+              </a:schemeClr>
+            </a:solidFill>
+            <a:ln>
+              <a:noFill/>
+            </a:ln>
+          </p:spPr>
+          <p:style>
+            <a:lnRef idx="2">
+              <a:schemeClr val="accent1">
+                <a:shade val="15000"/>
+              </a:schemeClr>
+            </a:lnRef>
+            <a:fillRef idx="1">
+              <a:schemeClr val="accent1"/>
+            </a:fillRef>
+            <a:effectRef idx="0">
+              <a:schemeClr val="accent1"/>
+            </a:effectRef>
+            <a:fontRef idx="minor">
+              <a:schemeClr val="lt1"/>
+            </a:fontRef>
+          </p:style>
+          <p:txBody>
+            <a:bodyPr rtlCol="0" anchor="ctr"/>
+            <a:lstStyle/>
+            <a:p>
+              <a:pPr algn="ctr"/>
+              <a:endParaRPr lang="en-US"/>
+            </a:p>
+          </p:txBody>
+        </p:sp>
+        <p:cxnSp>
+          <p:nvCxnSpPr>
+            <p:cNvPr id="142" name="直線矢印コネクタ 141">
+              <a:extLst>
+                <a:ext uri="{FF2B5EF4-FFF2-40B4-BE49-F238E27FC236}">
+                  <a16:creationId xmlns:a16="http://schemas.microsoft.com/office/drawing/2014/main" id="{0640FDC6-147F-C85B-57DF-E5A7D51AD91B}"/>
+                </a:ext>
+              </a:extLst>
+            </p:cNvPr>
+            <p:cNvCxnSpPr>
+              <a:cxnSpLocks/>
+            </p:cNvCxnSpPr>
+            <p:nvPr/>
+          </p:nvCxnSpPr>
+          <p:spPr>
+            <a:xfrm flipH="1" flipV="1">
+              <a:off x="3010072" y="3924459"/>
+              <a:ext cx="1430428" cy="1614445"/>
+            </a:xfrm>
+            <a:prstGeom prst="straightConnector1">
+              <a:avLst/>
+            </a:prstGeom>
+            <a:ln>
+              <a:tailEnd type="triangle"/>
+            </a:ln>
+          </p:spPr>
+          <p:style>
+            <a:lnRef idx="2">
+              <a:schemeClr val="dk1"/>
+            </a:lnRef>
+            <a:fillRef idx="0">
+              <a:schemeClr val="dk1"/>
+            </a:fillRef>
+            <a:effectRef idx="1">
+              <a:schemeClr val="dk1"/>
+            </a:effectRef>
+            <a:fontRef idx="minor">
+              <a:schemeClr val="tx1"/>
+            </a:fontRef>
+          </p:style>
+        </p:cxnSp>
+        <p:cxnSp>
+          <p:nvCxnSpPr>
+            <p:cNvPr id="160" name="直線コネクタ 159">
+              <a:extLst>
+                <a:ext uri="{FF2B5EF4-FFF2-40B4-BE49-F238E27FC236}">
+                  <a16:creationId xmlns:a16="http://schemas.microsoft.com/office/drawing/2014/main" id="{1E6C05B9-529B-9E04-0B29-B52B20DBA0C7}"/>
+                </a:ext>
+              </a:extLst>
+            </p:cNvPr>
+            <p:cNvCxnSpPr>
+              <a:cxnSpLocks/>
+            </p:cNvCxnSpPr>
+            <p:nvPr/>
+          </p:nvCxnSpPr>
+          <p:spPr>
+            <a:xfrm flipV="1">
+              <a:off x="3966528" y="4502466"/>
+              <a:ext cx="0" cy="837277"/>
+            </a:xfrm>
+            <a:prstGeom prst="line">
+              <a:avLst/>
+            </a:prstGeom>
+            <a:ln>
+              <a:prstDash val="solid"/>
+              <a:headEnd type="arrow" w="med" len="med"/>
+              <a:tailEnd type="arrow" w="med" len="med"/>
+            </a:ln>
+          </p:spPr>
+          <p:style>
+            <a:lnRef idx="1">
+              <a:schemeClr val="accent1"/>
+            </a:lnRef>
+            <a:fillRef idx="0">
+              <a:schemeClr val="accent1"/>
+            </a:fillRef>
+            <a:effectRef idx="0">
+              <a:schemeClr val="accent1"/>
+            </a:effectRef>
+            <a:fontRef idx="minor">
+              <a:schemeClr val="tx1"/>
+            </a:fontRef>
+          </p:style>
+        </p:cxnSp>
+        <mc:AlternateContent xmlns:mc="http://schemas.openxmlformats.org/markup-compatibility/2006">
+          <mc:Choice xmlns:a14="http://schemas.microsoft.com/office/drawing/2010/main" Requires="a14">
+            <p:sp>
+              <p:nvSpPr>
+                <p:cNvPr id="183" name="テキスト ボックス 182">
+                  <a:extLst>
+                    <a:ext uri="{FF2B5EF4-FFF2-40B4-BE49-F238E27FC236}">
+                      <a16:creationId xmlns:a16="http://schemas.microsoft.com/office/drawing/2014/main" id="{2220A236-E7B6-B8D5-330E-0483692E8CD1}"/>
+                    </a:ext>
+                  </a:extLst>
+                </p:cNvPr>
+                <p:cNvSpPr txBox="1"/>
+                <p:nvPr/>
+              </p:nvSpPr>
+              <p:spPr>
+                <a:xfrm>
+                  <a:off x="2191426" y="3206975"/>
+                  <a:ext cx="294760" cy="276999"/>
+                </a:xfrm>
+                <a:prstGeom prst="rect">
+                  <a:avLst/>
+                </a:prstGeom>
+                <a:noFill/>
+              </p:spPr>
+              <p:txBody>
+                <a:bodyPr wrap="none" lIns="0" tIns="0" rIns="0" bIns="0" rtlCol="0">
+                  <a:spAutoFit/>
+                </a:bodyPr>
+                <a:lstStyle/>
+                <a:p>
+                  <a:pPr/>
+                  <a14:m>
+                    <m:oMathPara xmlns:m="http://schemas.openxmlformats.org/officeDocument/2006/math">
+                      <m:oMathParaPr>
+                        <m:jc m:val="centerGroup"/>
+                      </m:oMathParaPr>
+                      <m:oMath xmlns:m="http://schemas.openxmlformats.org/officeDocument/2006/math">
+                        <m:sSub>
+                          <m:sSubPr>
+                            <m:ctrlPr>
+                              <a:rPr lang="en-US" i="1" smtClean="0">
+                                <a:latin typeface="Cambria Math" panose="02040503050406030204" pitchFamily="18" charset="0"/>
+                              </a:rPr>
+                            </m:ctrlPr>
+                          </m:sSubPr>
+                          <m:e>
+                            <m:r>
+                              <a:rPr lang="en-US" i="1" smtClean="0">
+                                <a:latin typeface="Cambria Math" panose="02040503050406030204" pitchFamily="18" charset="0"/>
+                                <a:ea typeface="Cambria Math" panose="02040503050406030204" pitchFamily="18" charset="0"/>
+                              </a:rPr>
+                              <m:t>𝜃</m:t>
+                            </m:r>
+                          </m:e>
+                          <m:sub>
+                            <m:r>
+                              <a:rPr lang="en-US" b="0" i="1" smtClean="0">
+                                <a:latin typeface="Cambria Math" panose="02040503050406030204" pitchFamily="18" charset="0"/>
+                                <a:ea typeface="Cambria Math" panose="02040503050406030204" pitchFamily="18" charset="0"/>
+                              </a:rPr>
+                              <m:t>0</m:t>
+                            </m:r>
+                          </m:sub>
+                        </m:sSub>
+                      </m:oMath>
+                    </m:oMathPara>
+                  </a14:m>
+                  <a:endParaRPr lang="en-US" dirty="0"/>
+                </a:p>
+              </p:txBody>
+            </p:sp>
+          </mc:Choice>
+          <mc:Fallback>
+            <p:sp>
+              <p:nvSpPr>
+                <p:cNvPr id="183" name="テキスト ボックス 182">
+                  <a:extLst>
+                    <a:ext uri="{FF2B5EF4-FFF2-40B4-BE49-F238E27FC236}">
+                      <a16:creationId xmlns:a16="http://schemas.microsoft.com/office/drawing/2014/main" id="{2220A236-E7B6-B8D5-330E-0483692E8CD1}"/>
+                    </a:ext>
+                  </a:extLst>
+                </p:cNvPr>
+                <p:cNvSpPr txBox="1">
+                  <a:spLocks noRot="1" noChangeAspect="1" noMove="1" noResize="1" noEditPoints="1" noAdjustHandles="1" noChangeArrowheads="1" noChangeShapeType="1" noTextEdit="1"/>
+                </p:cNvSpPr>
+                <p:nvPr/>
+              </p:nvSpPr>
+              <p:spPr>
+                <a:xfrm>
+                  <a:off x="2191426" y="3206975"/>
+                  <a:ext cx="294760" cy="276999"/>
+                </a:xfrm>
+                <a:prstGeom prst="rect">
+                  <a:avLst/>
+                </a:prstGeom>
+                <a:blipFill>
+                  <a:blip r:embed="rId2"/>
+                  <a:stretch>
+                    <a:fillRect l="-16327" r="-2041" b="-13043"/>
+                  </a:stretch>
+                </a:blipFill>
+              </p:spPr>
+              <p:txBody>
+                <a:bodyPr/>
+                <a:lstStyle/>
+                <a:p>
+                  <a:r>
+                    <a:rPr lang="en-US">
+                      <a:noFill/>
+                    </a:rPr>
+                    <a:t> </a:t>
+                  </a:r>
+                </a:p>
+              </p:txBody>
+            </p:sp>
+          </mc:Fallback>
+        </mc:AlternateContent>
+        <mc:AlternateContent xmlns:mc="http://schemas.openxmlformats.org/markup-compatibility/2006">
+          <mc:Choice xmlns:a14="http://schemas.microsoft.com/office/drawing/2010/main" Requires="a14">
+            <p:sp>
+              <p:nvSpPr>
+                <p:cNvPr id="184" name="テキスト ボックス 183">
+                  <a:extLst>
+                    <a:ext uri="{FF2B5EF4-FFF2-40B4-BE49-F238E27FC236}">
+                      <a16:creationId xmlns:a16="http://schemas.microsoft.com/office/drawing/2014/main" id="{C650E2FB-1953-2D26-014C-BA19119A2481}"/>
+                    </a:ext>
+                  </a:extLst>
+                </p:cNvPr>
+                <p:cNvSpPr txBox="1"/>
+                <p:nvPr/>
+              </p:nvSpPr>
+              <p:spPr>
+                <a:xfrm>
+                  <a:off x="1628300" y="3517192"/>
+                  <a:ext cx="206082" cy="276999"/>
+                </a:xfrm>
+                <a:prstGeom prst="rect">
+                  <a:avLst/>
+                </a:prstGeom>
+                <a:noFill/>
+              </p:spPr>
+              <p:txBody>
+                <a:bodyPr wrap="none" lIns="0" tIns="0" rIns="0" bIns="0" rtlCol="0">
+                  <a:spAutoFit/>
+                </a:bodyPr>
+                <a:lstStyle/>
+                <a:p>
+                  <a:pPr/>
+                  <a14:m>
+                    <m:oMathPara xmlns:m="http://schemas.openxmlformats.org/officeDocument/2006/math">
+                      <m:oMathParaPr>
+                        <m:jc m:val="centerGroup"/>
+                      </m:oMathParaPr>
+                      <m:oMath xmlns:m="http://schemas.openxmlformats.org/officeDocument/2006/math">
+                        <m:r>
+                          <a:rPr lang="en-US" b="0" i="1" smtClean="0">
+                            <a:latin typeface="Cambria Math" panose="02040503050406030204" pitchFamily="18" charset="0"/>
+                          </a:rPr>
+                          <m:t>𝑑</m:t>
+                        </m:r>
+                      </m:oMath>
+                    </m:oMathPara>
+                  </a14:m>
+                  <a:endParaRPr lang="en-US" dirty="0"/>
+                </a:p>
+              </p:txBody>
+            </p:sp>
+          </mc:Choice>
+          <mc:Fallback>
+            <p:sp>
+              <p:nvSpPr>
+                <p:cNvPr id="184" name="テキスト ボックス 183">
+                  <a:extLst>
+                    <a:ext uri="{FF2B5EF4-FFF2-40B4-BE49-F238E27FC236}">
+                      <a16:creationId xmlns:a16="http://schemas.microsoft.com/office/drawing/2014/main" id="{C650E2FB-1953-2D26-014C-BA19119A2481}"/>
+                    </a:ext>
+                  </a:extLst>
+                </p:cNvPr>
+                <p:cNvSpPr txBox="1">
+                  <a:spLocks noRot="1" noChangeAspect="1" noMove="1" noResize="1" noEditPoints="1" noAdjustHandles="1" noChangeArrowheads="1" noChangeShapeType="1" noTextEdit="1"/>
+                </p:cNvSpPr>
+                <p:nvPr/>
+              </p:nvSpPr>
+              <p:spPr>
+                <a:xfrm>
+                  <a:off x="1628300" y="3517192"/>
+                  <a:ext cx="206082" cy="276999"/>
+                </a:xfrm>
+                <a:prstGeom prst="rect">
+                  <a:avLst/>
+                </a:prstGeom>
+                <a:blipFill>
+                  <a:blip r:embed="rId3"/>
+                  <a:stretch>
+                    <a:fillRect l="-26471" r="-20588" b="-6522"/>
+                  </a:stretch>
+                </a:blipFill>
+              </p:spPr>
+              <p:txBody>
+                <a:bodyPr/>
+                <a:lstStyle/>
+                <a:p>
+                  <a:r>
+                    <a:rPr lang="en-US">
+                      <a:noFill/>
+                    </a:rPr>
+                    <a:t> </a:t>
+                  </a:r>
+                </a:p>
+              </p:txBody>
+            </p:sp>
+          </mc:Fallback>
+        </mc:AlternateContent>
+        <mc:AlternateContent xmlns:mc="http://schemas.openxmlformats.org/markup-compatibility/2006">
+          <mc:Choice xmlns:a14="http://schemas.microsoft.com/office/drawing/2010/main" Requires="a14">
+            <p:sp>
+              <p:nvSpPr>
+                <p:cNvPr id="191" name="テキスト ボックス 190">
+                  <a:extLst>
+                    <a:ext uri="{FF2B5EF4-FFF2-40B4-BE49-F238E27FC236}">
+                      <a16:creationId xmlns:a16="http://schemas.microsoft.com/office/drawing/2014/main" id="{8B609B1E-7E4A-5827-761E-C335A95A52D0}"/>
+                    </a:ext>
+                  </a:extLst>
+                </p:cNvPr>
+                <p:cNvSpPr txBox="1"/>
+                <p:nvPr/>
+              </p:nvSpPr>
+              <p:spPr>
+                <a:xfrm>
+                  <a:off x="-222636" y="2588521"/>
+                  <a:ext cx="1280928" cy="276999"/>
+                </a:xfrm>
+                <a:prstGeom prst="rect">
+                  <a:avLst/>
+                </a:prstGeom>
+                <a:noFill/>
+              </p:spPr>
+              <p:txBody>
+                <a:bodyPr wrap="none" lIns="0" tIns="0" rIns="0" bIns="0" rtlCol="0">
+                  <a:spAutoFit/>
+                </a:bodyPr>
+                <a:lstStyle/>
+                <a:p>
+                  <a:pPr/>
+                  <a14:m>
+                    <m:oMathPara xmlns:m="http://schemas.openxmlformats.org/officeDocument/2006/math">
+                      <m:oMathParaPr>
+                        <m:jc m:val="centerGroup"/>
+                      </m:oMathParaPr>
+                      <m:oMath xmlns:m="http://schemas.openxmlformats.org/officeDocument/2006/math">
+                        <m:r>
+                          <a:rPr lang="en-US" b="0" i="1" smtClean="0">
+                            <a:latin typeface="Cambria Math" panose="02040503050406030204" pitchFamily="18" charset="0"/>
+                          </a:rPr>
+                          <m:t>𝑂𝑝𝑡𝑖𝑐</m:t>
+                        </m:r>
+                        <m:r>
+                          <a:rPr lang="en-US" b="0" i="1" smtClean="0">
+                            <a:latin typeface="Cambria Math" panose="02040503050406030204" pitchFamily="18" charset="0"/>
+                          </a:rPr>
+                          <m:t> </m:t>
+                        </m:r>
+                        <m:r>
+                          <a:rPr lang="en-US" b="0" i="1" smtClean="0">
+                            <a:latin typeface="Cambria Math" panose="02040503050406030204" pitchFamily="18" charset="0"/>
+                          </a:rPr>
+                          <m:t>𝑎𝑥𝑖𝑠</m:t>
+                        </m:r>
+                        <m:r>
+                          <a:rPr lang="en-US" b="0" i="1" smtClean="0">
+                            <a:latin typeface="Cambria Math" panose="02040503050406030204" pitchFamily="18" charset="0"/>
+                          </a:rPr>
+                          <m:t> </m:t>
+                        </m:r>
+                        <m:r>
+                          <a:rPr lang="en-US" b="1" i="1" smtClean="0">
+                            <a:latin typeface="Cambria Math" panose="02040503050406030204" pitchFamily="18" charset="0"/>
+                          </a:rPr>
+                          <m:t>𝒄</m:t>
+                        </m:r>
+                      </m:oMath>
+                    </m:oMathPara>
+                  </a14:m>
+                  <a:endParaRPr lang="en-US" b="1" dirty="0"/>
+                </a:p>
+              </p:txBody>
+            </p:sp>
+          </mc:Choice>
+          <mc:Fallback>
+            <p:sp>
+              <p:nvSpPr>
+                <p:cNvPr id="191" name="テキスト ボックス 190">
+                  <a:extLst>
+                    <a:ext uri="{FF2B5EF4-FFF2-40B4-BE49-F238E27FC236}">
+                      <a16:creationId xmlns:a16="http://schemas.microsoft.com/office/drawing/2014/main" id="{8B609B1E-7E4A-5827-761E-C335A95A52D0}"/>
+                    </a:ext>
+                  </a:extLst>
+                </p:cNvPr>
+                <p:cNvSpPr txBox="1">
+                  <a:spLocks noRot="1" noChangeAspect="1" noMove="1" noResize="1" noEditPoints="1" noAdjustHandles="1" noChangeArrowheads="1" noChangeShapeType="1" noTextEdit="1"/>
+                </p:cNvSpPr>
+                <p:nvPr/>
+              </p:nvSpPr>
+              <p:spPr>
+                <a:xfrm>
+                  <a:off x="-222636" y="2588521"/>
+                  <a:ext cx="1280928" cy="276999"/>
+                </a:xfrm>
+                <a:prstGeom prst="rect">
+                  <a:avLst/>
+                </a:prstGeom>
+                <a:blipFill>
+                  <a:blip r:embed="rId4"/>
+                  <a:stretch>
+                    <a:fillRect l="-5714" t="-2222" r="-1905" b="-35556"/>
+                  </a:stretch>
+                </a:blipFill>
+              </p:spPr>
+              <p:txBody>
+                <a:bodyPr/>
+                <a:lstStyle/>
+                <a:p>
+                  <a:r>
+                    <a:rPr lang="en-US">
+                      <a:noFill/>
+                    </a:rPr>
+                    <a:t> </a:t>
+                  </a:r>
+                </a:p>
+              </p:txBody>
+            </p:sp>
+          </mc:Fallback>
+        </mc:AlternateContent>
+        <mc:AlternateContent xmlns:mc="http://schemas.openxmlformats.org/markup-compatibility/2006">
+          <mc:Choice xmlns:a14="http://schemas.microsoft.com/office/drawing/2010/main" Requires="a14">
+            <p:sp>
+              <p:nvSpPr>
+                <p:cNvPr id="196" name="テキスト ボックス 195">
+                  <a:extLst>
+                    <a:ext uri="{FF2B5EF4-FFF2-40B4-BE49-F238E27FC236}">
+                      <a16:creationId xmlns:a16="http://schemas.microsoft.com/office/drawing/2014/main" id="{63CBE710-3964-2FAB-405B-4674A739CE31}"/>
+                    </a:ext>
+                  </a:extLst>
+                </p:cNvPr>
+                <p:cNvSpPr txBox="1"/>
+                <p:nvPr/>
+              </p:nvSpPr>
+              <p:spPr>
+                <a:xfrm>
+                  <a:off x="4513688" y="5322947"/>
+                  <a:ext cx="356315" cy="276999"/>
+                </a:xfrm>
+                <a:prstGeom prst="rect">
+                  <a:avLst/>
+                </a:prstGeom>
+                <a:noFill/>
+              </p:spPr>
+              <p:txBody>
+                <a:bodyPr wrap="none" lIns="0" tIns="0" rIns="0" bIns="0" rtlCol="0">
+                  <a:spAutoFit/>
+                </a:bodyPr>
+                <a:lstStyle/>
+                <a:p>
+                  <a:pPr/>
+                  <a14:m>
+                    <m:oMathPara xmlns:m="http://schemas.openxmlformats.org/officeDocument/2006/math">
+                      <m:oMathParaPr>
+                        <m:jc m:val="centerGroup"/>
+                      </m:oMathParaPr>
+                      <m:oMath xmlns:m="http://schemas.openxmlformats.org/officeDocument/2006/math">
+                        <m:sSub>
+                          <m:sSubPr>
+                            <m:ctrlPr>
+                              <a:rPr lang="en-US" i="1" smtClean="0">
+                                <a:latin typeface="Cambria Math" panose="02040503050406030204" pitchFamily="18" charset="0"/>
+                              </a:rPr>
+                            </m:ctrlPr>
+                          </m:sSubPr>
+                          <m:e>
+                            <m:r>
+                              <a:rPr lang="en-US" b="1" i="1" smtClean="0">
+                                <a:latin typeface="Cambria Math" panose="02040503050406030204" pitchFamily="18" charset="0"/>
+                              </a:rPr>
+                              <m:t>𝒌</m:t>
+                            </m:r>
+                          </m:e>
+                          <m:sub>
+                            <m:r>
+                              <a:rPr lang="en-US" i="1">
+                                <a:latin typeface="Cambria Math" panose="02040503050406030204" pitchFamily="18" charset="0"/>
+                                <a:ea typeface="Cambria Math" panose="02040503050406030204" pitchFamily="18" charset="0"/>
+                              </a:rPr>
+                              <m:t>𝜔</m:t>
+                            </m:r>
+                          </m:sub>
+                        </m:sSub>
+                      </m:oMath>
+                    </m:oMathPara>
+                  </a14:m>
+                  <a:endParaRPr lang="en-US" dirty="0"/>
+                </a:p>
+              </p:txBody>
+            </p:sp>
+          </mc:Choice>
+          <mc:Fallback>
+            <p:sp>
+              <p:nvSpPr>
+                <p:cNvPr id="196" name="テキスト ボックス 195">
+                  <a:extLst>
+                    <a:ext uri="{FF2B5EF4-FFF2-40B4-BE49-F238E27FC236}">
+                      <a16:creationId xmlns:a16="http://schemas.microsoft.com/office/drawing/2014/main" id="{63CBE710-3964-2FAB-405B-4674A739CE31}"/>
+                    </a:ext>
+                  </a:extLst>
+                </p:cNvPr>
+                <p:cNvSpPr txBox="1">
+                  <a:spLocks noRot="1" noChangeAspect="1" noMove="1" noResize="1" noEditPoints="1" noAdjustHandles="1" noChangeArrowheads="1" noChangeShapeType="1" noTextEdit="1"/>
+                </p:cNvSpPr>
+                <p:nvPr/>
+              </p:nvSpPr>
+              <p:spPr>
+                <a:xfrm>
+                  <a:off x="4513688" y="5322947"/>
+                  <a:ext cx="356315" cy="276999"/>
+                </a:xfrm>
+                <a:prstGeom prst="rect">
+                  <a:avLst/>
+                </a:prstGeom>
+                <a:blipFill>
+                  <a:blip r:embed="rId5"/>
+                  <a:stretch>
+                    <a:fillRect l="-13559" b="-8696"/>
+                  </a:stretch>
+                </a:blipFill>
+              </p:spPr>
+              <p:txBody>
+                <a:bodyPr/>
+                <a:lstStyle/>
+                <a:p>
+                  <a:r>
+                    <a:rPr lang="en-US">
+                      <a:noFill/>
+                    </a:rPr>
+                    <a:t> </a:t>
+                  </a:r>
+                </a:p>
+              </p:txBody>
+            </p:sp>
+          </mc:Fallback>
+        </mc:AlternateContent>
+        <mc:AlternateContent xmlns:mc="http://schemas.openxmlformats.org/markup-compatibility/2006">
+          <mc:Choice xmlns:a14="http://schemas.microsoft.com/office/drawing/2010/main" Requires="a14">
+            <p:sp>
+              <p:nvSpPr>
+                <p:cNvPr id="199" name="テキスト ボックス 198">
+                  <a:extLst>
+                    <a:ext uri="{FF2B5EF4-FFF2-40B4-BE49-F238E27FC236}">
+                      <a16:creationId xmlns:a16="http://schemas.microsoft.com/office/drawing/2014/main" id="{60C9A364-4B32-E455-CA63-48F49B29346C}"/>
+                    </a:ext>
+                  </a:extLst>
+                </p:cNvPr>
+                <p:cNvSpPr txBox="1"/>
+                <p:nvPr/>
+              </p:nvSpPr>
+              <p:spPr>
+                <a:xfrm>
+                  <a:off x="387680" y="5396488"/>
+                  <a:ext cx="305789" cy="276999"/>
+                </a:xfrm>
+                <a:prstGeom prst="rect">
+                  <a:avLst/>
+                </a:prstGeom>
+                <a:noFill/>
+              </p:spPr>
+              <p:txBody>
+                <a:bodyPr wrap="none" lIns="0" tIns="0" rIns="0" bIns="0" rtlCol="0">
+                  <a:spAutoFit/>
+                </a:bodyPr>
+                <a:lstStyle/>
+                <a:p>
+                  <a:pPr/>
+                  <a14:m>
+                    <m:oMathPara xmlns:m="http://schemas.openxmlformats.org/officeDocument/2006/math">
+                      <m:oMathParaPr>
+                        <m:jc m:val="centerGroup"/>
+                      </m:oMathParaPr>
+                      <m:oMath xmlns:m="http://schemas.openxmlformats.org/officeDocument/2006/math">
+                        <m:sSub>
+                          <m:sSubPr>
+                            <m:ctrlPr>
+                              <a:rPr lang="en-US" i="1" smtClean="0">
+                                <a:latin typeface="Cambria Math" panose="02040503050406030204" pitchFamily="18" charset="0"/>
+                              </a:rPr>
+                            </m:ctrlPr>
+                          </m:sSubPr>
+                          <m:e>
+                            <m:acc>
+                              <m:accPr>
+                                <m:chr m:val="̂"/>
+                                <m:ctrlPr>
+                                  <a:rPr lang="en-US" b="1" i="1">
+                                    <a:latin typeface="Cambria Math" panose="02040503050406030204" pitchFamily="18" charset="0"/>
+                                  </a:rPr>
+                                </m:ctrlPr>
+                              </m:accPr>
+                              <m:e>
+                                <m:r>
+                                  <a:rPr lang="en-US" b="1" i="1">
+                                    <a:latin typeface="Cambria Math" panose="02040503050406030204" pitchFamily="18" charset="0"/>
+                                  </a:rPr>
+                                  <m:t>𝒆</m:t>
+                                </m:r>
+                              </m:e>
+                            </m:acc>
+                          </m:e>
+                          <m:sub>
+                            <m:r>
+                              <a:rPr lang="en-US" b="0" i="1" smtClean="0">
+                                <a:latin typeface="Cambria Math" panose="02040503050406030204" pitchFamily="18" charset="0"/>
+                              </a:rPr>
+                              <m:t>𝑥</m:t>
+                            </m:r>
+                          </m:sub>
+                        </m:sSub>
+                      </m:oMath>
+                    </m:oMathPara>
+                  </a14:m>
+                  <a:endParaRPr lang="en-US" dirty="0"/>
+                </a:p>
+              </p:txBody>
+            </p:sp>
+          </mc:Choice>
+          <mc:Fallback>
+            <p:sp>
+              <p:nvSpPr>
+                <p:cNvPr id="199" name="テキスト ボックス 198">
+                  <a:extLst>
+                    <a:ext uri="{FF2B5EF4-FFF2-40B4-BE49-F238E27FC236}">
+                      <a16:creationId xmlns:a16="http://schemas.microsoft.com/office/drawing/2014/main" id="{60C9A364-4B32-E455-CA63-48F49B29346C}"/>
+                    </a:ext>
+                  </a:extLst>
+                </p:cNvPr>
+                <p:cNvSpPr txBox="1">
+                  <a:spLocks noRot="1" noChangeAspect="1" noMove="1" noResize="1" noEditPoints="1" noAdjustHandles="1" noChangeArrowheads="1" noChangeShapeType="1" noTextEdit="1"/>
+                </p:cNvSpPr>
+                <p:nvPr/>
+              </p:nvSpPr>
+              <p:spPr>
+                <a:xfrm>
+                  <a:off x="387680" y="5396488"/>
+                  <a:ext cx="305789" cy="276999"/>
+                </a:xfrm>
+                <a:prstGeom prst="rect">
+                  <a:avLst/>
+                </a:prstGeom>
+                <a:blipFill>
+                  <a:blip r:embed="rId6"/>
+                  <a:stretch>
+                    <a:fillRect l="-9804" t="-23913" r="-45098" b="-8696"/>
+                  </a:stretch>
+                </a:blipFill>
+              </p:spPr>
+              <p:txBody>
+                <a:bodyPr/>
+                <a:lstStyle/>
+                <a:p>
+                  <a:r>
+                    <a:rPr lang="en-US">
+                      <a:noFill/>
+                    </a:rPr>
+                    <a:t> </a:t>
+                  </a:r>
+                </a:p>
+              </p:txBody>
+            </p:sp>
+          </mc:Fallback>
+        </mc:AlternateContent>
+        <mc:AlternateContent xmlns:mc="http://schemas.openxmlformats.org/markup-compatibility/2006">
+          <mc:Choice xmlns:a14="http://schemas.microsoft.com/office/drawing/2010/main" Requires="a14">
+            <p:sp>
+              <p:nvSpPr>
+                <p:cNvPr id="201" name="テキスト ボックス 200">
+                  <a:extLst>
+                    <a:ext uri="{FF2B5EF4-FFF2-40B4-BE49-F238E27FC236}">
+                      <a16:creationId xmlns:a16="http://schemas.microsoft.com/office/drawing/2014/main" id="{BED4360B-96B6-253A-4733-DFA1FE69D9EA}"/>
+                    </a:ext>
+                  </a:extLst>
+                </p:cNvPr>
+                <p:cNvSpPr txBox="1"/>
+                <p:nvPr/>
+              </p:nvSpPr>
+              <p:spPr>
+                <a:xfrm>
+                  <a:off x="972253" y="4605258"/>
+                  <a:ext cx="313419" cy="298928"/>
+                </a:xfrm>
+                <a:prstGeom prst="rect">
+                  <a:avLst/>
+                </a:prstGeom>
+                <a:noFill/>
+              </p:spPr>
+              <p:txBody>
+                <a:bodyPr wrap="none" lIns="0" tIns="0" rIns="0" bIns="0" rtlCol="0">
+                  <a:spAutoFit/>
+                </a:bodyPr>
+                <a:lstStyle/>
+                <a:p>
+                  <a:pPr/>
+                  <a14:m>
+                    <m:oMathPara xmlns:m="http://schemas.openxmlformats.org/officeDocument/2006/math">
+                      <m:oMathParaPr>
+                        <m:jc m:val="centerGroup"/>
+                      </m:oMathParaPr>
+                      <m:oMath xmlns:m="http://schemas.openxmlformats.org/officeDocument/2006/math">
+                        <m:sSub>
+                          <m:sSubPr>
+                            <m:ctrlPr>
+                              <a:rPr lang="en-US" i="1" smtClean="0">
+                                <a:latin typeface="Cambria Math" panose="02040503050406030204" pitchFamily="18" charset="0"/>
+                              </a:rPr>
+                            </m:ctrlPr>
+                          </m:sSubPr>
+                          <m:e>
+                            <m:acc>
+                              <m:accPr>
+                                <m:chr m:val="̂"/>
+                                <m:ctrlPr>
+                                  <a:rPr lang="en-US" b="1" i="1">
+                                    <a:latin typeface="Cambria Math" panose="02040503050406030204" pitchFamily="18" charset="0"/>
+                                  </a:rPr>
+                                </m:ctrlPr>
+                              </m:accPr>
+                              <m:e>
+                                <m:r>
+                                  <a:rPr lang="en-US" b="1" i="1">
+                                    <a:latin typeface="Cambria Math" panose="02040503050406030204" pitchFamily="18" charset="0"/>
+                                  </a:rPr>
+                                  <m:t>𝒆</m:t>
+                                </m:r>
+                              </m:e>
+                            </m:acc>
+                          </m:e>
+                          <m:sub>
+                            <m:r>
+                              <a:rPr lang="en-US" b="0" i="1" smtClean="0">
+                                <a:latin typeface="Cambria Math" panose="02040503050406030204" pitchFamily="18" charset="0"/>
+                              </a:rPr>
+                              <m:t>𝑦</m:t>
+                            </m:r>
+                          </m:sub>
+                        </m:sSub>
+                      </m:oMath>
+                    </m:oMathPara>
+                  </a14:m>
+                  <a:endParaRPr lang="en-US" dirty="0"/>
+                </a:p>
+              </p:txBody>
+            </p:sp>
+          </mc:Choice>
+          <mc:Fallback>
+            <p:sp>
+              <p:nvSpPr>
+                <p:cNvPr id="201" name="テキスト ボックス 200">
+                  <a:extLst>
+                    <a:ext uri="{FF2B5EF4-FFF2-40B4-BE49-F238E27FC236}">
+                      <a16:creationId xmlns:a16="http://schemas.microsoft.com/office/drawing/2014/main" id="{BED4360B-96B6-253A-4733-DFA1FE69D9EA}"/>
+                    </a:ext>
+                  </a:extLst>
+                </p:cNvPr>
+                <p:cNvSpPr txBox="1">
+                  <a:spLocks noRot="1" noChangeAspect="1" noMove="1" noResize="1" noEditPoints="1" noAdjustHandles="1" noChangeArrowheads="1" noChangeShapeType="1" noTextEdit="1"/>
+                </p:cNvSpPr>
+                <p:nvPr/>
+              </p:nvSpPr>
+              <p:spPr>
+                <a:xfrm>
+                  <a:off x="972253" y="4605258"/>
+                  <a:ext cx="313419" cy="298928"/>
+                </a:xfrm>
+                <a:prstGeom prst="rect">
+                  <a:avLst/>
+                </a:prstGeom>
+                <a:blipFill>
+                  <a:blip r:embed="rId7"/>
+                  <a:stretch>
+                    <a:fillRect l="-9615" t="-22449" r="-44231" b="-18367"/>
+                  </a:stretch>
+                </a:blipFill>
+              </p:spPr>
+              <p:txBody>
+                <a:bodyPr/>
+                <a:lstStyle/>
+                <a:p>
+                  <a:r>
+                    <a:rPr lang="en-US">
+                      <a:noFill/>
+                    </a:rPr>
+                    <a:t> </a:t>
+                  </a:r>
+                </a:p>
+              </p:txBody>
+            </p:sp>
+          </mc:Fallback>
+        </mc:AlternateContent>
+        <mc:AlternateContent xmlns:mc="http://schemas.openxmlformats.org/markup-compatibility/2006">
+          <mc:Choice xmlns:a14="http://schemas.microsoft.com/office/drawing/2010/main" Requires="a14">
+            <p:sp>
+              <p:nvSpPr>
+                <p:cNvPr id="203" name="テキスト ボックス 202">
+                  <a:extLst>
+                    <a:ext uri="{FF2B5EF4-FFF2-40B4-BE49-F238E27FC236}">
+                      <a16:creationId xmlns:a16="http://schemas.microsoft.com/office/drawing/2014/main" id="{FF2BC06A-6AA5-316B-4D11-A64A61B5F8F9}"/>
+                    </a:ext>
+                  </a:extLst>
+                </p:cNvPr>
+                <p:cNvSpPr txBox="1"/>
+                <p:nvPr/>
+              </p:nvSpPr>
+              <p:spPr>
+                <a:xfrm>
+                  <a:off x="283473" y="4672541"/>
+                  <a:ext cx="295401" cy="276999"/>
+                </a:xfrm>
+                <a:prstGeom prst="rect">
+                  <a:avLst/>
+                </a:prstGeom>
+                <a:noFill/>
+              </p:spPr>
+              <p:txBody>
+                <a:bodyPr wrap="none" lIns="0" tIns="0" rIns="0" bIns="0" rtlCol="0">
+                  <a:spAutoFit/>
+                </a:bodyPr>
+                <a:lstStyle/>
+                <a:p>
+                  <a:pPr/>
+                  <a14:m>
+                    <m:oMathPara xmlns:m="http://schemas.openxmlformats.org/officeDocument/2006/math">
+                      <m:oMathParaPr>
+                        <m:jc m:val="centerGroup"/>
+                      </m:oMathParaPr>
+                      <m:oMath xmlns:m="http://schemas.openxmlformats.org/officeDocument/2006/math">
+                        <m:sSub>
+                          <m:sSubPr>
+                            <m:ctrlPr>
+                              <a:rPr lang="en-US" i="1" smtClean="0">
+                                <a:latin typeface="Cambria Math" panose="02040503050406030204" pitchFamily="18" charset="0"/>
+                              </a:rPr>
+                            </m:ctrlPr>
+                          </m:sSubPr>
+                          <m:e>
+                            <m:acc>
+                              <m:accPr>
+                                <m:chr m:val="̂"/>
+                                <m:ctrlPr>
+                                  <a:rPr lang="en-US" b="1" i="1" smtClean="0">
+                                    <a:latin typeface="Cambria Math" panose="02040503050406030204" pitchFamily="18" charset="0"/>
+                                  </a:rPr>
+                                </m:ctrlPr>
+                              </m:accPr>
+                              <m:e>
+                                <m:r>
+                                  <a:rPr lang="en-US" b="1" i="1" smtClean="0">
+                                    <a:latin typeface="Cambria Math" panose="02040503050406030204" pitchFamily="18" charset="0"/>
+                                  </a:rPr>
+                                  <m:t>𝒆</m:t>
+                                </m:r>
+                              </m:e>
+                            </m:acc>
+                          </m:e>
+                          <m:sub>
+                            <m:r>
+                              <a:rPr lang="en-US" b="0" i="1" smtClean="0">
+                                <a:latin typeface="Cambria Math" panose="02040503050406030204" pitchFamily="18" charset="0"/>
+                              </a:rPr>
+                              <m:t>𝑧</m:t>
+                            </m:r>
+                          </m:sub>
+                        </m:sSub>
+                      </m:oMath>
+                    </m:oMathPara>
+                  </a14:m>
+                  <a:endParaRPr lang="en-US" dirty="0"/>
+                </a:p>
+              </p:txBody>
+            </p:sp>
+          </mc:Choice>
+          <mc:Fallback>
+            <p:sp>
+              <p:nvSpPr>
+                <p:cNvPr id="203" name="テキスト ボックス 202">
+                  <a:extLst>
+                    <a:ext uri="{FF2B5EF4-FFF2-40B4-BE49-F238E27FC236}">
+                      <a16:creationId xmlns:a16="http://schemas.microsoft.com/office/drawing/2014/main" id="{FF2BC06A-6AA5-316B-4D11-A64A61B5F8F9}"/>
+                    </a:ext>
+                  </a:extLst>
+                </p:cNvPr>
+                <p:cNvSpPr txBox="1">
+                  <a:spLocks noRot="1" noChangeAspect="1" noMove="1" noResize="1" noEditPoints="1" noAdjustHandles="1" noChangeArrowheads="1" noChangeShapeType="1" noTextEdit="1"/>
+                </p:cNvSpPr>
+                <p:nvPr/>
+              </p:nvSpPr>
+              <p:spPr>
+                <a:xfrm>
+                  <a:off x="283473" y="4672541"/>
+                  <a:ext cx="295401" cy="276999"/>
+                </a:xfrm>
+                <a:prstGeom prst="rect">
+                  <a:avLst/>
+                </a:prstGeom>
+                <a:blipFill>
+                  <a:blip r:embed="rId8"/>
+                  <a:stretch>
+                    <a:fillRect l="-10204" t="-26667" r="-46939" b="-11111"/>
+                  </a:stretch>
+                </a:blipFill>
+              </p:spPr>
+              <p:txBody>
+                <a:bodyPr/>
+                <a:lstStyle/>
+                <a:p>
+                  <a:r>
+                    <a:rPr lang="en-US">
+                      <a:noFill/>
+                    </a:rPr>
+                    <a:t> </a:t>
+                  </a:r>
+                </a:p>
+              </p:txBody>
+            </p:sp>
+          </mc:Fallback>
+        </mc:AlternateContent>
+        <p:cxnSp>
+          <p:nvCxnSpPr>
+            <p:cNvPr id="204" name="直線コネクタ 203">
+              <a:extLst>
+                <a:ext uri="{FF2B5EF4-FFF2-40B4-BE49-F238E27FC236}">
+                  <a16:creationId xmlns:a16="http://schemas.microsoft.com/office/drawing/2014/main" id="{8B037684-2025-47E2-23F9-575E618FED94}"/>
+                </a:ext>
+              </a:extLst>
+            </p:cNvPr>
+            <p:cNvCxnSpPr>
+              <a:cxnSpLocks/>
+            </p:cNvCxnSpPr>
+            <p:nvPr/>
+          </p:nvCxnSpPr>
+          <p:spPr>
+            <a:xfrm flipV="1">
+              <a:off x="569724" y="5354389"/>
+              <a:ext cx="495830" cy="70285"/>
+            </a:xfrm>
+            <a:prstGeom prst="line">
+              <a:avLst/>
+            </a:prstGeom>
+            <a:ln w="9525">
+              <a:prstDash val="sysDash"/>
+              <a:headEnd type="arrow" w="med" len="med"/>
+              <a:tailEnd type="none" w="med" len="med"/>
+            </a:ln>
+          </p:spPr>
+          <p:style>
+            <a:lnRef idx="2">
+              <a:schemeClr val="accent1"/>
+            </a:lnRef>
+            <a:fillRef idx="0">
+              <a:schemeClr val="accent1"/>
+            </a:fillRef>
+            <a:effectRef idx="1">
+              <a:schemeClr val="accent1"/>
+            </a:effectRef>
+            <a:fontRef idx="minor">
+              <a:schemeClr val="tx1"/>
+            </a:fontRef>
+          </p:style>
+        </p:cxnSp>
+        <p:cxnSp>
+          <p:nvCxnSpPr>
+            <p:cNvPr id="206" name="直線コネクタ 205">
+              <a:extLst>
+                <a:ext uri="{FF2B5EF4-FFF2-40B4-BE49-F238E27FC236}">
+                  <a16:creationId xmlns:a16="http://schemas.microsoft.com/office/drawing/2014/main" id="{ADBBE2EF-46F2-47AF-02A5-4D76945F827A}"/>
+                </a:ext>
+              </a:extLst>
+            </p:cNvPr>
+            <p:cNvCxnSpPr>
+              <a:cxnSpLocks/>
+            </p:cNvCxnSpPr>
+            <p:nvPr/>
+          </p:nvCxnSpPr>
+          <p:spPr>
+            <a:xfrm>
+              <a:off x="1065554" y="4892381"/>
+              <a:ext cx="0" cy="447362"/>
+            </a:xfrm>
+            <a:prstGeom prst="line">
+              <a:avLst/>
+            </a:prstGeom>
+            <a:ln w="9525">
+              <a:prstDash val="sysDash"/>
+              <a:headEnd type="arrow" w="med" len="med"/>
+              <a:tailEnd type="none" w="med" len="med"/>
+            </a:ln>
+          </p:spPr>
+          <p:style>
+            <a:lnRef idx="2">
+              <a:schemeClr val="accent1"/>
+            </a:lnRef>
+            <a:fillRef idx="0">
+              <a:schemeClr val="accent1"/>
+            </a:fillRef>
+            <a:effectRef idx="1">
+              <a:schemeClr val="accent1"/>
+            </a:effectRef>
+            <a:fontRef idx="minor">
+              <a:schemeClr val="tx1"/>
+            </a:fontRef>
+          </p:style>
+        </p:cxnSp>
+        <p:cxnSp>
+          <p:nvCxnSpPr>
+            <p:cNvPr id="208" name="直線コネクタ 207">
+              <a:extLst>
+                <a:ext uri="{FF2B5EF4-FFF2-40B4-BE49-F238E27FC236}">
+                  <a16:creationId xmlns:a16="http://schemas.microsoft.com/office/drawing/2014/main" id="{BCB8AD9C-EC91-B69E-699F-E113CD1D22CA}"/>
+                </a:ext>
+              </a:extLst>
+            </p:cNvPr>
+            <p:cNvCxnSpPr>
+              <a:cxnSpLocks/>
+            </p:cNvCxnSpPr>
+            <p:nvPr/>
+          </p:nvCxnSpPr>
+          <p:spPr>
+            <a:xfrm flipH="1" flipV="1">
+              <a:off x="605142" y="4899048"/>
+              <a:ext cx="814729" cy="774439"/>
+            </a:xfrm>
+            <a:prstGeom prst="line">
+              <a:avLst/>
+            </a:prstGeom>
+            <a:ln w="9525">
+              <a:prstDash val="sysDash"/>
+              <a:headEnd type="none" w="med" len="med"/>
+              <a:tailEnd type="arrow" w="med" len="med"/>
+            </a:ln>
+          </p:spPr>
+          <p:style>
+            <a:lnRef idx="2">
+              <a:schemeClr val="accent1"/>
+            </a:lnRef>
+            <a:fillRef idx="0">
+              <a:schemeClr val="accent1"/>
+            </a:fillRef>
+            <a:effectRef idx="1">
+              <a:schemeClr val="accent1"/>
+            </a:effectRef>
+            <a:fontRef idx="minor">
+              <a:schemeClr val="tx1"/>
+            </a:fontRef>
+          </p:style>
+        </p:cxnSp>
+        <mc:AlternateContent xmlns:mc="http://schemas.openxmlformats.org/markup-compatibility/2006">
+          <mc:Choice xmlns:a14="http://schemas.microsoft.com/office/drawing/2010/main" Requires="a14">
+            <p:sp>
+              <p:nvSpPr>
+                <p:cNvPr id="212" name="テキスト ボックス 211">
+                  <a:extLst>
+                    <a:ext uri="{FF2B5EF4-FFF2-40B4-BE49-F238E27FC236}">
+                      <a16:creationId xmlns:a16="http://schemas.microsoft.com/office/drawing/2014/main" id="{ACD6B711-1ED3-37F3-E5CF-452B7C56E62C}"/>
+                    </a:ext>
+                  </a:extLst>
+                </p:cNvPr>
+                <p:cNvSpPr txBox="1"/>
+                <p:nvPr/>
+              </p:nvSpPr>
+              <p:spPr>
+                <a:xfrm>
+                  <a:off x="773841" y="1231188"/>
+                  <a:ext cx="454099" cy="276999"/>
+                </a:xfrm>
+                <a:prstGeom prst="rect">
+                  <a:avLst/>
+                </a:prstGeom>
+                <a:noFill/>
+              </p:spPr>
+              <p:txBody>
+                <a:bodyPr wrap="none" lIns="0" tIns="0" rIns="0" bIns="0" rtlCol="0">
+                  <a:spAutoFit/>
+                </a:bodyPr>
+                <a:lstStyle/>
+                <a:p>
+                  <a:pPr/>
+                  <a14:m>
+                    <m:oMathPara xmlns:m="http://schemas.openxmlformats.org/officeDocument/2006/math">
+                      <m:oMathParaPr>
+                        <m:jc m:val="centerGroup"/>
+                      </m:oMathParaPr>
+                      <m:oMath xmlns:m="http://schemas.openxmlformats.org/officeDocument/2006/math">
+                        <m:sSub>
+                          <m:sSubPr>
+                            <m:ctrlPr>
+                              <a:rPr lang="en-US" i="1" smtClean="0">
+                                <a:latin typeface="Cambria Math" panose="02040503050406030204" pitchFamily="18" charset="0"/>
+                              </a:rPr>
+                            </m:ctrlPr>
+                          </m:sSubPr>
+                          <m:e>
+                            <m:r>
+                              <a:rPr lang="en-US" b="1" i="1" smtClean="0">
+                                <a:latin typeface="Cambria Math" panose="02040503050406030204" pitchFamily="18" charset="0"/>
+                              </a:rPr>
+                              <m:t>𝒌</m:t>
+                            </m:r>
+                          </m:e>
+                          <m:sub>
+                            <m:r>
+                              <a:rPr lang="en-US" b="0" i="1" smtClean="0">
+                                <a:latin typeface="Cambria Math" panose="02040503050406030204" pitchFamily="18" charset="0"/>
+                              </a:rPr>
+                              <m:t>2</m:t>
+                            </m:r>
+                            <m:r>
+                              <a:rPr lang="en-US" i="1">
+                                <a:latin typeface="Cambria Math" panose="02040503050406030204" pitchFamily="18" charset="0"/>
+                                <a:ea typeface="Cambria Math" panose="02040503050406030204" pitchFamily="18" charset="0"/>
+                              </a:rPr>
+                              <m:t>𝜔</m:t>
+                            </m:r>
+                          </m:sub>
+                        </m:sSub>
+                      </m:oMath>
+                    </m:oMathPara>
+                  </a14:m>
+                  <a:endParaRPr lang="en-US" dirty="0"/>
+                </a:p>
+              </p:txBody>
+            </p:sp>
+          </mc:Choice>
+          <mc:Fallback>
+            <p:sp>
+              <p:nvSpPr>
+                <p:cNvPr id="212" name="テキスト ボックス 211">
+                  <a:extLst>
+                    <a:ext uri="{FF2B5EF4-FFF2-40B4-BE49-F238E27FC236}">
+                      <a16:creationId xmlns:a16="http://schemas.microsoft.com/office/drawing/2014/main" id="{ACD6B711-1ED3-37F3-E5CF-452B7C56E62C}"/>
+                    </a:ext>
+                  </a:extLst>
+                </p:cNvPr>
+                <p:cNvSpPr txBox="1">
+                  <a:spLocks noRot="1" noChangeAspect="1" noMove="1" noResize="1" noEditPoints="1" noAdjustHandles="1" noChangeArrowheads="1" noChangeShapeType="1" noTextEdit="1"/>
+                </p:cNvSpPr>
+                <p:nvPr/>
+              </p:nvSpPr>
+              <p:spPr>
+                <a:xfrm>
+                  <a:off x="773841" y="1231188"/>
+                  <a:ext cx="454099" cy="276999"/>
+                </a:xfrm>
+                <a:prstGeom prst="rect">
+                  <a:avLst/>
+                </a:prstGeom>
+                <a:blipFill>
+                  <a:blip r:embed="rId9"/>
+                  <a:stretch>
+                    <a:fillRect l="-12162" b="-13043"/>
+                  </a:stretch>
+                </a:blipFill>
+              </p:spPr>
+              <p:txBody>
+                <a:bodyPr/>
+                <a:lstStyle/>
+                <a:p>
+                  <a:r>
+                    <a:rPr lang="en-US">
+                      <a:noFill/>
+                    </a:rPr>
+                    <a:t> </a:t>
+                  </a:r>
+                </a:p>
+              </p:txBody>
+            </p:sp>
+          </mc:Fallback>
+        </mc:AlternateContent>
+        <p:cxnSp>
+          <p:nvCxnSpPr>
+            <p:cNvPr id="5" name="直線コネクタ 4">
+              <a:extLst>
+                <a:ext uri="{FF2B5EF4-FFF2-40B4-BE49-F238E27FC236}">
+                  <a16:creationId xmlns:a16="http://schemas.microsoft.com/office/drawing/2014/main" id="{150392C5-3C01-F447-72B2-A871CBD12E56}"/>
+                </a:ext>
+              </a:extLst>
+            </p:cNvPr>
+            <p:cNvCxnSpPr>
+              <a:cxnSpLocks/>
+            </p:cNvCxnSpPr>
+            <p:nvPr/>
+          </p:nvCxnSpPr>
+          <p:spPr>
+            <a:xfrm flipV="1">
+              <a:off x="3496504" y="4041472"/>
+              <a:ext cx="0" cy="837277"/>
+            </a:xfrm>
+            <a:prstGeom prst="line">
+              <a:avLst/>
+            </a:prstGeom>
+            <a:ln>
+              <a:prstDash val="solid"/>
+              <a:headEnd type="arrow" w="med" len="med"/>
+              <a:tailEnd type="arrow" w="med" len="med"/>
+            </a:ln>
+          </p:spPr>
+          <p:style>
+            <a:lnRef idx="1">
+              <a:schemeClr val="accent1"/>
+            </a:lnRef>
+            <a:fillRef idx="0">
+              <a:schemeClr val="accent1"/>
+            </a:fillRef>
+            <a:effectRef idx="0">
+              <a:schemeClr val="accent1"/>
+            </a:effectRef>
+            <a:fontRef idx="minor">
+              <a:schemeClr val="tx1"/>
+            </a:fontRef>
+          </p:style>
+        </p:cxnSp>
+        <p:cxnSp>
+          <p:nvCxnSpPr>
+            <p:cNvPr id="6" name="直線コネクタ 5">
+              <a:extLst>
+                <a:ext uri="{FF2B5EF4-FFF2-40B4-BE49-F238E27FC236}">
+                  <a16:creationId xmlns:a16="http://schemas.microsoft.com/office/drawing/2014/main" id="{0B90A7AE-15B5-3904-CE1A-2642EE9DE2C0}"/>
+                </a:ext>
+              </a:extLst>
+            </p:cNvPr>
+            <p:cNvCxnSpPr>
+              <a:cxnSpLocks/>
+            </p:cNvCxnSpPr>
+            <p:nvPr/>
+          </p:nvCxnSpPr>
+          <p:spPr>
+            <a:xfrm flipV="1">
+              <a:off x="3648904" y="4193872"/>
+              <a:ext cx="0" cy="837277"/>
+            </a:xfrm>
+            <a:prstGeom prst="line">
+              <a:avLst/>
+            </a:prstGeom>
+            <a:ln>
+              <a:prstDash val="solid"/>
+              <a:headEnd type="arrow" w="med" len="med"/>
+              <a:tailEnd type="arrow" w="med" len="med"/>
+            </a:ln>
+          </p:spPr>
+          <p:style>
+            <a:lnRef idx="1">
+              <a:schemeClr val="accent1"/>
+            </a:lnRef>
+            <a:fillRef idx="0">
+              <a:schemeClr val="accent1"/>
+            </a:fillRef>
+            <a:effectRef idx="0">
+              <a:schemeClr val="accent1"/>
+            </a:effectRef>
+            <a:fontRef idx="minor">
+              <a:schemeClr val="tx1"/>
+            </a:fontRef>
+          </p:style>
+        </p:cxnSp>
+        <p:cxnSp>
+          <p:nvCxnSpPr>
+            <p:cNvPr id="7" name="直線コネクタ 6">
+              <a:extLst>
+                <a:ext uri="{FF2B5EF4-FFF2-40B4-BE49-F238E27FC236}">
+                  <a16:creationId xmlns:a16="http://schemas.microsoft.com/office/drawing/2014/main" id="{9B5703FB-FA15-2FD7-7E38-055A7054E862}"/>
+                </a:ext>
+              </a:extLst>
+            </p:cNvPr>
+            <p:cNvCxnSpPr>
+              <a:cxnSpLocks/>
+            </p:cNvCxnSpPr>
+            <p:nvPr/>
+          </p:nvCxnSpPr>
+          <p:spPr>
+            <a:xfrm flipV="1">
+              <a:off x="3801304" y="4346272"/>
+              <a:ext cx="0" cy="837277"/>
+            </a:xfrm>
+            <a:prstGeom prst="line">
+              <a:avLst/>
+            </a:prstGeom>
+            <a:ln>
+              <a:prstDash val="solid"/>
+              <a:headEnd type="arrow" w="med" len="med"/>
+              <a:tailEnd type="arrow" w="med" len="med"/>
+            </a:ln>
+          </p:spPr>
+          <p:style>
+            <a:lnRef idx="1">
+              <a:schemeClr val="accent1"/>
+            </a:lnRef>
+            <a:fillRef idx="0">
+              <a:schemeClr val="accent1"/>
+            </a:fillRef>
+            <a:effectRef idx="0">
+              <a:schemeClr val="accent1"/>
+            </a:effectRef>
+            <a:fontRef idx="minor">
+              <a:schemeClr val="tx1"/>
+            </a:fontRef>
+          </p:style>
+        </p:cxnSp>
+        <p:cxnSp>
+          <p:nvCxnSpPr>
+            <p:cNvPr id="12" name="直線コネクタ 11">
+              <a:extLst>
+                <a:ext uri="{FF2B5EF4-FFF2-40B4-BE49-F238E27FC236}">
+                  <a16:creationId xmlns:a16="http://schemas.microsoft.com/office/drawing/2014/main" id="{CBD7E590-DAE9-1C12-1E26-E6DBF5AEA5BD}"/>
+                </a:ext>
+              </a:extLst>
+            </p:cNvPr>
+            <p:cNvCxnSpPr>
+              <a:cxnSpLocks/>
+            </p:cNvCxnSpPr>
+            <p:nvPr/>
+          </p:nvCxnSpPr>
+          <p:spPr>
+            <a:xfrm flipH="1">
+              <a:off x="1419871" y="2401591"/>
+              <a:ext cx="597326" cy="77939"/>
+            </a:xfrm>
+            <a:prstGeom prst="line">
+              <a:avLst/>
+            </a:prstGeom>
+            <a:ln>
+              <a:headEnd type="arrow" w="med" len="med"/>
+              <a:tailEnd type="arrow" w="med" len="med"/>
+            </a:ln>
+          </p:spPr>
+          <p:style>
+            <a:lnRef idx="1">
+              <a:schemeClr val="accent5"/>
+            </a:lnRef>
+            <a:fillRef idx="0">
+              <a:schemeClr val="accent5"/>
+            </a:fillRef>
+            <a:effectRef idx="0">
+              <a:schemeClr val="accent5"/>
+            </a:effectRef>
+            <a:fontRef idx="minor">
+              <a:schemeClr val="tx1"/>
+            </a:fontRef>
+          </p:style>
+        </p:cxnSp>
+        <p:cxnSp>
+          <p:nvCxnSpPr>
+            <p:cNvPr id="13" name="直線コネクタ 12">
+              <a:extLst>
+                <a:ext uri="{FF2B5EF4-FFF2-40B4-BE49-F238E27FC236}">
+                  <a16:creationId xmlns:a16="http://schemas.microsoft.com/office/drawing/2014/main" id="{8CCB6D77-074A-D2FB-AAAE-CC98A68C8613}"/>
+                </a:ext>
+              </a:extLst>
+            </p:cNvPr>
+            <p:cNvCxnSpPr>
+              <a:cxnSpLocks/>
+            </p:cNvCxnSpPr>
+            <p:nvPr/>
+          </p:nvCxnSpPr>
+          <p:spPr>
+            <a:xfrm flipH="1">
+              <a:off x="1512761" y="2506400"/>
+              <a:ext cx="597326" cy="77939"/>
+            </a:xfrm>
+            <a:prstGeom prst="line">
+              <a:avLst/>
+            </a:prstGeom>
+            <a:ln>
+              <a:headEnd type="arrow" w="med" len="med"/>
+              <a:tailEnd type="arrow" w="med" len="med"/>
+            </a:ln>
+          </p:spPr>
+          <p:style>
+            <a:lnRef idx="1">
+              <a:schemeClr val="accent5"/>
+            </a:lnRef>
+            <a:fillRef idx="0">
+              <a:schemeClr val="accent5"/>
+            </a:fillRef>
+            <a:effectRef idx="0">
+              <a:schemeClr val="accent5"/>
+            </a:effectRef>
+            <a:fontRef idx="minor">
+              <a:schemeClr val="tx1"/>
+            </a:fontRef>
+          </p:style>
+        </p:cxnSp>
+        <p:cxnSp>
+          <p:nvCxnSpPr>
+            <p:cNvPr id="14" name="直線コネクタ 13">
+              <a:extLst>
+                <a:ext uri="{FF2B5EF4-FFF2-40B4-BE49-F238E27FC236}">
+                  <a16:creationId xmlns:a16="http://schemas.microsoft.com/office/drawing/2014/main" id="{242E6391-B412-F400-998D-FD5BE360AF82}"/>
+                </a:ext>
+              </a:extLst>
+            </p:cNvPr>
+            <p:cNvCxnSpPr>
+              <a:cxnSpLocks/>
+            </p:cNvCxnSpPr>
+            <p:nvPr/>
+          </p:nvCxnSpPr>
+          <p:spPr>
+            <a:xfrm flipH="1">
+              <a:off x="1594422" y="2613734"/>
+              <a:ext cx="597326" cy="77939"/>
+            </a:xfrm>
+            <a:prstGeom prst="line">
+              <a:avLst/>
+            </a:prstGeom>
+            <a:ln>
+              <a:headEnd type="arrow" w="med" len="med"/>
+              <a:tailEnd type="arrow" w="med" len="med"/>
+            </a:ln>
+          </p:spPr>
+          <p:style>
+            <a:lnRef idx="1">
+              <a:schemeClr val="accent5"/>
+            </a:lnRef>
+            <a:fillRef idx="0">
+              <a:schemeClr val="accent5"/>
+            </a:fillRef>
+            <a:effectRef idx="0">
+              <a:schemeClr val="accent5"/>
+            </a:effectRef>
+            <a:fontRef idx="minor">
+              <a:schemeClr val="tx1"/>
+            </a:fontRef>
+          </p:style>
+        </p:cxnSp>
+        <p:cxnSp>
+          <p:nvCxnSpPr>
+            <p:cNvPr id="15" name="直線コネクタ 14">
+              <a:extLst>
+                <a:ext uri="{FF2B5EF4-FFF2-40B4-BE49-F238E27FC236}">
+                  <a16:creationId xmlns:a16="http://schemas.microsoft.com/office/drawing/2014/main" id="{52DB9722-CB1A-F077-2BF7-39EDE7799FB6}"/>
+                </a:ext>
+              </a:extLst>
+            </p:cNvPr>
+            <p:cNvCxnSpPr>
+              <a:cxnSpLocks/>
+            </p:cNvCxnSpPr>
+            <p:nvPr/>
+          </p:nvCxnSpPr>
+          <p:spPr>
+            <a:xfrm flipH="1">
+              <a:off x="1692517" y="2719420"/>
+              <a:ext cx="597326" cy="77939"/>
+            </a:xfrm>
+            <a:prstGeom prst="line">
+              <a:avLst/>
+            </a:prstGeom>
+            <a:ln>
+              <a:headEnd type="arrow" w="med" len="med"/>
+              <a:tailEnd type="arrow" w="med" len="med"/>
+            </a:ln>
+          </p:spPr>
+          <p:style>
+            <a:lnRef idx="1">
+              <a:schemeClr val="accent5"/>
+            </a:lnRef>
+            <a:fillRef idx="0">
+              <a:schemeClr val="accent5"/>
+            </a:fillRef>
+            <a:effectRef idx="0">
+              <a:schemeClr val="accent5"/>
+            </a:effectRef>
+            <a:fontRef idx="minor">
+              <a:schemeClr val="tx1"/>
+            </a:fontRef>
+          </p:style>
+        </p:cxnSp>
+      </p:grpSp>
+      <mc:AlternateContent xmlns:mc="http://schemas.openxmlformats.org/markup-compatibility/2006">
+        <mc:Choice xmlns:a14="http://schemas.microsoft.com/office/drawing/2010/main" Requires="a14">
+          <p:sp>
+            <p:nvSpPr>
+              <p:cNvPr id="3" name="テキスト ボックス 2">
+                <a:extLst>
+                  <a:ext uri="{FF2B5EF4-FFF2-40B4-BE49-F238E27FC236}">
+                    <a16:creationId xmlns:a16="http://schemas.microsoft.com/office/drawing/2014/main" id="{60F48FD9-03D9-85AB-75A4-844BE93043CC}"/>
+                  </a:ext>
+                </a:extLst>
+              </p:cNvPr>
+              <p:cNvSpPr txBox="1"/>
+              <p:nvPr/>
+            </p:nvSpPr>
+            <p:spPr>
+              <a:xfrm>
+                <a:off x="1152939" y="6433930"/>
+                <a:ext cx="2397259" cy="369332"/>
+              </a:xfrm>
+              <a:prstGeom prst="rect">
+                <a:avLst/>
+              </a:prstGeom>
+              <a:noFill/>
+            </p:spPr>
+            <p:txBody>
+              <a:bodyPr wrap="none" rtlCol="0">
+                <a:spAutoFit/>
+              </a:bodyPr>
+              <a:lstStyle/>
+              <a:p>
+                <a:r>
+                  <a:rPr lang="en-US" dirty="0"/>
+                  <a:t>Surface normal = </a:t>
+                </a:r>
+                <a14:m>
+                  <m:oMath xmlns:m="http://schemas.openxmlformats.org/officeDocument/2006/math">
+                    <m:sSub>
+                      <m:sSubPr>
+                        <m:ctrlPr>
+                          <a:rPr lang="en-US" i="1">
+                            <a:latin typeface="Cambria Math" panose="02040503050406030204" pitchFamily="18" charset="0"/>
+                          </a:rPr>
+                        </m:ctrlPr>
+                      </m:sSubPr>
+                      <m:e>
+                        <m:acc>
+                          <m:accPr>
+                            <m:chr m:val="̂"/>
+                            <m:ctrlPr>
+                              <a:rPr lang="en-US" b="1" i="1">
+                                <a:latin typeface="Cambria Math" panose="02040503050406030204" pitchFamily="18" charset="0"/>
+                              </a:rPr>
+                            </m:ctrlPr>
+                          </m:accPr>
+                          <m:e>
+                            <m:r>
+                              <a:rPr lang="en-US" b="1" i="1">
+                                <a:latin typeface="Cambria Math" panose="02040503050406030204" pitchFamily="18" charset="0"/>
+                              </a:rPr>
+                              <m:t>𝒆</m:t>
+                            </m:r>
+                          </m:e>
+                        </m:acc>
+                      </m:e>
+                      <m:sub>
+                        <m:r>
+                          <a:rPr lang="en-US" i="1">
+                            <a:latin typeface="Cambria Math" panose="02040503050406030204" pitchFamily="18" charset="0"/>
+                          </a:rPr>
+                          <m:t>𝑧</m:t>
+                        </m:r>
+                      </m:sub>
+                    </m:sSub>
+                  </m:oMath>
+                </a14:m>
+                <a:r>
+                  <a:rPr lang="en-US" dirty="0"/>
+                  <a:t> </a:t>
+                </a:r>
+              </a:p>
+            </p:txBody>
+          </p:sp>
+        </mc:Choice>
+        <mc:Fallback>
+          <p:sp>
+            <p:nvSpPr>
+              <p:cNvPr id="3" name="テキスト ボックス 2">
+                <a:extLst>
+                  <a:ext uri="{FF2B5EF4-FFF2-40B4-BE49-F238E27FC236}">
+                    <a16:creationId xmlns:a16="http://schemas.microsoft.com/office/drawing/2014/main" id="{60F48FD9-03D9-85AB-75A4-844BE93043CC}"/>
+                  </a:ext>
+                </a:extLst>
+              </p:cNvPr>
+              <p:cNvSpPr txBox="1">
+                <a:spLocks noRot="1" noChangeAspect="1" noMove="1" noResize="1" noEditPoints="1" noAdjustHandles="1" noChangeArrowheads="1" noChangeShapeType="1" noTextEdit="1"/>
+              </p:cNvSpPr>
+              <p:nvPr/>
+            </p:nvSpPr>
+            <p:spPr>
+              <a:xfrm>
+                <a:off x="1152939" y="6433930"/>
+                <a:ext cx="2397259" cy="369332"/>
+              </a:xfrm>
+              <a:prstGeom prst="rect">
+                <a:avLst/>
+              </a:prstGeom>
+              <a:blipFill>
+                <a:blip r:embed="rId10"/>
+                <a:stretch>
+                  <a:fillRect l="-2036" t="-6557" r="-3817" b="-26230"/>
+                </a:stretch>
+              </a:blipFill>
+            </p:spPr>
+            <p:txBody>
+              <a:bodyPr/>
+              <a:lstStyle/>
+              <a:p>
+                <a:r>
+                  <a:rPr lang="en-US">
+                    <a:noFill/>
+                  </a:rPr>
+                  <a:t> </a:t>
+                </a:r>
+              </a:p>
+            </p:txBody>
+          </p:sp>
+        </mc:Fallback>
+      </mc:AlternateContent>
+    </p:spTree>
+    <p:extLst>
+      <p:ext uri="{BB962C8B-B14F-4D97-AF65-F5344CB8AC3E}">
+        <p14:creationId xmlns:p14="http://schemas.microsoft.com/office/powerpoint/2010/main" val="3765132764"/>
+      </p:ext>
+    </p:extLst>
+  </p:cSld>
+  <p:clrMapOvr>
+    <a:masterClrMapping/>
+  </p:clrMapOvr>
+</p:sld>
+</file>
+
+<file path=ppt/slides/slide14.xml><?xml version="1.0" encoding="utf-8"?>
+<p:sld xmlns:a="http://schemas.openxmlformats.org/drawingml/2006/main" xmlns:r="http://schemas.openxmlformats.org/officeDocument/2006/relationships" xmlns:p="http://schemas.openxmlformats.org/presentationml/2006/main">
+  <p:cSld>
+    <p:spTree>
+      <p:nvGrpSpPr>
+        <p:cNvPr id="1" name="">
+          <a:extLst>
+            <a:ext uri="{FF2B5EF4-FFF2-40B4-BE49-F238E27FC236}">
+              <a16:creationId xmlns:a16="http://schemas.microsoft.com/office/drawing/2014/main" id="{B4932CE8-FC63-0D31-D1DA-1D1A548FDFC8}"/>
+            </a:ext>
+          </a:extLst>
+        </p:cNvPr>
+        <p:cNvGrpSpPr/>
+        <p:nvPr/>
+      </p:nvGrpSpPr>
+      <p:grpSpPr>
+        <a:xfrm>
+          <a:off x="0" y="0"/>
+          <a:ext cx="0" cy="0"/>
+          <a:chOff x="0" y="0"/>
+          <a:chExt cx="0" cy="0"/>
+        </a:xfrm>
+      </p:grpSpPr>
+      <p:grpSp>
+        <p:nvGrpSpPr>
+          <p:cNvPr id="171" name="グループ化 170">
+            <a:extLst>
+              <a:ext uri="{FF2B5EF4-FFF2-40B4-BE49-F238E27FC236}">
+                <a16:creationId xmlns:a16="http://schemas.microsoft.com/office/drawing/2014/main" id="{676647FD-B9D8-F8CB-BADF-142739ADCF25}"/>
+              </a:ext>
+            </a:extLst>
+          </p:cNvPr>
+          <p:cNvGrpSpPr/>
+          <p:nvPr/>
+        </p:nvGrpSpPr>
+        <p:grpSpPr>
+          <a:xfrm>
+            <a:off x="1437977" y="866518"/>
+            <a:ext cx="7797785" cy="5522126"/>
+            <a:chOff x="-263823" y="1057018"/>
+            <a:chExt cx="7797785" cy="5522126"/>
+          </a:xfrm>
+        </p:grpSpPr>
+        <p:grpSp>
+          <p:nvGrpSpPr>
+            <p:cNvPr id="37" name="グループ化 36">
+              <a:extLst>
+                <a:ext uri="{FF2B5EF4-FFF2-40B4-BE49-F238E27FC236}">
+                  <a16:creationId xmlns:a16="http://schemas.microsoft.com/office/drawing/2014/main" id="{523E0F75-90EC-EC08-EC0F-ADCD9661C9A2}"/>
+                </a:ext>
+              </a:extLst>
+            </p:cNvPr>
+            <p:cNvGrpSpPr/>
+            <p:nvPr/>
+          </p:nvGrpSpPr>
+          <p:grpSpPr>
+            <a:xfrm>
+              <a:off x="-263823" y="1057018"/>
+              <a:ext cx="7797785" cy="4903687"/>
+              <a:chOff x="-1373774" y="1231188"/>
+              <a:chExt cx="7797785" cy="4903687"/>
+            </a:xfrm>
+          </p:grpSpPr>
+          <p:sp>
+            <p:nvSpPr>
+              <p:cNvPr id="180" name="二等辺三角形 179">
+                <a:extLst>
+                  <a:ext uri="{FF2B5EF4-FFF2-40B4-BE49-F238E27FC236}">
+                    <a16:creationId xmlns:a16="http://schemas.microsoft.com/office/drawing/2014/main" id="{8F953448-758B-31CD-0A02-20F48018AC22}"/>
+                  </a:ext>
+                </a:extLst>
+              </p:cNvPr>
+              <p:cNvSpPr/>
+              <p:nvPr/>
+            </p:nvSpPr>
+            <p:spPr>
+              <a:xfrm rot="8323263">
+                <a:off x="707068" y="1526725"/>
+                <a:ext cx="1427346" cy="3305339"/>
+              </a:xfrm>
+              <a:prstGeom prst="triangle">
+                <a:avLst>
+                  <a:gd name="adj" fmla="val 0"/>
+                </a:avLst>
+              </a:prstGeom>
+              <a:solidFill>
+                <a:schemeClr val="bg2">
+                  <a:lumMod val="50000"/>
+                  <a:alpha val="20000"/>
+                </a:schemeClr>
+              </a:solidFill>
+              <a:ln>
+                <a:noFill/>
+              </a:ln>
+            </p:spPr>
+            <p:style>
+              <a:lnRef idx="2">
+                <a:schemeClr val="accent1">
+                  <a:shade val="15000"/>
+                </a:schemeClr>
+              </a:lnRef>
+              <a:fillRef idx="1">
+                <a:schemeClr val="accent1"/>
+              </a:fillRef>
+              <a:effectRef idx="0">
+                <a:schemeClr val="accent1"/>
+              </a:effectRef>
+              <a:fontRef idx="minor">
+                <a:schemeClr val="lt1"/>
+              </a:fontRef>
+            </p:style>
+            <p:txBody>
+              <a:bodyPr rtlCol="0" anchor="ctr"/>
+              <a:lstStyle/>
+              <a:p>
+                <a:pPr algn="ctr"/>
+                <a:endParaRPr lang="en-US"/>
+              </a:p>
+            </p:txBody>
+          </p:sp>
+          <p:sp>
+            <p:nvSpPr>
+              <p:cNvPr id="36" name="正方形/長方形 35">
+                <a:extLst>
+                  <a:ext uri="{FF2B5EF4-FFF2-40B4-BE49-F238E27FC236}">
+                    <a16:creationId xmlns:a16="http://schemas.microsoft.com/office/drawing/2014/main" id="{56E31054-4C6F-71D5-6FD0-6EBCCEDE91C6}"/>
+                  </a:ext>
+                </a:extLst>
+              </p:cNvPr>
+              <p:cNvSpPr/>
+              <p:nvPr/>
+            </p:nvSpPr>
+            <p:spPr>
+              <a:xfrm rot="3743983">
+                <a:off x="-885231" y="1162212"/>
+                <a:ext cx="2422166" cy="3399252"/>
+              </a:xfrm>
+              <a:prstGeom prst="rect">
+                <a:avLst/>
+              </a:prstGeom>
+              <a:solidFill>
+                <a:schemeClr val="bg1"/>
+              </a:solidFill>
+              <a:ln>
+                <a:noFill/>
+              </a:ln>
+            </p:spPr>
+            <p:style>
+              <a:lnRef idx="2">
+                <a:schemeClr val="accent1">
+                  <a:shade val="15000"/>
+                </a:schemeClr>
+              </a:lnRef>
+              <a:fillRef idx="1">
+                <a:schemeClr val="accent1"/>
+              </a:fillRef>
+              <a:effectRef idx="0">
+                <a:schemeClr val="accent1"/>
+              </a:effectRef>
+              <a:fontRef idx="minor">
+                <a:schemeClr val="lt1"/>
+              </a:fontRef>
+            </p:style>
+            <p:txBody>
+              <a:bodyPr rtlCol="0" anchor="ctr"/>
+              <a:lstStyle/>
+              <a:p>
+                <a:pPr algn="ctr"/>
+                <a:endParaRPr lang="en-US"/>
+              </a:p>
+            </p:txBody>
+          </p:sp>
+          <p:sp>
+            <p:nvSpPr>
+              <p:cNvPr id="31" name="二等辺三角形 30">
+                <a:extLst>
+                  <a:ext uri="{FF2B5EF4-FFF2-40B4-BE49-F238E27FC236}">
+                    <a16:creationId xmlns:a16="http://schemas.microsoft.com/office/drawing/2014/main" id="{053F6D08-41BC-F51C-A6F6-B8CDB7DC25E7}"/>
+                  </a:ext>
+                </a:extLst>
+              </p:cNvPr>
+              <p:cNvSpPr/>
+              <p:nvPr/>
+            </p:nvSpPr>
+            <p:spPr>
+              <a:xfrm rot="19088861">
+                <a:off x="3296095" y="2595169"/>
+                <a:ext cx="3127916" cy="2130097"/>
+              </a:xfrm>
+              <a:prstGeom prst="triangle">
+                <a:avLst>
+                  <a:gd name="adj" fmla="val 0"/>
+                </a:avLst>
+              </a:prstGeom>
+              <a:solidFill>
+                <a:schemeClr val="bg2">
+                  <a:lumMod val="50000"/>
+                  <a:alpha val="20000"/>
+                </a:schemeClr>
+              </a:solidFill>
+              <a:ln>
+                <a:noFill/>
+              </a:ln>
+            </p:spPr>
+            <p:style>
+              <a:lnRef idx="2">
+                <a:schemeClr val="accent1">
+                  <a:shade val="15000"/>
+                </a:schemeClr>
+              </a:lnRef>
+              <a:fillRef idx="1">
+                <a:schemeClr val="accent1"/>
+              </a:fillRef>
+              <a:effectRef idx="0">
+                <a:schemeClr val="accent1"/>
+              </a:effectRef>
+              <a:fontRef idx="minor">
+                <a:schemeClr val="lt1"/>
+              </a:fontRef>
+            </p:style>
+            <p:txBody>
+              <a:bodyPr rtlCol="0" anchor="ctr"/>
+              <a:lstStyle/>
+              <a:p>
+                <a:pPr algn="ctr"/>
+                <a:endParaRPr lang="en-US"/>
+              </a:p>
+            </p:txBody>
+          </p:sp>
+          <p:sp>
+            <p:nvSpPr>
+              <p:cNvPr id="34" name="正方形/長方形 33">
+                <a:extLst>
+                  <a:ext uri="{FF2B5EF4-FFF2-40B4-BE49-F238E27FC236}">
+                    <a16:creationId xmlns:a16="http://schemas.microsoft.com/office/drawing/2014/main" id="{9B4C47D8-5653-946E-25C0-E3D177A3002B}"/>
+                  </a:ext>
+                </a:extLst>
+              </p:cNvPr>
+              <p:cNvSpPr/>
+              <p:nvPr/>
+            </p:nvSpPr>
+            <p:spPr>
+              <a:xfrm rot="1777756">
+                <a:off x="5032056" y="3027111"/>
+                <a:ext cx="1176800" cy="3052341"/>
+              </a:xfrm>
+              <a:prstGeom prst="rect">
+                <a:avLst/>
+              </a:prstGeom>
+              <a:solidFill>
+                <a:schemeClr val="bg1"/>
+              </a:solidFill>
+              <a:ln>
+                <a:noFill/>
+              </a:ln>
+            </p:spPr>
+            <p:style>
+              <a:lnRef idx="2">
+                <a:schemeClr val="accent1">
+                  <a:shade val="15000"/>
+                </a:schemeClr>
+              </a:lnRef>
+              <a:fillRef idx="1">
+                <a:schemeClr val="accent1"/>
+              </a:fillRef>
+              <a:effectRef idx="0">
+                <a:schemeClr val="accent1"/>
+              </a:effectRef>
+              <a:fontRef idx="minor">
+                <a:schemeClr val="lt1"/>
+              </a:fontRef>
+            </p:style>
+            <p:txBody>
+              <a:bodyPr rtlCol="0" anchor="ctr"/>
+              <a:lstStyle/>
+              <a:p>
+                <a:pPr algn="ctr"/>
+                <a:endParaRPr lang="en-US"/>
+              </a:p>
+            </p:txBody>
+          </p:sp>
+          <p:cxnSp>
+            <p:nvCxnSpPr>
+              <p:cNvPr id="20" name="直線コネクタ 19">
+                <a:extLst>
+                  <a:ext uri="{FF2B5EF4-FFF2-40B4-BE49-F238E27FC236}">
+                    <a16:creationId xmlns:a16="http://schemas.microsoft.com/office/drawing/2014/main" id="{4069FAE7-DCE3-8368-4C29-3D6328386224}"/>
+                  </a:ext>
+                </a:extLst>
+              </p:cNvPr>
+              <p:cNvCxnSpPr>
+                <a:cxnSpLocks/>
+              </p:cNvCxnSpPr>
+              <p:nvPr/>
+            </p:nvCxnSpPr>
+            <p:spPr>
+              <a:xfrm flipH="1">
+                <a:off x="1881919" y="2923745"/>
+                <a:ext cx="597326" cy="77939"/>
+              </a:xfrm>
+              <a:prstGeom prst="line">
+                <a:avLst/>
+              </a:prstGeom>
+              <a:ln>
+                <a:headEnd type="arrow" w="med" len="med"/>
+                <a:tailEnd type="arrow" w="med" len="med"/>
+              </a:ln>
+            </p:spPr>
+            <p:style>
+              <a:lnRef idx="1">
+                <a:schemeClr val="accent5"/>
+              </a:lnRef>
+              <a:fillRef idx="0">
+                <a:schemeClr val="accent5"/>
+              </a:fillRef>
+              <a:effectRef idx="0">
+                <a:schemeClr val="accent5"/>
+              </a:effectRef>
+              <a:fontRef idx="minor">
+                <a:schemeClr val="tx1"/>
+              </a:fontRef>
+            </p:style>
+          </p:cxnSp>
+          <p:sp>
+            <p:nvSpPr>
+              <p:cNvPr id="178" name="円弧 177">
+                <a:extLst>
+                  <a:ext uri="{FF2B5EF4-FFF2-40B4-BE49-F238E27FC236}">
+                    <a16:creationId xmlns:a16="http://schemas.microsoft.com/office/drawing/2014/main" id="{2A2BC753-74A4-22CD-55C6-2A9758ED9DAA}"/>
+                  </a:ext>
+                </a:extLst>
+              </p:cNvPr>
+              <p:cNvSpPr/>
+              <p:nvPr/>
+            </p:nvSpPr>
+            <p:spPr>
+              <a:xfrm rot="16200000">
+                <a:off x="2459254" y="3516836"/>
+                <a:ext cx="301908" cy="252800"/>
+              </a:xfrm>
+              <a:prstGeom prst="arc">
+                <a:avLst/>
+              </a:prstGeom>
+            </p:spPr>
+            <p:style>
+              <a:lnRef idx="2">
+                <a:schemeClr val="dk1"/>
+              </a:lnRef>
+              <a:fillRef idx="0">
+                <a:schemeClr val="dk1"/>
+              </a:fillRef>
+              <a:effectRef idx="1">
+                <a:schemeClr val="dk1"/>
+              </a:effectRef>
+              <a:fontRef idx="minor">
+                <a:schemeClr val="tx1"/>
+              </a:fontRef>
+            </p:style>
+            <p:txBody>
+              <a:bodyPr rtlCol="0" anchor="ctr"/>
+              <a:lstStyle/>
+              <a:p>
+                <a:pPr algn="ctr"/>
+                <a:endParaRPr lang="en-US"/>
+              </a:p>
+            </p:txBody>
+          </p:sp>
+          <p:cxnSp>
+            <p:nvCxnSpPr>
+              <p:cNvPr id="173" name="直線コネクタ 172">
+                <a:extLst>
+                  <a:ext uri="{FF2B5EF4-FFF2-40B4-BE49-F238E27FC236}">
+                    <a16:creationId xmlns:a16="http://schemas.microsoft.com/office/drawing/2014/main" id="{17626213-B6BE-4EBB-34E4-2244CACCEED0}"/>
+                  </a:ext>
+                </a:extLst>
+              </p:cNvPr>
+              <p:cNvCxnSpPr>
+                <a:cxnSpLocks/>
+              </p:cNvCxnSpPr>
+              <p:nvPr/>
+            </p:nvCxnSpPr>
+            <p:spPr>
+              <a:xfrm flipH="1">
+                <a:off x="1795779" y="2824353"/>
+                <a:ext cx="597326" cy="77939"/>
+              </a:xfrm>
+              <a:prstGeom prst="line">
+                <a:avLst/>
+              </a:prstGeom>
+              <a:ln>
+                <a:headEnd type="arrow" w="med" len="med"/>
+                <a:tailEnd type="arrow" w="med" len="med"/>
+              </a:ln>
+            </p:spPr>
+            <p:style>
+              <a:lnRef idx="1">
+                <a:schemeClr val="accent5"/>
+              </a:lnRef>
+              <a:fillRef idx="0">
+                <a:schemeClr val="accent5"/>
+              </a:fillRef>
+              <a:effectRef idx="0">
+                <a:schemeClr val="accent5"/>
+              </a:effectRef>
+              <a:fontRef idx="minor">
+                <a:schemeClr val="tx1"/>
+              </a:fontRef>
+            </p:style>
+          </p:cxnSp>
+          <p:cxnSp>
+            <p:nvCxnSpPr>
+              <p:cNvPr id="163" name="直線矢印コネクタ 162">
+                <a:extLst>
+                  <a:ext uri="{FF2B5EF4-FFF2-40B4-BE49-F238E27FC236}">
+                    <a16:creationId xmlns:a16="http://schemas.microsoft.com/office/drawing/2014/main" id="{FD737309-5506-701E-4240-BC1D9CAB0CE3}"/>
+                  </a:ext>
+                </a:extLst>
+              </p:cNvPr>
+              <p:cNvCxnSpPr>
+                <a:cxnSpLocks/>
+              </p:cNvCxnSpPr>
+              <p:nvPr/>
+            </p:nvCxnSpPr>
+            <p:spPr>
+              <a:xfrm flipH="1" flipV="1">
+                <a:off x="1086740" y="1699147"/>
+                <a:ext cx="1934960" cy="2235736"/>
+              </a:xfrm>
+              <a:prstGeom prst="straightConnector1">
+                <a:avLst/>
+              </a:prstGeom>
+              <a:ln>
+                <a:tailEnd type="triangle"/>
+              </a:ln>
+            </p:spPr>
+            <p:style>
+              <a:lnRef idx="2">
+                <a:schemeClr val="accent5"/>
+              </a:lnRef>
+              <a:fillRef idx="0">
+                <a:schemeClr val="accent5"/>
+              </a:fillRef>
+              <a:effectRef idx="1">
+                <a:schemeClr val="accent5"/>
+              </a:effectRef>
+              <a:fontRef idx="minor">
+                <a:schemeClr val="tx1"/>
+              </a:fontRef>
+            </p:style>
+          </p:cxnSp>
+          <p:cxnSp>
+            <p:nvCxnSpPr>
+              <p:cNvPr id="129" name="直線コネクタ 128">
+                <a:extLst>
+                  <a:ext uri="{FF2B5EF4-FFF2-40B4-BE49-F238E27FC236}">
+                    <a16:creationId xmlns:a16="http://schemas.microsoft.com/office/drawing/2014/main" id="{639B7E91-3F4A-EBBD-C91D-5768D1AF3314}"/>
+                  </a:ext>
+                </a:extLst>
+              </p:cNvPr>
+              <p:cNvCxnSpPr>
+                <a:cxnSpLocks/>
+              </p:cNvCxnSpPr>
+              <p:nvPr/>
+            </p:nvCxnSpPr>
+            <p:spPr>
+              <a:xfrm flipH="1" flipV="1">
+                <a:off x="844186" y="2902292"/>
+                <a:ext cx="4800402" cy="2285112"/>
+              </a:xfrm>
+              <a:prstGeom prst="line">
+                <a:avLst/>
+              </a:prstGeom>
+              <a:ln w="19050">
+                <a:headEnd type="none" w="med" len="med"/>
+                <a:tailEnd type="none" w="med" len="med"/>
+              </a:ln>
+            </p:spPr>
+            <p:style>
+              <a:lnRef idx="1">
+                <a:schemeClr val="accent1"/>
+              </a:lnRef>
+              <a:fillRef idx="0">
+                <a:schemeClr val="accent1"/>
+              </a:fillRef>
+              <a:effectRef idx="0">
+                <a:schemeClr val="accent1"/>
+              </a:effectRef>
+              <a:fontRef idx="minor">
+                <a:schemeClr val="tx1"/>
+              </a:fontRef>
+            </p:style>
+          </p:cxnSp>
+          <p:sp>
+            <p:nvSpPr>
+              <p:cNvPr id="130" name="直方体 129">
+                <a:extLst>
+                  <a:ext uri="{FF2B5EF4-FFF2-40B4-BE49-F238E27FC236}">
+                    <a16:creationId xmlns:a16="http://schemas.microsoft.com/office/drawing/2014/main" id="{22BFB687-C0E6-FB0D-1AAA-840E9FC83963}"/>
+                  </a:ext>
+                </a:extLst>
+              </p:cNvPr>
+              <p:cNvSpPr/>
+              <p:nvPr/>
+            </p:nvSpPr>
+            <p:spPr>
+              <a:xfrm rot="10800000" flipV="1">
+                <a:off x="1103385" y="2144463"/>
+                <a:ext cx="3453647" cy="3280211"/>
+              </a:xfrm>
+              <a:prstGeom prst="cube">
+                <a:avLst>
+                  <a:gd name="adj" fmla="val 16324"/>
+                </a:avLst>
+              </a:prstGeom>
+              <a:gradFill>
+                <a:gsLst>
+                  <a:gs pos="0">
+                    <a:schemeClr val="accent1">
+                      <a:satMod val="103000"/>
+                      <a:lumMod val="102000"/>
+                      <a:tint val="94000"/>
+                      <a:alpha val="50000"/>
+                    </a:schemeClr>
+                  </a:gs>
+                  <a:gs pos="50000">
+                    <a:schemeClr val="accent1">
+                      <a:satMod val="110000"/>
+                      <a:lumMod val="100000"/>
+                      <a:shade val="100000"/>
+                      <a:alpha val="50000"/>
+                    </a:schemeClr>
+                  </a:gs>
+                  <a:gs pos="100000">
+                    <a:schemeClr val="accent1">
+                      <a:lumMod val="99000"/>
+                      <a:satMod val="120000"/>
+                      <a:shade val="78000"/>
+                      <a:alpha val="50000"/>
+                    </a:schemeClr>
+                  </a:gs>
+                </a:gsLst>
+              </a:gradFill>
+              <a:scene3d>
+                <a:camera prst="orthographicFront">
+                  <a:rot lat="600000" lon="19200000" rev="0"/>
+                </a:camera>
+                <a:lightRig rig="threePt" dir="t"/>
+              </a:scene3d>
+            </p:spPr>
+            <p:style>
+              <a:lnRef idx="0">
+                <a:schemeClr val="accent1"/>
+              </a:lnRef>
+              <a:fillRef idx="3">
+                <a:schemeClr val="accent1"/>
+              </a:fillRef>
+              <a:effectRef idx="3">
+                <a:schemeClr val="accent1"/>
+              </a:effectRef>
+              <a:fontRef idx="minor">
+                <a:schemeClr val="lt1"/>
+              </a:fontRef>
+            </p:style>
+            <p:txBody>
+              <a:bodyPr rtlCol="0" anchor="ctr"/>
+              <a:lstStyle/>
+              <a:p>
+                <a:pPr algn="ctr"/>
+                <a:endParaRPr lang="en-US" dirty="0"/>
+              </a:p>
+            </p:txBody>
+          </p:sp>
+          <p:cxnSp>
+            <p:nvCxnSpPr>
+              <p:cNvPr id="131" name="直線コネクタ 130">
+                <a:extLst>
+                  <a:ext uri="{FF2B5EF4-FFF2-40B4-BE49-F238E27FC236}">
+                    <a16:creationId xmlns:a16="http://schemas.microsoft.com/office/drawing/2014/main" id="{1F611055-F9A2-BD5C-B2D4-D911B7632ACE}"/>
+                  </a:ext>
+                </a:extLst>
+              </p:cNvPr>
+              <p:cNvCxnSpPr>
+                <a:cxnSpLocks/>
+              </p:cNvCxnSpPr>
+              <p:nvPr/>
+            </p:nvCxnSpPr>
+            <p:spPr>
+              <a:xfrm flipV="1">
+                <a:off x="130284" y="3542322"/>
+                <a:ext cx="5575590" cy="790353"/>
+              </a:xfrm>
+              <a:prstGeom prst="line">
+                <a:avLst/>
+              </a:prstGeom>
+              <a:ln w="9525">
+                <a:prstDash val="sysDash"/>
+                <a:headEnd type="arrow" w="med" len="med"/>
+                <a:tailEnd type="none" w="med" len="med"/>
+              </a:ln>
+            </p:spPr>
+            <p:style>
+              <a:lnRef idx="2">
+                <a:schemeClr val="accent1"/>
+              </a:lnRef>
+              <a:fillRef idx="0">
+                <a:schemeClr val="accent1"/>
+              </a:fillRef>
+              <a:effectRef idx="1">
+                <a:schemeClr val="accent1"/>
+              </a:effectRef>
+              <a:fontRef idx="minor">
+                <a:schemeClr val="tx1"/>
+              </a:fontRef>
+            </p:style>
+          </p:cxnSp>
+          <p:cxnSp>
+            <p:nvCxnSpPr>
+              <p:cNvPr id="132" name="直線コネクタ 131">
+                <a:extLst>
+                  <a:ext uri="{FF2B5EF4-FFF2-40B4-BE49-F238E27FC236}">
+                    <a16:creationId xmlns:a16="http://schemas.microsoft.com/office/drawing/2014/main" id="{7E00D959-AC30-E395-E395-2F650D884ED1}"/>
+                  </a:ext>
+                </a:extLst>
+              </p:cNvPr>
+              <p:cNvCxnSpPr>
+                <a:cxnSpLocks/>
+              </p:cNvCxnSpPr>
+              <p:nvPr/>
+            </p:nvCxnSpPr>
+            <p:spPr>
+              <a:xfrm>
+                <a:off x="3010072" y="1385976"/>
+                <a:ext cx="0" cy="2550589"/>
+              </a:xfrm>
+              <a:prstGeom prst="line">
+                <a:avLst/>
+              </a:prstGeom>
+              <a:ln w="9525">
+                <a:prstDash val="sysDash"/>
+                <a:headEnd type="arrow" w="med" len="med"/>
+                <a:tailEnd type="none" w="med" len="med"/>
+              </a:ln>
+            </p:spPr>
+            <p:style>
+              <a:lnRef idx="2">
+                <a:schemeClr val="accent1"/>
+              </a:lnRef>
+              <a:fillRef idx="0">
+                <a:schemeClr val="accent1"/>
+              </a:fillRef>
+              <a:effectRef idx="1">
+                <a:schemeClr val="accent1"/>
+              </a:effectRef>
+              <a:fontRef idx="minor">
+                <a:schemeClr val="tx1"/>
+              </a:fontRef>
+            </p:style>
+          </p:cxnSp>
+          <p:cxnSp>
+            <p:nvCxnSpPr>
+              <p:cNvPr id="135" name="直線コネクタ 134">
+                <a:extLst>
+                  <a:ext uri="{FF2B5EF4-FFF2-40B4-BE49-F238E27FC236}">
+                    <a16:creationId xmlns:a16="http://schemas.microsoft.com/office/drawing/2014/main" id="{8FD917A6-592F-607D-8BF3-628EDE51C2A5}"/>
+                  </a:ext>
+                </a:extLst>
+              </p:cNvPr>
+              <p:cNvCxnSpPr>
+                <a:cxnSpLocks/>
+              </p:cNvCxnSpPr>
+              <p:nvPr/>
+            </p:nvCxnSpPr>
+            <p:spPr>
+              <a:xfrm>
+                <a:off x="1531875" y="3641603"/>
+                <a:ext cx="372635" cy="436057"/>
+              </a:xfrm>
+              <a:prstGeom prst="line">
+                <a:avLst/>
+              </a:prstGeom>
+              <a:ln w="9525">
+                <a:solidFill>
+                  <a:schemeClr val="bg2">
+                    <a:lumMod val="75000"/>
+                  </a:schemeClr>
+                </a:solidFill>
+                <a:prstDash val="sysDash"/>
+                <a:headEnd type="none" w="med" len="med"/>
+                <a:tailEnd type="none" w="med" len="med"/>
+              </a:ln>
+            </p:spPr>
+            <p:style>
+              <a:lnRef idx="2">
+                <a:schemeClr val="accent1"/>
+              </a:lnRef>
+              <a:fillRef idx="0">
+                <a:schemeClr val="accent1"/>
+              </a:fillRef>
+              <a:effectRef idx="1">
+                <a:schemeClr val="accent1"/>
+              </a:effectRef>
+              <a:fontRef idx="minor">
+                <a:schemeClr val="tx1"/>
+              </a:fontRef>
+            </p:style>
+          </p:cxnSp>
+          <p:sp>
+            <p:nvSpPr>
+              <p:cNvPr id="140" name="二等辺三角形 139">
+                <a:extLst>
+                  <a:ext uri="{FF2B5EF4-FFF2-40B4-BE49-F238E27FC236}">
+                    <a16:creationId xmlns:a16="http://schemas.microsoft.com/office/drawing/2014/main" id="{FA72BF2D-E283-9927-82F3-17E3D17C66C2}"/>
+                  </a:ext>
+                </a:extLst>
+              </p:cNvPr>
+              <p:cNvSpPr/>
+              <p:nvPr/>
+            </p:nvSpPr>
+            <p:spPr>
+              <a:xfrm rot="912908">
+                <a:off x="191573" y="3781640"/>
+                <a:ext cx="4428076" cy="1155771"/>
+              </a:xfrm>
+              <a:prstGeom prst="triangle">
+                <a:avLst>
+                  <a:gd name="adj" fmla="val 60257"/>
+                </a:avLst>
+              </a:prstGeom>
+              <a:solidFill>
+                <a:schemeClr val="bg2">
+                  <a:lumMod val="50000"/>
+                  <a:alpha val="20000"/>
+                </a:schemeClr>
+              </a:solidFill>
+              <a:ln>
+                <a:noFill/>
+              </a:ln>
+            </p:spPr>
+            <p:style>
+              <a:lnRef idx="2">
+                <a:schemeClr val="accent1">
+                  <a:shade val="15000"/>
+                </a:schemeClr>
+              </a:lnRef>
+              <a:fillRef idx="1">
+                <a:schemeClr val="accent1"/>
+              </a:fillRef>
+              <a:effectRef idx="0">
+                <a:schemeClr val="accent1"/>
+              </a:effectRef>
+              <a:fontRef idx="minor">
+                <a:schemeClr val="lt1"/>
+              </a:fontRef>
+            </p:style>
+            <p:txBody>
+              <a:bodyPr rtlCol="0" anchor="ctr"/>
+              <a:lstStyle/>
+              <a:p>
+                <a:pPr algn="ctr"/>
+                <a:endParaRPr lang="en-US"/>
+              </a:p>
+            </p:txBody>
+          </p:sp>
+          <p:cxnSp>
+            <p:nvCxnSpPr>
+              <p:cNvPr id="142" name="直線矢印コネクタ 141">
+                <a:extLst>
+                  <a:ext uri="{FF2B5EF4-FFF2-40B4-BE49-F238E27FC236}">
+                    <a16:creationId xmlns:a16="http://schemas.microsoft.com/office/drawing/2014/main" id="{AC96840D-D78E-8D7F-46E8-A471D899BA2F}"/>
+                  </a:ext>
+                </a:extLst>
+              </p:cNvPr>
+              <p:cNvCxnSpPr>
+                <a:cxnSpLocks/>
+              </p:cNvCxnSpPr>
+              <p:nvPr/>
+            </p:nvCxnSpPr>
+            <p:spPr>
+              <a:xfrm flipV="1">
+                <a:off x="1970629" y="3924459"/>
+                <a:ext cx="1039443" cy="2210416"/>
+              </a:xfrm>
+              <a:prstGeom prst="straightConnector1">
+                <a:avLst/>
+              </a:prstGeom>
+              <a:ln>
+                <a:tailEnd type="triangle"/>
+              </a:ln>
+            </p:spPr>
+            <p:style>
+              <a:lnRef idx="2">
+                <a:schemeClr val="dk1"/>
+              </a:lnRef>
+              <a:fillRef idx="0">
+                <a:schemeClr val="dk1"/>
+              </a:fillRef>
+              <a:effectRef idx="1">
+                <a:schemeClr val="dk1"/>
+              </a:effectRef>
+              <a:fontRef idx="minor">
+                <a:schemeClr val="tx1"/>
+              </a:fontRef>
+            </p:style>
+          </p:cxnSp>
+          <p:cxnSp>
+            <p:nvCxnSpPr>
+              <p:cNvPr id="160" name="直線コネクタ 159">
+                <a:extLst>
+                  <a:ext uri="{FF2B5EF4-FFF2-40B4-BE49-F238E27FC236}">
+                    <a16:creationId xmlns:a16="http://schemas.microsoft.com/office/drawing/2014/main" id="{875859F5-07DC-22F0-BAEA-DDF1F9C71522}"/>
+                  </a:ext>
+                </a:extLst>
+              </p:cNvPr>
+              <p:cNvCxnSpPr>
+                <a:cxnSpLocks/>
+              </p:cNvCxnSpPr>
+              <p:nvPr/>
+            </p:nvCxnSpPr>
+            <p:spPr>
+              <a:xfrm flipV="1">
+                <a:off x="4226727" y="4556663"/>
+                <a:ext cx="0" cy="473004"/>
+              </a:xfrm>
+              <a:prstGeom prst="line">
+                <a:avLst/>
+              </a:prstGeom>
+              <a:ln>
+                <a:prstDash val="solid"/>
+                <a:headEnd type="arrow" w="med" len="med"/>
+                <a:tailEnd type="arrow" w="med" len="med"/>
+              </a:ln>
+            </p:spPr>
+            <p:style>
+              <a:lnRef idx="1">
+                <a:schemeClr val="accent1"/>
+              </a:lnRef>
+              <a:fillRef idx="0">
+                <a:schemeClr val="accent1"/>
+              </a:fillRef>
+              <a:effectRef idx="0">
+                <a:schemeClr val="accent1"/>
+              </a:effectRef>
+              <a:fontRef idx="minor">
+                <a:schemeClr val="tx1"/>
+              </a:fontRef>
+            </p:style>
+          </p:cxnSp>
+          <mc:AlternateContent xmlns:mc="http://schemas.openxmlformats.org/markup-compatibility/2006">
+            <mc:Choice xmlns:a14="http://schemas.microsoft.com/office/drawing/2010/main" Requires="a14">
+              <p:sp>
+                <p:nvSpPr>
+                  <p:cNvPr id="183" name="テキスト ボックス 182">
+                    <a:extLst>
+                      <a:ext uri="{FF2B5EF4-FFF2-40B4-BE49-F238E27FC236}">
+                        <a16:creationId xmlns:a16="http://schemas.microsoft.com/office/drawing/2014/main" id="{023170A7-EE8B-6405-9336-2916FF6DC7E4}"/>
+                      </a:ext>
+                    </a:extLst>
+                  </p:cNvPr>
+                  <p:cNvSpPr txBox="1"/>
+                  <p:nvPr/>
+                </p:nvSpPr>
+                <p:spPr>
+                  <a:xfrm>
+                    <a:off x="2304850" y="3320227"/>
+                    <a:ext cx="202299" cy="276999"/>
+                  </a:xfrm>
+                  <a:prstGeom prst="rect">
+                    <a:avLst/>
+                  </a:prstGeom>
+                  <a:noFill/>
+                </p:spPr>
+                <p:txBody>
+                  <a:bodyPr wrap="none" lIns="0" tIns="0" rIns="0" bIns="0" rtlCol="0">
+                    <a:spAutoFit/>
+                  </a:bodyPr>
+                  <a:lstStyle/>
+                  <a:p>
+                    <a:pPr/>
+                    <a14:m>
+                      <m:oMathPara xmlns:m="http://schemas.openxmlformats.org/officeDocument/2006/math">
+                        <m:oMathParaPr>
+                          <m:jc m:val="centerGroup"/>
+                        </m:oMathParaPr>
+                        <m:oMath xmlns:m="http://schemas.openxmlformats.org/officeDocument/2006/math">
+                          <m:r>
+                            <a:rPr lang="en-US" i="1">
+                              <a:latin typeface="Cambria Math" panose="02040503050406030204" pitchFamily="18" charset="0"/>
+                              <a:ea typeface="Cambria Math" panose="02040503050406030204" pitchFamily="18" charset="0"/>
+                            </a:rPr>
+                            <m:t>𝜃</m:t>
+                          </m:r>
+                        </m:oMath>
+                      </m:oMathPara>
+                    </a14:m>
+                    <a:endParaRPr lang="en-US" dirty="0"/>
+                  </a:p>
+                </p:txBody>
+              </p:sp>
+            </mc:Choice>
+            <mc:Fallback>
+              <p:sp>
+                <p:nvSpPr>
+                  <p:cNvPr id="183" name="テキスト ボックス 182">
+                    <a:extLst>
+                      <a:ext uri="{FF2B5EF4-FFF2-40B4-BE49-F238E27FC236}">
+                        <a16:creationId xmlns:a16="http://schemas.microsoft.com/office/drawing/2014/main" id="{023170A7-EE8B-6405-9336-2916FF6DC7E4}"/>
+                      </a:ext>
+                    </a:extLst>
+                  </p:cNvPr>
+                  <p:cNvSpPr txBox="1">
+                    <a:spLocks noRot="1" noChangeAspect="1" noMove="1" noResize="1" noEditPoints="1" noAdjustHandles="1" noChangeArrowheads="1" noChangeShapeType="1" noTextEdit="1"/>
+                  </p:cNvSpPr>
+                  <p:nvPr/>
+                </p:nvSpPr>
+                <p:spPr>
+                  <a:xfrm>
+                    <a:off x="2304850" y="3320227"/>
+                    <a:ext cx="202299" cy="276999"/>
+                  </a:xfrm>
+                  <a:prstGeom prst="rect">
+                    <a:avLst/>
+                  </a:prstGeom>
+                  <a:blipFill>
+                    <a:blip r:embed="rId2"/>
+                    <a:stretch>
+                      <a:fillRect l="-23529" r="-17647" b="-6667"/>
+                    </a:stretch>
+                  </a:blipFill>
+                </p:spPr>
+                <p:txBody>
+                  <a:bodyPr/>
+                  <a:lstStyle/>
+                  <a:p>
+                    <a:r>
+                      <a:rPr lang="en-US">
+                        <a:noFill/>
+                      </a:rPr>
+                      <a:t> </a:t>
+                    </a:r>
+                  </a:p>
+                </p:txBody>
+              </p:sp>
+            </mc:Fallback>
+          </mc:AlternateContent>
+          <mc:AlternateContent xmlns:mc="http://schemas.openxmlformats.org/markup-compatibility/2006">
+            <mc:Choice xmlns:a14="http://schemas.microsoft.com/office/drawing/2010/main" Requires="a14">
+              <p:sp>
+                <p:nvSpPr>
+                  <p:cNvPr id="184" name="テキスト ボックス 183">
+                    <a:extLst>
+                      <a:ext uri="{FF2B5EF4-FFF2-40B4-BE49-F238E27FC236}">
+                        <a16:creationId xmlns:a16="http://schemas.microsoft.com/office/drawing/2014/main" id="{183AAB29-C199-3D1E-2A89-CBF81133F7AD}"/>
+                      </a:ext>
+                    </a:extLst>
+                  </p:cNvPr>
+                  <p:cNvSpPr txBox="1"/>
+                  <p:nvPr/>
+                </p:nvSpPr>
+                <p:spPr>
+                  <a:xfrm>
+                    <a:off x="1628300" y="3517192"/>
+                    <a:ext cx="206082" cy="276999"/>
+                  </a:xfrm>
+                  <a:prstGeom prst="rect">
+                    <a:avLst/>
+                  </a:prstGeom>
+                  <a:noFill/>
+                </p:spPr>
+                <p:txBody>
+                  <a:bodyPr wrap="none" lIns="0" tIns="0" rIns="0" bIns="0" rtlCol="0">
+                    <a:spAutoFit/>
+                  </a:bodyPr>
+                  <a:lstStyle/>
+                  <a:p>
+                    <a:pPr/>
+                    <a14:m>
+                      <m:oMathPara xmlns:m="http://schemas.openxmlformats.org/officeDocument/2006/math">
+                        <m:oMathParaPr>
+                          <m:jc m:val="centerGroup"/>
+                        </m:oMathParaPr>
+                        <m:oMath xmlns:m="http://schemas.openxmlformats.org/officeDocument/2006/math">
+                          <m:r>
+                            <a:rPr lang="en-US" b="0" i="1" smtClean="0">
+                              <a:latin typeface="Cambria Math" panose="02040503050406030204" pitchFamily="18" charset="0"/>
+                            </a:rPr>
+                            <m:t>𝑑</m:t>
+                          </m:r>
+                        </m:oMath>
+                      </m:oMathPara>
+                    </a14:m>
+                    <a:endParaRPr lang="en-US" dirty="0"/>
+                  </a:p>
+                </p:txBody>
+              </p:sp>
+            </mc:Choice>
+            <mc:Fallback>
+              <p:sp>
+                <p:nvSpPr>
+                  <p:cNvPr id="184" name="テキスト ボックス 183">
+                    <a:extLst>
+                      <a:ext uri="{FF2B5EF4-FFF2-40B4-BE49-F238E27FC236}">
+                        <a16:creationId xmlns:a16="http://schemas.microsoft.com/office/drawing/2014/main" id="{183AAB29-C199-3D1E-2A89-CBF81133F7AD}"/>
+                      </a:ext>
+                    </a:extLst>
+                  </p:cNvPr>
+                  <p:cNvSpPr txBox="1">
+                    <a:spLocks noRot="1" noChangeAspect="1" noMove="1" noResize="1" noEditPoints="1" noAdjustHandles="1" noChangeArrowheads="1" noChangeShapeType="1" noTextEdit="1"/>
+                  </p:cNvSpPr>
+                  <p:nvPr/>
+                </p:nvSpPr>
+                <p:spPr>
+                  <a:xfrm>
+                    <a:off x="1628300" y="3517192"/>
+                    <a:ext cx="206082" cy="276999"/>
+                  </a:xfrm>
+                  <a:prstGeom prst="rect">
+                    <a:avLst/>
+                  </a:prstGeom>
+                  <a:blipFill>
+                    <a:blip r:embed="rId3"/>
+                    <a:stretch>
+                      <a:fillRect l="-26471" r="-20588" b="-6522"/>
+                    </a:stretch>
+                  </a:blipFill>
+                </p:spPr>
+                <p:txBody>
+                  <a:bodyPr/>
+                  <a:lstStyle/>
+                  <a:p>
+                    <a:r>
+                      <a:rPr lang="en-US">
+                        <a:noFill/>
+                      </a:rPr>
+                      <a:t> </a:t>
+                    </a:r>
+                  </a:p>
+                </p:txBody>
+              </p:sp>
+            </mc:Fallback>
+          </mc:AlternateContent>
+          <mc:AlternateContent xmlns:mc="http://schemas.openxmlformats.org/markup-compatibility/2006">
+            <mc:Choice xmlns:a14="http://schemas.microsoft.com/office/drawing/2010/main" Requires="a14">
+              <p:sp>
+                <p:nvSpPr>
+                  <p:cNvPr id="191" name="テキスト ボックス 190">
+                    <a:extLst>
+                      <a:ext uri="{FF2B5EF4-FFF2-40B4-BE49-F238E27FC236}">
+                        <a16:creationId xmlns:a16="http://schemas.microsoft.com/office/drawing/2014/main" id="{D0DA9189-6A2D-5C33-F1C7-7F50887983BB}"/>
+                      </a:ext>
+                    </a:extLst>
+                  </p:cNvPr>
+                  <p:cNvSpPr txBox="1"/>
+                  <p:nvPr/>
+                </p:nvSpPr>
+                <p:spPr>
+                  <a:xfrm>
+                    <a:off x="-222636" y="2588521"/>
+                    <a:ext cx="1280928" cy="276999"/>
+                  </a:xfrm>
+                  <a:prstGeom prst="rect">
+                    <a:avLst/>
+                  </a:prstGeom>
+                  <a:noFill/>
+                </p:spPr>
+                <p:txBody>
+                  <a:bodyPr wrap="none" lIns="0" tIns="0" rIns="0" bIns="0" rtlCol="0">
+                    <a:spAutoFit/>
+                  </a:bodyPr>
+                  <a:lstStyle/>
+                  <a:p>
+                    <a:pPr/>
+                    <a14:m>
+                      <m:oMathPara xmlns:m="http://schemas.openxmlformats.org/officeDocument/2006/math">
+                        <m:oMathParaPr>
+                          <m:jc m:val="centerGroup"/>
+                        </m:oMathParaPr>
+                        <m:oMath xmlns:m="http://schemas.openxmlformats.org/officeDocument/2006/math">
+                          <m:r>
+                            <a:rPr lang="en-US" b="0" i="1" smtClean="0">
+                              <a:latin typeface="Cambria Math" panose="02040503050406030204" pitchFamily="18" charset="0"/>
+                            </a:rPr>
+                            <m:t>𝑂𝑝𝑡𝑖𝑐</m:t>
+                          </m:r>
+                          <m:r>
+                            <a:rPr lang="en-US" b="0" i="1" smtClean="0">
+                              <a:latin typeface="Cambria Math" panose="02040503050406030204" pitchFamily="18" charset="0"/>
+                            </a:rPr>
+                            <m:t> </m:t>
+                          </m:r>
+                          <m:r>
+                            <a:rPr lang="en-US" b="0" i="1" smtClean="0">
+                              <a:latin typeface="Cambria Math" panose="02040503050406030204" pitchFamily="18" charset="0"/>
+                            </a:rPr>
+                            <m:t>𝑎𝑥𝑖𝑠</m:t>
+                          </m:r>
+                          <m:r>
+                            <a:rPr lang="en-US" b="0" i="1" smtClean="0">
+                              <a:latin typeface="Cambria Math" panose="02040503050406030204" pitchFamily="18" charset="0"/>
+                            </a:rPr>
+                            <m:t> </m:t>
+                          </m:r>
+                          <m:r>
+                            <a:rPr lang="en-US" b="1" i="1" smtClean="0">
+                              <a:latin typeface="Cambria Math" panose="02040503050406030204" pitchFamily="18" charset="0"/>
+                            </a:rPr>
+                            <m:t>𝒄</m:t>
+                          </m:r>
+                        </m:oMath>
+                      </m:oMathPara>
+                    </a14:m>
+                    <a:endParaRPr lang="en-US" b="1" dirty="0"/>
+                  </a:p>
+                </p:txBody>
+              </p:sp>
+            </mc:Choice>
+            <mc:Fallback>
+              <p:sp>
+                <p:nvSpPr>
+                  <p:cNvPr id="191" name="テキスト ボックス 190">
+                    <a:extLst>
+                      <a:ext uri="{FF2B5EF4-FFF2-40B4-BE49-F238E27FC236}">
+                        <a16:creationId xmlns:a16="http://schemas.microsoft.com/office/drawing/2014/main" id="{D0DA9189-6A2D-5C33-F1C7-7F50887983BB}"/>
+                      </a:ext>
+                    </a:extLst>
+                  </p:cNvPr>
+                  <p:cNvSpPr txBox="1">
+                    <a:spLocks noRot="1" noChangeAspect="1" noMove="1" noResize="1" noEditPoints="1" noAdjustHandles="1" noChangeArrowheads="1" noChangeShapeType="1" noTextEdit="1"/>
+                  </p:cNvSpPr>
+                  <p:nvPr/>
+                </p:nvSpPr>
+                <p:spPr>
+                  <a:xfrm>
+                    <a:off x="-222636" y="2588521"/>
+                    <a:ext cx="1280928" cy="276999"/>
+                  </a:xfrm>
+                  <a:prstGeom prst="rect">
+                    <a:avLst/>
+                  </a:prstGeom>
+                  <a:blipFill>
+                    <a:blip r:embed="rId4"/>
+                    <a:stretch>
+                      <a:fillRect l="-5714" t="-2222" r="-1905" b="-35556"/>
+                    </a:stretch>
+                  </a:blipFill>
+                </p:spPr>
+                <p:txBody>
+                  <a:bodyPr/>
+                  <a:lstStyle/>
+                  <a:p>
+                    <a:r>
+                      <a:rPr lang="en-US">
+                        <a:noFill/>
+                      </a:rPr>
+                      <a:t> </a:t>
+                    </a:r>
+                  </a:p>
+                </p:txBody>
+              </p:sp>
+            </mc:Fallback>
+          </mc:AlternateContent>
+          <mc:AlternateContent xmlns:mc="http://schemas.openxmlformats.org/markup-compatibility/2006">
+            <mc:Choice xmlns:a14="http://schemas.microsoft.com/office/drawing/2010/main" Requires="a14">
+              <p:sp>
+                <p:nvSpPr>
+                  <p:cNvPr id="196" name="テキスト ボックス 195">
+                    <a:extLst>
+                      <a:ext uri="{FF2B5EF4-FFF2-40B4-BE49-F238E27FC236}">
+                        <a16:creationId xmlns:a16="http://schemas.microsoft.com/office/drawing/2014/main" id="{16FBB22E-A9A0-33EF-6667-C1ECD9251DD6}"/>
+                      </a:ext>
+                    </a:extLst>
+                  </p:cNvPr>
+                  <p:cNvSpPr txBox="1"/>
+                  <p:nvPr/>
+                </p:nvSpPr>
+                <p:spPr>
+                  <a:xfrm>
+                    <a:off x="2191748" y="5713540"/>
+                    <a:ext cx="484043" cy="289182"/>
+                  </a:xfrm>
+                  <a:prstGeom prst="rect">
+                    <a:avLst/>
+                  </a:prstGeom>
+                  <a:noFill/>
+                </p:spPr>
+                <p:txBody>
+                  <a:bodyPr wrap="none" lIns="0" tIns="0" rIns="0" bIns="0" rtlCol="0">
+                    <a:spAutoFit/>
+                  </a:bodyPr>
+                  <a:lstStyle/>
+                  <a:p>
+                    <a:pPr/>
+                    <a14:m>
+                      <m:oMathPara xmlns:m="http://schemas.openxmlformats.org/officeDocument/2006/math">
+                        <m:oMathParaPr>
+                          <m:jc m:val="centerGroup"/>
+                        </m:oMathParaPr>
+                        <m:oMath xmlns:m="http://schemas.openxmlformats.org/officeDocument/2006/math">
+                          <m:sSub>
+                            <m:sSubPr>
+                              <m:ctrlPr>
+                                <a:rPr lang="en-US" i="1" smtClean="0">
+                                  <a:latin typeface="Cambria Math" panose="02040503050406030204" pitchFamily="18" charset="0"/>
+                                </a:rPr>
+                              </m:ctrlPr>
+                            </m:sSubPr>
+                            <m:e>
+                              <m:r>
+                                <a:rPr lang="en-US" b="1" i="1" smtClean="0">
+                                  <a:latin typeface="Cambria Math" panose="02040503050406030204" pitchFamily="18" charset="0"/>
+                                </a:rPr>
+                                <m:t>𝒌</m:t>
+                              </m:r>
+                            </m:e>
+                            <m:sub>
+                              <m:r>
+                                <a:rPr lang="en-US" b="0" i="1" smtClean="0">
+                                  <a:latin typeface="Cambria Math" panose="02040503050406030204" pitchFamily="18" charset="0"/>
+                                </a:rPr>
+                                <m:t>1,</m:t>
+                              </m:r>
+                              <m:r>
+                                <a:rPr lang="en-US" b="0" i="1" smtClean="0">
+                                  <a:latin typeface="Cambria Math" panose="02040503050406030204" pitchFamily="18" charset="0"/>
+                                  <a:ea typeface="Cambria Math" panose="02040503050406030204" pitchFamily="18" charset="0"/>
+                                </a:rPr>
+                                <m:t>𝜔</m:t>
+                              </m:r>
+                            </m:sub>
+                          </m:sSub>
+                        </m:oMath>
+                      </m:oMathPara>
+                    </a14:m>
+                    <a:endParaRPr lang="en-US" dirty="0"/>
+                  </a:p>
+                </p:txBody>
+              </p:sp>
+            </mc:Choice>
+            <mc:Fallback>
+              <p:sp>
+                <p:nvSpPr>
+                  <p:cNvPr id="196" name="テキスト ボックス 195">
+                    <a:extLst>
+                      <a:ext uri="{FF2B5EF4-FFF2-40B4-BE49-F238E27FC236}">
+                        <a16:creationId xmlns:a16="http://schemas.microsoft.com/office/drawing/2014/main" id="{16FBB22E-A9A0-33EF-6667-C1ECD9251DD6}"/>
+                      </a:ext>
+                    </a:extLst>
+                  </p:cNvPr>
+                  <p:cNvSpPr txBox="1">
+                    <a:spLocks noRot="1" noChangeAspect="1" noMove="1" noResize="1" noEditPoints="1" noAdjustHandles="1" noChangeArrowheads="1" noChangeShapeType="1" noTextEdit="1"/>
+                  </p:cNvSpPr>
+                  <p:nvPr/>
+                </p:nvSpPr>
+                <p:spPr>
+                  <a:xfrm>
+                    <a:off x="2191748" y="5713540"/>
+                    <a:ext cx="484043" cy="289182"/>
+                  </a:xfrm>
+                  <a:prstGeom prst="rect">
+                    <a:avLst/>
+                  </a:prstGeom>
+                  <a:blipFill>
+                    <a:blip r:embed="rId5"/>
+                    <a:stretch>
+                      <a:fillRect l="-11392" b="-10417"/>
+                    </a:stretch>
+                  </a:blipFill>
+                </p:spPr>
+                <p:txBody>
+                  <a:bodyPr/>
+                  <a:lstStyle/>
+                  <a:p>
+                    <a:r>
+                      <a:rPr lang="en-US">
+                        <a:noFill/>
+                      </a:rPr>
+                      <a:t> </a:t>
+                    </a:r>
+                  </a:p>
+                </p:txBody>
+              </p:sp>
+            </mc:Fallback>
+          </mc:AlternateContent>
+          <mc:AlternateContent xmlns:mc="http://schemas.openxmlformats.org/markup-compatibility/2006">
+            <mc:Choice xmlns:a14="http://schemas.microsoft.com/office/drawing/2010/main" Requires="a14">
+              <p:sp>
+                <p:nvSpPr>
+                  <p:cNvPr id="199" name="テキスト ボックス 198">
+                    <a:extLst>
+                      <a:ext uri="{FF2B5EF4-FFF2-40B4-BE49-F238E27FC236}">
+                        <a16:creationId xmlns:a16="http://schemas.microsoft.com/office/drawing/2014/main" id="{FA67BE37-6E72-0E99-6032-D1BB595475CA}"/>
+                      </a:ext>
+                    </a:extLst>
+                  </p:cNvPr>
+                  <p:cNvSpPr txBox="1"/>
+                  <p:nvPr/>
+                </p:nvSpPr>
+                <p:spPr>
+                  <a:xfrm>
+                    <a:off x="387680" y="5396488"/>
+                    <a:ext cx="305789" cy="276999"/>
+                  </a:xfrm>
+                  <a:prstGeom prst="rect">
+                    <a:avLst/>
+                  </a:prstGeom>
+                  <a:noFill/>
+                </p:spPr>
+                <p:txBody>
+                  <a:bodyPr wrap="none" lIns="0" tIns="0" rIns="0" bIns="0" rtlCol="0">
+                    <a:spAutoFit/>
+                  </a:bodyPr>
+                  <a:lstStyle/>
+                  <a:p>
+                    <a:pPr/>
+                    <a14:m>
+                      <m:oMathPara xmlns:m="http://schemas.openxmlformats.org/officeDocument/2006/math">
+                        <m:oMathParaPr>
+                          <m:jc m:val="centerGroup"/>
+                        </m:oMathParaPr>
+                        <m:oMath xmlns:m="http://schemas.openxmlformats.org/officeDocument/2006/math">
+                          <m:sSub>
+                            <m:sSubPr>
+                              <m:ctrlPr>
+                                <a:rPr lang="en-US" i="1" smtClean="0">
+                                  <a:latin typeface="Cambria Math" panose="02040503050406030204" pitchFamily="18" charset="0"/>
+                                </a:rPr>
+                              </m:ctrlPr>
+                            </m:sSubPr>
+                            <m:e>
+                              <m:acc>
+                                <m:accPr>
+                                  <m:chr m:val="̂"/>
+                                  <m:ctrlPr>
+                                    <a:rPr lang="en-US" b="1" i="1">
+                                      <a:latin typeface="Cambria Math" panose="02040503050406030204" pitchFamily="18" charset="0"/>
+                                    </a:rPr>
+                                  </m:ctrlPr>
+                                </m:accPr>
+                                <m:e>
+                                  <m:r>
+                                    <a:rPr lang="en-US" b="1" i="1">
+                                      <a:latin typeface="Cambria Math" panose="02040503050406030204" pitchFamily="18" charset="0"/>
+                                    </a:rPr>
+                                    <m:t>𝒆</m:t>
+                                  </m:r>
+                                </m:e>
+                              </m:acc>
+                            </m:e>
+                            <m:sub>
+                              <m:r>
+                                <a:rPr lang="en-US" b="0" i="1" smtClean="0">
+                                  <a:latin typeface="Cambria Math" panose="02040503050406030204" pitchFamily="18" charset="0"/>
+                                </a:rPr>
+                                <m:t>𝑥</m:t>
+                              </m:r>
+                            </m:sub>
+                          </m:sSub>
+                        </m:oMath>
+                      </m:oMathPara>
+                    </a14:m>
+                    <a:endParaRPr lang="en-US" dirty="0"/>
+                  </a:p>
+                </p:txBody>
+              </p:sp>
+            </mc:Choice>
+            <mc:Fallback>
+              <p:sp>
+                <p:nvSpPr>
+                  <p:cNvPr id="199" name="テキスト ボックス 198">
+                    <a:extLst>
+                      <a:ext uri="{FF2B5EF4-FFF2-40B4-BE49-F238E27FC236}">
+                        <a16:creationId xmlns:a16="http://schemas.microsoft.com/office/drawing/2014/main" id="{FA67BE37-6E72-0E99-6032-D1BB595475CA}"/>
+                      </a:ext>
+                    </a:extLst>
+                  </p:cNvPr>
+                  <p:cNvSpPr txBox="1">
+                    <a:spLocks noRot="1" noChangeAspect="1" noMove="1" noResize="1" noEditPoints="1" noAdjustHandles="1" noChangeArrowheads="1" noChangeShapeType="1" noTextEdit="1"/>
+                  </p:cNvSpPr>
+                  <p:nvPr/>
+                </p:nvSpPr>
+                <p:spPr>
+                  <a:xfrm>
+                    <a:off x="387680" y="5396488"/>
+                    <a:ext cx="305789" cy="276999"/>
+                  </a:xfrm>
+                  <a:prstGeom prst="rect">
+                    <a:avLst/>
+                  </a:prstGeom>
+                  <a:blipFill>
+                    <a:blip r:embed="rId6"/>
+                    <a:stretch>
+                      <a:fillRect l="-12000" t="-23913" r="-46000" b="-8696"/>
+                    </a:stretch>
+                  </a:blipFill>
+                </p:spPr>
+                <p:txBody>
+                  <a:bodyPr/>
+                  <a:lstStyle/>
+                  <a:p>
+                    <a:r>
+                      <a:rPr lang="en-US">
+                        <a:noFill/>
+                      </a:rPr>
+                      <a:t> </a:t>
+                    </a:r>
+                  </a:p>
+                </p:txBody>
+              </p:sp>
+            </mc:Fallback>
+          </mc:AlternateContent>
+          <mc:AlternateContent xmlns:mc="http://schemas.openxmlformats.org/markup-compatibility/2006">
+            <mc:Choice xmlns:a14="http://schemas.microsoft.com/office/drawing/2010/main" Requires="a14">
+              <p:sp>
+                <p:nvSpPr>
+                  <p:cNvPr id="201" name="テキスト ボックス 200">
+                    <a:extLst>
+                      <a:ext uri="{FF2B5EF4-FFF2-40B4-BE49-F238E27FC236}">
+                        <a16:creationId xmlns:a16="http://schemas.microsoft.com/office/drawing/2014/main" id="{074B58AF-8E92-D535-1FCF-BDF1F2891A69}"/>
+                      </a:ext>
+                    </a:extLst>
+                  </p:cNvPr>
+                  <p:cNvSpPr txBox="1"/>
+                  <p:nvPr/>
+                </p:nvSpPr>
+                <p:spPr>
+                  <a:xfrm>
+                    <a:off x="972253" y="4605258"/>
+                    <a:ext cx="313419" cy="298928"/>
+                  </a:xfrm>
+                  <a:prstGeom prst="rect">
+                    <a:avLst/>
+                  </a:prstGeom>
+                  <a:noFill/>
+                </p:spPr>
+                <p:txBody>
+                  <a:bodyPr wrap="none" lIns="0" tIns="0" rIns="0" bIns="0" rtlCol="0">
+                    <a:spAutoFit/>
+                  </a:bodyPr>
+                  <a:lstStyle/>
+                  <a:p>
+                    <a:pPr/>
+                    <a14:m>
+                      <m:oMathPara xmlns:m="http://schemas.openxmlformats.org/officeDocument/2006/math">
+                        <m:oMathParaPr>
+                          <m:jc m:val="centerGroup"/>
+                        </m:oMathParaPr>
+                        <m:oMath xmlns:m="http://schemas.openxmlformats.org/officeDocument/2006/math">
+                          <m:sSub>
+                            <m:sSubPr>
+                              <m:ctrlPr>
+                                <a:rPr lang="en-US" i="1" smtClean="0">
+                                  <a:latin typeface="Cambria Math" panose="02040503050406030204" pitchFamily="18" charset="0"/>
+                                </a:rPr>
+                              </m:ctrlPr>
+                            </m:sSubPr>
+                            <m:e>
+                              <m:acc>
+                                <m:accPr>
+                                  <m:chr m:val="̂"/>
+                                  <m:ctrlPr>
+                                    <a:rPr lang="en-US" b="1" i="1">
+                                      <a:latin typeface="Cambria Math" panose="02040503050406030204" pitchFamily="18" charset="0"/>
+                                    </a:rPr>
+                                  </m:ctrlPr>
+                                </m:accPr>
+                                <m:e>
+                                  <m:r>
+                                    <a:rPr lang="en-US" b="1" i="1">
+                                      <a:latin typeface="Cambria Math" panose="02040503050406030204" pitchFamily="18" charset="0"/>
+                                    </a:rPr>
+                                    <m:t>𝒆</m:t>
+                                  </m:r>
+                                </m:e>
+                              </m:acc>
+                            </m:e>
+                            <m:sub>
+                              <m:r>
+                                <a:rPr lang="en-US" b="0" i="1" smtClean="0">
+                                  <a:latin typeface="Cambria Math" panose="02040503050406030204" pitchFamily="18" charset="0"/>
+                                </a:rPr>
+                                <m:t>𝑦</m:t>
+                              </m:r>
+                            </m:sub>
+                          </m:sSub>
+                        </m:oMath>
+                      </m:oMathPara>
+                    </a14:m>
+                    <a:endParaRPr lang="en-US" dirty="0"/>
+                  </a:p>
+                </p:txBody>
+              </p:sp>
+            </mc:Choice>
+            <mc:Fallback>
+              <p:sp>
+                <p:nvSpPr>
+                  <p:cNvPr id="201" name="テキスト ボックス 200">
+                    <a:extLst>
+                      <a:ext uri="{FF2B5EF4-FFF2-40B4-BE49-F238E27FC236}">
+                        <a16:creationId xmlns:a16="http://schemas.microsoft.com/office/drawing/2014/main" id="{074B58AF-8E92-D535-1FCF-BDF1F2891A69}"/>
+                      </a:ext>
+                    </a:extLst>
+                  </p:cNvPr>
+                  <p:cNvSpPr txBox="1">
+                    <a:spLocks noRot="1" noChangeAspect="1" noMove="1" noResize="1" noEditPoints="1" noAdjustHandles="1" noChangeArrowheads="1" noChangeShapeType="1" noTextEdit="1"/>
+                  </p:cNvSpPr>
+                  <p:nvPr/>
+                </p:nvSpPr>
+                <p:spPr>
+                  <a:xfrm>
+                    <a:off x="972253" y="4605258"/>
+                    <a:ext cx="313419" cy="298928"/>
+                  </a:xfrm>
+                  <a:prstGeom prst="rect">
+                    <a:avLst/>
+                  </a:prstGeom>
+                  <a:blipFill>
+                    <a:blip r:embed="rId7"/>
+                    <a:stretch>
+                      <a:fillRect l="-11765" t="-22449" r="-45098" b="-18367"/>
+                    </a:stretch>
+                  </a:blipFill>
+                </p:spPr>
+                <p:txBody>
+                  <a:bodyPr/>
+                  <a:lstStyle/>
+                  <a:p>
+                    <a:r>
+                      <a:rPr lang="en-US">
+                        <a:noFill/>
+                      </a:rPr>
+                      <a:t> </a:t>
+                    </a:r>
+                  </a:p>
+                </p:txBody>
+              </p:sp>
+            </mc:Fallback>
+          </mc:AlternateContent>
+          <mc:AlternateContent xmlns:mc="http://schemas.openxmlformats.org/markup-compatibility/2006">
+            <mc:Choice xmlns:a14="http://schemas.microsoft.com/office/drawing/2010/main" Requires="a14">
+              <p:sp>
+                <p:nvSpPr>
+                  <p:cNvPr id="203" name="テキスト ボックス 202">
+                    <a:extLst>
+                      <a:ext uri="{FF2B5EF4-FFF2-40B4-BE49-F238E27FC236}">
+                        <a16:creationId xmlns:a16="http://schemas.microsoft.com/office/drawing/2014/main" id="{95356ABD-AC5C-BED3-27C2-8A1C46A62254}"/>
+                      </a:ext>
+                    </a:extLst>
+                  </p:cNvPr>
+                  <p:cNvSpPr txBox="1"/>
+                  <p:nvPr/>
+                </p:nvSpPr>
+                <p:spPr>
+                  <a:xfrm>
+                    <a:off x="283473" y="4672541"/>
+                    <a:ext cx="295401" cy="276999"/>
+                  </a:xfrm>
+                  <a:prstGeom prst="rect">
+                    <a:avLst/>
+                  </a:prstGeom>
+                  <a:noFill/>
+                </p:spPr>
+                <p:txBody>
+                  <a:bodyPr wrap="none" lIns="0" tIns="0" rIns="0" bIns="0" rtlCol="0">
+                    <a:spAutoFit/>
+                  </a:bodyPr>
+                  <a:lstStyle/>
+                  <a:p>
+                    <a:pPr/>
+                    <a14:m>
+                      <m:oMathPara xmlns:m="http://schemas.openxmlformats.org/officeDocument/2006/math">
+                        <m:oMathParaPr>
+                          <m:jc m:val="centerGroup"/>
+                        </m:oMathParaPr>
+                        <m:oMath xmlns:m="http://schemas.openxmlformats.org/officeDocument/2006/math">
+                          <m:sSub>
+                            <m:sSubPr>
+                              <m:ctrlPr>
+                                <a:rPr lang="en-US" i="1" smtClean="0">
+                                  <a:latin typeface="Cambria Math" panose="02040503050406030204" pitchFamily="18" charset="0"/>
+                                </a:rPr>
+                              </m:ctrlPr>
+                            </m:sSubPr>
+                            <m:e>
+                              <m:acc>
+                                <m:accPr>
+                                  <m:chr m:val="̂"/>
+                                  <m:ctrlPr>
+                                    <a:rPr lang="en-US" b="1" i="1" smtClean="0">
+                                      <a:latin typeface="Cambria Math" panose="02040503050406030204" pitchFamily="18" charset="0"/>
+                                    </a:rPr>
+                                  </m:ctrlPr>
+                                </m:accPr>
+                                <m:e>
+                                  <m:r>
+                                    <a:rPr lang="en-US" b="1" i="1" smtClean="0">
+                                      <a:latin typeface="Cambria Math" panose="02040503050406030204" pitchFamily="18" charset="0"/>
+                                    </a:rPr>
+                                    <m:t>𝒆</m:t>
+                                  </m:r>
+                                </m:e>
+                              </m:acc>
+                            </m:e>
+                            <m:sub>
+                              <m:r>
+                                <a:rPr lang="en-US" b="0" i="1" smtClean="0">
+                                  <a:latin typeface="Cambria Math" panose="02040503050406030204" pitchFamily="18" charset="0"/>
+                                </a:rPr>
+                                <m:t>𝑧</m:t>
+                              </m:r>
+                            </m:sub>
+                          </m:sSub>
+                        </m:oMath>
+                      </m:oMathPara>
+                    </a14:m>
+                    <a:endParaRPr lang="en-US" dirty="0"/>
+                  </a:p>
+                </p:txBody>
+              </p:sp>
+            </mc:Choice>
+            <mc:Fallback>
+              <p:sp>
+                <p:nvSpPr>
+                  <p:cNvPr id="203" name="テキスト ボックス 202">
+                    <a:extLst>
+                      <a:ext uri="{FF2B5EF4-FFF2-40B4-BE49-F238E27FC236}">
+                        <a16:creationId xmlns:a16="http://schemas.microsoft.com/office/drawing/2014/main" id="{95356ABD-AC5C-BED3-27C2-8A1C46A62254}"/>
+                      </a:ext>
+                    </a:extLst>
+                  </p:cNvPr>
+                  <p:cNvSpPr txBox="1">
+                    <a:spLocks noRot="1" noChangeAspect="1" noMove="1" noResize="1" noEditPoints="1" noAdjustHandles="1" noChangeArrowheads="1" noChangeShapeType="1" noTextEdit="1"/>
+                  </p:cNvSpPr>
+                  <p:nvPr/>
+                </p:nvSpPr>
+                <p:spPr>
+                  <a:xfrm>
+                    <a:off x="283473" y="4672541"/>
+                    <a:ext cx="295401" cy="276999"/>
+                  </a:xfrm>
+                  <a:prstGeom prst="rect">
+                    <a:avLst/>
+                  </a:prstGeom>
+                  <a:blipFill>
+                    <a:blip r:embed="rId8"/>
+                    <a:stretch>
+                      <a:fillRect l="-12500" t="-26667" r="-47917" b="-11111"/>
+                    </a:stretch>
+                  </a:blipFill>
+                </p:spPr>
+                <p:txBody>
+                  <a:bodyPr/>
+                  <a:lstStyle/>
+                  <a:p>
+                    <a:r>
+                      <a:rPr lang="en-US">
+                        <a:noFill/>
+                      </a:rPr>
+                      <a:t> </a:t>
+                    </a:r>
+                  </a:p>
+                </p:txBody>
+              </p:sp>
+            </mc:Fallback>
+          </mc:AlternateContent>
+          <p:cxnSp>
+            <p:nvCxnSpPr>
+              <p:cNvPr id="204" name="直線コネクタ 203">
+                <a:extLst>
+                  <a:ext uri="{FF2B5EF4-FFF2-40B4-BE49-F238E27FC236}">
+                    <a16:creationId xmlns:a16="http://schemas.microsoft.com/office/drawing/2014/main" id="{DEC72EA9-6C8D-49F5-624D-CA5B595110D9}"/>
+                  </a:ext>
+                </a:extLst>
+              </p:cNvPr>
+              <p:cNvCxnSpPr>
+                <a:cxnSpLocks/>
+              </p:cNvCxnSpPr>
+              <p:nvPr/>
+            </p:nvCxnSpPr>
+            <p:spPr>
+              <a:xfrm flipV="1">
+                <a:off x="569724" y="5354389"/>
+                <a:ext cx="495830" cy="70285"/>
+              </a:xfrm>
+              <a:prstGeom prst="line">
+                <a:avLst/>
+              </a:prstGeom>
+              <a:ln w="9525">
+                <a:prstDash val="sysDash"/>
+                <a:headEnd type="arrow" w="med" len="med"/>
+                <a:tailEnd type="none" w="med" len="med"/>
+              </a:ln>
+            </p:spPr>
+            <p:style>
+              <a:lnRef idx="2">
+                <a:schemeClr val="accent1"/>
+              </a:lnRef>
+              <a:fillRef idx="0">
+                <a:schemeClr val="accent1"/>
+              </a:fillRef>
+              <a:effectRef idx="1">
+                <a:schemeClr val="accent1"/>
+              </a:effectRef>
+              <a:fontRef idx="minor">
+                <a:schemeClr val="tx1"/>
+              </a:fontRef>
+            </p:style>
+          </p:cxnSp>
+          <p:cxnSp>
+            <p:nvCxnSpPr>
+              <p:cNvPr id="206" name="直線コネクタ 205">
+                <a:extLst>
+                  <a:ext uri="{FF2B5EF4-FFF2-40B4-BE49-F238E27FC236}">
+                    <a16:creationId xmlns:a16="http://schemas.microsoft.com/office/drawing/2014/main" id="{9032D9E5-D98D-1577-9FF7-CECCF5E7D8DD}"/>
+                  </a:ext>
+                </a:extLst>
+              </p:cNvPr>
+              <p:cNvCxnSpPr>
+                <a:cxnSpLocks/>
+              </p:cNvCxnSpPr>
+              <p:nvPr/>
+            </p:nvCxnSpPr>
+            <p:spPr>
+              <a:xfrm>
+                <a:off x="1065554" y="4892381"/>
+                <a:ext cx="0" cy="447362"/>
+              </a:xfrm>
+              <a:prstGeom prst="line">
+                <a:avLst/>
+              </a:prstGeom>
+              <a:ln w="9525">
+                <a:prstDash val="sysDash"/>
+                <a:headEnd type="arrow" w="med" len="med"/>
+                <a:tailEnd type="none" w="med" len="med"/>
+              </a:ln>
+            </p:spPr>
+            <p:style>
+              <a:lnRef idx="2">
+                <a:schemeClr val="accent1"/>
+              </a:lnRef>
+              <a:fillRef idx="0">
+                <a:schemeClr val="accent1"/>
+              </a:fillRef>
+              <a:effectRef idx="1">
+                <a:schemeClr val="accent1"/>
+              </a:effectRef>
+              <a:fontRef idx="minor">
+                <a:schemeClr val="tx1"/>
+              </a:fontRef>
+            </p:style>
+          </p:cxnSp>
+          <p:cxnSp>
+            <p:nvCxnSpPr>
+              <p:cNvPr id="208" name="直線コネクタ 207">
+                <a:extLst>
+                  <a:ext uri="{FF2B5EF4-FFF2-40B4-BE49-F238E27FC236}">
+                    <a16:creationId xmlns:a16="http://schemas.microsoft.com/office/drawing/2014/main" id="{6B74278D-C87D-8862-29F7-368C42A6F1E5}"/>
+                  </a:ext>
+                </a:extLst>
+              </p:cNvPr>
+              <p:cNvCxnSpPr>
+                <a:cxnSpLocks/>
+              </p:cNvCxnSpPr>
+              <p:nvPr/>
+            </p:nvCxnSpPr>
+            <p:spPr>
+              <a:xfrm flipH="1" flipV="1">
+                <a:off x="605142" y="4899048"/>
+                <a:ext cx="929433" cy="917711"/>
+              </a:xfrm>
+              <a:prstGeom prst="line">
+                <a:avLst/>
+              </a:prstGeom>
+              <a:ln w="9525">
+                <a:prstDash val="sysDash"/>
+                <a:headEnd type="none" w="med" len="med"/>
+                <a:tailEnd type="arrow" w="med" len="med"/>
+              </a:ln>
+            </p:spPr>
+            <p:style>
+              <a:lnRef idx="2">
+                <a:schemeClr val="accent1"/>
+              </a:lnRef>
+              <a:fillRef idx="0">
+                <a:schemeClr val="accent1"/>
+              </a:fillRef>
+              <a:effectRef idx="1">
+                <a:schemeClr val="accent1"/>
+              </a:effectRef>
+              <a:fontRef idx="minor">
+                <a:schemeClr val="tx1"/>
+              </a:fontRef>
+            </p:style>
+          </p:cxnSp>
+          <mc:AlternateContent xmlns:mc="http://schemas.openxmlformats.org/markup-compatibility/2006">
+            <mc:Choice xmlns:a14="http://schemas.microsoft.com/office/drawing/2010/main" Requires="a14">
+              <p:sp>
+                <p:nvSpPr>
+                  <p:cNvPr id="212" name="テキスト ボックス 211">
+                    <a:extLst>
+                      <a:ext uri="{FF2B5EF4-FFF2-40B4-BE49-F238E27FC236}">
+                        <a16:creationId xmlns:a16="http://schemas.microsoft.com/office/drawing/2014/main" id="{092AF00C-4641-0E1C-0B67-753240ED7557}"/>
+                      </a:ext>
+                    </a:extLst>
+                  </p:cNvPr>
+                  <p:cNvSpPr txBox="1"/>
+                  <p:nvPr/>
+                </p:nvSpPr>
+                <p:spPr>
+                  <a:xfrm>
+                    <a:off x="773841" y="1231188"/>
+                    <a:ext cx="454099" cy="276999"/>
+                  </a:xfrm>
+                  <a:prstGeom prst="rect">
+                    <a:avLst/>
+                  </a:prstGeom>
+                  <a:noFill/>
+                </p:spPr>
+                <p:txBody>
+                  <a:bodyPr wrap="none" lIns="0" tIns="0" rIns="0" bIns="0" rtlCol="0">
+                    <a:spAutoFit/>
+                  </a:bodyPr>
+                  <a:lstStyle/>
+                  <a:p>
+                    <a:pPr/>
+                    <a14:m>
+                      <m:oMathPara xmlns:m="http://schemas.openxmlformats.org/officeDocument/2006/math">
+                        <m:oMathParaPr>
+                          <m:jc m:val="centerGroup"/>
+                        </m:oMathParaPr>
+                        <m:oMath xmlns:m="http://schemas.openxmlformats.org/officeDocument/2006/math">
+                          <m:sSub>
+                            <m:sSubPr>
+                              <m:ctrlPr>
+                                <a:rPr lang="en-US" i="1" smtClean="0">
+                                  <a:latin typeface="Cambria Math" panose="02040503050406030204" pitchFamily="18" charset="0"/>
+                                </a:rPr>
+                              </m:ctrlPr>
+                            </m:sSubPr>
+                            <m:e>
+                              <m:r>
+                                <a:rPr lang="en-US" b="1" i="1" smtClean="0">
+                                  <a:latin typeface="Cambria Math" panose="02040503050406030204" pitchFamily="18" charset="0"/>
+                                </a:rPr>
+                                <m:t>𝒌</m:t>
+                              </m:r>
+                            </m:e>
+                            <m:sub>
+                              <m:r>
+                                <a:rPr lang="en-US" b="0" i="1" smtClean="0">
+                                  <a:latin typeface="Cambria Math" panose="02040503050406030204" pitchFamily="18" charset="0"/>
+                                </a:rPr>
+                                <m:t>2</m:t>
+                              </m:r>
+                              <m:r>
+                                <a:rPr lang="en-US" i="1">
+                                  <a:latin typeface="Cambria Math" panose="02040503050406030204" pitchFamily="18" charset="0"/>
+                                  <a:ea typeface="Cambria Math" panose="02040503050406030204" pitchFamily="18" charset="0"/>
+                                </a:rPr>
+                                <m:t>𝜔</m:t>
+                              </m:r>
+                            </m:sub>
+                          </m:sSub>
+                        </m:oMath>
+                      </m:oMathPara>
+                    </a14:m>
+                    <a:endParaRPr lang="en-US" dirty="0"/>
+                  </a:p>
+                </p:txBody>
+              </p:sp>
+            </mc:Choice>
+            <mc:Fallback>
+              <p:sp>
+                <p:nvSpPr>
+                  <p:cNvPr id="212" name="テキスト ボックス 211">
+                    <a:extLst>
+                      <a:ext uri="{FF2B5EF4-FFF2-40B4-BE49-F238E27FC236}">
+                        <a16:creationId xmlns:a16="http://schemas.microsoft.com/office/drawing/2014/main" id="{092AF00C-4641-0E1C-0B67-753240ED7557}"/>
+                      </a:ext>
+                    </a:extLst>
+                  </p:cNvPr>
+                  <p:cNvSpPr txBox="1">
+                    <a:spLocks noRot="1" noChangeAspect="1" noMove="1" noResize="1" noEditPoints="1" noAdjustHandles="1" noChangeArrowheads="1" noChangeShapeType="1" noTextEdit="1"/>
+                  </p:cNvSpPr>
+                  <p:nvPr/>
+                </p:nvSpPr>
+                <p:spPr>
+                  <a:xfrm>
+                    <a:off x="773841" y="1231188"/>
+                    <a:ext cx="454099" cy="276999"/>
+                  </a:xfrm>
+                  <a:prstGeom prst="rect">
+                    <a:avLst/>
+                  </a:prstGeom>
+                  <a:blipFill>
+                    <a:blip r:embed="rId9"/>
+                    <a:stretch>
+                      <a:fillRect l="-10667" b="-13043"/>
+                    </a:stretch>
+                  </a:blipFill>
+                </p:spPr>
+                <p:txBody>
+                  <a:bodyPr/>
+                  <a:lstStyle/>
+                  <a:p>
+                    <a:r>
+                      <a:rPr lang="en-US">
+                        <a:noFill/>
+                      </a:rPr>
+                      <a:t> </a:t>
+                    </a:r>
+                  </a:p>
+                </p:txBody>
+              </p:sp>
+            </mc:Fallback>
+          </mc:AlternateContent>
+          <p:cxnSp>
+            <p:nvCxnSpPr>
+              <p:cNvPr id="5" name="直線コネクタ 4">
+                <a:extLst>
+                  <a:ext uri="{FF2B5EF4-FFF2-40B4-BE49-F238E27FC236}">
+                    <a16:creationId xmlns:a16="http://schemas.microsoft.com/office/drawing/2014/main" id="{26570B17-F552-E6EA-5480-FE1282944121}"/>
+                  </a:ext>
+                </a:extLst>
+              </p:cNvPr>
+              <p:cNvCxnSpPr>
+                <a:cxnSpLocks/>
+              </p:cNvCxnSpPr>
+              <p:nvPr/>
+            </p:nvCxnSpPr>
+            <p:spPr>
+              <a:xfrm flipV="1">
+                <a:off x="2561936" y="4622934"/>
+                <a:ext cx="0" cy="582130"/>
+              </a:xfrm>
+              <a:prstGeom prst="line">
+                <a:avLst/>
+              </a:prstGeom>
+              <a:ln>
+                <a:prstDash val="solid"/>
+                <a:headEnd type="arrow" w="med" len="med"/>
+                <a:tailEnd type="arrow" w="med" len="med"/>
+              </a:ln>
+            </p:spPr>
+            <p:style>
+              <a:lnRef idx="1">
+                <a:schemeClr val="accent1"/>
+              </a:lnRef>
+              <a:fillRef idx="0">
+                <a:schemeClr val="accent1"/>
+              </a:fillRef>
+              <a:effectRef idx="0">
+                <a:schemeClr val="accent1"/>
+              </a:effectRef>
+              <a:fontRef idx="minor">
+                <a:schemeClr val="tx1"/>
+              </a:fontRef>
+            </p:style>
+          </p:cxnSp>
+          <p:cxnSp>
+            <p:nvCxnSpPr>
+              <p:cNvPr id="6" name="直線コネクタ 5">
+                <a:extLst>
+                  <a:ext uri="{FF2B5EF4-FFF2-40B4-BE49-F238E27FC236}">
+                    <a16:creationId xmlns:a16="http://schemas.microsoft.com/office/drawing/2014/main" id="{70412230-B909-5321-2D54-5ED8C3918027}"/>
+                  </a:ext>
+                </a:extLst>
+              </p:cNvPr>
+              <p:cNvCxnSpPr>
+                <a:cxnSpLocks/>
+              </p:cNvCxnSpPr>
+              <p:nvPr/>
+            </p:nvCxnSpPr>
+            <p:spPr>
+              <a:xfrm flipV="1">
+                <a:off x="2682318" y="4360085"/>
+                <a:ext cx="0" cy="589455"/>
+              </a:xfrm>
+              <a:prstGeom prst="line">
+                <a:avLst/>
+              </a:prstGeom>
+              <a:ln>
+                <a:prstDash val="solid"/>
+                <a:headEnd type="arrow" w="med" len="med"/>
+                <a:tailEnd type="arrow" w="med" len="med"/>
+              </a:ln>
+            </p:spPr>
+            <p:style>
+              <a:lnRef idx="1">
+                <a:schemeClr val="accent1"/>
+              </a:lnRef>
+              <a:fillRef idx="0">
+                <a:schemeClr val="accent1"/>
+              </a:fillRef>
+              <a:effectRef idx="0">
+                <a:schemeClr val="accent1"/>
+              </a:effectRef>
+              <a:fontRef idx="minor">
+                <a:schemeClr val="tx1"/>
+              </a:fontRef>
+            </p:style>
+          </p:cxnSp>
+          <p:cxnSp>
+            <p:nvCxnSpPr>
+              <p:cNvPr id="7" name="直線コネクタ 6">
+                <a:extLst>
+                  <a:ext uri="{FF2B5EF4-FFF2-40B4-BE49-F238E27FC236}">
+                    <a16:creationId xmlns:a16="http://schemas.microsoft.com/office/drawing/2014/main" id="{E7C3E9B0-9473-D3DB-E115-BAA569A6627B}"/>
+                  </a:ext>
+                </a:extLst>
+              </p:cNvPr>
+              <p:cNvCxnSpPr>
+                <a:cxnSpLocks/>
+              </p:cNvCxnSpPr>
+              <p:nvPr/>
+            </p:nvCxnSpPr>
+            <p:spPr>
+              <a:xfrm flipV="1">
+                <a:off x="2418072" y="4884097"/>
+                <a:ext cx="0" cy="540577"/>
+              </a:xfrm>
+              <a:prstGeom prst="line">
+                <a:avLst/>
+              </a:prstGeom>
+              <a:ln>
+                <a:prstDash val="solid"/>
+                <a:headEnd type="arrow" w="med" len="med"/>
+                <a:tailEnd type="arrow" w="med" len="med"/>
+              </a:ln>
+            </p:spPr>
+            <p:style>
+              <a:lnRef idx="1">
+                <a:schemeClr val="accent1"/>
+              </a:lnRef>
+              <a:fillRef idx="0">
+                <a:schemeClr val="accent1"/>
+              </a:fillRef>
+              <a:effectRef idx="0">
+                <a:schemeClr val="accent1"/>
+              </a:effectRef>
+              <a:fontRef idx="minor">
+                <a:schemeClr val="tx1"/>
+              </a:fontRef>
+            </p:style>
+          </p:cxnSp>
+          <p:cxnSp>
+            <p:nvCxnSpPr>
+              <p:cNvPr id="12" name="直線コネクタ 11">
+                <a:extLst>
+                  <a:ext uri="{FF2B5EF4-FFF2-40B4-BE49-F238E27FC236}">
+                    <a16:creationId xmlns:a16="http://schemas.microsoft.com/office/drawing/2014/main" id="{63F6F569-48BB-671E-B253-615713DFC82E}"/>
+                  </a:ext>
+                </a:extLst>
+              </p:cNvPr>
+              <p:cNvCxnSpPr>
+                <a:cxnSpLocks/>
+              </p:cNvCxnSpPr>
+              <p:nvPr/>
+            </p:nvCxnSpPr>
+            <p:spPr>
+              <a:xfrm flipH="1">
+                <a:off x="1419871" y="2401591"/>
+                <a:ext cx="597326" cy="77939"/>
+              </a:xfrm>
+              <a:prstGeom prst="line">
+                <a:avLst/>
+              </a:prstGeom>
+              <a:ln>
+                <a:headEnd type="arrow" w="med" len="med"/>
+                <a:tailEnd type="arrow" w="med" len="med"/>
+              </a:ln>
+            </p:spPr>
+            <p:style>
+              <a:lnRef idx="1">
+                <a:schemeClr val="accent5"/>
+              </a:lnRef>
+              <a:fillRef idx="0">
+                <a:schemeClr val="accent5"/>
+              </a:fillRef>
+              <a:effectRef idx="0">
+                <a:schemeClr val="accent5"/>
+              </a:effectRef>
+              <a:fontRef idx="minor">
+                <a:schemeClr val="tx1"/>
+              </a:fontRef>
+            </p:style>
+          </p:cxnSp>
+          <p:cxnSp>
+            <p:nvCxnSpPr>
+              <p:cNvPr id="13" name="直線コネクタ 12">
+                <a:extLst>
+                  <a:ext uri="{FF2B5EF4-FFF2-40B4-BE49-F238E27FC236}">
+                    <a16:creationId xmlns:a16="http://schemas.microsoft.com/office/drawing/2014/main" id="{F9C66CBD-B29E-8B38-0297-479F654AF13F}"/>
+                  </a:ext>
+                </a:extLst>
+              </p:cNvPr>
+              <p:cNvCxnSpPr>
+                <a:cxnSpLocks/>
+              </p:cNvCxnSpPr>
+              <p:nvPr/>
+            </p:nvCxnSpPr>
+            <p:spPr>
+              <a:xfrm flipH="1">
+                <a:off x="1512761" y="2506400"/>
+                <a:ext cx="597326" cy="77939"/>
+              </a:xfrm>
+              <a:prstGeom prst="line">
+                <a:avLst/>
+              </a:prstGeom>
+              <a:ln>
+                <a:headEnd type="arrow" w="med" len="med"/>
+                <a:tailEnd type="arrow" w="med" len="med"/>
+              </a:ln>
+            </p:spPr>
+            <p:style>
+              <a:lnRef idx="1">
+                <a:schemeClr val="accent5"/>
+              </a:lnRef>
+              <a:fillRef idx="0">
+                <a:schemeClr val="accent5"/>
+              </a:fillRef>
+              <a:effectRef idx="0">
+                <a:schemeClr val="accent5"/>
+              </a:effectRef>
+              <a:fontRef idx="minor">
+                <a:schemeClr val="tx1"/>
+              </a:fontRef>
+            </p:style>
+          </p:cxnSp>
+          <p:cxnSp>
+            <p:nvCxnSpPr>
+              <p:cNvPr id="14" name="直線コネクタ 13">
+                <a:extLst>
+                  <a:ext uri="{FF2B5EF4-FFF2-40B4-BE49-F238E27FC236}">
+                    <a16:creationId xmlns:a16="http://schemas.microsoft.com/office/drawing/2014/main" id="{EA0651D3-F6F3-ED88-396E-B1551949C6BD}"/>
+                  </a:ext>
+                </a:extLst>
+              </p:cNvPr>
+              <p:cNvCxnSpPr>
+                <a:cxnSpLocks/>
+              </p:cNvCxnSpPr>
+              <p:nvPr/>
+            </p:nvCxnSpPr>
+            <p:spPr>
+              <a:xfrm flipH="1">
+                <a:off x="1594422" y="2613734"/>
+                <a:ext cx="597326" cy="77939"/>
+              </a:xfrm>
+              <a:prstGeom prst="line">
+                <a:avLst/>
+              </a:prstGeom>
+              <a:ln>
+                <a:headEnd type="arrow" w="med" len="med"/>
+                <a:tailEnd type="arrow" w="med" len="med"/>
+              </a:ln>
+            </p:spPr>
+            <p:style>
+              <a:lnRef idx="1">
+                <a:schemeClr val="accent5"/>
+              </a:lnRef>
+              <a:fillRef idx="0">
+                <a:schemeClr val="accent5"/>
+              </a:fillRef>
+              <a:effectRef idx="0">
+                <a:schemeClr val="accent5"/>
+              </a:effectRef>
+              <a:fontRef idx="minor">
+                <a:schemeClr val="tx1"/>
+              </a:fontRef>
+            </p:style>
+          </p:cxnSp>
+          <p:cxnSp>
+            <p:nvCxnSpPr>
+              <p:cNvPr id="15" name="直線コネクタ 14">
+                <a:extLst>
+                  <a:ext uri="{FF2B5EF4-FFF2-40B4-BE49-F238E27FC236}">
+                    <a16:creationId xmlns:a16="http://schemas.microsoft.com/office/drawing/2014/main" id="{316CBBD2-3CDF-8AB8-23AB-00BE64B8D754}"/>
+                  </a:ext>
+                </a:extLst>
+              </p:cNvPr>
+              <p:cNvCxnSpPr>
+                <a:cxnSpLocks/>
+              </p:cNvCxnSpPr>
+              <p:nvPr/>
+            </p:nvCxnSpPr>
+            <p:spPr>
+              <a:xfrm flipH="1">
+                <a:off x="1692517" y="2719420"/>
+                <a:ext cx="597326" cy="77939"/>
+              </a:xfrm>
+              <a:prstGeom prst="line">
+                <a:avLst/>
+              </a:prstGeom>
+              <a:ln>
+                <a:headEnd type="arrow" w="med" len="med"/>
+                <a:tailEnd type="arrow" w="med" len="med"/>
+              </a:ln>
+            </p:spPr>
+            <p:style>
+              <a:lnRef idx="1">
+                <a:schemeClr val="accent5"/>
+              </a:lnRef>
+              <a:fillRef idx="0">
+                <a:schemeClr val="accent5"/>
+              </a:fillRef>
+              <a:effectRef idx="0">
+                <a:schemeClr val="accent5"/>
+              </a:effectRef>
+              <a:fontRef idx="minor">
+                <a:schemeClr val="tx1"/>
+              </a:fontRef>
+            </p:style>
+          </p:cxnSp>
+        </p:grpSp>
+        <p:cxnSp>
+          <p:nvCxnSpPr>
+            <p:cNvPr id="42" name="直線矢印コネクタ 41">
+              <a:extLst>
+                <a:ext uri="{FF2B5EF4-FFF2-40B4-BE49-F238E27FC236}">
+                  <a16:creationId xmlns:a16="http://schemas.microsoft.com/office/drawing/2014/main" id="{37DA9B1E-7E83-1C5A-34AE-7B7E7D6EAAF7}"/>
+                </a:ext>
+              </a:extLst>
+            </p:cNvPr>
+            <p:cNvCxnSpPr>
+              <a:cxnSpLocks/>
+            </p:cNvCxnSpPr>
+            <p:nvPr/>
+          </p:nvCxnSpPr>
+          <p:spPr>
+            <a:xfrm flipH="1" flipV="1">
+              <a:off x="4126088" y="3750788"/>
+              <a:ext cx="2251898" cy="1549757"/>
+            </a:xfrm>
+            <a:prstGeom prst="straightConnector1">
+              <a:avLst/>
+            </a:prstGeom>
+            <a:ln>
+              <a:tailEnd type="triangle"/>
+            </a:ln>
+          </p:spPr>
+          <p:style>
+            <a:lnRef idx="2">
+              <a:schemeClr val="dk1"/>
+            </a:lnRef>
+            <a:fillRef idx="0">
+              <a:schemeClr val="dk1"/>
+            </a:fillRef>
+            <a:effectRef idx="1">
+              <a:schemeClr val="dk1"/>
+            </a:effectRef>
+            <a:fontRef idx="minor">
+              <a:schemeClr val="tx1"/>
+            </a:fontRef>
+          </p:style>
+        </p:cxnSp>
+        <p:cxnSp>
+          <p:nvCxnSpPr>
+            <p:cNvPr id="45" name="直線コネクタ 44">
+              <a:extLst>
+                <a:ext uri="{FF2B5EF4-FFF2-40B4-BE49-F238E27FC236}">
+                  <a16:creationId xmlns:a16="http://schemas.microsoft.com/office/drawing/2014/main" id="{95E6A913-5B89-DE48-23E5-C409E51A29CF}"/>
+                </a:ext>
+              </a:extLst>
+            </p:cNvPr>
+            <p:cNvCxnSpPr>
+              <a:cxnSpLocks/>
+            </p:cNvCxnSpPr>
+            <p:nvPr/>
+          </p:nvCxnSpPr>
+          <p:spPr>
+            <a:xfrm flipV="1">
+              <a:off x="5470309" y="4464830"/>
+              <a:ext cx="0" cy="477062"/>
+            </a:xfrm>
+            <a:prstGeom prst="line">
+              <a:avLst/>
+            </a:prstGeom>
+            <a:ln>
+              <a:prstDash val="solid"/>
+              <a:headEnd type="arrow" w="med" len="med"/>
+              <a:tailEnd type="arrow" w="med" len="med"/>
+            </a:ln>
+          </p:spPr>
+          <p:style>
+            <a:lnRef idx="1">
+              <a:schemeClr val="accent1"/>
+            </a:lnRef>
+            <a:fillRef idx="0">
+              <a:schemeClr val="accent1"/>
+            </a:fillRef>
+            <a:effectRef idx="0">
+              <a:schemeClr val="accent1"/>
+            </a:effectRef>
+            <a:fontRef idx="minor">
+              <a:schemeClr val="tx1"/>
+            </a:fontRef>
+          </p:style>
+        </p:cxnSp>
+        <p:cxnSp>
+          <p:nvCxnSpPr>
+            <p:cNvPr id="46" name="直線コネクタ 45">
+              <a:extLst>
+                <a:ext uri="{FF2B5EF4-FFF2-40B4-BE49-F238E27FC236}">
+                  <a16:creationId xmlns:a16="http://schemas.microsoft.com/office/drawing/2014/main" id="{288B4B7A-E52F-C99A-6E89-382554E3C11E}"/>
+                </a:ext>
+              </a:extLst>
+            </p:cNvPr>
+            <p:cNvCxnSpPr>
+              <a:cxnSpLocks/>
+            </p:cNvCxnSpPr>
+            <p:nvPr/>
+          </p:nvCxnSpPr>
+          <p:spPr>
+            <a:xfrm flipV="1">
+              <a:off x="5623639" y="4554194"/>
+              <a:ext cx="0" cy="491695"/>
+            </a:xfrm>
+            <a:prstGeom prst="line">
+              <a:avLst/>
+            </a:prstGeom>
+            <a:ln>
+              <a:prstDash val="solid"/>
+              <a:headEnd type="arrow" w="med" len="med"/>
+              <a:tailEnd type="arrow" w="med" len="med"/>
+            </a:ln>
+          </p:spPr>
+          <p:style>
+            <a:lnRef idx="1">
+              <a:schemeClr val="accent1"/>
+            </a:lnRef>
+            <a:fillRef idx="0">
+              <a:schemeClr val="accent1"/>
+            </a:fillRef>
+            <a:effectRef idx="0">
+              <a:schemeClr val="accent1"/>
+            </a:effectRef>
+            <a:fontRef idx="minor">
+              <a:schemeClr val="tx1"/>
+            </a:fontRef>
+          </p:style>
+        </p:cxnSp>
+        <p:cxnSp>
+          <p:nvCxnSpPr>
+            <p:cNvPr id="50" name="直線コネクタ 49">
+              <a:extLst>
+                <a:ext uri="{FF2B5EF4-FFF2-40B4-BE49-F238E27FC236}">
+                  <a16:creationId xmlns:a16="http://schemas.microsoft.com/office/drawing/2014/main" id="{4332A866-32C7-5247-FECA-A36AA40669A7}"/>
+                </a:ext>
+              </a:extLst>
+            </p:cNvPr>
+            <p:cNvCxnSpPr>
+              <a:cxnSpLocks/>
+              <a:stCxn id="140" idx="0"/>
+            </p:cNvCxnSpPr>
+            <p:nvPr/>
+          </p:nvCxnSpPr>
+          <p:spPr>
+            <a:xfrm>
+              <a:off x="4105492" y="3746925"/>
+              <a:ext cx="1757243" cy="1985809"/>
+            </a:xfrm>
+            <a:prstGeom prst="line">
+              <a:avLst/>
+            </a:prstGeom>
+            <a:ln w="9525">
+              <a:prstDash val="sysDash"/>
+            </a:ln>
+          </p:spPr>
+          <p:style>
+            <a:lnRef idx="2">
+              <a:schemeClr val="accent1"/>
+            </a:lnRef>
+            <a:fillRef idx="0">
+              <a:schemeClr val="accent1"/>
+            </a:fillRef>
+            <a:effectRef idx="1">
+              <a:schemeClr val="accent1"/>
+            </a:effectRef>
+            <a:fontRef idx="minor">
+              <a:schemeClr val="tx1"/>
+            </a:fontRef>
+          </p:style>
+        </p:cxnSp>
+        <mc:AlternateContent xmlns:mc="http://schemas.openxmlformats.org/markup-compatibility/2006">
+          <mc:Choice xmlns:a14="http://schemas.microsoft.com/office/drawing/2010/main" Requires="a14">
+            <p:sp>
+              <p:nvSpPr>
+                <p:cNvPr id="60" name="テキスト ボックス 59">
+                  <a:extLst>
+                    <a:ext uri="{FF2B5EF4-FFF2-40B4-BE49-F238E27FC236}">
+                      <a16:creationId xmlns:a16="http://schemas.microsoft.com/office/drawing/2014/main" id="{87CA5E10-8FFB-FF0D-4C15-679FFB0122AE}"/>
+                    </a:ext>
+                  </a:extLst>
+                </p:cNvPr>
+                <p:cNvSpPr txBox="1"/>
+                <p:nvPr/>
+              </p:nvSpPr>
+              <p:spPr>
+                <a:xfrm>
+                  <a:off x="6381881" y="5226554"/>
+                  <a:ext cx="489365" cy="289182"/>
+                </a:xfrm>
+                <a:prstGeom prst="rect">
+                  <a:avLst/>
+                </a:prstGeom>
+                <a:noFill/>
+              </p:spPr>
+              <p:txBody>
+                <a:bodyPr wrap="none" lIns="0" tIns="0" rIns="0" bIns="0" rtlCol="0">
+                  <a:spAutoFit/>
+                </a:bodyPr>
+                <a:lstStyle/>
+                <a:p>
+                  <a:pPr/>
+                  <a14:m>
+                    <m:oMathPara xmlns:m="http://schemas.openxmlformats.org/officeDocument/2006/math">
+                      <m:oMathParaPr>
+                        <m:jc m:val="centerGroup"/>
+                      </m:oMathParaPr>
+                      <m:oMath xmlns:m="http://schemas.openxmlformats.org/officeDocument/2006/math">
+                        <m:sSub>
+                          <m:sSubPr>
+                            <m:ctrlPr>
+                              <a:rPr lang="en-US" i="1" smtClean="0">
+                                <a:latin typeface="Cambria Math" panose="02040503050406030204" pitchFamily="18" charset="0"/>
+                              </a:rPr>
+                            </m:ctrlPr>
+                          </m:sSubPr>
+                          <m:e>
+                            <m:r>
+                              <a:rPr lang="en-US" b="1" i="1" smtClean="0">
+                                <a:latin typeface="Cambria Math" panose="02040503050406030204" pitchFamily="18" charset="0"/>
+                              </a:rPr>
+                              <m:t>𝒌</m:t>
+                            </m:r>
+                          </m:e>
+                          <m:sub>
+                            <m:r>
+                              <a:rPr lang="en-US" b="0" i="1" smtClean="0">
+                                <a:latin typeface="Cambria Math" panose="02040503050406030204" pitchFamily="18" charset="0"/>
+                              </a:rPr>
+                              <m:t>2</m:t>
+                            </m:r>
+                            <m:r>
+                              <a:rPr lang="en-US" b="0" i="1" smtClean="0">
+                                <a:latin typeface="Cambria Math" panose="02040503050406030204" pitchFamily="18" charset="0"/>
+                              </a:rPr>
+                              <m:t>,</m:t>
+                            </m:r>
+                            <m:r>
+                              <a:rPr lang="en-US" b="0" i="1" smtClean="0">
+                                <a:latin typeface="Cambria Math" panose="02040503050406030204" pitchFamily="18" charset="0"/>
+                                <a:ea typeface="Cambria Math" panose="02040503050406030204" pitchFamily="18" charset="0"/>
+                              </a:rPr>
+                              <m:t>𝜔</m:t>
+                            </m:r>
+                          </m:sub>
+                        </m:sSub>
+                      </m:oMath>
+                    </m:oMathPara>
+                  </a14:m>
+                  <a:endParaRPr lang="en-US" dirty="0"/>
+                </a:p>
+              </p:txBody>
+            </p:sp>
+          </mc:Choice>
+          <mc:Fallback>
+            <p:sp>
+              <p:nvSpPr>
+                <p:cNvPr id="60" name="テキスト ボックス 59">
+                  <a:extLst>
+                    <a:ext uri="{FF2B5EF4-FFF2-40B4-BE49-F238E27FC236}">
+                      <a16:creationId xmlns:a16="http://schemas.microsoft.com/office/drawing/2014/main" id="{87CA5E10-8FFB-FF0D-4C15-679FFB0122AE}"/>
+                    </a:ext>
+                  </a:extLst>
+                </p:cNvPr>
+                <p:cNvSpPr txBox="1">
+                  <a:spLocks noRot="1" noChangeAspect="1" noMove="1" noResize="1" noEditPoints="1" noAdjustHandles="1" noChangeArrowheads="1" noChangeShapeType="1" noTextEdit="1"/>
+                </p:cNvSpPr>
+                <p:nvPr/>
+              </p:nvSpPr>
+              <p:spPr>
+                <a:xfrm>
+                  <a:off x="6381881" y="5226554"/>
+                  <a:ext cx="489365" cy="289182"/>
+                </a:xfrm>
+                <a:prstGeom prst="rect">
+                  <a:avLst/>
+                </a:prstGeom>
+                <a:blipFill>
+                  <a:blip r:embed="rId10"/>
+                  <a:stretch>
+                    <a:fillRect l="-10000" b="-10417"/>
+                  </a:stretch>
+                </a:blipFill>
+              </p:spPr>
+              <p:txBody>
+                <a:bodyPr/>
+                <a:lstStyle/>
+                <a:p>
+                  <a:r>
+                    <a:rPr lang="en-US">
+                      <a:noFill/>
+                    </a:rPr>
+                    <a:t> </a:t>
+                  </a:r>
+                </a:p>
+              </p:txBody>
+            </p:sp>
+          </mc:Fallback>
+        </mc:AlternateContent>
+        <p:sp>
+          <p:nvSpPr>
+            <p:cNvPr id="63" name="円弧 62">
+              <a:extLst>
+                <a:ext uri="{FF2B5EF4-FFF2-40B4-BE49-F238E27FC236}">
+                  <a16:creationId xmlns:a16="http://schemas.microsoft.com/office/drawing/2014/main" id="{2D9CC5A0-C964-FFF0-E492-7C7F2DEE61EA}"/>
+                </a:ext>
+              </a:extLst>
+            </p:cNvPr>
+            <p:cNvSpPr/>
+            <p:nvPr/>
+          </p:nvSpPr>
+          <p:spPr>
+            <a:xfrm rot="7190372">
+              <a:off x="3844941" y="3571613"/>
+              <a:ext cx="594736" cy="581752"/>
+            </a:xfrm>
+            <a:prstGeom prst="arc">
+              <a:avLst>
+                <a:gd name="adj1" fmla="val 17020275"/>
+                <a:gd name="adj2" fmla="val 0"/>
+              </a:avLst>
+            </a:prstGeom>
+          </p:spPr>
+          <p:style>
+            <a:lnRef idx="2">
+              <a:schemeClr val="dk1"/>
+            </a:lnRef>
+            <a:fillRef idx="0">
+              <a:schemeClr val="dk1"/>
+            </a:fillRef>
+            <a:effectRef idx="1">
+              <a:schemeClr val="dk1"/>
+            </a:effectRef>
+            <a:fontRef idx="minor">
+              <a:schemeClr val="tx1"/>
+            </a:fontRef>
+          </p:style>
+          <p:txBody>
+            <a:bodyPr rtlCol="0" anchor="ctr"/>
+            <a:lstStyle/>
+            <a:p>
+              <a:pPr algn="ctr"/>
+              <a:endParaRPr lang="en-US"/>
+            </a:p>
+          </p:txBody>
+        </p:sp>
+        <p:sp>
+          <p:nvSpPr>
+            <p:cNvPr id="133" name="円弧 132">
+              <a:extLst>
+                <a:ext uri="{FF2B5EF4-FFF2-40B4-BE49-F238E27FC236}">
+                  <a16:creationId xmlns:a16="http://schemas.microsoft.com/office/drawing/2014/main" id="{0C0F2BBB-A0F2-09E4-7A21-C03B3DD56AF8}"/>
+                </a:ext>
+              </a:extLst>
+            </p:cNvPr>
+            <p:cNvSpPr/>
+            <p:nvPr/>
+          </p:nvSpPr>
+          <p:spPr>
+            <a:xfrm rot="4984093">
+              <a:off x="4290369" y="3897744"/>
+              <a:ext cx="170487" cy="161675"/>
+            </a:xfrm>
+            <a:prstGeom prst="arc">
+              <a:avLst>
+                <a:gd name="adj1" fmla="val 17020275"/>
+                <a:gd name="adj2" fmla="val 0"/>
+              </a:avLst>
+            </a:prstGeom>
+          </p:spPr>
+          <p:style>
+            <a:lnRef idx="2">
+              <a:schemeClr val="dk1"/>
+            </a:lnRef>
+            <a:fillRef idx="0">
+              <a:schemeClr val="dk1"/>
+            </a:fillRef>
+            <a:effectRef idx="1">
+              <a:schemeClr val="dk1"/>
+            </a:effectRef>
+            <a:fontRef idx="minor">
+              <a:schemeClr val="tx1"/>
+            </a:fontRef>
+          </p:style>
+          <p:txBody>
+            <a:bodyPr rtlCol="0" anchor="ctr"/>
+            <a:lstStyle/>
+            <a:p>
+              <a:pPr algn="ctr"/>
+              <a:endParaRPr lang="en-US"/>
+            </a:p>
+          </p:txBody>
+        </p:sp>
+        <mc:AlternateContent xmlns:mc="http://schemas.openxmlformats.org/markup-compatibility/2006">
+          <mc:Choice xmlns:a14="http://schemas.microsoft.com/office/drawing/2010/main" Requires="a14">
+            <p:sp>
+              <p:nvSpPr>
+                <p:cNvPr id="137" name="テキスト ボックス 136">
+                  <a:extLst>
+                    <a:ext uri="{FF2B5EF4-FFF2-40B4-BE49-F238E27FC236}">
+                      <a16:creationId xmlns:a16="http://schemas.microsoft.com/office/drawing/2014/main" id="{67EA756C-7178-2337-255A-A4B77D6AF8D1}"/>
+                    </a:ext>
+                  </a:extLst>
+                </p:cNvPr>
+                <p:cNvSpPr txBox="1"/>
+                <p:nvPr/>
+              </p:nvSpPr>
+              <p:spPr>
+                <a:xfrm>
+                  <a:off x="4082514" y="4260279"/>
+                  <a:ext cx="281872" cy="276999"/>
+                </a:xfrm>
+                <a:prstGeom prst="rect">
+                  <a:avLst/>
+                </a:prstGeom>
+                <a:noFill/>
+              </p:spPr>
+              <p:txBody>
+                <a:bodyPr wrap="none" lIns="0" tIns="0" rIns="0" bIns="0" rtlCol="0">
+                  <a:spAutoFit/>
+                </a:bodyPr>
+                <a:lstStyle/>
+                <a:p>
+                  <a:pPr/>
+                  <a14:m>
+                    <m:oMathPara xmlns:m="http://schemas.openxmlformats.org/officeDocument/2006/math">
+                      <m:oMathParaPr>
+                        <m:jc m:val="centerGroup"/>
+                      </m:oMathParaPr>
+                      <m:oMath xmlns:m="http://schemas.openxmlformats.org/officeDocument/2006/math">
+                        <m:sSubSup>
+                          <m:sSubSupPr>
+                            <m:ctrlPr>
+                              <a:rPr lang="en-US" i="1" smtClean="0">
+                                <a:latin typeface="Cambria Math" panose="02040503050406030204" pitchFamily="18" charset="0"/>
+                              </a:rPr>
+                            </m:ctrlPr>
+                          </m:sSubSupPr>
+                          <m:e>
+                            <m:r>
+                              <a:rPr lang="en-US" i="1" smtClean="0">
+                                <a:latin typeface="Cambria Math" panose="02040503050406030204" pitchFamily="18" charset="0"/>
+                                <a:ea typeface="Cambria Math" panose="02040503050406030204" pitchFamily="18" charset="0"/>
+                              </a:rPr>
+                              <m:t>𝛾</m:t>
+                            </m:r>
+                          </m:e>
+                          <m:sub>
+                            <m:r>
+                              <a:rPr lang="en-US" b="0" i="1" smtClean="0">
+                                <a:latin typeface="Cambria Math" panose="02040503050406030204" pitchFamily="18" charset="0"/>
+                              </a:rPr>
+                              <m:t>1</m:t>
+                            </m:r>
+                          </m:sub>
+                          <m:sup>
+                            <m:r>
+                              <a:rPr lang="en-US" b="0" i="1" smtClean="0">
+                                <a:latin typeface="Cambria Math" panose="02040503050406030204" pitchFamily="18" charset="0"/>
+                              </a:rPr>
+                              <m:t>′</m:t>
+                            </m:r>
+                          </m:sup>
+                        </m:sSubSup>
+                      </m:oMath>
+                    </m:oMathPara>
+                  </a14:m>
+                  <a:endParaRPr lang="en-US" dirty="0"/>
+                </a:p>
+              </p:txBody>
+            </p:sp>
+          </mc:Choice>
+          <mc:Fallback>
+            <p:sp>
+              <p:nvSpPr>
+                <p:cNvPr id="137" name="テキスト ボックス 136">
+                  <a:extLst>
+                    <a:ext uri="{FF2B5EF4-FFF2-40B4-BE49-F238E27FC236}">
+                      <a16:creationId xmlns:a16="http://schemas.microsoft.com/office/drawing/2014/main" id="{67EA756C-7178-2337-255A-A4B77D6AF8D1}"/>
+                    </a:ext>
+                  </a:extLst>
+                </p:cNvPr>
+                <p:cNvSpPr txBox="1">
+                  <a:spLocks noRot="1" noChangeAspect="1" noMove="1" noResize="1" noEditPoints="1" noAdjustHandles="1" noChangeArrowheads="1" noChangeShapeType="1" noTextEdit="1"/>
+                </p:cNvSpPr>
+                <p:nvPr/>
+              </p:nvSpPr>
+              <p:spPr>
+                <a:xfrm>
+                  <a:off x="4082514" y="4260279"/>
+                  <a:ext cx="281872" cy="276999"/>
+                </a:xfrm>
+                <a:prstGeom prst="rect">
+                  <a:avLst/>
+                </a:prstGeom>
+                <a:blipFill>
+                  <a:blip r:embed="rId11"/>
+                  <a:stretch>
+                    <a:fillRect l="-19565" r="-2174" b="-22222"/>
+                  </a:stretch>
+                </a:blipFill>
+              </p:spPr>
+              <p:txBody>
+                <a:bodyPr/>
+                <a:lstStyle/>
+                <a:p>
+                  <a:r>
+                    <a:rPr lang="en-US">
+                      <a:noFill/>
+                    </a:rPr>
+                    <a:t> </a:t>
+                  </a:r>
+                </a:p>
+              </p:txBody>
+            </p:sp>
+          </mc:Fallback>
+        </mc:AlternateContent>
+        <mc:AlternateContent xmlns:mc="http://schemas.openxmlformats.org/markup-compatibility/2006">
+          <mc:Choice xmlns:a14="http://schemas.microsoft.com/office/drawing/2010/main" Requires="a14">
+            <p:sp>
+              <p:nvSpPr>
+                <p:cNvPr id="139" name="テキスト ボックス 138">
+                  <a:extLst>
+                    <a:ext uri="{FF2B5EF4-FFF2-40B4-BE49-F238E27FC236}">
+                      <a16:creationId xmlns:a16="http://schemas.microsoft.com/office/drawing/2014/main" id="{14B5F41D-01F2-C36C-6088-61A4F03794DA}"/>
+                    </a:ext>
+                  </a:extLst>
+                </p:cNvPr>
+                <p:cNvSpPr txBox="1"/>
+                <p:nvPr/>
+              </p:nvSpPr>
+              <p:spPr>
+                <a:xfrm>
+                  <a:off x="4423649" y="3679223"/>
+                  <a:ext cx="287194" cy="276999"/>
+                </a:xfrm>
+                <a:prstGeom prst="rect">
+                  <a:avLst/>
+                </a:prstGeom>
+                <a:noFill/>
+              </p:spPr>
+              <p:txBody>
+                <a:bodyPr wrap="none" lIns="0" tIns="0" rIns="0" bIns="0" rtlCol="0">
+                  <a:spAutoFit/>
+                </a:bodyPr>
+                <a:lstStyle/>
+                <a:p>
+                  <a:pPr/>
+                  <a14:m>
+                    <m:oMathPara xmlns:m="http://schemas.openxmlformats.org/officeDocument/2006/math">
+                      <m:oMathParaPr>
+                        <m:jc m:val="centerGroup"/>
+                      </m:oMathParaPr>
+                      <m:oMath xmlns:m="http://schemas.openxmlformats.org/officeDocument/2006/math">
+                        <m:sSubSup>
+                          <m:sSubSupPr>
+                            <m:ctrlPr>
+                              <a:rPr lang="en-US" i="1" smtClean="0">
+                                <a:latin typeface="Cambria Math" panose="02040503050406030204" pitchFamily="18" charset="0"/>
+                              </a:rPr>
+                            </m:ctrlPr>
+                          </m:sSubSupPr>
+                          <m:e>
+                            <m:r>
+                              <a:rPr lang="en-US" i="1" smtClean="0">
+                                <a:latin typeface="Cambria Math" panose="02040503050406030204" pitchFamily="18" charset="0"/>
+                                <a:ea typeface="Cambria Math" panose="02040503050406030204" pitchFamily="18" charset="0"/>
+                              </a:rPr>
+                              <m:t>𝛾</m:t>
+                            </m:r>
+                          </m:e>
+                          <m:sub>
+                            <m:r>
+                              <a:rPr lang="en-US" b="0" i="1" smtClean="0">
+                                <a:latin typeface="Cambria Math" panose="02040503050406030204" pitchFamily="18" charset="0"/>
+                                <a:ea typeface="Cambria Math" panose="02040503050406030204" pitchFamily="18" charset="0"/>
+                              </a:rPr>
+                              <m:t>2</m:t>
+                            </m:r>
+                          </m:sub>
+                          <m:sup>
+                            <m:r>
+                              <a:rPr lang="en-US" b="0" i="1" smtClean="0">
+                                <a:latin typeface="Cambria Math" panose="02040503050406030204" pitchFamily="18" charset="0"/>
+                              </a:rPr>
+                              <m:t>′</m:t>
+                            </m:r>
+                          </m:sup>
+                        </m:sSubSup>
+                      </m:oMath>
+                    </m:oMathPara>
+                  </a14:m>
+                  <a:endParaRPr lang="en-US" dirty="0"/>
+                </a:p>
+              </p:txBody>
+            </p:sp>
+          </mc:Choice>
+          <mc:Fallback>
+            <p:sp>
+              <p:nvSpPr>
+                <p:cNvPr id="139" name="テキスト ボックス 138">
+                  <a:extLst>
+                    <a:ext uri="{FF2B5EF4-FFF2-40B4-BE49-F238E27FC236}">
+                      <a16:creationId xmlns:a16="http://schemas.microsoft.com/office/drawing/2014/main" id="{14B5F41D-01F2-C36C-6088-61A4F03794DA}"/>
+                    </a:ext>
+                  </a:extLst>
+                </p:cNvPr>
+                <p:cNvSpPr txBox="1">
+                  <a:spLocks noRot="1" noChangeAspect="1" noMove="1" noResize="1" noEditPoints="1" noAdjustHandles="1" noChangeArrowheads="1" noChangeShapeType="1" noTextEdit="1"/>
+                </p:cNvSpPr>
+                <p:nvPr/>
+              </p:nvSpPr>
+              <p:spPr>
+                <a:xfrm>
+                  <a:off x="4423649" y="3679223"/>
+                  <a:ext cx="287194" cy="276999"/>
+                </a:xfrm>
+                <a:prstGeom prst="rect">
+                  <a:avLst/>
+                </a:prstGeom>
+                <a:blipFill>
+                  <a:blip r:embed="rId12"/>
+                  <a:stretch>
+                    <a:fillRect l="-19149" r="-2128" b="-21739"/>
+                  </a:stretch>
+                </a:blipFill>
+              </p:spPr>
+              <p:txBody>
+                <a:bodyPr/>
+                <a:lstStyle/>
+                <a:p>
+                  <a:r>
+                    <a:rPr lang="en-US">
+                      <a:noFill/>
+                    </a:rPr>
+                    <a:t> </a:t>
+                  </a:r>
+                </a:p>
+              </p:txBody>
+            </p:sp>
+          </mc:Fallback>
+        </mc:AlternateContent>
+        <mc:AlternateContent xmlns:mc="http://schemas.openxmlformats.org/markup-compatibility/2006">
+          <mc:Choice xmlns:a14="http://schemas.microsoft.com/office/drawing/2010/main" Requires="a14">
+            <p:sp>
+              <p:nvSpPr>
+                <p:cNvPr id="144" name="テキスト ボックス 143">
+                  <a:extLst>
+                    <a:ext uri="{FF2B5EF4-FFF2-40B4-BE49-F238E27FC236}">
+                      <a16:creationId xmlns:a16="http://schemas.microsoft.com/office/drawing/2014/main" id="{49E8488A-CE86-DE29-4D91-21BFADF57941}"/>
+                    </a:ext>
+                  </a:extLst>
+                </p:cNvPr>
+                <p:cNvSpPr txBox="1"/>
+                <p:nvPr/>
+              </p:nvSpPr>
+              <p:spPr>
+                <a:xfrm>
+                  <a:off x="270317" y="6209812"/>
+                  <a:ext cx="2397259" cy="369332"/>
+                </a:xfrm>
+                <a:prstGeom prst="rect">
+                  <a:avLst/>
+                </a:prstGeom>
+                <a:noFill/>
+              </p:spPr>
+              <p:txBody>
+                <a:bodyPr wrap="none" rtlCol="0">
+                  <a:spAutoFit/>
+                </a:bodyPr>
+                <a:lstStyle/>
+                <a:p>
+                  <a:r>
+                    <a:rPr lang="en-US" dirty="0"/>
+                    <a:t>Surface normal = </a:t>
+                  </a:r>
+                  <a14:m>
+                    <m:oMath xmlns:m="http://schemas.openxmlformats.org/officeDocument/2006/math">
+                      <m:sSub>
+                        <m:sSubPr>
+                          <m:ctrlPr>
+                            <a:rPr lang="en-US" i="1">
+                              <a:latin typeface="Cambria Math" panose="02040503050406030204" pitchFamily="18" charset="0"/>
+                            </a:rPr>
+                          </m:ctrlPr>
+                        </m:sSubPr>
+                        <m:e>
+                          <m:acc>
+                            <m:accPr>
+                              <m:chr m:val="̂"/>
+                              <m:ctrlPr>
+                                <a:rPr lang="en-US" b="1" i="1">
+                                  <a:latin typeface="Cambria Math" panose="02040503050406030204" pitchFamily="18" charset="0"/>
+                                </a:rPr>
+                              </m:ctrlPr>
+                            </m:accPr>
+                            <m:e>
+                              <m:r>
+                                <a:rPr lang="en-US" b="1" i="1">
+                                  <a:latin typeface="Cambria Math" panose="02040503050406030204" pitchFamily="18" charset="0"/>
+                                </a:rPr>
+                                <m:t>𝒆</m:t>
+                              </m:r>
+                            </m:e>
+                          </m:acc>
+                        </m:e>
+                        <m:sub>
+                          <m:r>
+                            <a:rPr lang="en-US" i="1">
+                              <a:latin typeface="Cambria Math" panose="02040503050406030204" pitchFamily="18" charset="0"/>
+                            </a:rPr>
+                            <m:t>𝑧</m:t>
+                          </m:r>
+                        </m:sub>
+                      </m:sSub>
+                    </m:oMath>
+                  </a14:m>
+                  <a:r>
+                    <a:rPr lang="en-US" dirty="0"/>
+                    <a:t> </a:t>
+                  </a:r>
+                </a:p>
+              </p:txBody>
+            </p:sp>
+          </mc:Choice>
+          <mc:Fallback>
+            <p:sp>
+              <p:nvSpPr>
+                <p:cNvPr id="144" name="テキスト ボックス 143">
+                  <a:extLst>
+                    <a:ext uri="{FF2B5EF4-FFF2-40B4-BE49-F238E27FC236}">
+                      <a16:creationId xmlns:a16="http://schemas.microsoft.com/office/drawing/2014/main" id="{49E8488A-CE86-DE29-4D91-21BFADF57941}"/>
+                    </a:ext>
+                  </a:extLst>
+                </p:cNvPr>
+                <p:cNvSpPr txBox="1">
+                  <a:spLocks noRot="1" noChangeAspect="1" noMove="1" noResize="1" noEditPoints="1" noAdjustHandles="1" noChangeArrowheads="1" noChangeShapeType="1" noTextEdit="1"/>
+                </p:cNvSpPr>
+                <p:nvPr/>
+              </p:nvSpPr>
+              <p:spPr>
+                <a:xfrm>
+                  <a:off x="270317" y="6209812"/>
+                  <a:ext cx="2397259" cy="369332"/>
+                </a:xfrm>
+                <a:prstGeom prst="rect">
+                  <a:avLst/>
+                </a:prstGeom>
+                <a:blipFill>
+                  <a:blip r:embed="rId13"/>
+                  <a:stretch>
+                    <a:fillRect l="-2290" t="-6557" r="-3562" b="-26230"/>
+                  </a:stretch>
+                </a:blipFill>
+              </p:spPr>
+              <p:txBody>
+                <a:bodyPr/>
+                <a:lstStyle/>
+                <a:p>
+                  <a:r>
+                    <a:rPr lang="en-US">
+                      <a:noFill/>
+                    </a:rPr>
+                    <a:t> </a:t>
+                  </a:r>
+                </a:p>
+              </p:txBody>
+            </p:sp>
+          </mc:Fallback>
+        </mc:AlternateContent>
+      </p:grpSp>
+    </p:spTree>
+    <p:extLst>
+      <p:ext uri="{BB962C8B-B14F-4D97-AF65-F5344CB8AC3E}">
+        <p14:creationId xmlns:p14="http://schemas.microsoft.com/office/powerpoint/2010/main" val="320822935"/>
+      </p:ext>
+    </p:extLst>
+  </p:cSld>
+  <p:clrMapOvr>
+    <a:masterClrMapping/>
+  </p:clrMapOvr>
+</p:sld>
+</file>
+
+<file path=ppt/slides/slide15.xml><?xml version="1.0" encoding="utf-8"?>
+<p:sld xmlns:a="http://schemas.openxmlformats.org/drawingml/2006/main" xmlns:r="http://schemas.openxmlformats.org/officeDocument/2006/relationships" xmlns:p="http://schemas.openxmlformats.org/presentationml/2006/main">
+  <p:cSld>
+    <p:spTree>
+      <p:nvGrpSpPr>
+        <p:cNvPr id="1" name="">
+          <a:extLst>
+            <a:ext uri="{FF2B5EF4-FFF2-40B4-BE49-F238E27FC236}">
+              <a16:creationId xmlns:a16="http://schemas.microsoft.com/office/drawing/2014/main" id="{A3CC7BEA-F87B-6FB3-C933-7CF0204434AE}"/>
+            </a:ext>
+          </a:extLst>
+        </p:cNvPr>
+        <p:cNvGrpSpPr/>
+        <p:nvPr/>
+      </p:nvGrpSpPr>
+      <p:grpSpPr>
+        <a:xfrm>
+          <a:off x="0" y="0"/>
+          <a:ext cx="0" cy="0"/>
+          <a:chOff x="0" y="0"/>
+          <a:chExt cx="0" cy="0"/>
+        </a:xfrm>
+      </p:grpSpPr>
+      <p:sp>
+        <p:nvSpPr>
+          <p:cNvPr id="291" name="平行四辺形 290">
+            <a:extLst>
+              <a:ext uri="{FF2B5EF4-FFF2-40B4-BE49-F238E27FC236}">
+                <a16:creationId xmlns:a16="http://schemas.microsoft.com/office/drawing/2014/main" id="{4032F71E-450D-7E1F-90C2-0635FB33D38F}"/>
+              </a:ext>
+            </a:extLst>
+          </p:cNvPr>
+          <p:cNvSpPr/>
+          <p:nvPr/>
+        </p:nvSpPr>
+        <p:spPr>
+          <a:xfrm flipV="1">
+            <a:off x="10672040" y="2687721"/>
+            <a:ext cx="3970518" cy="1782832"/>
+          </a:xfrm>
+          <a:prstGeom prst="parallelogram">
+            <a:avLst>
+              <a:gd name="adj" fmla="val 105300"/>
+            </a:avLst>
+          </a:prstGeom>
+          <a:solidFill>
+            <a:srgbClr val="156082">
+              <a:alpha val="50196"/>
+            </a:srgbClr>
+          </a:solidFill>
+        </p:spPr>
+        <p:style>
+          <a:lnRef idx="2">
+            <a:schemeClr val="accent1">
+              <a:shade val="15000"/>
+            </a:schemeClr>
+          </a:lnRef>
+          <a:fillRef idx="1">
+            <a:schemeClr val="accent1"/>
+          </a:fillRef>
+          <a:effectRef idx="0">
+            <a:schemeClr val="accent1"/>
+          </a:effectRef>
+          <a:fontRef idx="minor">
+            <a:schemeClr val="lt1"/>
+          </a:fontRef>
+        </p:style>
+        <p:txBody>
+          <a:bodyPr rtlCol="0" anchor="ctr"/>
+          <a:lstStyle/>
+          <a:p>
+            <a:pPr algn="ctr"/>
+            <a:endParaRPr lang="en-US"/>
+          </a:p>
+        </p:txBody>
+      </p:sp>
+      <p:sp>
+        <p:nvSpPr>
+          <p:cNvPr id="220" name="楕円 219">
+            <a:extLst>
+              <a:ext uri="{FF2B5EF4-FFF2-40B4-BE49-F238E27FC236}">
+                <a16:creationId xmlns:a16="http://schemas.microsoft.com/office/drawing/2014/main" id="{84351E4C-FD89-F4BA-16AE-4ED455703E53}"/>
+              </a:ext>
+            </a:extLst>
+          </p:cNvPr>
+          <p:cNvSpPr>
+            <a:spLocks noGrp="1" noRot="1" noMove="1" noResize="1" noEditPoints="1" noAdjustHandles="1" noChangeArrowheads="1" noChangeShapeType="1"/>
+          </p:cNvSpPr>
+          <p:nvPr/>
+        </p:nvSpPr>
+        <p:spPr>
+          <a:xfrm rot="1430539">
+            <a:off x="9811831" y="1614880"/>
+            <a:ext cx="1703737" cy="2145575"/>
+          </a:xfrm>
+          <a:prstGeom prst="ellipse">
+            <a:avLst/>
+          </a:prstGeom>
+          <a:solidFill>
+            <a:srgbClr val="ACCAF6">
+              <a:alpha val="50196"/>
+            </a:srgbClr>
+          </a:solidFill>
+          <a:ln w="19050">
+            <a:solidFill>
+              <a:schemeClr val="tx1"/>
+            </a:solidFill>
+            <a:prstDash val="solid"/>
+          </a:ln>
+        </p:spPr>
+        <p:style>
+          <a:lnRef idx="2">
+            <a:schemeClr val="accent1">
+              <a:shade val="15000"/>
+            </a:schemeClr>
+          </a:lnRef>
+          <a:fillRef idx="1">
+            <a:schemeClr val="accent1"/>
+          </a:fillRef>
+          <a:effectRef idx="0">
+            <a:schemeClr val="accent1"/>
+          </a:effectRef>
+          <a:fontRef idx="minor">
+            <a:schemeClr val="lt1"/>
+          </a:fontRef>
+        </p:style>
+        <p:txBody>
+          <a:bodyPr rtlCol="0" anchor="ctr"/>
+          <a:lstStyle/>
+          <a:p>
+            <a:pPr algn="ctr"/>
+            <a:endParaRPr lang="en-US"/>
+          </a:p>
+        </p:txBody>
+      </p:sp>
+      <p:sp>
+        <p:nvSpPr>
+          <p:cNvPr id="279" name="楕円 278">
+            <a:extLst>
+              <a:ext uri="{FF2B5EF4-FFF2-40B4-BE49-F238E27FC236}">
+                <a16:creationId xmlns:a16="http://schemas.microsoft.com/office/drawing/2014/main" id="{B018BA33-4E8F-2B27-A7A4-DC5F0B4EB6B2}"/>
+              </a:ext>
+            </a:extLst>
+          </p:cNvPr>
+          <p:cNvSpPr/>
+          <p:nvPr/>
+        </p:nvSpPr>
+        <p:spPr>
+          <a:xfrm rot="1567301">
+            <a:off x="9807821" y="2161301"/>
+            <a:ext cx="1711756" cy="1065129"/>
+          </a:xfrm>
+          <a:prstGeom prst="ellipse">
+            <a:avLst/>
+          </a:prstGeom>
+          <a:solidFill>
+            <a:srgbClr val="747474">
+              <a:alpha val="50196"/>
+            </a:srgbClr>
+          </a:solidFill>
+          <a:ln>
+            <a:solidFill>
+              <a:schemeClr val="bg2">
+                <a:lumMod val="90000"/>
+              </a:schemeClr>
+            </a:solidFill>
+          </a:ln>
+        </p:spPr>
+        <p:style>
+          <a:lnRef idx="2">
+            <a:schemeClr val="accent1">
+              <a:shade val="15000"/>
+            </a:schemeClr>
+          </a:lnRef>
+          <a:fillRef idx="1">
+            <a:schemeClr val="accent1"/>
+          </a:fillRef>
+          <a:effectRef idx="0">
+            <a:schemeClr val="accent1"/>
+          </a:effectRef>
+          <a:fontRef idx="minor">
+            <a:schemeClr val="lt1"/>
+          </a:fontRef>
+        </p:style>
+        <p:txBody>
+          <a:bodyPr rtlCol="0" anchor="ctr"/>
+          <a:lstStyle/>
+          <a:p>
+            <a:pPr algn="ctr"/>
+            <a:endParaRPr lang="en-US"/>
+          </a:p>
+        </p:txBody>
+      </p:sp>
+      <p:sp>
+        <p:nvSpPr>
+          <p:cNvPr id="278" name="楕円 277">
+            <a:extLst>
+              <a:ext uri="{FF2B5EF4-FFF2-40B4-BE49-F238E27FC236}">
+                <a16:creationId xmlns:a16="http://schemas.microsoft.com/office/drawing/2014/main" id="{8D9FA2DC-0E53-E479-45CD-338719FAA1E2}"/>
+              </a:ext>
+            </a:extLst>
+          </p:cNvPr>
+          <p:cNvSpPr/>
+          <p:nvPr/>
+        </p:nvSpPr>
+        <p:spPr>
+          <a:xfrm rot="1505753" flipH="1">
+            <a:off x="10521802" y="1619160"/>
+            <a:ext cx="303677" cy="2137014"/>
+          </a:xfrm>
+          <a:prstGeom prst="ellipse">
+            <a:avLst/>
+          </a:prstGeom>
+          <a:solidFill>
+            <a:srgbClr val="156082">
+              <a:alpha val="50196"/>
+            </a:srgbClr>
+          </a:solidFill>
+          <a:ln>
+            <a:solidFill>
+              <a:schemeClr val="bg2">
+                <a:lumMod val="90000"/>
+              </a:schemeClr>
+            </a:solidFill>
+          </a:ln>
+        </p:spPr>
+        <p:style>
+          <a:lnRef idx="2">
+            <a:schemeClr val="accent1">
+              <a:shade val="15000"/>
+            </a:schemeClr>
+          </a:lnRef>
+          <a:fillRef idx="1">
+            <a:schemeClr val="accent1"/>
+          </a:fillRef>
+          <a:effectRef idx="0">
+            <a:schemeClr val="accent1"/>
+          </a:effectRef>
+          <a:fontRef idx="minor">
+            <a:schemeClr val="lt1"/>
+          </a:fontRef>
+        </p:style>
+        <p:txBody>
+          <a:bodyPr rtlCol="0" anchor="ctr"/>
+          <a:lstStyle/>
+          <a:p>
+            <a:pPr algn="ctr"/>
+            <a:endParaRPr lang="en-US"/>
+          </a:p>
+        </p:txBody>
+      </p:sp>
+      <p:grpSp>
+        <p:nvGrpSpPr>
+          <p:cNvPr id="289" name="グループ化 288">
+            <a:extLst>
+              <a:ext uri="{FF2B5EF4-FFF2-40B4-BE49-F238E27FC236}">
+                <a16:creationId xmlns:a16="http://schemas.microsoft.com/office/drawing/2014/main" id="{03A168F5-7312-7202-0397-C4E305F5CCAE}"/>
+              </a:ext>
+            </a:extLst>
+          </p:cNvPr>
+          <p:cNvGrpSpPr/>
+          <p:nvPr/>
+        </p:nvGrpSpPr>
+        <p:grpSpPr>
+          <a:xfrm>
+            <a:off x="315486" y="1553811"/>
+            <a:ext cx="4340922" cy="5068688"/>
+            <a:chOff x="6821138" y="1025756"/>
+            <a:chExt cx="4340922" cy="5068688"/>
+          </a:xfrm>
+        </p:grpSpPr>
+        <p:cxnSp>
+          <p:nvCxnSpPr>
+            <p:cNvPr id="166" name="直線矢印コネクタ 165">
+              <a:extLst>
+                <a:ext uri="{FF2B5EF4-FFF2-40B4-BE49-F238E27FC236}">
+                  <a16:creationId xmlns:a16="http://schemas.microsoft.com/office/drawing/2014/main" id="{8AC4C944-798A-7076-5BDA-4F5D2D2DA0F7}"/>
+                </a:ext>
+              </a:extLst>
+            </p:cNvPr>
+            <p:cNvCxnSpPr>
+              <a:cxnSpLocks/>
+            </p:cNvCxnSpPr>
+            <p:nvPr/>
+          </p:nvCxnSpPr>
+          <p:spPr>
+            <a:xfrm flipH="1" flipV="1">
+              <a:off x="6821138" y="1025756"/>
+              <a:ext cx="2392395" cy="2810438"/>
+            </a:xfrm>
+            <a:prstGeom prst="straightConnector1">
+              <a:avLst/>
+            </a:prstGeom>
+            <a:ln>
+              <a:solidFill>
+                <a:schemeClr val="tx2">
+                  <a:lumMod val="75000"/>
+                  <a:lumOff val="25000"/>
+                </a:schemeClr>
+              </a:solidFill>
+              <a:tailEnd type="triangle"/>
+            </a:ln>
+          </p:spPr>
+          <p:style>
+            <a:lnRef idx="2">
+              <a:schemeClr val="accent5"/>
+            </a:lnRef>
+            <a:fillRef idx="0">
+              <a:schemeClr val="accent5"/>
+            </a:fillRef>
+            <a:effectRef idx="1">
+              <a:schemeClr val="accent5"/>
+            </a:effectRef>
+            <a:fontRef idx="minor">
+              <a:schemeClr val="tx1"/>
+            </a:fontRef>
+          </p:style>
+        </p:cxnSp>
+        <p:sp>
+          <p:nvSpPr>
+            <p:cNvPr id="147" name="楕円 146">
+              <a:extLst>
+                <a:ext uri="{FF2B5EF4-FFF2-40B4-BE49-F238E27FC236}">
+                  <a16:creationId xmlns:a16="http://schemas.microsoft.com/office/drawing/2014/main" id="{69599ECB-CEA5-7BED-D4A6-23D3EDA7851E}"/>
+                </a:ext>
+              </a:extLst>
+            </p:cNvPr>
+            <p:cNvSpPr/>
+            <p:nvPr/>
+          </p:nvSpPr>
+          <p:spPr>
+            <a:xfrm rot="1433805">
+              <a:off x="8287516" y="3365051"/>
+              <a:ext cx="1827584" cy="931238"/>
+            </a:xfrm>
+            <a:prstGeom prst="ellipse">
+              <a:avLst/>
+            </a:prstGeom>
+            <a:solidFill>
+              <a:srgbClr val="ACCAF6">
+                <a:alpha val="49804"/>
+              </a:srgbClr>
+            </a:solidFill>
+          </p:spPr>
+          <p:style>
+            <a:lnRef idx="2">
+              <a:schemeClr val="accent1">
+                <a:shade val="15000"/>
+              </a:schemeClr>
+            </a:lnRef>
+            <a:fillRef idx="1">
+              <a:schemeClr val="accent1"/>
+            </a:fillRef>
+            <a:effectRef idx="0">
+              <a:schemeClr val="accent1"/>
+            </a:effectRef>
+            <a:fontRef idx="minor">
+              <a:schemeClr val="lt1"/>
+            </a:fontRef>
+          </p:style>
+          <p:txBody>
+            <a:bodyPr rtlCol="0" anchor="ctr"/>
+            <a:lstStyle/>
+            <a:p>
+              <a:pPr algn="ctr"/>
+              <a:endParaRPr lang="en-US"/>
+            </a:p>
+          </p:txBody>
+        </p:sp>
+        <p:cxnSp>
+          <p:nvCxnSpPr>
+            <p:cNvPr id="164" name="直線矢印コネクタ 163">
+              <a:extLst>
+                <a:ext uri="{FF2B5EF4-FFF2-40B4-BE49-F238E27FC236}">
+                  <a16:creationId xmlns:a16="http://schemas.microsoft.com/office/drawing/2014/main" id="{5966CE49-2A87-5FCA-521A-9A8AB5BFFD5E}"/>
+                </a:ext>
+              </a:extLst>
+            </p:cNvPr>
+            <p:cNvCxnSpPr>
+              <a:cxnSpLocks/>
+            </p:cNvCxnSpPr>
+            <p:nvPr/>
+          </p:nvCxnSpPr>
+          <p:spPr>
+            <a:xfrm flipH="1" flipV="1">
+              <a:off x="9227100" y="3858708"/>
+              <a:ext cx="1934960" cy="2235736"/>
+            </a:xfrm>
+            <a:prstGeom prst="straightConnector1">
+              <a:avLst/>
+            </a:prstGeom>
+            <a:ln>
+              <a:tailEnd type="triangle"/>
+            </a:ln>
+          </p:spPr>
+          <p:style>
+            <a:lnRef idx="2">
+              <a:schemeClr val="accent5"/>
+            </a:lnRef>
+            <a:fillRef idx="0">
+              <a:schemeClr val="accent5"/>
+            </a:fillRef>
+            <a:effectRef idx="1">
+              <a:schemeClr val="accent5"/>
+            </a:effectRef>
+            <a:fontRef idx="minor">
+              <a:schemeClr val="tx1"/>
+            </a:fontRef>
+          </p:style>
+        </p:cxnSp>
+        <p:sp>
+          <p:nvSpPr>
+            <p:cNvPr id="177" name="楕円 176">
+              <a:extLst>
+                <a:ext uri="{FF2B5EF4-FFF2-40B4-BE49-F238E27FC236}">
+                  <a16:creationId xmlns:a16="http://schemas.microsoft.com/office/drawing/2014/main" id="{4B6172CB-BF07-1CF9-AE59-524828B357FC}"/>
+                </a:ext>
+              </a:extLst>
+            </p:cNvPr>
+            <p:cNvSpPr/>
+            <p:nvPr/>
+          </p:nvSpPr>
+          <p:spPr>
+            <a:xfrm rot="6823473">
+              <a:off x="9083164" y="2932475"/>
+              <a:ext cx="227193" cy="1838098"/>
+            </a:xfrm>
+            <a:prstGeom prst="ellipse">
+              <a:avLst/>
+            </a:prstGeom>
+            <a:solidFill>
+              <a:schemeClr val="accent1">
+                <a:lumMod val="40000"/>
+                <a:lumOff val="60000"/>
+                <a:alpha val="50196"/>
+              </a:schemeClr>
+            </a:solidFill>
+            <a:ln>
+              <a:solidFill>
+                <a:schemeClr val="bg1">
+                  <a:lumMod val="65000"/>
+                </a:schemeClr>
+              </a:solidFill>
+              <a:prstDash val="solid"/>
+            </a:ln>
+          </p:spPr>
+          <p:style>
+            <a:lnRef idx="2">
+              <a:schemeClr val="accent1">
+                <a:shade val="15000"/>
+              </a:schemeClr>
+            </a:lnRef>
+            <a:fillRef idx="1">
+              <a:schemeClr val="accent1"/>
+            </a:fillRef>
+            <a:effectRef idx="0">
+              <a:schemeClr val="accent1"/>
+            </a:effectRef>
+            <a:fontRef idx="minor">
+              <a:schemeClr val="lt1"/>
+            </a:fontRef>
+          </p:style>
+          <p:txBody>
+            <a:bodyPr rtlCol="0" anchor="ctr"/>
+            <a:lstStyle/>
+            <a:p>
+              <a:pPr algn="ctr"/>
+              <a:endParaRPr lang="en-US"/>
+            </a:p>
+          </p:txBody>
+        </p:sp>
+        <p:sp>
+          <p:nvSpPr>
+            <p:cNvPr id="145" name="楕円 144">
+              <a:extLst>
+                <a:ext uri="{FF2B5EF4-FFF2-40B4-BE49-F238E27FC236}">
+                  <a16:creationId xmlns:a16="http://schemas.microsoft.com/office/drawing/2014/main" id="{C07D3655-560D-0FDD-9F6A-0082E3B3A379}"/>
+                </a:ext>
+              </a:extLst>
+            </p:cNvPr>
+            <p:cNvSpPr/>
+            <p:nvPr/>
+          </p:nvSpPr>
+          <p:spPr>
+            <a:xfrm rot="1452190">
+              <a:off x="9096873" y="3380117"/>
+              <a:ext cx="280857" cy="915685"/>
+            </a:xfrm>
+            <a:prstGeom prst="ellipse">
+              <a:avLst/>
+            </a:prstGeom>
+            <a:solidFill>
+              <a:schemeClr val="bg2">
+                <a:lumMod val="50000"/>
+                <a:alpha val="50196"/>
+              </a:schemeClr>
+            </a:solidFill>
+            <a:ln>
+              <a:solidFill>
+                <a:schemeClr val="bg1">
+                  <a:lumMod val="65000"/>
+                </a:schemeClr>
+              </a:solidFill>
+              <a:prstDash val="solid"/>
+            </a:ln>
+          </p:spPr>
+          <p:style>
+            <a:lnRef idx="2">
+              <a:schemeClr val="accent1">
+                <a:shade val="15000"/>
+              </a:schemeClr>
+            </a:lnRef>
+            <a:fillRef idx="1">
+              <a:schemeClr val="accent1"/>
+            </a:fillRef>
+            <a:effectRef idx="0">
+              <a:schemeClr val="accent1"/>
+            </a:effectRef>
+            <a:fontRef idx="minor">
+              <a:schemeClr val="lt1"/>
+            </a:fontRef>
+          </p:style>
+          <p:txBody>
+            <a:bodyPr rtlCol="0" anchor="ctr"/>
+            <a:lstStyle/>
+            <a:p>
+              <a:pPr algn="ctr"/>
+              <a:endParaRPr lang="en-US"/>
+            </a:p>
+          </p:txBody>
+        </p:sp>
+        <p:cxnSp>
+          <p:nvCxnSpPr>
+            <p:cNvPr id="185" name="直線コネクタ 184">
+              <a:extLst>
+                <a:ext uri="{FF2B5EF4-FFF2-40B4-BE49-F238E27FC236}">
+                  <a16:creationId xmlns:a16="http://schemas.microsoft.com/office/drawing/2014/main" id="{28E60811-531A-E658-E808-7B461991E2E4}"/>
+                </a:ext>
+              </a:extLst>
+            </p:cNvPr>
+            <p:cNvCxnSpPr>
+              <a:cxnSpLocks/>
+              <a:stCxn id="177" idx="4"/>
+              <a:endCxn id="177" idx="0"/>
+            </p:cNvCxnSpPr>
+            <p:nvPr/>
+          </p:nvCxnSpPr>
+          <p:spPr>
+            <a:xfrm>
+              <a:off x="8355380" y="3481754"/>
+              <a:ext cx="1682761" cy="739541"/>
+            </a:xfrm>
+            <a:prstGeom prst="line">
+              <a:avLst/>
+            </a:prstGeom>
+            <a:ln>
+              <a:prstDash val="sysDash"/>
+            </a:ln>
+          </p:spPr>
+          <p:style>
+            <a:lnRef idx="1">
+              <a:schemeClr val="accent4"/>
+            </a:lnRef>
+            <a:fillRef idx="0">
+              <a:schemeClr val="accent4"/>
+            </a:fillRef>
+            <a:effectRef idx="0">
+              <a:schemeClr val="accent4"/>
+            </a:effectRef>
+            <a:fontRef idx="minor">
+              <a:schemeClr val="tx1"/>
+            </a:fontRef>
+          </p:style>
+        </p:cxnSp>
+        <p:sp>
+          <p:nvSpPr>
+            <p:cNvPr id="193" name="フリーフォーム: 図形 192">
+              <a:extLst>
+                <a:ext uri="{FF2B5EF4-FFF2-40B4-BE49-F238E27FC236}">
+                  <a16:creationId xmlns:a16="http://schemas.microsoft.com/office/drawing/2014/main" id="{0579E9C5-4570-A2FC-861B-714A04696999}"/>
+                </a:ext>
+              </a:extLst>
+            </p:cNvPr>
+            <p:cNvSpPr/>
+            <p:nvPr/>
+          </p:nvSpPr>
+          <p:spPr>
+            <a:xfrm>
+              <a:off x="8349004" y="3476625"/>
+              <a:ext cx="1695109" cy="757238"/>
+            </a:xfrm>
+            <a:custGeom>
+              <a:avLst/>
+              <a:gdLst>
+                <a:gd name="csX0" fmla="*/ 4421 w 1695109"/>
+                <a:gd name="csY0" fmla="*/ 0 h 757238"/>
+                <a:gd name="csX1" fmla="*/ 37759 w 1695109"/>
+                <a:gd name="csY1" fmla="*/ 66675 h 757238"/>
+                <a:gd name="csX2" fmla="*/ 280646 w 1695109"/>
+                <a:gd name="csY2" fmla="*/ 228600 h 757238"/>
+                <a:gd name="csX3" fmla="*/ 580684 w 1695109"/>
+                <a:gd name="csY3" fmla="*/ 381000 h 757238"/>
+                <a:gd name="csX4" fmla="*/ 842621 w 1695109"/>
+                <a:gd name="csY4" fmla="*/ 490538 h 757238"/>
+                <a:gd name="csX5" fmla="*/ 1195046 w 1695109"/>
+                <a:gd name="csY5" fmla="*/ 638175 h 757238"/>
+                <a:gd name="csX6" fmla="*/ 1490321 w 1695109"/>
+                <a:gd name="csY6" fmla="*/ 733425 h 757238"/>
+                <a:gd name="csX7" fmla="*/ 1695109 w 1695109"/>
+                <a:gd name="csY7" fmla="*/ 757238 h 757238"/>
+              </a:gdLst>
+              <a:ahLst/>
+              <a:cxnLst>
+                <a:cxn ang="0">
+                  <a:pos x="csX0" y="csY0"/>
+                </a:cxn>
+                <a:cxn ang="0">
+                  <a:pos x="csX1" y="csY1"/>
+                </a:cxn>
+                <a:cxn ang="0">
+                  <a:pos x="csX2" y="csY2"/>
+                </a:cxn>
+                <a:cxn ang="0">
+                  <a:pos x="csX3" y="csY3"/>
+                </a:cxn>
+                <a:cxn ang="0">
+                  <a:pos x="csX4" y="csY4"/>
+                </a:cxn>
+                <a:cxn ang="0">
+                  <a:pos x="csX5" y="csY5"/>
+                </a:cxn>
+                <a:cxn ang="0">
+                  <a:pos x="csX6" y="csY6"/>
+                </a:cxn>
+                <a:cxn ang="0">
+                  <a:pos x="csX7" y="csY7"/>
+                </a:cxn>
+              </a:cxnLst>
+              <a:rect l="l" t="t" r="r" b="b"/>
+              <a:pathLst>
+                <a:path w="1695109" h="757238">
+                  <a:moveTo>
+                    <a:pt x="4421" y="0"/>
+                  </a:moveTo>
+                  <a:cubicBezTo>
+                    <a:pt x="-1929" y="14287"/>
+                    <a:pt x="-8278" y="28575"/>
+                    <a:pt x="37759" y="66675"/>
+                  </a:cubicBezTo>
+                  <a:cubicBezTo>
+                    <a:pt x="83796" y="104775"/>
+                    <a:pt x="190159" y="176213"/>
+                    <a:pt x="280646" y="228600"/>
+                  </a:cubicBezTo>
+                  <a:cubicBezTo>
+                    <a:pt x="371134" y="280988"/>
+                    <a:pt x="487022" y="337344"/>
+                    <a:pt x="580684" y="381000"/>
+                  </a:cubicBezTo>
+                  <a:cubicBezTo>
+                    <a:pt x="674346" y="424656"/>
+                    <a:pt x="842621" y="490538"/>
+                    <a:pt x="842621" y="490538"/>
+                  </a:cubicBezTo>
+                  <a:cubicBezTo>
+                    <a:pt x="945015" y="533400"/>
+                    <a:pt x="1087096" y="597694"/>
+                    <a:pt x="1195046" y="638175"/>
+                  </a:cubicBezTo>
+                  <a:cubicBezTo>
+                    <a:pt x="1302996" y="678656"/>
+                    <a:pt x="1406977" y="713581"/>
+                    <a:pt x="1490321" y="733425"/>
+                  </a:cubicBezTo>
+                  <a:cubicBezTo>
+                    <a:pt x="1573665" y="753269"/>
+                    <a:pt x="1634387" y="755253"/>
+                    <a:pt x="1695109" y="757238"/>
+                  </a:cubicBezTo>
+                </a:path>
+              </a:pathLst>
+            </a:custGeom>
+            <a:noFill/>
+          </p:spPr>
+          <p:style>
+            <a:lnRef idx="2">
+              <a:schemeClr val="accent1">
+                <a:shade val="15000"/>
+              </a:schemeClr>
+            </a:lnRef>
+            <a:fillRef idx="1">
+              <a:schemeClr val="accent1"/>
+            </a:fillRef>
+            <a:effectRef idx="0">
+              <a:schemeClr val="accent1"/>
+            </a:effectRef>
+            <a:fontRef idx="minor">
+              <a:schemeClr val="lt1"/>
+            </a:fontRef>
+          </p:style>
+          <p:txBody>
+            <a:bodyPr rtlCol="0" anchor="ctr"/>
+            <a:lstStyle/>
+            <a:p>
+              <a:pPr algn="ctr"/>
+              <a:endParaRPr lang="en-US"/>
+            </a:p>
+          </p:txBody>
+        </p:sp>
+        <p:sp>
+          <p:nvSpPr>
+            <p:cNvPr id="194" name="フリーフォーム: 図形 193">
+              <a:extLst>
+                <a:ext uri="{FF2B5EF4-FFF2-40B4-BE49-F238E27FC236}">
+                  <a16:creationId xmlns:a16="http://schemas.microsoft.com/office/drawing/2014/main" id="{71A86D99-24A6-1E08-987E-3D3CA58C4D30}"/>
+                </a:ext>
+              </a:extLst>
+            </p:cNvPr>
+            <p:cNvSpPr/>
+            <p:nvPr/>
+          </p:nvSpPr>
+          <p:spPr>
+            <a:xfrm rot="402312">
+              <a:off x="9040071" y="3386130"/>
+              <a:ext cx="346924" cy="909146"/>
+            </a:xfrm>
+            <a:custGeom>
+              <a:avLst/>
+              <a:gdLst>
+                <a:gd name="csX0" fmla="*/ 439296 w 439296"/>
+                <a:gd name="csY0" fmla="*/ 0 h 852488"/>
+                <a:gd name="csX1" fmla="*/ 372621 w 439296"/>
+                <a:gd name="csY1" fmla="*/ 9525 h 852488"/>
+                <a:gd name="csX2" fmla="*/ 253559 w 439296"/>
+                <a:gd name="csY2" fmla="*/ 85725 h 852488"/>
+                <a:gd name="csX3" fmla="*/ 110684 w 439296"/>
+                <a:gd name="csY3" fmla="*/ 280988 h 852488"/>
+                <a:gd name="csX4" fmla="*/ 44009 w 439296"/>
+                <a:gd name="csY4" fmla="*/ 452438 h 852488"/>
+                <a:gd name="csX5" fmla="*/ 1146 w 439296"/>
+                <a:gd name="csY5" fmla="*/ 661988 h 852488"/>
+                <a:gd name="csX6" fmla="*/ 15434 w 439296"/>
+                <a:gd name="csY6" fmla="*/ 776288 h 852488"/>
+                <a:gd name="csX7" fmla="*/ 48771 w 439296"/>
+                <a:gd name="csY7" fmla="*/ 823913 h 852488"/>
+                <a:gd name="csX8" fmla="*/ 67821 w 439296"/>
+                <a:gd name="csY8" fmla="*/ 852488 h 852488"/>
+              </a:gdLst>
+              <a:ahLst/>
+              <a:cxnLst>
+                <a:cxn ang="0">
+                  <a:pos x="csX0" y="csY0"/>
+                </a:cxn>
+                <a:cxn ang="0">
+                  <a:pos x="csX1" y="csY1"/>
+                </a:cxn>
+                <a:cxn ang="0">
+                  <a:pos x="csX2" y="csY2"/>
+                </a:cxn>
+                <a:cxn ang="0">
+                  <a:pos x="csX3" y="csY3"/>
+                </a:cxn>
+                <a:cxn ang="0">
+                  <a:pos x="csX4" y="csY4"/>
+                </a:cxn>
+                <a:cxn ang="0">
+                  <a:pos x="csX5" y="csY5"/>
+                </a:cxn>
+                <a:cxn ang="0">
+                  <a:pos x="csX6" y="csY6"/>
+                </a:cxn>
+                <a:cxn ang="0">
+                  <a:pos x="csX7" y="csY7"/>
+                </a:cxn>
+                <a:cxn ang="0">
+                  <a:pos x="csX8" y="csY8"/>
+                </a:cxn>
+              </a:cxnLst>
+              <a:rect l="l" t="t" r="r" b="b"/>
+              <a:pathLst>
+                <a:path w="439296" h="852488">
+                  <a:moveTo>
+                    <a:pt x="439296" y="0"/>
+                  </a:moveTo>
+                  <a:lnTo>
+                    <a:pt x="372621" y="9525"/>
+                  </a:lnTo>
+                  <a:cubicBezTo>
+                    <a:pt x="341665" y="23813"/>
+                    <a:pt x="297215" y="40481"/>
+                    <a:pt x="253559" y="85725"/>
+                  </a:cubicBezTo>
+                  <a:cubicBezTo>
+                    <a:pt x="209903" y="130969"/>
+                    <a:pt x="145609" y="219869"/>
+                    <a:pt x="110684" y="280988"/>
+                  </a:cubicBezTo>
+                  <a:cubicBezTo>
+                    <a:pt x="75759" y="342107"/>
+                    <a:pt x="62265" y="388938"/>
+                    <a:pt x="44009" y="452438"/>
+                  </a:cubicBezTo>
+                  <a:cubicBezTo>
+                    <a:pt x="25753" y="515938"/>
+                    <a:pt x="5909" y="608013"/>
+                    <a:pt x="1146" y="661988"/>
+                  </a:cubicBezTo>
+                  <a:cubicBezTo>
+                    <a:pt x="-3617" y="715963"/>
+                    <a:pt x="7497" y="749301"/>
+                    <a:pt x="15434" y="776288"/>
+                  </a:cubicBezTo>
+                  <a:cubicBezTo>
+                    <a:pt x="23371" y="803275"/>
+                    <a:pt x="40040" y="811213"/>
+                    <a:pt x="48771" y="823913"/>
+                  </a:cubicBezTo>
+                  <a:cubicBezTo>
+                    <a:pt x="57502" y="836613"/>
+                    <a:pt x="62661" y="844550"/>
+                    <a:pt x="67821" y="852488"/>
+                  </a:cubicBezTo>
+                </a:path>
+              </a:pathLst>
+            </a:custGeom>
+            <a:noFill/>
+          </p:spPr>
+          <p:style>
+            <a:lnRef idx="2">
+              <a:schemeClr val="accent1">
+                <a:shade val="15000"/>
+              </a:schemeClr>
+            </a:lnRef>
+            <a:fillRef idx="1">
+              <a:schemeClr val="accent1"/>
+            </a:fillRef>
+            <a:effectRef idx="0">
+              <a:schemeClr val="accent1"/>
+            </a:effectRef>
+            <a:fontRef idx="minor">
+              <a:schemeClr val="lt1"/>
+            </a:fontRef>
+          </p:style>
+          <p:txBody>
+            <a:bodyPr rtlCol="0" anchor="ctr"/>
+            <a:lstStyle/>
+            <a:p>
+              <a:pPr algn="ctr"/>
+              <a:endParaRPr lang="en-US"/>
+            </a:p>
+          </p:txBody>
+        </p:sp>
+        <p:cxnSp>
+          <p:nvCxnSpPr>
+            <p:cNvPr id="197" name="直線コネクタ 196">
+              <a:extLst>
+                <a:ext uri="{FF2B5EF4-FFF2-40B4-BE49-F238E27FC236}">
+                  <a16:creationId xmlns:a16="http://schemas.microsoft.com/office/drawing/2014/main" id="{5C900D32-E7E9-1364-EAC6-D2BE28DF38AE}"/>
+                </a:ext>
+              </a:extLst>
+            </p:cNvPr>
+            <p:cNvCxnSpPr>
+              <a:cxnSpLocks/>
+            </p:cNvCxnSpPr>
+            <p:nvPr/>
+          </p:nvCxnSpPr>
+          <p:spPr>
+            <a:xfrm flipV="1">
+              <a:off x="6902815" y="3704133"/>
+              <a:ext cx="3385631" cy="479921"/>
+            </a:xfrm>
+            <a:prstGeom prst="line">
+              <a:avLst/>
+            </a:prstGeom>
+            <a:ln w="9525">
+              <a:prstDash val="sysDash"/>
+              <a:headEnd type="arrow" w="med" len="med"/>
+              <a:tailEnd type="none" w="med" len="med"/>
+            </a:ln>
+          </p:spPr>
+          <p:style>
+            <a:lnRef idx="2">
+              <a:schemeClr val="accent1"/>
+            </a:lnRef>
+            <a:fillRef idx="0">
+              <a:schemeClr val="accent1"/>
+            </a:fillRef>
+            <a:effectRef idx="1">
+              <a:schemeClr val="accent1"/>
+            </a:effectRef>
+            <a:fontRef idx="minor">
+              <a:schemeClr val="tx1"/>
+            </a:fontRef>
+          </p:style>
+        </p:cxnSp>
+        <p:cxnSp>
+          <p:nvCxnSpPr>
+            <p:cNvPr id="205" name="直線コネクタ 204">
+              <a:extLst>
+                <a:ext uri="{FF2B5EF4-FFF2-40B4-BE49-F238E27FC236}">
+                  <a16:creationId xmlns:a16="http://schemas.microsoft.com/office/drawing/2014/main" id="{C2B7AC58-5804-5284-84BB-39A3DA3127ED}"/>
+                </a:ext>
+              </a:extLst>
+            </p:cNvPr>
+            <p:cNvCxnSpPr>
+              <a:cxnSpLocks/>
+            </p:cNvCxnSpPr>
+            <p:nvPr/>
+          </p:nvCxnSpPr>
+          <p:spPr>
+            <a:xfrm>
+              <a:off x="9227100" y="2638899"/>
+              <a:ext cx="0" cy="2205314"/>
+            </a:xfrm>
+            <a:prstGeom prst="line">
+              <a:avLst/>
+            </a:prstGeom>
+            <a:ln w="9525">
+              <a:prstDash val="sysDash"/>
+              <a:headEnd type="arrow" w="med" len="med"/>
+              <a:tailEnd type="none" w="med" len="med"/>
+            </a:ln>
+          </p:spPr>
+          <p:style>
+            <a:lnRef idx="2">
+              <a:schemeClr val="accent1"/>
+            </a:lnRef>
+            <a:fillRef idx="0">
+              <a:schemeClr val="accent1"/>
+            </a:fillRef>
+            <a:effectRef idx="1">
+              <a:schemeClr val="accent1"/>
+            </a:effectRef>
+            <a:fontRef idx="minor">
+              <a:schemeClr val="tx1"/>
+            </a:fontRef>
+          </p:style>
+        </p:cxnSp>
+        <p:cxnSp>
+          <p:nvCxnSpPr>
+            <p:cNvPr id="215" name="直線コネクタ 214">
+              <a:extLst>
+                <a:ext uri="{FF2B5EF4-FFF2-40B4-BE49-F238E27FC236}">
+                  <a16:creationId xmlns:a16="http://schemas.microsoft.com/office/drawing/2014/main" id="{112343E4-3A04-6740-630E-F015A78BF4C3}"/>
+                </a:ext>
+              </a:extLst>
+            </p:cNvPr>
+            <p:cNvCxnSpPr>
+              <a:cxnSpLocks/>
+            </p:cNvCxnSpPr>
+            <p:nvPr/>
+          </p:nvCxnSpPr>
+          <p:spPr>
+            <a:xfrm flipV="1">
+              <a:off x="8291210" y="2975739"/>
+              <a:ext cx="427118" cy="60545"/>
+            </a:xfrm>
+            <a:prstGeom prst="line">
+              <a:avLst/>
+            </a:prstGeom>
+            <a:ln>
+              <a:solidFill>
+                <a:schemeClr val="tx2">
+                  <a:lumMod val="75000"/>
+                  <a:lumOff val="25000"/>
+                </a:schemeClr>
+              </a:solidFill>
+              <a:headEnd type="arrow" w="med" len="med"/>
+              <a:tailEnd type="arrow" w="med" len="med"/>
+            </a:ln>
+          </p:spPr>
+          <p:style>
+            <a:lnRef idx="1">
+              <a:schemeClr val="accent5"/>
+            </a:lnRef>
+            <a:fillRef idx="0">
+              <a:schemeClr val="accent5"/>
+            </a:fillRef>
+            <a:effectRef idx="0">
+              <a:schemeClr val="accent5"/>
+            </a:effectRef>
+            <a:fontRef idx="minor">
+              <a:schemeClr val="tx1"/>
+            </a:fontRef>
+          </p:style>
+        </p:cxnSp>
+        <p:cxnSp>
+          <p:nvCxnSpPr>
+            <p:cNvPr id="218" name="直線コネクタ 217">
+              <a:extLst>
+                <a:ext uri="{FF2B5EF4-FFF2-40B4-BE49-F238E27FC236}">
+                  <a16:creationId xmlns:a16="http://schemas.microsoft.com/office/drawing/2014/main" id="{E349EFAE-1245-EE06-082E-127B84E34FC2}"/>
+                </a:ext>
+              </a:extLst>
+            </p:cNvPr>
+            <p:cNvCxnSpPr>
+              <a:cxnSpLocks/>
+            </p:cNvCxnSpPr>
+            <p:nvPr/>
+          </p:nvCxnSpPr>
+          <p:spPr>
+            <a:xfrm flipV="1">
+              <a:off x="8432310" y="3134607"/>
+              <a:ext cx="427118" cy="60545"/>
+            </a:xfrm>
+            <a:prstGeom prst="line">
+              <a:avLst/>
+            </a:prstGeom>
+            <a:ln>
+              <a:solidFill>
+                <a:schemeClr val="tx2">
+                  <a:lumMod val="75000"/>
+                  <a:lumOff val="25000"/>
+                </a:schemeClr>
+              </a:solidFill>
+              <a:headEnd type="arrow" w="med" len="med"/>
+              <a:tailEnd type="arrow" w="med" len="med"/>
+            </a:ln>
+          </p:spPr>
+          <p:style>
+            <a:lnRef idx="1">
+              <a:schemeClr val="accent5"/>
+            </a:lnRef>
+            <a:fillRef idx="0">
+              <a:schemeClr val="accent5"/>
+            </a:fillRef>
+            <a:effectRef idx="0">
+              <a:schemeClr val="accent5"/>
+            </a:effectRef>
+            <a:fontRef idx="minor">
+              <a:schemeClr val="tx1"/>
+            </a:fontRef>
+          </p:style>
+        </p:cxnSp>
+        <p:cxnSp>
+          <p:nvCxnSpPr>
+            <p:cNvPr id="219" name="直線コネクタ 218">
+              <a:extLst>
+                <a:ext uri="{FF2B5EF4-FFF2-40B4-BE49-F238E27FC236}">
+                  <a16:creationId xmlns:a16="http://schemas.microsoft.com/office/drawing/2014/main" id="{39F1C47D-EBF0-A3F8-6D7B-4D42252DCBD7}"/>
+                </a:ext>
+              </a:extLst>
+            </p:cNvPr>
+            <p:cNvCxnSpPr>
+              <a:cxnSpLocks/>
+            </p:cNvCxnSpPr>
+            <p:nvPr/>
+          </p:nvCxnSpPr>
+          <p:spPr>
+            <a:xfrm flipV="1">
+              <a:off x="8136458" y="2796513"/>
+              <a:ext cx="427118" cy="60545"/>
+            </a:xfrm>
+            <a:prstGeom prst="line">
+              <a:avLst/>
+            </a:prstGeom>
+            <a:ln>
+              <a:solidFill>
+                <a:schemeClr val="tx2">
+                  <a:lumMod val="75000"/>
+                  <a:lumOff val="25000"/>
+                </a:schemeClr>
+              </a:solidFill>
+              <a:headEnd type="arrow" w="med" len="med"/>
+              <a:tailEnd type="arrow" w="med" len="med"/>
+            </a:ln>
+          </p:spPr>
+          <p:style>
+            <a:lnRef idx="1">
+              <a:schemeClr val="accent5"/>
+            </a:lnRef>
+            <a:fillRef idx="0">
+              <a:schemeClr val="accent5"/>
+            </a:fillRef>
+            <a:effectRef idx="0">
+              <a:schemeClr val="accent5"/>
+            </a:effectRef>
+            <a:fontRef idx="minor">
+              <a:schemeClr val="tx1"/>
+            </a:fontRef>
+          </p:style>
+        </p:cxnSp>
+        <p:cxnSp>
+          <p:nvCxnSpPr>
+            <p:cNvPr id="221" name="直線コネクタ 220">
+              <a:extLst>
+                <a:ext uri="{FF2B5EF4-FFF2-40B4-BE49-F238E27FC236}">
+                  <a16:creationId xmlns:a16="http://schemas.microsoft.com/office/drawing/2014/main" id="{E6EA564C-BEFB-AC73-23B9-B89CBC05922F}"/>
+                </a:ext>
+              </a:extLst>
+            </p:cNvPr>
+            <p:cNvCxnSpPr>
+              <a:cxnSpLocks/>
+            </p:cNvCxnSpPr>
+            <p:nvPr/>
+          </p:nvCxnSpPr>
+          <p:spPr>
+            <a:xfrm flipH="1" flipV="1">
+              <a:off x="9817272" y="4358074"/>
+              <a:ext cx="30624" cy="392239"/>
+            </a:xfrm>
+            <a:prstGeom prst="line">
+              <a:avLst/>
+            </a:prstGeom>
+            <a:ln>
+              <a:headEnd type="arrow" w="med" len="med"/>
+              <a:tailEnd type="arrow" w="med" len="med"/>
+            </a:ln>
+          </p:spPr>
+          <p:style>
+            <a:lnRef idx="1">
+              <a:schemeClr val="accent5"/>
+            </a:lnRef>
+            <a:fillRef idx="0">
+              <a:schemeClr val="accent5"/>
+            </a:fillRef>
+            <a:effectRef idx="0">
+              <a:schemeClr val="accent5"/>
+            </a:effectRef>
+            <a:fontRef idx="minor">
+              <a:schemeClr val="tx1"/>
+            </a:fontRef>
+          </p:style>
+        </p:cxnSp>
+        <p:cxnSp>
+          <p:nvCxnSpPr>
+            <p:cNvPr id="231" name="直線コネクタ 230">
+              <a:extLst>
+                <a:ext uri="{FF2B5EF4-FFF2-40B4-BE49-F238E27FC236}">
+                  <a16:creationId xmlns:a16="http://schemas.microsoft.com/office/drawing/2014/main" id="{326F0A71-B84E-4089-523F-DA2F0EC330C2}"/>
+                </a:ext>
+              </a:extLst>
+            </p:cNvPr>
+            <p:cNvCxnSpPr>
+              <a:cxnSpLocks/>
+              <a:stCxn id="145" idx="4"/>
+              <a:endCxn id="145" idx="0"/>
+            </p:cNvCxnSpPr>
+            <p:nvPr/>
+          </p:nvCxnSpPr>
+          <p:spPr>
+            <a:xfrm flipV="1">
+              <a:off x="9049599" y="3420363"/>
+              <a:ext cx="375406" cy="835194"/>
+            </a:xfrm>
+            <a:prstGeom prst="line">
+              <a:avLst/>
+            </a:prstGeom>
+            <a:ln>
+              <a:prstDash val="sysDash"/>
+            </a:ln>
+          </p:spPr>
+          <p:style>
+            <a:lnRef idx="1">
+              <a:schemeClr val="accent4"/>
+            </a:lnRef>
+            <a:fillRef idx="0">
+              <a:schemeClr val="accent4"/>
+            </a:fillRef>
+            <a:effectRef idx="0">
+              <a:schemeClr val="accent4"/>
+            </a:effectRef>
+            <a:fontRef idx="minor">
+              <a:schemeClr val="tx1"/>
+            </a:fontRef>
+          </p:style>
+        </p:cxnSp>
+        <p:cxnSp>
+          <p:nvCxnSpPr>
+            <p:cNvPr id="241" name="直線コネクタ 240">
+              <a:extLst>
+                <a:ext uri="{FF2B5EF4-FFF2-40B4-BE49-F238E27FC236}">
+                  <a16:creationId xmlns:a16="http://schemas.microsoft.com/office/drawing/2014/main" id="{7F347F74-DFD1-CE15-A0F5-E159F6E65230}"/>
+                </a:ext>
+              </a:extLst>
+            </p:cNvPr>
+            <p:cNvCxnSpPr>
+              <a:cxnSpLocks/>
+            </p:cNvCxnSpPr>
+            <p:nvPr/>
+          </p:nvCxnSpPr>
+          <p:spPr>
+            <a:xfrm flipH="1" flipV="1">
+              <a:off x="9969672" y="4543709"/>
+              <a:ext cx="30624" cy="392239"/>
+            </a:xfrm>
+            <a:prstGeom prst="line">
+              <a:avLst/>
+            </a:prstGeom>
+            <a:ln>
+              <a:headEnd type="arrow" w="med" len="med"/>
+              <a:tailEnd type="arrow" w="med" len="med"/>
+            </a:ln>
+          </p:spPr>
+          <p:style>
+            <a:lnRef idx="1">
+              <a:schemeClr val="accent5"/>
+            </a:lnRef>
+            <a:fillRef idx="0">
+              <a:schemeClr val="accent5"/>
+            </a:fillRef>
+            <a:effectRef idx="0">
+              <a:schemeClr val="accent5"/>
+            </a:effectRef>
+            <a:fontRef idx="minor">
+              <a:schemeClr val="tx1"/>
+            </a:fontRef>
+          </p:style>
+        </p:cxnSp>
+        <p:cxnSp>
+          <p:nvCxnSpPr>
+            <p:cNvPr id="242" name="直線コネクタ 241">
+              <a:extLst>
+                <a:ext uri="{FF2B5EF4-FFF2-40B4-BE49-F238E27FC236}">
+                  <a16:creationId xmlns:a16="http://schemas.microsoft.com/office/drawing/2014/main" id="{D35CBFF2-34C0-F667-4450-B3DA8873EF09}"/>
+                </a:ext>
+              </a:extLst>
+            </p:cNvPr>
+            <p:cNvCxnSpPr>
+              <a:cxnSpLocks/>
+            </p:cNvCxnSpPr>
+            <p:nvPr/>
+          </p:nvCxnSpPr>
+          <p:spPr>
+            <a:xfrm flipH="1" flipV="1">
+              <a:off x="10122072" y="4718045"/>
+              <a:ext cx="30624" cy="392239"/>
+            </a:xfrm>
+            <a:prstGeom prst="line">
+              <a:avLst/>
+            </a:prstGeom>
+            <a:ln>
+              <a:headEnd type="arrow" w="med" len="med"/>
+              <a:tailEnd type="arrow" w="med" len="med"/>
+            </a:ln>
+          </p:spPr>
+          <p:style>
+            <a:lnRef idx="1">
+              <a:schemeClr val="accent5"/>
+            </a:lnRef>
+            <a:fillRef idx="0">
+              <a:schemeClr val="accent5"/>
+            </a:fillRef>
+            <a:effectRef idx="0">
+              <a:schemeClr val="accent5"/>
+            </a:effectRef>
+            <a:fontRef idx="minor">
+              <a:schemeClr val="tx1"/>
+            </a:fontRef>
+          </p:style>
+        </p:cxnSp>
+      </p:grpSp>
+      <p:cxnSp>
+        <p:nvCxnSpPr>
+          <p:cNvPr id="276" name="直線コネクタ 275">
+            <a:extLst>
+              <a:ext uri="{FF2B5EF4-FFF2-40B4-BE49-F238E27FC236}">
+                <a16:creationId xmlns:a16="http://schemas.microsoft.com/office/drawing/2014/main" id="{BA564435-F521-B91F-43D9-65F5C51DAF26}"/>
+              </a:ext>
+            </a:extLst>
+          </p:cNvPr>
+          <p:cNvCxnSpPr>
+            <a:cxnSpLocks/>
+          </p:cNvCxnSpPr>
+          <p:nvPr/>
+        </p:nvCxnSpPr>
+        <p:spPr>
+          <a:xfrm>
+            <a:off x="9555824" y="2194100"/>
+            <a:ext cx="2390339" cy="1050508"/>
+          </a:xfrm>
+          <a:prstGeom prst="line">
+            <a:avLst/>
+          </a:prstGeom>
+          <a:ln>
+            <a:prstDash val="sysDash"/>
+          </a:ln>
+        </p:spPr>
+        <p:style>
+          <a:lnRef idx="1">
+            <a:schemeClr val="accent4"/>
+          </a:lnRef>
+          <a:fillRef idx="0">
+            <a:schemeClr val="accent4"/>
+          </a:fillRef>
+          <a:effectRef idx="0">
+            <a:schemeClr val="accent4"/>
+          </a:effectRef>
+          <a:fontRef idx="minor">
+            <a:schemeClr val="tx1"/>
+          </a:fontRef>
+        </p:style>
+      </p:cxnSp>
+      <p:sp>
+        <p:nvSpPr>
+          <p:cNvPr id="283" name="フリーフォーム: 図形 282">
+            <a:extLst>
+              <a:ext uri="{FF2B5EF4-FFF2-40B4-BE49-F238E27FC236}">
+                <a16:creationId xmlns:a16="http://schemas.microsoft.com/office/drawing/2014/main" id="{5CBEC4DF-8416-53BE-62FA-AB584CA2FDC3}"/>
+              </a:ext>
+            </a:extLst>
+          </p:cNvPr>
+          <p:cNvSpPr/>
+          <p:nvPr/>
+        </p:nvSpPr>
+        <p:spPr>
+          <a:xfrm>
+            <a:off x="10196101" y="1720850"/>
+            <a:ext cx="897349" cy="1930400"/>
+          </a:xfrm>
+          <a:custGeom>
+            <a:avLst/>
+            <a:gdLst>
+              <a:gd name="csX0" fmla="*/ 897349 w 897349"/>
+              <a:gd name="csY0" fmla="*/ 0 h 1930400"/>
+              <a:gd name="csX1" fmla="*/ 757649 w 897349"/>
+              <a:gd name="csY1" fmla="*/ 158750 h 1930400"/>
+              <a:gd name="csX2" fmla="*/ 611599 w 897349"/>
+              <a:gd name="csY2" fmla="*/ 374650 h 1930400"/>
+              <a:gd name="csX3" fmla="*/ 433799 w 897349"/>
+              <a:gd name="csY3" fmla="*/ 717550 h 1930400"/>
+              <a:gd name="csX4" fmla="*/ 224249 w 897349"/>
+              <a:gd name="csY4" fmla="*/ 1149350 h 1930400"/>
+              <a:gd name="csX5" fmla="*/ 65499 w 897349"/>
+              <a:gd name="csY5" fmla="*/ 1574800 h 1930400"/>
+              <a:gd name="csX6" fmla="*/ 1999 w 897349"/>
+              <a:gd name="csY6" fmla="*/ 1835150 h 1930400"/>
+              <a:gd name="csX7" fmla="*/ 14699 w 897349"/>
+              <a:gd name="csY7" fmla="*/ 1930400 h 1930400"/>
+            </a:gdLst>
+            <a:ahLst/>
+            <a:cxnLst>
+              <a:cxn ang="0">
+                <a:pos x="csX0" y="csY0"/>
+              </a:cxn>
+              <a:cxn ang="0">
+                <a:pos x="csX1" y="csY1"/>
+              </a:cxn>
+              <a:cxn ang="0">
+                <a:pos x="csX2" y="csY2"/>
+              </a:cxn>
+              <a:cxn ang="0">
+                <a:pos x="csX3" y="csY3"/>
+              </a:cxn>
+              <a:cxn ang="0">
+                <a:pos x="csX4" y="csY4"/>
+              </a:cxn>
+              <a:cxn ang="0">
+                <a:pos x="csX5" y="csY5"/>
+              </a:cxn>
+              <a:cxn ang="0">
+                <a:pos x="csX6" y="csY6"/>
+              </a:cxn>
+              <a:cxn ang="0">
+                <a:pos x="csX7" y="csY7"/>
+              </a:cxn>
+            </a:cxnLst>
+            <a:rect l="l" t="t" r="r" b="b"/>
+            <a:pathLst>
+              <a:path w="897349" h="1930400">
+                <a:moveTo>
+                  <a:pt x="897349" y="0"/>
+                </a:moveTo>
+                <a:cubicBezTo>
+                  <a:pt x="851311" y="48154"/>
+                  <a:pt x="805274" y="96308"/>
+                  <a:pt x="757649" y="158750"/>
+                </a:cubicBezTo>
+                <a:cubicBezTo>
+                  <a:pt x="710024" y="221192"/>
+                  <a:pt x="665574" y="281517"/>
+                  <a:pt x="611599" y="374650"/>
+                </a:cubicBezTo>
+                <a:cubicBezTo>
+                  <a:pt x="557624" y="467783"/>
+                  <a:pt x="498357" y="588433"/>
+                  <a:pt x="433799" y="717550"/>
+                </a:cubicBezTo>
+                <a:cubicBezTo>
+                  <a:pt x="369241" y="846667"/>
+                  <a:pt x="285632" y="1006475"/>
+                  <a:pt x="224249" y="1149350"/>
+                </a:cubicBezTo>
+                <a:cubicBezTo>
+                  <a:pt x="162866" y="1292225"/>
+                  <a:pt x="102541" y="1460500"/>
+                  <a:pt x="65499" y="1574800"/>
+                </a:cubicBezTo>
+                <a:cubicBezTo>
+                  <a:pt x="28457" y="1689100"/>
+                  <a:pt x="10466" y="1775883"/>
+                  <a:pt x="1999" y="1835150"/>
+                </a:cubicBezTo>
+                <a:cubicBezTo>
+                  <a:pt x="-6468" y="1894417"/>
+                  <a:pt x="14699" y="1930400"/>
+                  <a:pt x="14699" y="1930400"/>
+                </a:cubicBezTo>
+              </a:path>
+            </a:pathLst>
+          </a:custGeom>
+          <a:noFill/>
+        </p:spPr>
+        <p:style>
+          <a:lnRef idx="2">
+            <a:schemeClr val="accent1">
+              <a:shade val="15000"/>
+            </a:schemeClr>
+          </a:lnRef>
+          <a:fillRef idx="1">
+            <a:schemeClr val="accent1"/>
+          </a:fillRef>
+          <a:effectRef idx="0">
+            <a:schemeClr val="accent1"/>
+          </a:effectRef>
+          <a:fontRef idx="minor">
+            <a:schemeClr val="lt1"/>
+          </a:fontRef>
+        </p:style>
+        <p:txBody>
+          <a:bodyPr rtlCol="0" anchor="ctr"/>
+          <a:lstStyle/>
+          <a:p>
+            <a:pPr algn="ctr"/>
+            <a:endParaRPr lang="en-US"/>
+          </a:p>
+        </p:txBody>
+      </p:sp>
+      <p:sp>
+        <p:nvSpPr>
+          <p:cNvPr id="284" name="フリーフォーム: 図形 283">
+            <a:extLst>
+              <a:ext uri="{FF2B5EF4-FFF2-40B4-BE49-F238E27FC236}">
+                <a16:creationId xmlns:a16="http://schemas.microsoft.com/office/drawing/2014/main" id="{EEDDE005-8C39-0DF2-9F3E-0912B2A0A016}"/>
+              </a:ext>
+            </a:extLst>
+          </p:cNvPr>
+          <p:cNvSpPr/>
+          <p:nvPr/>
+        </p:nvSpPr>
+        <p:spPr>
+          <a:xfrm>
+            <a:off x="9862641" y="2355850"/>
+            <a:ext cx="1586409" cy="946870"/>
+          </a:xfrm>
+          <a:custGeom>
+            <a:avLst/>
+            <a:gdLst>
+              <a:gd name="csX0" fmla="*/ 11609 w 1586409"/>
+              <a:gd name="csY0" fmla="*/ 0 h 946870"/>
+              <a:gd name="csX1" fmla="*/ 11609 w 1586409"/>
+              <a:gd name="csY1" fmla="*/ 209550 h 946870"/>
+              <a:gd name="csX2" fmla="*/ 132259 w 1586409"/>
+              <a:gd name="csY2" fmla="*/ 463550 h 946870"/>
+              <a:gd name="csX3" fmla="*/ 392609 w 1586409"/>
+              <a:gd name="csY3" fmla="*/ 717550 h 946870"/>
+              <a:gd name="csX4" fmla="*/ 748209 w 1586409"/>
+              <a:gd name="csY4" fmla="*/ 889000 h 946870"/>
+              <a:gd name="csX5" fmla="*/ 1110159 w 1586409"/>
+              <a:gd name="csY5" fmla="*/ 946150 h 946870"/>
+              <a:gd name="csX6" fmla="*/ 1446709 w 1586409"/>
+              <a:gd name="csY6" fmla="*/ 857250 h 946870"/>
+              <a:gd name="csX7" fmla="*/ 1586409 w 1586409"/>
+              <a:gd name="csY7" fmla="*/ 654050 h 946870"/>
+            </a:gdLst>
+            <a:ahLst/>
+            <a:cxnLst>
+              <a:cxn ang="0">
+                <a:pos x="csX0" y="csY0"/>
+              </a:cxn>
+              <a:cxn ang="0">
+                <a:pos x="csX1" y="csY1"/>
+              </a:cxn>
+              <a:cxn ang="0">
+                <a:pos x="csX2" y="csY2"/>
+              </a:cxn>
+              <a:cxn ang="0">
+                <a:pos x="csX3" y="csY3"/>
+              </a:cxn>
+              <a:cxn ang="0">
+                <a:pos x="csX4" y="csY4"/>
+              </a:cxn>
+              <a:cxn ang="0">
+                <a:pos x="csX5" y="csY5"/>
+              </a:cxn>
+              <a:cxn ang="0">
+                <a:pos x="csX6" y="csY6"/>
+              </a:cxn>
+              <a:cxn ang="0">
+                <a:pos x="csX7" y="csY7"/>
+              </a:cxn>
+            </a:cxnLst>
+            <a:rect l="l" t="t" r="r" b="b"/>
+            <a:pathLst>
+              <a:path w="1586409" h="946870">
+                <a:moveTo>
+                  <a:pt x="11609" y="0"/>
+                </a:moveTo>
+                <a:cubicBezTo>
+                  <a:pt x="1555" y="66146"/>
+                  <a:pt x="-8499" y="132292"/>
+                  <a:pt x="11609" y="209550"/>
+                </a:cubicBezTo>
+                <a:cubicBezTo>
+                  <a:pt x="31717" y="286808"/>
+                  <a:pt x="68759" y="378883"/>
+                  <a:pt x="132259" y="463550"/>
+                </a:cubicBezTo>
+                <a:cubicBezTo>
+                  <a:pt x="195759" y="548217"/>
+                  <a:pt x="289951" y="646642"/>
+                  <a:pt x="392609" y="717550"/>
+                </a:cubicBezTo>
+                <a:cubicBezTo>
+                  <a:pt x="495267" y="788458"/>
+                  <a:pt x="628617" y="850900"/>
+                  <a:pt x="748209" y="889000"/>
+                </a:cubicBezTo>
+                <a:cubicBezTo>
+                  <a:pt x="867801" y="927100"/>
+                  <a:pt x="993742" y="951442"/>
+                  <a:pt x="1110159" y="946150"/>
+                </a:cubicBezTo>
+                <a:cubicBezTo>
+                  <a:pt x="1226576" y="940858"/>
+                  <a:pt x="1367334" y="905933"/>
+                  <a:pt x="1446709" y="857250"/>
+                </a:cubicBezTo>
+                <a:cubicBezTo>
+                  <a:pt x="1526084" y="808567"/>
+                  <a:pt x="1556246" y="731308"/>
+                  <a:pt x="1586409" y="654050"/>
+                </a:cubicBezTo>
+              </a:path>
+            </a:pathLst>
+          </a:custGeom>
+          <a:noFill/>
+        </p:spPr>
+        <p:style>
+          <a:lnRef idx="2">
+            <a:schemeClr val="accent1">
+              <a:shade val="15000"/>
+            </a:schemeClr>
+          </a:lnRef>
+          <a:fillRef idx="1">
+            <a:schemeClr val="accent1"/>
+          </a:fillRef>
+          <a:effectRef idx="0">
+            <a:schemeClr val="accent1"/>
+          </a:effectRef>
+          <a:fontRef idx="minor">
+            <a:schemeClr val="lt1"/>
+          </a:fontRef>
+        </p:style>
+        <p:txBody>
+          <a:bodyPr rtlCol="0" anchor="ctr"/>
+          <a:lstStyle/>
+          <a:p>
+            <a:pPr algn="ctr"/>
+            <a:endParaRPr lang="en-US"/>
+          </a:p>
+        </p:txBody>
+      </p:sp>
+      <p:grpSp>
+        <p:nvGrpSpPr>
+          <p:cNvPr id="288" name="グループ化 287">
+            <a:extLst>
+              <a:ext uri="{FF2B5EF4-FFF2-40B4-BE49-F238E27FC236}">
+                <a16:creationId xmlns:a16="http://schemas.microsoft.com/office/drawing/2014/main" id="{30BE6C6D-F483-1CBB-45F0-9DCB9570A1C0}"/>
+              </a:ext>
+            </a:extLst>
+          </p:cNvPr>
+          <p:cNvGrpSpPr/>
+          <p:nvPr/>
+        </p:nvGrpSpPr>
+        <p:grpSpPr>
+          <a:xfrm>
+            <a:off x="8561227" y="2480615"/>
+            <a:ext cx="3970518" cy="1984638"/>
+            <a:chOff x="7676382" y="1639258"/>
+            <a:chExt cx="3970518" cy="1984638"/>
+          </a:xfrm>
+        </p:grpSpPr>
+        <p:grpSp>
+          <p:nvGrpSpPr>
+            <p:cNvPr id="285" name="グループ化 284">
+              <a:extLst>
+                <a:ext uri="{FF2B5EF4-FFF2-40B4-BE49-F238E27FC236}">
+                  <a16:creationId xmlns:a16="http://schemas.microsoft.com/office/drawing/2014/main" id="{91EC8264-C0A6-E592-A000-854BC2F983D4}"/>
+                </a:ext>
+              </a:extLst>
+            </p:cNvPr>
+            <p:cNvGrpSpPr/>
+            <p:nvPr/>
+          </p:nvGrpSpPr>
+          <p:grpSpPr>
+            <a:xfrm>
+              <a:off x="9425005" y="1639258"/>
+              <a:ext cx="1799273" cy="1581855"/>
+              <a:chOff x="9342187" y="1166994"/>
+              <a:chExt cx="2091780" cy="1839016"/>
+            </a:xfrm>
+          </p:grpSpPr>
+          <p:cxnSp>
+            <p:nvCxnSpPr>
+              <p:cNvPr id="262" name="直線コネクタ 261">
+                <a:extLst>
+                  <a:ext uri="{FF2B5EF4-FFF2-40B4-BE49-F238E27FC236}">
+                    <a16:creationId xmlns:a16="http://schemas.microsoft.com/office/drawing/2014/main" id="{25A0D2BA-7ADE-0412-0654-A3E9C40279B3}"/>
+                  </a:ext>
+                </a:extLst>
+              </p:cNvPr>
+              <p:cNvCxnSpPr>
+                <a:cxnSpLocks/>
+              </p:cNvCxnSpPr>
+              <p:nvPr/>
+            </p:nvCxnSpPr>
+            <p:spPr>
+              <a:xfrm>
+                <a:off x="9342187" y="2413505"/>
+                <a:ext cx="1485836" cy="0"/>
+              </a:xfrm>
+              <a:prstGeom prst="line">
+                <a:avLst/>
+              </a:prstGeom>
+              <a:ln>
+                <a:solidFill>
+                  <a:schemeClr val="tx1">
+                    <a:lumMod val="50000"/>
+                    <a:lumOff val="50000"/>
+                  </a:schemeClr>
+                </a:solidFill>
+                <a:prstDash val="sysDot"/>
+              </a:ln>
+            </p:spPr>
+            <p:style>
+              <a:lnRef idx="2">
+                <a:schemeClr val="accent1"/>
+              </a:lnRef>
+              <a:fillRef idx="0">
+                <a:schemeClr val="accent1"/>
+              </a:fillRef>
+              <a:effectRef idx="1">
+                <a:schemeClr val="accent1"/>
+              </a:effectRef>
+              <a:fontRef idx="minor">
+                <a:schemeClr val="tx1"/>
+              </a:fontRef>
+            </p:style>
+          </p:cxnSp>
+          <p:cxnSp>
+            <p:nvCxnSpPr>
+              <p:cNvPr id="267" name="直線コネクタ 266">
+                <a:extLst>
+                  <a:ext uri="{FF2B5EF4-FFF2-40B4-BE49-F238E27FC236}">
+                    <a16:creationId xmlns:a16="http://schemas.microsoft.com/office/drawing/2014/main" id="{436164A0-B519-2103-643E-DEB888D4664D}"/>
+                  </a:ext>
+                </a:extLst>
+              </p:cNvPr>
+              <p:cNvCxnSpPr>
+                <a:cxnSpLocks/>
+              </p:cNvCxnSpPr>
+              <p:nvPr/>
+            </p:nvCxnSpPr>
+            <p:spPr>
+              <a:xfrm>
+                <a:off x="10796287" y="1166994"/>
+                <a:ext cx="0" cy="1290083"/>
+              </a:xfrm>
+              <a:prstGeom prst="line">
+                <a:avLst/>
+              </a:prstGeom>
+              <a:ln>
+                <a:solidFill>
+                  <a:schemeClr val="tx1">
+                    <a:lumMod val="50000"/>
+                    <a:lumOff val="50000"/>
+                  </a:schemeClr>
+                </a:solidFill>
+                <a:prstDash val="sysDot"/>
+              </a:ln>
+            </p:spPr>
+            <p:style>
+              <a:lnRef idx="2">
+                <a:schemeClr val="accent1"/>
+              </a:lnRef>
+              <a:fillRef idx="0">
+                <a:schemeClr val="accent1"/>
+              </a:fillRef>
+              <a:effectRef idx="1">
+                <a:schemeClr val="accent1"/>
+              </a:effectRef>
+              <a:fontRef idx="minor">
+                <a:schemeClr val="tx1"/>
+              </a:fontRef>
+            </p:style>
+          </p:cxnSp>
+          <p:cxnSp>
+            <p:nvCxnSpPr>
+              <p:cNvPr id="273" name="直線コネクタ 272">
+                <a:extLst>
+                  <a:ext uri="{FF2B5EF4-FFF2-40B4-BE49-F238E27FC236}">
+                    <a16:creationId xmlns:a16="http://schemas.microsoft.com/office/drawing/2014/main" id="{4EDEC711-BDB5-9BCC-827D-BD5449A7DDBD}"/>
+                  </a:ext>
+                </a:extLst>
+              </p:cNvPr>
+              <p:cNvCxnSpPr>
+                <a:cxnSpLocks/>
+              </p:cNvCxnSpPr>
+              <p:nvPr/>
+            </p:nvCxnSpPr>
+            <p:spPr>
+              <a:xfrm>
+                <a:off x="9769998" y="1402986"/>
+                <a:ext cx="1663969" cy="1603024"/>
+              </a:xfrm>
+              <a:prstGeom prst="line">
+                <a:avLst/>
+              </a:prstGeom>
+              <a:ln>
+                <a:solidFill>
+                  <a:schemeClr val="tx1">
+                    <a:lumMod val="50000"/>
+                    <a:lumOff val="50000"/>
+                  </a:schemeClr>
+                </a:solidFill>
+                <a:prstDash val="sysDot"/>
+              </a:ln>
+            </p:spPr>
+            <p:style>
+              <a:lnRef idx="2">
+                <a:schemeClr val="accent1"/>
+              </a:lnRef>
+              <a:fillRef idx="0">
+                <a:schemeClr val="accent1"/>
+              </a:fillRef>
+              <a:effectRef idx="1">
+                <a:schemeClr val="accent1"/>
+              </a:effectRef>
+              <a:fontRef idx="minor">
+                <a:schemeClr val="tx1"/>
+              </a:fontRef>
+            </p:style>
+          </p:cxnSp>
+        </p:grpSp>
+        <p:sp>
+          <p:nvSpPr>
+            <p:cNvPr id="287" name="平行四辺形 286">
+              <a:extLst>
+                <a:ext uri="{FF2B5EF4-FFF2-40B4-BE49-F238E27FC236}">
+                  <a16:creationId xmlns:a16="http://schemas.microsoft.com/office/drawing/2014/main" id="{C920431D-B32D-9B75-6171-7D166C2F7CD5}"/>
+                </a:ext>
+              </a:extLst>
+            </p:cNvPr>
+            <p:cNvSpPr/>
+            <p:nvPr/>
+          </p:nvSpPr>
+          <p:spPr>
+            <a:xfrm flipV="1">
+              <a:off x="7676382" y="1841064"/>
+              <a:ext cx="3970518" cy="1782832"/>
+            </a:xfrm>
+            <a:prstGeom prst="parallelogram">
+              <a:avLst>
+                <a:gd name="adj" fmla="val 105300"/>
+              </a:avLst>
+            </a:prstGeom>
+            <a:solidFill>
+              <a:srgbClr val="156082">
+                <a:alpha val="50196"/>
+              </a:srgbClr>
+            </a:solidFill>
+          </p:spPr>
+          <p:style>
+            <a:lnRef idx="2">
+              <a:schemeClr val="accent1">
+                <a:shade val="15000"/>
+              </a:schemeClr>
+            </a:lnRef>
+            <a:fillRef idx="1">
+              <a:schemeClr val="accent1"/>
+            </a:fillRef>
+            <a:effectRef idx="0">
+              <a:schemeClr val="accent1"/>
+            </a:effectRef>
+            <a:fontRef idx="minor">
+              <a:schemeClr val="lt1"/>
+            </a:fontRef>
+          </p:style>
+          <p:txBody>
+            <a:bodyPr rtlCol="0" anchor="ctr"/>
+            <a:lstStyle/>
+            <a:p>
+              <a:pPr algn="ctr"/>
+              <a:endParaRPr lang="en-US"/>
+            </a:p>
+          </p:txBody>
+        </p:sp>
+      </p:grpSp>
+    </p:spTree>
+    <p:extLst>
+      <p:ext uri="{BB962C8B-B14F-4D97-AF65-F5344CB8AC3E}">
+        <p14:creationId xmlns:p14="http://schemas.microsoft.com/office/powerpoint/2010/main" val="1669152728"/>
       </p:ext>
     </p:extLst>
   </p:cSld>
@@ -14285,15 +22645,15 @@
 <file path=customXml/itemProps3.xml><?xml version="1.0" encoding="utf-8"?>
 <ds:datastoreItem xmlns:ds="http://schemas.openxmlformats.org/officeDocument/2006/customXml" ds:itemID="{E690C700-0B54-4769-9477-9FE646BEDBDF}">
   <ds:schemaRefs>
+    <ds:schemaRef ds:uri="http://schemas.microsoft.com/office/2006/metadata/properties"/>
+    <ds:schemaRef ds:uri="http://www.w3.org/XML/1998/namespace"/>
+    <ds:schemaRef ds:uri="http://purl.org/dc/elements/1.1/"/>
+    <ds:schemaRef ds:uri="http://purl.org/dc/terms/"/>
+    <ds:schemaRef ds:uri="http://schemas.openxmlformats.org/package/2006/metadata/core-properties"/>
+    <ds:schemaRef ds:uri="http://schemas.microsoft.com/office/2006/documentManagement/types"/>
+    <ds:schemaRef ds:uri="http://schemas.microsoft.com/office/infopath/2007/PartnerControls"/>
     <ds:schemaRef ds:uri="e5fea337-426f-4878-aaa1-6cc4dbed00d3"/>
-    <ds:schemaRef ds:uri="http://schemas.microsoft.com/office/infopath/2007/PartnerControls"/>
-    <ds:schemaRef ds:uri="http://www.w3.org/XML/1998/namespace"/>
-    <ds:schemaRef ds:uri="http://schemas.microsoft.com/office/2006/documentManagement/types"/>
     <ds:schemaRef ds:uri="http://purl.org/dc/dcmitype/"/>
-    <ds:schemaRef ds:uri="http://purl.org/dc/terms/"/>
-    <ds:schemaRef ds:uri="http://purl.org/dc/elements/1.1/"/>
-    <ds:schemaRef ds:uri="http://schemas.openxmlformats.org/package/2006/metadata/core-properties"/>
-    <ds:schemaRef ds:uri="http://schemas.microsoft.com/office/2006/metadata/properties"/>
   </ds:schemaRefs>
 </ds:datastoreItem>
 </file>